--- a/slides/Bakti.pptx
+++ b/slides/Bakti.pptx
@@ -14,8 +14,6 @@
     <p:sldId id="262" r:id="rId13"/>
     <p:sldId id="263" r:id="rId14"/>
     <p:sldId id="264" r:id="rId15"/>
-    <p:sldId id="265" r:id="rId16"/>
-    <p:sldId id="266" r:id="rId17"/>
   </p:sldIdLst>
   <p:sldSz cx="12188952" cy="6858000" type="screen4x3"/>
   <p:notesSz cx="6858000" cy="9144000"/>
@@ -3222,7 +3220,7 @@
                 </a:solidFill>
                 <a:latin typeface="Fraunces"/>
               </a:rPr>
-              <a:t>Bakti | A monthly allowance your parents collect as cash.</a:t>
+              <a:t>Bakti | A monthly allowance your parents collect cash.</a:t>
             </a:r>
           </a:p>
         </p:txBody>
@@ -3257,378 +3255,7 @@
                 </a:solidFill>
                 <a:latin typeface="Manrope"/>
               </a:rPr>
-              <a:t>Stellar APAC Hackathon 2026 · Track A</a:t>
-            </a:r>
-          </a:p>
-        </p:txBody>
-      </p:sp>
-    </p:spTree>
-  </p:cSld>
-  <p:clrMapOvr>
-    <a:masterClrMapping/>
-  </p:clrMapOvr>
-</p:sld>
-</file>
-
-<file path=ppt/slides/slide10.xml><?xml version="1.0" encoding="utf-8"?>
-<p:sld xmlns:a="http://schemas.openxmlformats.org/drawingml/2006/main" xmlns:p="http://schemas.openxmlformats.org/presentationml/2006/main" xmlns:r="http://schemas.openxmlformats.org/officeDocument/2006/relationships">
-  <p:cSld>
-    <p:bg>
-      <p:bgPr>
-        <a:solidFill>
-          <a:srgbClr val="FFFFFF"/>
-        </a:solidFill>
-        <a:effectLst/>
-      </p:bgPr>
-    </p:bg>
-    <p:spTree>
-      <p:nvGrpSpPr>
-        <p:cNvPr id="1" name=""/>
-        <p:cNvGrpSpPr/>
-        <p:nvPr/>
-      </p:nvGrpSpPr>
-      <p:grpSpPr/>
-      <p:sp>
-        <p:nvSpPr>
-          <p:cNvPr id="2" name="Rectangle 1"/>
-          <p:cNvSpPr/>
-          <p:nvPr/>
-        </p:nvSpPr>
-        <p:spPr>
-          <a:xfrm>
-            <a:off x="0" y="0"/>
-            <a:ext cx="182880" cy="6858000"/>
-          </a:xfrm>
-          <a:prstGeom prst="rect">
-            <a:avLst/>
-          </a:prstGeom>
-          <a:solidFill>
-            <a:srgbClr val="0284C7"/>
-          </a:solidFill>
-          <a:ln>
-            <a:noFill/>
-          </a:ln>
-        </p:spPr>
-        <p:style>
-          <a:lnRef idx="1">
-            <a:schemeClr val="accent1"/>
-          </a:lnRef>
-          <a:fillRef idx="3">
-            <a:schemeClr val="accent1"/>
-          </a:fillRef>
-          <a:effectRef idx="2">
-            <a:schemeClr val="accent1"/>
-          </a:effectRef>
-          <a:fontRef idx="minor">
-            <a:schemeClr val="lt1"/>
-          </a:fontRef>
-        </p:style>
-        <p:txBody>
-          <a:bodyPr rtlCol="0" anchor="ctr"/>
-          <a:lstStyle/>
-          <a:p>
-            <a:pPr algn="ctr"/>
-          </a:p>
-        </p:txBody>
-      </p:sp>
-      <p:sp>
-        <p:nvSpPr>
-          <p:cNvPr id="3" name="Rectangle 2"/>
-          <p:cNvSpPr/>
-          <p:nvPr/>
-        </p:nvSpPr>
-        <p:spPr>
-          <a:xfrm>
-            <a:off x="0" y="6217920"/>
-            <a:ext cx="12188952" cy="640080"/>
-          </a:xfrm>
-          <a:prstGeom prst="rect">
-            <a:avLst/>
-          </a:prstGeom>
-          <a:solidFill>
-            <a:srgbClr val="0284C7"/>
-          </a:solidFill>
-          <a:ln>
-            <a:noFill/>
-          </a:ln>
-        </p:spPr>
-        <p:style>
-          <a:lnRef idx="1">
-            <a:schemeClr val="accent1"/>
-          </a:lnRef>
-          <a:fillRef idx="3">
-            <a:schemeClr val="accent1"/>
-          </a:fillRef>
-          <a:effectRef idx="2">
-            <a:schemeClr val="accent1"/>
-          </a:effectRef>
-          <a:fontRef idx="minor">
-            <a:schemeClr val="lt1"/>
-          </a:fontRef>
-        </p:style>
-        <p:txBody>
-          <a:bodyPr rtlCol="0" anchor="ctr"/>
-          <a:lstStyle/>
-          <a:p>
-            <a:pPr algn="ctr"/>
-          </a:p>
-        </p:txBody>
-      </p:sp>
-      <p:sp>
-        <p:nvSpPr>
-          <p:cNvPr id="4" name="TextBox 3"/>
-          <p:cNvSpPr txBox="1"/>
-          <p:nvPr/>
-        </p:nvSpPr>
-        <p:spPr>
-          <a:xfrm>
-            <a:off x="640080" y="320040"/>
-            <a:ext cx="10972800" cy="640080"/>
-          </a:xfrm>
-          <a:prstGeom prst="rect">
-            <a:avLst/>
-          </a:prstGeom>
-          <a:noFill/>
-        </p:spPr>
-        <p:txBody>
-          <a:bodyPr wrap="square">
-            <a:spAutoFit/>
-          </a:bodyPr>
-          <a:lstStyle/>
-          <a:p>
-            <a:pPr algn="l"/>
-            <a:r>
-              <a:rPr sz="1800" b="1">
-                <a:solidFill>
-                  <a:srgbClr val="0284C7"/>
-                </a:solidFill>
-                <a:latin typeface="Manrope"/>
-              </a:rPr>
-              <a:t>ROADMAP</a:t>
-            </a:r>
-          </a:p>
-        </p:txBody>
-      </p:sp>
-      <p:sp>
-        <p:nvSpPr>
-          <p:cNvPr id="5" name="TextBox 4"/>
-          <p:cNvSpPr txBox="1"/>
-          <p:nvPr/>
-        </p:nvSpPr>
-        <p:spPr>
-          <a:xfrm>
-            <a:off x="640080" y="1005840"/>
-            <a:ext cx="10972800" cy="4937760"/>
-          </a:xfrm>
-          <a:prstGeom prst="rect">
-            <a:avLst/>
-          </a:prstGeom>
-          <a:noFill/>
-        </p:spPr>
-        <p:txBody>
-          <a:bodyPr wrap="square">
-            <a:spAutoFit/>
-          </a:bodyPr>
-          <a:lstStyle/>
-          <a:p>
-            <a:pPr algn="l"/>
-            <a:r>
-              <a:rPr sz="1800" b="0">
-                <a:solidFill>
-                  <a:srgbClr val="0B1B2B"/>
-                </a:solidFill>
-                <a:latin typeface="Manrope"/>
-              </a:rPr>
-              <a:t>• Now: Stellar mainnet live with anchor demo.
-• 30 days: pilot with one Philippines anchor.
-• 90 days: second corridor live.
-• 180 days: licensed Malaysia rail via local e-money partner.
-• Year 1: 5 corridors, 1,000 active allowances, 10 anchor partnerships.</a:t>
-            </a:r>
-          </a:p>
-        </p:txBody>
-      </p:sp>
-    </p:spTree>
-  </p:cSld>
-  <p:clrMapOvr>
-    <a:masterClrMapping/>
-  </p:clrMapOvr>
-</p:sld>
-</file>
-
-<file path=ppt/slides/slide11.xml><?xml version="1.0" encoding="utf-8"?>
-<p:sld xmlns:a="http://schemas.openxmlformats.org/drawingml/2006/main" xmlns:p="http://schemas.openxmlformats.org/presentationml/2006/main" xmlns:r="http://schemas.openxmlformats.org/officeDocument/2006/relationships">
-  <p:cSld>
-    <p:bg>
-      <p:bgPr>
-        <a:solidFill>
-          <a:srgbClr val="FFFFFF"/>
-        </a:solidFill>
-        <a:effectLst/>
-      </p:bgPr>
-    </p:bg>
-    <p:spTree>
-      <p:nvGrpSpPr>
-        <p:cNvPr id="1" name=""/>
-        <p:cNvGrpSpPr/>
-        <p:nvPr/>
-      </p:nvGrpSpPr>
-      <p:grpSpPr/>
-      <p:sp>
-        <p:nvSpPr>
-          <p:cNvPr id="2" name="Rectangle 1"/>
-          <p:cNvSpPr/>
-          <p:nvPr/>
-        </p:nvSpPr>
-        <p:spPr>
-          <a:xfrm>
-            <a:off x="0" y="0"/>
-            <a:ext cx="182880" cy="6858000"/>
-          </a:xfrm>
-          <a:prstGeom prst="rect">
-            <a:avLst/>
-          </a:prstGeom>
-          <a:solidFill>
-            <a:srgbClr val="0284C7"/>
-          </a:solidFill>
-          <a:ln>
-            <a:noFill/>
-          </a:ln>
-        </p:spPr>
-        <p:style>
-          <a:lnRef idx="1">
-            <a:schemeClr val="accent1"/>
-          </a:lnRef>
-          <a:fillRef idx="3">
-            <a:schemeClr val="accent1"/>
-          </a:fillRef>
-          <a:effectRef idx="2">
-            <a:schemeClr val="accent1"/>
-          </a:effectRef>
-          <a:fontRef idx="minor">
-            <a:schemeClr val="lt1"/>
-          </a:fontRef>
-        </p:style>
-        <p:txBody>
-          <a:bodyPr rtlCol="0" anchor="ctr"/>
-          <a:lstStyle/>
-          <a:p>
-            <a:pPr algn="ctr"/>
-          </a:p>
-        </p:txBody>
-      </p:sp>
-      <p:sp>
-        <p:nvSpPr>
-          <p:cNvPr id="3" name="Rectangle 2"/>
-          <p:cNvSpPr/>
-          <p:nvPr/>
-        </p:nvSpPr>
-        <p:spPr>
-          <a:xfrm>
-            <a:off x="0" y="6217920"/>
-            <a:ext cx="12188952" cy="640080"/>
-          </a:xfrm>
-          <a:prstGeom prst="rect">
-            <a:avLst/>
-          </a:prstGeom>
-          <a:solidFill>
-            <a:srgbClr val="0284C7"/>
-          </a:solidFill>
-          <a:ln>
-            <a:noFill/>
-          </a:ln>
-        </p:spPr>
-        <p:style>
-          <a:lnRef idx="1">
-            <a:schemeClr val="accent1"/>
-          </a:lnRef>
-          <a:fillRef idx="3">
-            <a:schemeClr val="accent1"/>
-          </a:fillRef>
-          <a:effectRef idx="2">
-            <a:schemeClr val="accent1"/>
-          </a:effectRef>
-          <a:fontRef idx="minor">
-            <a:schemeClr val="lt1"/>
-          </a:fontRef>
-        </p:style>
-        <p:txBody>
-          <a:bodyPr rtlCol="0" anchor="ctr"/>
-          <a:lstStyle/>
-          <a:p>
-            <a:pPr algn="ctr"/>
-          </a:p>
-        </p:txBody>
-      </p:sp>
-      <p:sp>
-        <p:nvSpPr>
-          <p:cNvPr id="4" name="TextBox 3"/>
-          <p:cNvSpPr txBox="1"/>
-          <p:nvPr/>
-        </p:nvSpPr>
-        <p:spPr>
-          <a:xfrm>
-            <a:off x="640080" y="320040"/>
-            <a:ext cx="10972800" cy="640080"/>
-          </a:xfrm>
-          <a:prstGeom prst="rect">
-            <a:avLst/>
-          </a:prstGeom>
-          <a:noFill/>
-        </p:spPr>
-        <p:txBody>
-          <a:bodyPr wrap="square">
-            <a:spAutoFit/>
-          </a:bodyPr>
-          <a:lstStyle/>
-          <a:p>
-            <a:pPr algn="l"/>
-            <a:r>
-              <a:rPr sz="1800" b="1">
-                <a:solidFill>
-                  <a:srgbClr val="0284C7"/>
-                </a:solidFill>
-                <a:latin typeface="Manrope"/>
-              </a:rPr>
-              <a:t>THE ASK</a:t>
-            </a:r>
-          </a:p>
-        </p:txBody>
-      </p:sp>
-      <p:sp>
-        <p:nvSpPr>
-          <p:cNvPr id="5" name="TextBox 4"/>
-          <p:cNvSpPr txBox="1"/>
-          <p:nvPr/>
-        </p:nvSpPr>
-        <p:spPr>
-          <a:xfrm>
-            <a:off x="640080" y="1005840"/>
-            <a:ext cx="10972800" cy="4937760"/>
-          </a:xfrm>
-          <a:prstGeom prst="rect">
-            <a:avLst/>
-          </a:prstGeom>
-          <a:noFill/>
-        </p:spPr>
-        <p:txBody>
-          <a:bodyPr wrap="square">
-            <a:spAutoFit/>
-          </a:bodyPr>
-          <a:lstStyle/>
-          <a:p>
-            <a:pPr algn="l"/>
-            <a:r>
-              <a:rPr sz="1800" b="0">
-                <a:solidFill>
-                  <a:srgbClr val="0B1B2B"/>
-                </a:solidFill>
-                <a:latin typeface="Manrope"/>
-              </a:rPr>
-              <a:t>• Pilot anchor partner: SEP-24 integration with cash_pickup type.
-• Intro to one Philippines diaspora organization in the Gulf.
-• Introductions to PH remittance compliance contacts.
-• Funding to support anchor integration and legal review.</a:t>
+              <a:t>Hop Stellar · APAC Hackathon 2026 · Track A · Payments &amp; Commerce</a:t>
             </a:r>
           </a:p>
         </p:txBody>
@@ -3811,13 +3438,9 @@
                 <a:latin typeface="Manrope"/>
               </a:rPr>
               <a:t>"I always meant to send money to Ayah."
-Dewi is an Indonesian caregiver in Singapore.
-Some months she remembers to send money home.
-Some months she forgets — between double shifts, it slips away.
-When she forgets, her father stretches his medicine.
+Dewi is an Indonesian caregiver in Singapore. Some months she remembers. Some months — between double shifts, the money slips away. When she forgets, her father stretches his medicine.
 He doesn't use crypto. He uses the corner pickup shop.
-Bakti
-Dewi doesn't want a transfer. She wants a standing allowance she can trust to land every month.</a:t>
+Bakti isn't about transfer. It's about a standing allowance that lands every month, in trust.</a:t>
             </a:r>
           </a:p>
         </p:txBody>
@@ -3964,7 +3587,7 @@
                 </a:solidFill>
                 <a:latin typeface="Manrope"/>
               </a:rPr>
-              <a:t>MARKET</a:t>
+              <a:t>PROBLEM</a:t>
             </a:r>
           </a:p>
         </p:txBody>
@@ -3978,7 +3601,7 @@
         <p:spPr>
           <a:xfrm>
             <a:off x="640080" y="1005840"/>
-            <a:ext cx="10972800" cy="4937760"/>
+            <a:ext cx="5394960" cy="4937760"/>
           </a:xfrm>
           <a:prstGeom prst="rect">
             <a:avLst/>
@@ -3993,18 +3616,53 @@
           <a:p>
             <a:pPr algn="l"/>
             <a:r>
-              <a:rPr sz="1800" b="0">
+              <a:rPr sz="1700" b="0">
                 <a:solidFill>
                   <a:srgbClr val="0B1B2B"/>
                 </a:solidFill>
                 <a:latin typeface="Manrope"/>
               </a:rPr>
-              <a:t>• Philippines 2024 inflow: $38 billion USD (World Bank / KNOMAD).
-• Forecast 2025: $38.3 billion. Trajectory: $40 billion by 2026.
-• Top sources: Saudi Arabia, UAE, USA, Singapore, Hong Kong, Qatar, Kuwait, Japan, UK, Canada.
-• Malaysia sends $10–12 billion a year to PH, ID, BD, NP, IN.
-• MY–PH is the densest single intra-Asia remittance lane.
-• Average global cost of sending $200: 6.4% (WB Remittance Prices Q4 2024).</a:t>
+              <a:t>• Remittances reach wallets. They don't reach habits.
+• SEA diaspora sends &gt;$100B/year home — much of it from children supporting elderly parents.
+• Support today is ad-hoc: depends on the sender remembering in a busy month.
+• Apps charge opaque fees; no clean audit when money lands.</a:t>
+            </a:r>
+          </a:p>
+        </p:txBody>
+      </p:sp>
+      <p:sp>
+        <p:nvSpPr>
+          <p:cNvPr id="6" name="TextBox 5"/>
+          <p:cNvSpPr txBox="1"/>
+          <p:nvPr/>
+        </p:nvSpPr>
+        <p:spPr>
+          <a:xfrm>
+            <a:off x="6217920" y="1005840"/>
+            <a:ext cx="5394960" cy="4937760"/>
+          </a:xfrm>
+          <a:prstGeom prst="rect">
+            <a:avLst/>
+          </a:prstGeom>
+          <a:noFill/>
+        </p:spPr>
+        <p:txBody>
+          <a:bodyPr wrap="square">
+            <a:spAutoFit/>
+          </a:bodyPr>
+          <a:lstStyle/>
+          <a:p>
+            <a:pPr algn="l"/>
+            <a:r>
+              <a:rPr sz="1700" b="0">
+                <a:solidFill>
+                  <a:srgbClr val="0B1B2B"/>
+                </a:solidFill>
+                <a:latin typeface="Manrope"/>
+              </a:rPr>
+              <a:t>• Recipients are often elderly and cannot operate a wallet app.
+• A missed month is not abstract — it means skipped medicine or groceries.
+• Source: World Bank Migration &amp; Remittances data (KNOMAD, 2024).</a:t>
             </a:r>
           </a:p>
         </p:txBody>
@@ -4151,7 +3809,7 @@
                 </a:solidFill>
                 <a:latin typeface="Manrope"/>
               </a:rPr>
-              <a:t>CUSTOMER</a:t>
+              <a:t>MARKET</a:t>
             </a:r>
           </a:p>
         </p:txBody>
@@ -4186,11 +3844,12 @@
                 </a:solidFill>
                 <a:latin typeface="Manrope"/>
               </a:rPr>
-              <a:t>• Sender: OFW or contract worker, 25–45 years old.
-• Has a bank or mobile money account abroad. Comfortable with a Stellar wallet.
-• Receiver: parent, 55–75 years old.
-• No smartphone. No bank account. No crypto.
-• Dignity matters: no complex apps, no seed phrases.</a:t>
+              <a:t>• Philippines 2024: $38.6B personal remittances (Bangko Sentral ng Pilipinas).
+• +3% YoY. Cash remittances alone: $35.6B.
+• Top sources: Saudi Arabia, UAE, USA, Singapore, Hong Kong, UK.
+• Global average cost to send $200: ~6.5% (World Bank Remittance Prices Worldwide, 2024).
+• Malaysia is a top-10 outbound corridor; MY→PH flows through MoneyGram rails into PH cash-pickup.
+• Sources: bsp.gov.ph · remittanceprices.worldbank.org</a:t>
             </a:r>
           </a:p>
         </p:txBody>
@@ -4337,7 +3996,7 @@
                 </a:solidFill>
                 <a:latin typeface="Manrope"/>
               </a:rPr>
-              <a:t>WHY STELLAR</a:t>
+              <a:t>SOLUTION</a:t>
             </a:r>
           </a:p>
         </p:txBody>
@@ -4372,12 +4031,12 @@
                 </a:solidFill>
                 <a:latin typeface="Manrope"/>
               </a:rPr>
-              <a:t>• The only chain where this ends in cash.
-• Anchors and SEP-24: a real standardized path from stablecoin to local cash pickup.
-• Sub-cent fees: a $25 allowance is not eaten by the rails.
-• SEP-10 and SEP-23: auth and per-family attribution built into the protocol.
-• USDC on Stellar: natively issued by Circle. No bridged assets. No counterparty risk.
-• Soroban escrow: permissionless keeper release. Non-custodial. Auditable on-chain.</a:t>
+              <a:t>• A standing allowance that lands on a fixed day, in local cash.
+• Step 1 — Schedule. Sender signs one payment in Freighter: amount, corridor, day-of-month, recipient.
+• Step 2 — Escrow. BaktiEscrow (Soroban) holds the funds and releases one month at a time.
+• Step 3 — Anchor off-ramp. A Stellar SEP-24 anchor converts USDC to local fiat and issues a cash-pickup reference.
+• Step 4 — Pickup. The parent collects local cash at a MoneyGram pickup point. No wallet, no app on their side.
+• Non-custodial end-to-end. Bakti never holds keys or funds.</a:t>
             </a:r>
           </a:p>
         </p:txBody>
@@ -4524,7 +4183,7 @@
                 </a:solidFill>
                 <a:latin typeface="Manrope"/>
               </a:rPr>
-              <a:t>ANCHOR INTEGRATION</a:t>
+              <a:t>FLOW</a:t>
             </a:r>
           </a:p>
         </p:txBody>
@@ -4559,12 +4218,10 @@
                 </a:solidFill>
                 <a:latin typeface="Manrope"/>
               </a:rPr>
-              <a:t>• SEP-24: standardized off-ramp. Bakti is the SEP-24 wallet client.
-• SEP-10: user signs the challenge; Bakti server exchanges it for an anchor JWT.
-• POST /withdraw/interactive: Bakti sends destination (muxed), asset, amount.
-• GET /transaction: polls until status=completed; pickup_ref = transaction_id.
-• Target anchor: Coins.ph (Philippines, Bangko Sentral ng Pilipinas registered VASP).
-• Off-ramp is demo until a live SEP-24 anchor signs a partnership.</a:t>
+              <a:t>• Sender → Freighter (signs schedule)
+•         → Soroban BaktiEscrow (release 1 month per call)
+•         → SEP-24 Anchor (USDC → local fiat, cash-pickup reference)
+•         → MoneyGram pickup point (parent collects cash)</a:t>
             </a:r>
           </a:p>
         </p:txBody>
@@ -4711,7 +4368,7 @@
                 </a:solidFill>
                 <a:latin typeface="Manrope"/>
               </a:rPr>
-              <a:t>WHY US / WHY NOW</a:t>
+              <a:t>WHY STELLAR</a:t>
             </a:r>
           </a:p>
         </p:txBody>
@@ -4746,12 +4403,12 @@
                 </a:solidFill>
                 <a:latin typeface="Manrope"/>
               </a:rPr>
-              <a:t>• Receiver stays non-crypto-native — dignity preserved at every step.
-• Standing order vs. one-off: predictability changes parent finances.
-• On-chain receipt is the audit trail — provable, not opaque.
-• Built on Stellar: any Stellar wallet works. No proprietary lock-in.
-• Anchor off-ramp standard: swap partner without changing code.
-• Demo live on Stellar mainnet. Pilot anchor in progress.</a:t>
+              <a:t>• Only chain where the last mile ends in cash.
+• Sub-cent fees: a $25 allowance is not eaten by rails ($0.0000027 per tx).
+• USDC on Stellar is natively issued by Circle — no bridged assets, no counterparty risk.
+• Soroban escrow: permissionless keeper release, auditable on-chain.
+• SEP-10 auth, SEP-23 muxed accounts, SEP-24 anchor off-ramp — standardized protocol, not proprietary lock-in.
+• Source: stellar.org/developers · stellar.org/case-studies/moneygram</a:t>
             </a:r>
           </a:p>
         </p:txBody>
@@ -4898,7 +4555,7 @@
                 </a:solidFill>
                 <a:latin typeface="Manrope"/>
               </a:rPr>
-              <a:t>BUSINESS MODEL</a:t>
+              <a:t>LIVE PROOF</a:t>
             </a:r>
           </a:p>
         </p:txBody>
@@ -4933,11 +4590,12 @@
                 </a:solidFill>
                 <a:latin typeface="Manrope"/>
               </a:rPr>
-              <a:t>• Target: take rate on the on-ramp leg once fiat partner signs.
-• Anchor referral fee: Bakti drives users to SEP-24 partners.
-• Target all-in cost to sender: 2% or less.
-• Compare: global average 6.4%, traditional wire 8–12%.
-• Bakti never holds funds. Non-custodial by design.</a:t>
+              <a:t>• Not a mockup. A real mainnet payout.
+• Live app: https://bakti-stellar.vercel.app
+• Soroban contract (mainnet): CBVAZDK2GAX5MJ7SSSQKRLY33TO7Q6DG3ZGZK6WMZSGI63XRMIR2CTHR
+• On-chain release: https://stellar.expert/explorer/public/tx/cfa17a939f5cd0c90bc674d7cee61f0f4a67ed4c2f11ab3c789b0e3ad0c419d2
+• Sign once. Watch the payout flip Due now → Cash ready.
+• Verify on stellar.expert — real, permanent receipt.</a:t>
             </a:r>
           </a:p>
         </p:txBody>
@@ -5084,7 +4742,7 @@
                 </a:solidFill>
                 <a:latin typeface="Manrope"/>
               </a:rPr>
-              <a:t>GO-TO-MARKET</a:t>
+              <a:t>THE ASK</a:t>
             </a:r>
           </a:p>
         </p:txBody>
@@ -5119,9 +4777,11 @@
                 </a:solidFill>
                 <a:latin typeface="Manrope"/>
               </a:rPr>
-              <a:t>• Philippines first: Coins.ph ecosystem, OFW Facebook groups, diaspora orgs, remittance clinics in Saudi Arabia and UAE.
-• Malaysia to Philippines second: existing high-volume corridor, mature, competitive.
-• Indonesia, Vietnam, Thailand: expansion after anchor coverage confirmed per corridor.</a:t>
+              <a:t>• Pilot anchor partner for SEP-24 integration, cash_pickup type.
+• Intro to one Philippines diaspora organization in the Gulf (Saudi / UAE).
+• Connections to PH remittance compliance reviewers.
+• Funding support for anchor integration legal review.
+• Contacts: GitHub issues @ castrodennisstephens128174-jpg/Bakti</a:t>
             </a:r>
           </a:p>
         </p:txBody>

--- a/slides/Bakti.pptx
+++ b/slides/Bakti.pptx
@@ -15,7 +15,7 @@
     <p:sldId id="263" r:id="rId14"/>
     <p:sldId id="264" r:id="rId15"/>
   </p:sldIdLst>
-  <p:sldSz cx="12188952" cy="6858000" type="screen4x3"/>
+  <p:sldSz cx="12191695" cy="6858000" type="screen4x3"/>
   <p:notesSz cx="6858000" cy="9144000"/>
   <p:defaultTextStyle>
     <a:defPPr>
@@ -3113,16 +3113,18 @@
         <p:spPr>
           <a:xfrm>
             <a:off x="0" y="0"/>
-            <a:ext cx="12188952" cy="137160"/>
+            <a:ext cx="12191695" cy="64008"/>
           </a:xfrm>
           <a:prstGeom prst="rect">
             <a:avLst/>
           </a:prstGeom>
           <a:solidFill>
-            <a:srgbClr val="0284C7"/>
+            <a:srgbClr val="0369A1"/>
           </a:solidFill>
-          <a:ln>
-            <a:noFill/>
+          <a:ln w="15240">
+            <a:solidFill>
+              <a:srgbClr val="0369A1"/>
+            </a:solidFill>
           </a:ln>
         </p:spPr>
         <p:style>
@@ -3149,23 +3151,165 @@
       </p:sp>
       <p:sp>
         <p:nvSpPr>
-          <p:cNvPr id="3" name="Rectangle 2"/>
+          <p:cNvPr id="3" name="TextBox 2"/>
+          <p:cNvSpPr txBox="1"/>
+          <p:nvPr/>
+        </p:nvSpPr>
+        <p:spPr>
+          <a:xfrm>
+            <a:off x="685800" y="640080"/>
+            <a:ext cx="7315200" cy="274320"/>
+          </a:xfrm>
+          <a:prstGeom prst="rect">
+            <a:avLst/>
+          </a:prstGeom>
+          <a:noFill/>
+        </p:spPr>
+        <p:txBody>
+          <a:bodyPr wrap="square" lIns="0" rIns="0" tIns="0" bIns="0" anchor="t">
+            <a:spAutoFit/>
+          </a:bodyPr>
+          <a:lstStyle/>
+          <a:p>
+            <a:pPr algn="l"/>
+            <a:r>
+              <a:rPr sz="1200" b="1">
+                <a:solidFill>
+                  <a:srgbClr val="0369A1"/>
+                </a:solidFill>
+                <a:latin typeface="Manrope"/>
+              </a:rPr>
+              <a:t>HOP STELLAR 2026 · PRODUCT PITCH</a:t>
+            </a:r>
+          </a:p>
+        </p:txBody>
+      </p:sp>
+      <p:sp>
+        <p:nvSpPr>
+          <p:cNvPr id="4" name="TextBox 3"/>
+          <p:cNvSpPr txBox="1"/>
+          <p:nvPr/>
+        </p:nvSpPr>
+        <p:spPr>
+          <a:xfrm>
+            <a:off x="685800" y="1051560"/>
+            <a:ext cx="7772400" cy="914400"/>
+          </a:xfrm>
+          <a:prstGeom prst="rect">
+            <a:avLst/>
+          </a:prstGeom>
+          <a:noFill/>
+        </p:spPr>
+        <p:txBody>
+          <a:bodyPr wrap="square" lIns="0" rIns="0" tIns="0" bIns="0" anchor="t">
+            <a:spAutoFit/>
+          </a:bodyPr>
+          <a:lstStyle/>
+          <a:p>
+            <a:pPr algn="l"/>
+            <a:r>
+              <a:rPr sz="5400" b="1">
+                <a:solidFill>
+                  <a:srgbClr val="0369A1"/>
+                </a:solidFill>
+                <a:latin typeface="Fraunces"/>
+              </a:rPr>
+              <a:t>Bakti</a:t>
+            </a:r>
+          </a:p>
+        </p:txBody>
+      </p:sp>
+      <p:sp>
+        <p:nvSpPr>
+          <p:cNvPr id="5" name="TextBox 4"/>
+          <p:cNvSpPr txBox="1"/>
+          <p:nvPr/>
+        </p:nvSpPr>
+        <p:spPr>
+          <a:xfrm>
+            <a:off x="685800" y="1965960"/>
+            <a:ext cx="10058400" cy="594360"/>
+          </a:xfrm>
+          <a:prstGeom prst="rect">
+            <a:avLst/>
+          </a:prstGeom>
+          <a:noFill/>
+        </p:spPr>
+        <p:txBody>
+          <a:bodyPr wrap="square" lIns="0" rIns="0" tIns="0" bIns="0" anchor="t">
+            <a:spAutoFit/>
+          </a:bodyPr>
+          <a:lstStyle/>
+          <a:p>
+            <a:pPr algn="l"/>
+            <a:r>
+              <a:rPr sz="2700" b="1">
+                <a:solidFill>
+                  <a:srgbClr val="0B1B2B"/>
+                </a:solidFill>
+                <a:latin typeface="Fraunces"/>
+              </a:rPr>
+              <a:t>Plan salary-day support. Verify the transfer.</a:t>
+            </a:r>
+          </a:p>
+        </p:txBody>
+      </p:sp>
+      <p:sp>
+        <p:nvSpPr>
+          <p:cNvPr id="6" name="TextBox 5"/>
+          <p:cNvSpPr txBox="1"/>
+          <p:nvPr/>
+        </p:nvSpPr>
+        <p:spPr>
+          <a:xfrm>
+            <a:off x="685800" y="2697480"/>
+            <a:ext cx="10058400" cy="411480"/>
+          </a:xfrm>
+          <a:prstGeom prst="rect">
+            <a:avLst/>
+          </a:prstGeom>
+          <a:noFill/>
+        </p:spPr>
+        <p:txBody>
+          <a:bodyPr wrap="square" lIns="0" rIns="0" tIns="0" bIns="0" anchor="t">
+            <a:spAutoFit/>
+          </a:bodyPr>
+          <a:lstStyle/>
+          <a:p>
+            <a:pPr algn="l"/>
+            <a:r>
+              <a:rPr sz="1800" b="0">
+                <a:solidFill>
+                  <a:srgbClr val="51617A"/>
+                </a:solidFill>
+                <a:latin typeface="Manrope"/>
+              </a:rPr>
+              <a:t>Filipino workers in Malaysia → family in the Philippines</a:t>
+            </a:r>
+          </a:p>
+        </p:txBody>
+      </p:sp>
+      <p:sp>
+        <p:nvSpPr>
+          <p:cNvPr id="7" name="Rounded Rectangle 6"/>
           <p:cNvSpPr/>
           <p:nvPr/>
         </p:nvSpPr>
         <p:spPr>
           <a:xfrm>
-            <a:off x="0" y="5943600"/>
-            <a:ext cx="12188952" cy="914400"/>
-          </a:xfrm>
-          <a:prstGeom prst="rect">
+            <a:off x="685800" y="3474720"/>
+            <a:ext cx="5257800" cy="1508760"/>
+          </a:xfrm>
+          <a:prstGeom prst="roundRect">
             <a:avLst/>
           </a:prstGeom>
           <a:solidFill>
-            <a:srgbClr val="0284C7"/>
+            <a:srgbClr val="E6F3FB"/>
           </a:solidFill>
-          <a:ln>
-            <a:noFill/>
+          <a:ln w="15240">
+            <a:solidFill>
+              <a:srgbClr val="9DCBEA"/>
+            </a:solidFill>
           </a:ln>
         </p:spPr>
         <p:style>
@@ -3192,70 +3336,417 @@
       </p:sp>
       <p:sp>
         <p:nvSpPr>
-          <p:cNvPr id="4" name="TextBox 3"/>
-          <p:cNvSpPr txBox="1"/>
-          <p:nvPr/>
-        </p:nvSpPr>
-        <p:spPr>
-          <a:xfrm>
-            <a:off x="731520" y="1645920"/>
-            <a:ext cx="10515600" cy="1828800"/>
-          </a:xfrm>
-          <a:prstGeom prst="rect">
-            <a:avLst/>
-          </a:prstGeom>
-          <a:noFill/>
-        </p:spPr>
-        <p:txBody>
-          <a:bodyPr wrap="square">
+          <p:cNvPr id="8" name="Rounded Rectangle 7"/>
+          <p:cNvSpPr/>
+          <p:nvPr/>
+        </p:nvSpPr>
+        <p:spPr>
+          <a:xfrm>
+            <a:off x="932688" y="3685032"/>
+            <a:ext cx="914400" cy="310896"/>
+          </a:xfrm>
+          <a:prstGeom prst="roundRect">
+            <a:avLst/>
+          </a:prstGeom>
+          <a:solidFill>
+            <a:srgbClr val="E6F3FB"/>
+          </a:solidFill>
+          <a:ln w="15240">
+            <a:solidFill>
+              <a:srgbClr val="9DCBEA"/>
+            </a:solidFill>
+          </a:ln>
+        </p:spPr>
+        <p:style>
+          <a:lnRef idx="1">
+            <a:schemeClr val="accent1"/>
+          </a:lnRef>
+          <a:fillRef idx="3">
+            <a:schemeClr val="accent1"/>
+          </a:fillRef>
+          <a:effectRef idx="2">
+            <a:schemeClr val="accent1"/>
+          </a:effectRef>
+          <a:fontRef idx="minor">
+            <a:schemeClr val="lt1"/>
+          </a:fontRef>
+        </p:style>
+        <p:txBody>
+          <a:bodyPr rtlCol="0" anchor="ctr"/>
+          <a:lstStyle/>
+          <a:p>
+            <a:pPr algn="ctr"/>
+          </a:p>
+        </p:txBody>
+      </p:sp>
+      <p:sp>
+        <p:nvSpPr>
+          <p:cNvPr id="9" name="TextBox 8"/>
+          <p:cNvSpPr txBox="1"/>
+          <p:nvPr/>
+        </p:nvSpPr>
+        <p:spPr>
+          <a:xfrm>
+            <a:off x="932688" y="3703320"/>
+            <a:ext cx="914400" cy="228600"/>
+          </a:xfrm>
+          <a:prstGeom prst="rect">
+            <a:avLst/>
+          </a:prstGeom>
+          <a:noFill/>
+        </p:spPr>
+        <p:txBody>
+          <a:bodyPr wrap="square" lIns="0" rIns="0" tIns="0" bIns="0" anchor="t">
+            <a:spAutoFit/>
+          </a:bodyPr>
+          <a:lstStyle/>
+          <a:p>
+            <a:pPr algn="ctr"/>
+            <a:r>
+              <a:rPr sz="900" b="1">
+                <a:solidFill>
+                  <a:srgbClr val="0369A1"/>
+                </a:solidFill>
+                <a:latin typeface="Manrope"/>
+              </a:rPr>
+              <a:t>CURRENT</a:t>
+            </a:r>
+          </a:p>
+        </p:txBody>
+      </p:sp>
+      <p:sp>
+        <p:nvSpPr>
+          <p:cNvPr id="10" name="TextBox 9"/>
+          <p:cNvSpPr txBox="1"/>
+          <p:nvPr/>
+        </p:nvSpPr>
+        <p:spPr>
+          <a:xfrm>
+            <a:off x="932688" y="4114800"/>
+            <a:ext cx="4572000" cy="292608"/>
+          </a:xfrm>
+          <a:prstGeom prst="rect">
+            <a:avLst/>
+          </a:prstGeom>
+          <a:noFill/>
+        </p:spPr>
+        <p:txBody>
+          <a:bodyPr wrap="square" lIns="0" rIns="0" tIns="0" bIns="0" anchor="t">
             <a:spAutoFit/>
           </a:bodyPr>
           <a:lstStyle/>
           <a:p>
             <a:pPr algn="l"/>
             <a:r>
-              <a:rPr sz="5200" b="1">
-                <a:solidFill>
-                  <a:srgbClr val="0284C7"/>
-                </a:solidFill>
-                <a:latin typeface="Fraunces"/>
+              <a:rPr sz="1800" b="1">
+                <a:solidFill>
+                  <a:srgbClr val="0B1B2B"/>
+                </a:solidFill>
+                <a:latin typeface="Manrope"/>
               </a:rPr>
-              <a:t>Bakti | A monthly allowance your parents collect cash.</a:t>
-            </a:r>
-          </a:p>
-        </p:txBody>
-      </p:sp>
-      <p:sp>
-        <p:nvSpPr>
-          <p:cNvPr id="5" name="TextBox 4"/>
-          <p:cNvSpPr txBox="1"/>
-          <p:nvPr/>
-        </p:nvSpPr>
-        <p:spPr>
-          <a:xfrm>
-            <a:off x="731520" y="3474720"/>
-            <a:ext cx="10515600" cy="914400"/>
-          </a:xfrm>
-          <a:prstGeom prst="rect">
-            <a:avLst/>
-          </a:prstGeom>
-          <a:noFill/>
-        </p:spPr>
-        <p:txBody>
-          <a:bodyPr wrap="square">
+              <a:t>Stellar testnet prototype</a:t>
+            </a:r>
+          </a:p>
+        </p:txBody>
+      </p:sp>
+      <p:sp>
+        <p:nvSpPr>
+          <p:cNvPr id="11" name="TextBox 10"/>
+          <p:cNvSpPr txBox="1"/>
+          <p:nvPr/>
+        </p:nvSpPr>
+        <p:spPr>
+          <a:xfrm>
+            <a:off x="932688" y="4480560"/>
+            <a:ext cx="4572000" cy="384048"/>
+          </a:xfrm>
+          <a:prstGeom prst="rect">
+            <a:avLst/>
+          </a:prstGeom>
+          <a:noFill/>
+        </p:spPr>
+        <p:txBody>
+          <a:bodyPr wrap="square" lIns="0" rIns="0" tIns="0" bIns="0" anchor="t">
             <a:spAutoFit/>
           </a:bodyPr>
           <a:lstStyle/>
           <a:p>
             <a:pPr algn="l"/>
             <a:r>
-              <a:rPr sz="2200" b="0">
+              <a:rPr sz="1300" b="0">
                 <a:solidFill>
                   <a:srgbClr val="51617A"/>
                 </a:solidFill>
                 <a:latin typeface="Manrope"/>
               </a:rPr>
-              <a:t>Hop Stellar · APAC Hackathon 2026 · Track A · Payments &amp; Commerce</a:t>
+              <a:t>Signed XLM escrow releases, direct payments, and on-chain verification.</a:t>
+            </a:r>
+          </a:p>
+        </p:txBody>
+      </p:sp>
+      <p:sp>
+        <p:nvSpPr>
+          <p:cNvPr id="12" name="Rounded Rectangle 11"/>
+          <p:cNvSpPr/>
+          <p:nvPr/>
+        </p:nvSpPr>
+        <p:spPr>
+          <a:xfrm>
+            <a:off x="6236208" y="3474720"/>
+            <a:ext cx="5257800" cy="1508760"/>
+          </a:xfrm>
+          <a:prstGeom prst="roundRect">
+            <a:avLst/>
+          </a:prstGeom>
+          <a:solidFill>
+            <a:srgbClr val="FFFFFF"/>
+          </a:solidFill>
+          <a:ln w="15240">
+            <a:solidFill>
+              <a:srgbClr val="9DCBEA"/>
+            </a:solidFill>
+            <a:prstDash val="dash"/>
+          </a:ln>
+        </p:spPr>
+        <p:style>
+          <a:lnRef idx="1">
+            <a:schemeClr val="accent1"/>
+          </a:lnRef>
+          <a:fillRef idx="3">
+            <a:schemeClr val="accent1"/>
+          </a:fillRef>
+          <a:effectRef idx="2">
+            <a:schemeClr val="accent1"/>
+          </a:effectRef>
+          <a:fontRef idx="minor">
+            <a:schemeClr val="lt1"/>
+          </a:fontRef>
+        </p:style>
+        <p:txBody>
+          <a:bodyPr rtlCol="0" anchor="ctr"/>
+          <a:lstStyle/>
+          <a:p>
+            <a:pPr algn="ctr"/>
+          </a:p>
+        </p:txBody>
+      </p:sp>
+      <p:sp>
+        <p:nvSpPr>
+          <p:cNvPr id="13" name="Rounded Rectangle 12"/>
+          <p:cNvSpPr/>
+          <p:nvPr/>
+        </p:nvSpPr>
+        <p:spPr>
+          <a:xfrm>
+            <a:off x="6483096" y="3685032"/>
+            <a:ext cx="914400" cy="310896"/>
+          </a:xfrm>
+          <a:prstGeom prst="roundRect">
+            <a:avLst/>
+          </a:prstGeom>
+          <a:solidFill>
+            <a:srgbClr val="FFFFFF"/>
+          </a:solidFill>
+          <a:ln w="15240">
+            <a:solidFill>
+              <a:srgbClr val="9DCBEA"/>
+            </a:solidFill>
+            <a:prstDash val="dash"/>
+          </a:ln>
+        </p:spPr>
+        <p:style>
+          <a:lnRef idx="1">
+            <a:schemeClr val="accent1"/>
+          </a:lnRef>
+          <a:fillRef idx="3">
+            <a:schemeClr val="accent1"/>
+          </a:fillRef>
+          <a:effectRef idx="2">
+            <a:schemeClr val="accent1"/>
+          </a:effectRef>
+          <a:fontRef idx="minor">
+            <a:schemeClr val="lt1"/>
+          </a:fontRef>
+        </p:style>
+        <p:txBody>
+          <a:bodyPr rtlCol="0" anchor="ctr"/>
+          <a:lstStyle/>
+          <a:p>
+            <a:pPr algn="ctr"/>
+          </a:p>
+        </p:txBody>
+      </p:sp>
+      <p:sp>
+        <p:nvSpPr>
+          <p:cNvPr id="14" name="TextBox 13"/>
+          <p:cNvSpPr txBox="1"/>
+          <p:nvPr/>
+        </p:nvSpPr>
+        <p:spPr>
+          <a:xfrm>
+            <a:off x="6483096" y="3703320"/>
+            <a:ext cx="914400" cy="228600"/>
+          </a:xfrm>
+          <a:prstGeom prst="rect">
+            <a:avLst/>
+          </a:prstGeom>
+          <a:noFill/>
+        </p:spPr>
+        <p:txBody>
+          <a:bodyPr wrap="square" lIns="0" rIns="0" tIns="0" bIns="0" anchor="t">
+            <a:spAutoFit/>
+          </a:bodyPr>
+          <a:lstStyle/>
+          <a:p>
+            <a:pPr algn="ctr"/>
+            <a:r>
+              <a:rPr sz="900" b="1">
+                <a:solidFill>
+                  <a:srgbClr val="0369A1"/>
+                </a:solidFill>
+                <a:latin typeface="Manrope"/>
+              </a:rPr>
+              <a:t>PLANNED</a:t>
+            </a:r>
+          </a:p>
+        </p:txBody>
+      </p:sp>
+      <p:sp>
+        <p:nvSpPr>
+          <p:cNvPr id="15" name="TextBox 14"/>
+          <p:cNvSpPr txBox="1"/>
+          <p:nvPr/>
+        </p:nvSpPr>
+        <p:spPr>
+          <a:xfrm>
+            <a:off x="6483096" y="4114800"/>
+            <a:ext cx="4572000" cy="292608"/>
+          </a:xfrm>
+          <a:prstGeom prst="rect">
+            <a:avLst/>
+          </a:prstGeom>
+          <a:noFill/>
+        </p:spPr>
+        <p:txBody>
+          <a:bodyPr wrap="square" lIns="0" rIns="0" tIns="0" bIns="0" anchor="t">
+            <a:spAutoFit/>
+          </a:bodyPr>
+          <a:lstStyle/>
+          <a:p>
+            <a:pPr algn="l"/>
+            <a:r>
+              <a:rPr sz="1800" b="1">
+                <a:solidFill>
+                  <a:srgbClr val="0B1B2B"/>
+                </a:solidFill>
+                <a:latin typeface="Manrope"/>
+              </a:rPr>
+              <a:t>Licensed PHP cash-out</a:t>
+            </a:r>
+          </a:p>
+        </p:txBody>
+      </p:sp>
+      <p:sp>
+        <p:nvSpPr>
+          <p:cNvPr id="16" name="TextBox 15"/>
+          <p:cNvSpPr txBox="1"/>
+          <p:nvPr/>
+        </p:nvSpPr>
+        <p:spPr>
+          <a:xfrm>
+            <a:off x="6483096" y="4480560"/>
+            <a:ext cx="4572000" cy="384048"/>
+          </a:xfrm>
+          <a:prstGeom prst="rect">
+            <a:avLst/>
+          </a:prstGeom>
+          <a:noFill/>
+        </p:spPr>
+        <p:txBody>
+          <a:bodyPr wrap="square" lIns="0" rIns="0" tIns="0" bIns="0" anchor="t">
+            <a:spAutoFit/>
+          </a:bodyPr>
+          <a:lstStyle/>
+          <a:p>
+            <a:pPr algn="l"/>
+            <a:r>
+              <a:rPr sz="1300" b="0">
+                <a:solidFill>
+                  <a:srgbClr val="51617A"/>
+                </a:solidFill>
+                <a:latin typeface="Manrope"/>
+              </a:rPr>
+              <a:t>Provider SEP-24, KYC, routing/status, and confirmed collection.</a:t>
+            </a:r>
+          </a:p>
+        </p:txBody>
+      </p:sp>
+      <p:sp>
+        <p:nvSpPr>
+          <p:cNvPr id="17" name="TextBox 16"/>
+          <p:cNvSpPr txBox="1"/>
+          <p:nvPr/>
+        </p:nvSpPr>
+        <p:spPr>
+          <a:xfrm>
+            <a:off x="685800" y="6172200"/>
+            <a:ext cx="10789920" cy="228600"/>
+          </a:xfrm>
+          <a:prstGeom prst="rect">
+            <a:avLst/>
+          </a:prstGeom>
+          <a:noFill/>
+        </p:spPr>
+        <p:txBody>
+          <a:bodyPr wrap="square" lIns="0" rIns="0" tIns="0" bIns="0" anchor="t">
+            <a:spAutoFit/>
+          </a:bodyPr>
+          <a:lstStyle/>
+          <a:p>
+            <a:pPr algn="l"/>
+            <a:r>
+              <a:rPr sz="1000" b="0">
+                <a:solidFill>
+                  <a:srgbClr val="51617A"/>
+                </a:solidFill>
+                <a:latin typeface="Manrope"/>
+              </a:rPr>
+              <a:t>Stellar testnet prototype · licensed cash-out is the next integration</a:t>
+            </a:r>
+          </a:p>
+        </p:txBody>
+      </p:sp>
+      <p:sp>
+        <p:nvSpPr>
+          <p:cNvPr id="18" name="TextBox 17"/>
+          <p:cNvSpPr txBox="1"/>
+          <p:nvPr/>
+        </p:nvSpPr>
+        <p:spPr>
+          <a:xfrm>
+            <a:off x="10927080" y="292608"/>
+            <a:ext cx="566928" cy="228600"/>
+          </a:xfrm>
+          <a:prstGeom prst="rect">
+            <a:avLst/>
+          </a:prstGeom>
+          <a:noFill/>
+        </p:spPr>
+        <p:txBody>
+          <a:bodyPr wrap="square" lIns="0" rIns="0" tIns="0" bIns="0" anchor="t">
+            <a:spAutoFit/>
+          </a:bodyPr>
+          <a:lstStyle/>
+          <a:p>
+            <a:pPr algn="r"/>
+            <a:r>
+              <a:rPr sz="900" b="0">
+                <a:solidFill>
+                  <a:srgbClr val="51617A"/>
+                </a:solidFill>
+                <a:latin typeface="Manrope"/>
+              </a:rPr>
+              <a:t>1 / 9</a:t>
             </a:r>
           </a:p>
         </p:txBody>
@@ -3274,7 +3765,7 @@
     <p:bg>
       <p:bgPr>
         <a:solidFill>
-          <a:srgbClr val="FDF1E0"/>
+          <a:srgbClr val="FFFFFF"/>
         </a:solidFill>
         <a:effectLst/>
       </p:bgPr>
@@ -3295,16 +3786,18 @@
         <p:spPr>
           <a:xfrm>
             <a:off x="0" y="0"/>
-            <a:ext cx="12188952" cy="109728"/>
+            <a:ext cx="12191695" cy="64008"/>
           </a:xfrm>
           <a:prstGeom prst="rect">
             <a:avLst/>
           </a:prstGeom>
           <a:solidFill>
-            <a:srgbClr val="0284C7"/>
+            <a:srgbClr val="0369A1"/>
           </a:solidFill>
-          <a:ln>
-            <a:noFill/>
+          <a:ln w="15240">
+            <a:solidFill>
+              <a:srgbClr val="0369A1"/>
+            </a:solidFill>
           </a:ln>
         </p:spPr>
         <p:style>
@@ -3331,23 +3824,130 @@
       </p:sp>
       <p:sp>
         <p:nvSpPr>
-          <p:cNvPr id="3" name="Rectangle 2"/>
+          <p:cNvPr id="3" name="TextBox 2"/>
+          <p:cNvSpPr txBox="1"/>
+          <p:nvPr/>
+        </p:nvSpPr>
+        <p:spPr>
+          <a:xfrm>
+            <a:off x="658368" y="310896"/>
+            <a:ext cx="9601200" cy="292608"/>
+          </a:xfrm>
+          <a:prstGeom prst="rect">
+            <a:avLst/>
+          </a:prstGeom>
+          <a:noFill/>
+        </p:spPr>
+        <p:txBody>
+          <a:bodyPr wrap="square" lIns="0" rIns="0" tIns="0" bIns="0" anchor="t">
+            <a:spAutoFit/>
+          </a:bodyPr>
+          <a:lstStyle/>
+          <a:p>
+            <a:pPr algn="l"/>
+            <a:r>
+              <a:rPr sz="1100" b="1">
+                <a:solidFill>
+                  <a:srgbClr val="0369A1"/>
+                </a:solidFill>
+                <a:latin typeface="Manrope"/>
+              </a:rPr>
+              <a:t>HUMAN PROBLEM / TARGET PERSONA</a:t>
+            </a:r>
+          </a:p>
+        </p:txBody>
+      </p:sp>
+      <p:sp>
+        <p:nvSpPr>
+          <p:cNvPr id="4" name="TextBox 3"/>
+          <p:cNvSpPr txBox="1"/>
+          <p:nvPr/>
+        </p:nvSpPr>
+        <p:spPr>
+          <a:xfrm>
+            <a:off x="658368" y="667512"/>
+            <a:ext cx="10789920" cy="658368"/>
+          </a:xfrm>
+          <a:prstGeom prst="rect">
+            <a:avLst/>
+          </a:prstGeom>
+          <a:noFill/>
+        </p:spPr>
+        <p:txBody>
+          <a:bodyPr wrap="square" lIns="0" rIns="0" tIns="0" bIns="0" anchor="t">
+            <a:spAutoFit/>
+          </a:bodyPr>
+          <a:lstStyle/>
+          <a:p>
+            <a:pPr algn="l"/>
+            <a:r>
+              <a:rPr sz="2700" b="1">
+                <a:solidFill>
+                  <a:srgbClr val="0B1B2B"/>
+                </a:solidFill>
+                <a:latin typeface="Fraunces"/>
+              </a:rPr>
+              <a:t>“I want support to be ready around salary day.”</a:t>
+            </a:r>
+          </a:p>
+        </p:txBody>
+      </p:sp>
+      <p:sp>
+        <p:nvSpPr>
+          <p:cNvPr id="5" name="TextBox 4"/>
+          <p:cNvSpPr txBox="1"/>
+          <p:nvPr/>
+        </p:nvSpPr>
+        <p:spPr>
+          <a:xfrm>
+            <a:off x="10927080" y="292608"/>
+            <a:ext cx="566928" cy="228600"/>
+          </a:xfrm>
+          <a:prstGeom prst="rect">
+            <a:avLst/>
+          </a:prstGeom>
+          <a:noFill/>
+        </p:spPr>
+        <p:txBody>
+          <a:bodyPr wrap="square" lIns="0" rIns="0" tIns="0" bIns="0" anchor="t">
+            <a:spAutoFit/>
+          </a:bodyPr>
+          <a:lstStyle/>
+          <a:p>
+            <a:pPr algn="r"/>
+            <a:r>
+              <a:rPr sz="900" b="0">
+                <a:solidFill>
+                  <a:srgbClr val="51617A"/>
+                </a:solidFill>
+                <a:latin typeface="Manrope"/>
+              </a:rPr>
+              <a:t>2 / 9</a:t>
+            </a:r>
+          </a:p>
+        </p:txBody>
+      </p:sp>
+      <p:sp>
+        <p:nvSpPr>
+          <p:cNvPr id="6" name="Rounded Rectangle 5"/>
           <p:cNvSpPr/>
           <p:nvPr/>
         </p:nvSpPr>
         <p:spPr>
           <a:xfrm>
-            <a:off x="0" y="5943600"/>
-            <a:ext cx="12188952" cy="914400"/>
-          </a:xfrm>
-          <a:prstGeom prst="rect">
+            <a:off x="685800" y="1481328"/>
+            <a:ext cx="2926080" cy="310896"/>
+          </a:xfrm>
+          <a:prstGeom prst="roundRect">
             <a:avLst/>
           </a:prstGeom>
           <a:solidFill>
-            <a:srgbClr val="0284C7"/>
+            <a:srgbClr val="E6F3FB"/>
           </a:solidFill>
-          <a:ln>
-            <a:noFill/>
+          <a:ln w="15240">
+            <a:solidFill>
+              <a:srgbClr val="9DCBEA"/>
+            </a:solidFill>
           </a:ln>
         </p:spPr>
         <p:style>
@@ -3374,73 +3974,376 @@
       </p:sp>
       <p:sp>
         <p:nvSpPr>
-          <p:cNvPr id="4" name="TextBox 3"/>
-          <p:cNvSpPr txBox="1"/>
-          <p:nvPr/>
-        </p:nvSpPr>
-        <p:spPr>
-          <a:xfrm>
-            <a:off x="731520" y="457200"/>
-            <a:ext cx="10515600" cy="548640"/>
-          </a:xfrm>
-          <a:prstGeom prst="rect">
-            <a:avLst/>
-          </a:prstGeom>
-          <a:noFill/>
-        </p:spPr>
-        <p:txBody>
-          <a:bodyPr wrap="square">
+          <p:cNvPr id="7" name="TextBox 6"/>
+          <p:cNvSpPr txBox="1"/>
+          <p:nvPr/>
+        </p:nvSpPr>
+        <p:spPr>
+          <a:xfrm>
+            <a:off x="685800" y="1499616"/>
+            <a:ext cx="2926080" cy="228600"/>
+          </a:xfrm>
+          <a:prstGeom prst="rect">
+            <a:avLst/>
+          </a:prstGeom>
+          <a:noFill/>
+        </p:spPr>
+        <p:txBody>
+          <a:bodyPr wrap="square" lIns="0" rIns="0" tIns="0" bIns="0" anchor="t">
+            <a:spAutoFit/>
+          </a:bodyPr>
+          <a:lstStyle/>
+          <a:p>
+            <a:pPr algn="ctr"/>
+            <a:r>
+              <a:rPr sz="900" b="1">
+                <a:solidFill>
+                  <a:srgbClr val="0369A1"/>
+                </a:solidFill>
+                <a:latin typeface="Manrope"/>
+              </a:rPr>
+              <a:t>ILLUSTRATIVE PERSONA — NOT A CLAIMED INTERVIEW</a:t>
+            </a:r>
+          </a:p>
+        </p:txBody>
+      </p:sp>
+      <p:sp>
+        <p:nvSpPr>
+          <p:cNvPr id="8" name="TextBox 7"/>
+          <p:cNvSpPr txBox="1"/>
+          <p:nvPr/>
+        </p:nvSpPr>
+        <p:spPr>
+          <a:xfrm>
+            <a:off x="685800" y="2011680"/>
+            <a:ext cx="6583680" cy="1600200"/>
+          </a:xfrm>
+          <a:prstGeom prst="rect">
+            <a:avLst/>
+          </a:prstGeom>
+          <a:noFill/>
+        </p:spPr>
+        <p:txBody>
+          <a:bodyPr wrap="square" lIns="0" rIns="0" tIns="0" bIns="0" anchor="t">
             <a:spAutoFit/>
           </a:bodyPr>
           <a:lstStyle/>
           <a:p>
             <a:pPr algn="l"/>
             <a:r>
-              <a:rPr sz="1400" b="1">
-                <a:solidFill>
-                  <a:srgbClr val="0284C7"/>
-                </a:solidFill>
-                <a:latin typeface="Manrope"/>
+              <a:rPr sz="2300" b="0">
+                <a:solidFill>
+                  <a:srgbClr val="0B1B2B"/>
+                </a:solidFill>
+                <a:latin typeface="Fraunces"/>
               </a:rPr>
-              <a:t>THE MOMENT</a:t>
-            </a:r>
-          </a:p>
-        </p:txBody>
-      </p:sp>
-      <p:sp>
-        <p:nvSpPr>
-          <p:cNvPr id="5" name="TextBox 4"/>
-          <p:cNvSpPr txBox="1"/>
-          <p:nvPr/>
-        </p:nvSpPr>
-        <p:spPr>
-          <a:xfrm>
-            <a:off x="731520" y="1097280"/>
-            <a:ext cx="10515600" cy="4572000"/>
-          </a:xfrm>
-          <a:prstGeom prst="rect">
-            <a:avLst/>
-          </a:prstGeom>
-          <a:noFill/>
-        </p:spPr>
-        <p:txBody>
-          <a:bodyPr wrap="square">
+              <a:t>Maria is a Filipino service worker in Kuala Lumpur. Around salary day she wants to set aside support for her mother in the Philippines, remember the commitment, and know where the transfer went.</a:t>
+            </a:r>
+          </a:p>
+        </p:txBody>
+      </p:sp>
+      <p:sp>
+        <p:nvSpPr>
+          <p:cNvPr id="9" name="TextBox 8"/>
+          <p:cNvSpPr txBox="1"/>
+          <p:nvPr/>
+        </p:nvSpPr>
+        <p:spPr>
+          <a:xfrm>
+            <a:off x="685800" y="3840480"/>
+            <a:ext cx="6583680" cy="713232"/>
+          </a:xfrm>
+          <a:prstGeom prst="rect">
+            <a:avLst/>
+          </a:prstGeom>
+          <a:noFill/>
+        </p:spPr>
+        <p:txBody>
+          <a:bodyPr wrap="square" lIns="0" rIns="0" tIns="0" bIns="0" anchor="t">
             <a:spAutoFit/>
           </a:bodyPr>
           <a:lstStyle/>
           <a:p>
             <a:pPr algn="l"/>
             <a:r>
-              <a:rPr sz="2400" b="0">
+              <a:rPr sz="1600" b="0">
+                <a:solidFill>
+                  <a:srgbClr val="51617A"/>
+                </a:solidFill>
+                <a:latin typeface="Manrope"/>
+              </a:rPr>
+              <a:t>Today she still needs her mother's Stellar address. Maria signs every transfer; Bakti does not send automatically.</a:t>
+            </a:r>
+          </a:p>
+        </p:txBody>
+      </p:sp>
+      <p:sp>
+        <p:nvSpPr>
+          <p:cNvPr id="10" name="TextBox 9"/>
+          <p:cNvSpPr txBox="1"/>
+          <p:nvPr/>
+        </p:nvSpPr>
+        <p:spPr>
+          <a:xfrm>
+            <a:off x="685800" y="4800600"/>
+            <a:ext cx="6583680" cy="502920"/>
+          </a:xfrm>
+          <a:prstGeom prst="rect">
+            <a:avLst/>
+          </a:prstGeom>
+          <a:noFill/>
+        </p:spPr>
+        <p:txBody>
+          <a:bodyPr wrap="square" lIns="0" rIns="0" tIns="0" bIns="0" anchor="t">
+            <a:spAutoFit/>
+          </a:bodyPr>
+          <a:lstStyle/>
+          <a:p>
+            <a:pPr algn="l"/>
+            <a:r>
+              <a:rPr sz="1900" b="1">
+                <a:solidFill>
+                  <a:srgbClr val="0369A1"/>
+                </a:solidFill>
+                <a:latin typeface="Manrope"/>
+              </a:rPr>
+              <a:t>Job: make family support intentional, legible, and verifiable.</a:t>
+            </a:r>
+          </a:p>
+        </p:txBody>
+      </p:sp>
+      <p:sp>
+        <p:nvSpPr>
+          <p:cNvPr id="11" name="Rounded Rectangle 10"/>
+          <p:cNvSpPr/>
+          <p:nvPr/>
+        </p:nvSpPr>
+        <p:spPr>
+          <a:xfrm>
+            <a:off x="7909560" y="1463040"/>
+            <a:ext cx="3566160" cy="4480560"/>
+          </a:xfrm>
+          <a:prstGeom prst="roundRect">
+            <a:avLst/>
+          </a:prstGeom>
+          <a:solidFill>
+            <a:srgbClr val="FDF1E0"/>
+          </a:solidFill>
+          <a:ln w="15240">
+            <a:solidFill>
+              <a:srgbClr val="DBE3EE"/>
+            </a:solidFill>
+          </a:ln>
+        </p:spPr>
+        <p:style>
+          <a:lnRef idx="1">
+            <a:schemeClr val="accent1"/>
+          </a:lnRef>
+          <a:fillRef idx="3">
+            <a:schemeClr val="accent1"/>
+          </a:fillRef>
+          <a:effectRef idx="2">
+            <a:schemeClr val="accent1"/>
+          </a:effectRef>
+          <a:fontRef idx="minor">
+            <a:schemeClr val="lt1"/>
+          </a:fontRef>
+        </p:style>
+        <p:txBody>
+          <a:bodyPr rtlCol="0" anchor="ctr"/>
+          <a:lstStyle/>
+          <a:p>
+            <a:pPr algn="ctr"/>
+          </a:p>
+        </p:txBody>
+      </p:sp>
+      <p:sp>
+        <p:nvSpPr>
+          <p:cNvPr id="12" name="Oval 11"/>
+          <p:cNvSpPr/>
+          <p:nvPr/>
+        </p:nvSpPr>
+        <p:spPr>
+          <a:xfrm>
+            <a:off x="8915400" y="2240280"/>
+            <a:ext cx="1554480" cy="1554480"/>
+          </a:xfrm>
+          <a:prstGeom prst="ellipse">
+            <a:avLst/>
+          </a:prstGeom>
+          <a:solidFill>
+            <a:srgbClr val="0369A1"/>
+          </a:solidFill>
+          <a:ln>
+            <a:noFill/>
+          </a:ln>
+        </p:spPr>
+        <p:style>
+          <a:lnRef idx="1">
+            <a:schemeClr val="accent1"/>
+          </a:lnRef>
+          <a:fillRef idx="3">
+            <a:schemeClr val="accent1"/>
+          </a:fillRef>
+          <a:effectRef idx="2">
+            <a:schemeClr val="accent1"/>
+          </a:effectRef>
+          <a:fontRef idx="minor">
+            <a:schemeClr val="lt1"/>
+          </a:fontRef>
+        </p:style>
+        <p:txBody>
+          <a:bodyPr rtlCol="0" anchor="ctr"/>
+          <a:lstStyle/>
+          <a:p>
+            <a:pPr algn="ctr"/>
+          </a:p>
+        </p:txBody>
+      </p:sp>
+      <p:sp>
+        <p:nvSpPr>
+          <p:cNvPr id="13" name="Oval 12"/>
+          <p:cNvSpPr/>
+          <p:nvPr/>
+        </p:nvSpPr>
+        <p:spPr>
+          <a:xfrm>
+            <a:off x="9189720" y="2487168"/>
+            <a:ext cx="1005840" cy="777240"/>
+          </a:xfrm>
+          <a:prstGeom prst="ellipse">
+            <a:avLst/>
+          </a:prstGeom>
+          <a:solidFill>
+            <a:srgbClr val="FDF1E0"/>
+          </a:solidFill>
+          <a:ln>
+            <a:noFill/>
+          </a:ln>
+        </p:spPr>
+        <p:style>
+          <a:lnRef idx="1">
+            <a:schemeClr val="accent1"/>
+          </a:lnRef>
+          <a:fillRef idx="3">
+            <a:schemeClr val="accent1"/>
+          </a:fillRef>
+          <a:effectRef idx="2">
+            <a:schemeClr val="accent1"/>
+          </a:effectRef>
+          <a:fontRef idx="minor">
+            <a:schemeClr val="lt1"/>
+          </a:fontRef>
+        </p:style>
+        <p:txBody>
+          <a:bodyPr rtlCol="0" anchor="ctr"/>
+          <a:lstStyle/>
+          <a:p>
+            <a:pPr algn="ctr"/>
+          </a:p>
+        </p:txBody>
+      </p:sp>
+      <p:sp>
+        <p:nvSpPr>
+          <p:cNvPr id="14" name="TextBox 13"/>
+          <p:cNvSpPr txBox="1"/>
+          <p:nvPr/>
+        </p:nvSpPr>
+        <p:spPr>
+          <a:xfrm>
+            <a:off x="8549640" y="4160520"/>
+            <a:ext cx="2286000" cy="365760"/>
+          </a:xfrm>
+          <a:prstGeom prst="rect">
+            <a:avLst/>
+          </a:prstGeom>
+          <a:noFill/>
+        </p:spPr>
+        <p:txBody>
+          <a:bodyPr wrap="square" lIns="0" rIns="0" tIns="0" bIns="0" anchor="t">
+            <a:spAutoFit/>
+          </a:bodyPr>
+          <a:lstStyle/>
+          <a:p>
+            <a:pPr algn="ctr"/>
+            <a:r>
+              <a:rPr sz="1200" b="1">
+                <a:solidFill>
+                  <a:srgbClr val="51617A"/>
+                </a:solidFill>
+                <a:latin typeface="Manrope"/>
+              </a:rPr>
+              <a:t>MARIA</a:t>
+            </a:r>
+          </a:p>
+        </p:txBody>
+      </p:sp>
+      <p:sp>
+        <p:nvSpPr>
+          <p:cNvPr id="15" name="TextBox 14"/>
+          <p:cNvSpPr txBox="1"/>
+          <p:nvPr/>
+        </p:nvSpPr>
+        <p:spPr>
+          <a:xfrm>
+            <a:off x="8549640" y="4590288"/>
+            <a:ext cx="2286000" cy="320040"/>
+          </a:xfrm>
+          <a:prstGeom prst="rect">
+            <a:avLst/>
+          </a:prstGeom>
+          <a:noFill/>
+        </p:spPr>
+        <p:txBody>
+          <a:bodyPr wrap="square" lIns="0" rIns="0" tIns="0" bIns="0" anchor="t">
+            <a:spAutoFit/>
+          </a:bodyPr>
+          <a:lstStyle/>
+          <a:p>
+            <a:pPr algn="ctr"/>
+            <a:r>
+              <a:rPr sz="1300" b="1">
                 <a:solidFill>
                   <a:srgbClr val="0B1B2B"/>
                 </a:solidFill>
                 <a:latin typeface="Manrope"/>
               </a:rPr>
-              <a:t>"I always meant to send money to Ayah."
-Dewi is an Indonesian caregiver in Singapore. Some months she remembers. Some months — between double shifts, the money slips away. When she forgets, her father stretches his medicine.
-He doesn't use crypto. He uses the corner pickup shop.
-Bakti isn't about transfer. It's about a standing allowance that lands every month, in trust.</a:t>
+              <a:t>Illustrative persona</a:t>
+            </a:r>
+          </a:p>
+        </p:txBody>
+      </p:sp>
+      <p:sp>
+        <p:nvSpPr>
+          <p:cNvPr id="16" name="TextBox 15"/>
+          <p:cNvSpPr txBox="1"/>
+          <p:nvPr/>
+        </p:nvSpPr>
+        <p:spPr>
+          <a:xfrm>
+            <a:off x="8549640" y="4956048"/>
+            <a:ext cx="2286000" cy="320040"/>
+          </a:xfrm>
+          <a:prstGeom prst="rect">
+            <a:avLst/>
+          </a:prstGeom>
+          <a:noFill/>
+        </p:spPr>
+        <p:txBody>
+          <a:bodyPr wrap="square" lIns="0" rIns="0" tIns="0" bIns="0" anchor="t">
+            <a:spAutoFit/>
+          </a:bodyPr>
+          <a:lstStyle/>
+          <a:p>
+            <a:pPr algn="ctr"/>
+            <a:r>
+              <a:rPr sz="1100" b="0">
+                <a:solidFill>
+                  <a:srgbClr val="51617A"/>
+                </a:solidFill>
+                <a:latin typeface="Manrope"/>
+              </a:rPr>
+              <a:t>Not a claimed interview</a:t>
             </a:r>
           </a:p>
         </p:txBody>
@@ -3480,16 +4383,18 @@
         <p:spPr>
           <a:xfrm>
             <a:off x="0" y="0"/>
-            <a:ext cx="182880" cy="6858000"/>
+            <a:ext cx="12191695" cy="64008"/>
           </a:xfrm>
           <a:prstGeom prst="rect">
             <a:avLst/>
           </a:prstGeom>
           <a:solidFill>
-            <a:srgbClr val="0284C7"/>
+            <a:srgbClr val="0369A1"/>
           </a:solidFill>
-          <a:ln>
-            <a:noFill/>
+          <a:ln w="15240">
+            <a:solidFill>
+              <a:srgbClr val="0369A1"/>
+            </a:solidFill>
           </a:ln>
         </p:spPr>
         <p:style>
@@ -3516,23 +4421,130 @@
       </p:sp>
       <p:sp>
         <p:nvSpPr>
-          <p:cNvPr id="3" name="Rectangle 2"/>
+          <p:cNvPr id="3" name="TextBox 2"/>
+          <p:cNvSpPr txBox="1"/>
+          <p:nvPr/>
+        </p:nvSpPr>
+        <p:spPr>
+          <a:xfrm>
+            <a:off x="658368" y="310896"/>
+            <a:ext cx="9601200" cy="292608"/>
+          </a:xfrm>
+          <a:prstGeom prst="rect">
+            <a:avLst/>
+          </a:prstGeom>
+          <a:noFill/>
+        </p:spPr>
+        <p:txBody>
+          <a:bodyPr wrap="square" lIns="0" rIns="0" tIns="0" bIns="0" anchor="t">
+            <a:spAutoFit/>
+          </a:bodyPr>
+          <a:lstStyle/>
+          <a:p>
+            <a:pPr algn="l"/>
+            <a:r>
+              <a:rPr sz="1100" b="1">
+                <a:solidFill>
+                  <a:srgbClr val="0369A1"/>
+                </a:solidFill>
+                <a:latin typeface="Manrope"/>
+              </a:rPr>
+              <a:t>CORRIDOR EVIDENCE — SIGNAL, NOT TAM</a:t>
+            </a:r>
+          </a:p>
+        </p:txBody>
+      </p:sp>
+      <p:sp>
+        <p:nvSpPr>
+          <p:cNvPr id="4" name="TextBox 3"/>
+          <p:cNvSpPr txBox="1"/>
+          <p:nvPr/>
+        </p:nvSpPr>
+        <p:spPr>
+          <a:xfrm>
+            <a:off x="658368" y="667512"/>
+            <a:ext cx="10789920" cy="658368"/>
+          </a:xfrm>
+          <a:prstGeom prst="rect">
+            <a:avLst/>
+          </a:prstGeom>
+          <a:noFill/>
+        </p:spPr>
+        <p:txBody>
+          <a:bodyPr wrap="square" lIns="0" rIns="0" tIns="0" bIns="0" anchor="t">
+            <a:spAutoFit/>
+          </a:bodyPr>
+          <a:lstStyle/>
+          <a:p>
+            <a:pPr algn="l"/>
+            <a:r>
+              <a:rPr sz="2700" b="1">
+                <a:solidFill>
+                  <a:srgbClr val="0B1B2B"/>
+                </a:solidFill>
+                <a:latin typeface="Fraunces"/>
+              </a:rPr>
+              <a:t>A large national flow, with a measured Malaysia signal</a:t>
+            </a:r>
+          </a:p>
+        </p:txBody>
+      </p:sp>
+      <p:sp>
+        <p:nvSpPr>
+          <p:cNvPr id="5" name="TextBox 4"/>
+          <p:cNvSpPr txBox="1"/>
+          <p:nvPr/>
+        </p:nvSpPr>
+        <p:spPr>
+          <a:xfrm>
+            <a:off x="10927080" y="292608"/>
+            <a:ext cx="566928" cy="228600"/>
+          </a:xfrm>
+          <a:prstGeom prst="rect">
+            <a:avLst/>
+          </a:prstGeom>
+          <a:noFill/>
+        </p:spPr>
+        <p:txBody>
+          <a:bodyPr wrap="square" lIns="0" rIns="0" tIns="0" bIns="0" anchor="t">
+            <a:spAutoFit/>
+          </a:bodyPr>
+          <a:lstStyle/>
+          <a:p>
+            <a:pPr algn="r"/>
+            <a:r>
+              <a:rPr sz="900" b="0">
+                <a:solidFill>
+                  <a:srgbClr val="51617A"/>
+                </a:solidFill>
+                <a:latin typeface="Manrope"/>
+              </a:rPr>
+              <a:t>3 / 9</a:t>
+            </a:r>
+          </a:p>
+        </p:txBody>
+      </p:sp>
+      <p:sp>
+        <p:nvSpPr>
+          <p:cNvPr id="6" name="Rounded Rectangle 5"/>
           <p:cNvSpPr/>
           <p:nvPr/>
         </p:nvSpPr>
         <p:spPr>
           <a:xfrm>
-            <a:off x="0" y="6217920"/>
-            <a:ext cx="12188952" cy="640080"/>
-          </a:xfrm>
-          <a:prstGeom prst="rect">
+            <a:off x="685800" y="1554480"/>
+            <a:ext cx="3429000" cy="1600200"/>
+          </a:xfrm>
+          <a:prstGeom prst="roundRect">
             <a:avLst/>
           </a:prstGeom>
           <a:solidFill>
-            <a:srgbClr val="0284C7"/>
+            <a:srgbClr val="FDF1E0"/>
           </a:solidFill>
-          <a:ln>
-            <a:noFill/>
+          <a:ln w="15240">
+            <a:solidFill>
+              <a:srgbClr val="FDF1E0"/>
+            </a:solidFill>
           </a:ln>
         </p:spPr>
         <p:style>
@@ -3559,110 +4571,450 @@
       </p:sp>
       <p:sp>
         <p:nvSpPr>
-          <p:cNvPr id="4" name="TextBox 3"/>
-          <p:cNvSpPr txBox="1"/>
-          <p:nvPr/>
-        </p:nvSpPr>
-        <p:spPr>
-          <a:xfrm>
-            <a:off x="640080" y="320040"/>
-            <a:ext cx="10972800" cy="640080"/>
-          </a:xfrm>
-          <a:prstGeom prst="rect">
-            <a:avLst/>
-          </a:prstGeom>
-          <a:noFill/>
-        </p:spPr>
-        <p:txBody>
-          <a:bodyPr wrap="square">
+          <p:cNvPr id="7" name="TextBox 6"/>
+          <p:cNvSpPr txBox="1"/>
+          <p:nvPr/>
+        </p:nvSpPr>
+        <p:spPr>
+          <a:xfrm>
+            <a:off x="886968" y="1810512"/>
+            <a:ext cx="3017520" cy="502920"/>
+          </a:xfrm>
+          <a:prstGeom prst="rect">
+            <a:avLst/>
+          </a:prstGeom>
+          <a:noFill/>
+        </p:spPr>
+        <p:txBody>
+          <a:bodyPr wrap="square" lIns="0" rIns="0" tIns="0" bIns="0" anchor="t">
             <a:spAutoFit/>
           </a:bodyPr>
           <a:lstStyle/>
           <a:p>
             <a:pPr algn="l"/>
             <a:r>
-              <a:rPr sz="1800" b="1">
-                <a:solidFill>
-                  <a:srgbClr val="0284C7"/>
-                </a:solidFill>
-                <a:latin typeface="Manrope"/>
+              <a:rPr sz="2500" b="1">
+                <a:solidFill>
+                  <a:srgbClr val="0B1B2B"/>
+                </a:solidFill>
+                <a:latin typeface="Fraunces"/>
               </a:rPr>
-              <a:t>PROBLEM</a:t>
-            </a:r>
-          </a:p>
-        </p:txBody>
-      </p:sp>
-      <p:sp>
-        <p:nvSpPr>
-          <p:cNvPr id="5" name="TextBox 4"/>
-          <p:cNvSpPr txBox="1"/>
-          <p:nvPr/>
-        </p:nvSpPr>
-        <p:spPr>
-          <a:xfrm>
-            <a:off x="640080" y="1005840"/>
-            <a:ext cx="5394960" cy="4937760"/>
-          </a:xfrm>
-          <a:prstGeom prst="rect">
-            <a:avLst/>
-          </a:prstGeom>
-          <a:noFill/>
-        </p:spPr>
-        <p:txBody>
-          <a:bodyPr wrap="square">
+              <a:t>US$39.619B</a:t>
+            </a:r>
+          </a:p>
+        </p:txBody>
+      </p:sp>
+      <p:sp>
+        <p:nvSpPr>
+          <p:cNvPr id="8" name="TextBox 7"/>
+          <p:cNvSpPr txBox="1"/>
+          <p:nvPr/>
+        </p:nvSpPr>
+        <p:spPr>
+          <a:xfrm>
+            <a:off x="886968" y="2395728"/>
+            <a:ext cx="3017520" cy="548640"/>
+          </a:xfrm>
+          <a:prstGeom prst="rect">
+            <a:avLst/>
+          </a:prstGeom>
+          <a:noFill/>
+        </p:spPr>
+        <p:txBody>
+          <a:bodyPr wrap="square" lIns="0" rIns="0" tIns="0" bIns="0" anchor="t">
             <a:spAutoFit/>
           </a:bodyPr>
           <a:lstStyle/>
           <a:p>
             <a:pPr algn="l"/>
             <a:r>
-              <a:rPr sz="1700" b="0">
+              <a:rPr sz="1200" b="0">
+                <a:solidFill>
+                  <a:srgbClr val="51617A"/>
+                </a:solidFill>
+                <a:latin typeface="Manrope"/>
+              </a:rPr>
+              <a:t>Philippines personal remittances, 2025 preliminary</a:t>
+            </a:r>
+          </a:p>
+        </p:txBody>
+      </p:sp>
+      <p:sp>
+        <p:nvSpPr>
+          <p:cNvPr id="9" name="Rounded Rectangle 8"/>
+          <p:cNvSpPr/>
+          <p:nvPr/>
+        </p:nvSpPr>
+        <p:spPr>
+          <a:xfrm>
+            <a:off x="4416552" y="1554480"/>
+            <a:ext cx="3429000" cy="1600200"/>
+          </a:xfrm>
+          <a:prstGeom prst="roundRect">
+            <a:avLst/>
+          </a:prstGeom>
+          <a:solidFill>
+            <a:srgbClr val="FDF1E0"/>
+          </a:solidFill>
+          <a:ln w="15240">
+            <a:solidFill>
+              <a:srgbClr val="FDF1E0"/>
+            </a:solidFill>
+          </a:ln>
+        </p:spPr>
+        <p:style>
+          <a:lnRef idx="1">
+            <a:schemeClr val="accent1"/>
+          </a:lnRef>
+          <a:fillRef idx="3">
+            <a:schemeClr val="accent1"/>
+          </a:fillRef>
+          <a:effectRef idx="2">
+            <a:schemeClr val="accent1"/>
+          </a:effectRef>
+          <a:fontRef idx="minor">
+            <a:schemeClr val="lt1"/>
+          </a:fontRef>
+        </p:style>
+        <p:txBody>
+          <a:bodyPr rtlCol="0" anchor="ctr"/>
+          <a:lstStyle/>
+          <a:p>
+            <a:pPr algn="ctr"/>
+          </a:p>
+        </p:txBody>
+      </p:sp>
+      <p:sp>
+        <p:nvSpPr>
+          <p:cNvPr id="10" name="TextBox 9"/>
+          <p:cNvSpPr txBox="1"/>
+          <p:nvPr/>
+        </p:nvSpPr>
+        <p:spPr>
+          <a:xfrm>
+            <a:off x="4617720" y="1810512"/>
+            <a:ext cx="3017520" cy="502920"/>
+          </a:xfrm>
+          <a:prstGeom prst="rect">
+            <a:avLst/>
+          </a:prstGeom>
+          <a:noFill/>
+        </p:spPr>
+        <p:txBody>
+          <a:bodyPr wrap="square" lIns="0" rIns="0" tIns="0" bIns="0" anchor="t">
+            <a:spAutoFit/>
+          </a:bodyPr>
+          <a:lstStyle/>
+          <a:p>
+            <a:pPr algn="l"/>
+            <a:r>
+              <a:rPr sz="2500" b="1">
                 <a:solidFill>
                   <a:srgbClr val="0B1B2B"/>
                 </a:solidFill>
-                <a:latin typeface="Manrope"/>
+                <a:latin typeface="Fraunces"/>
               </a:rPr>
-              <a:t>• Remittances reach wallets. They don't reach habits.
-• SEA diaspora sends &gt;$100B/year home — much of it from children supporting elderly parents.
-• Support today is ad-hoc: depends on the sender remembering in a busy month.
-• Apps charge opaque fees; no clean audit when money lands.</a:t>
-            </a:r>
-          </a:p>
-        </p:txBody>
-      </p:sp>
-      <p:sp>
-        <p:nvSpPr>
-          <p:cNvPr id="6" name="TextBox 5"/>
-          <p:cNvSpPr txBox="1"/>
-          <p:nvPr/>
-        </p:nvSpPr>
-        <p:spPr>
-          <a:xfrm>
-            <a:off x="6217920" y="1005840"/>
-            <a:ext cx="5394960" cy="4937760"/>
-          </a:xfrm>
-          <a:prstGeom prst="rect">
-            <a:avLst/>
-          </a:prstGeom>
-          <a:noFill/>
-        </p:spPr>
-        <p:txBody>
-          <a:bodyPr wrap="square">
+              <a:t>US$35.634B</a:t>
+            </a:r>
+          </a:p>
+        </p:txBody>
+      </p:sp>
+      <p:sp>
+        <p:nvSpPr>
+          <p:cNvPr id="11" name="TextBox 10"/>
+          <p:cNvSpPr txBox="1"/>
+          <p:nvPr/>
+        </p:nvSpPr>
+        <p:spPr>
+          <a:xfrm>
+            <a:off x="4617720" y="2395728"/>
+            <a:ext cx="3017520" cy="548640"/>
+          </a:xfrm>
+          <a:prstGeom prst="rect">
+            <a:avLst/>
+          </a:prstGeom>
+          <a:noFill/>
+        </p:spPr>
+        <p:txBody>
+          <a:bodyPr wrap="square" lIns="0" rIns="0" tIns="0" bIns="0" anchor="t">
             <a:spAutoFit/>
           </a:bodyPr>
           <a:lstStyle/>
           <a:p>
             <a:pPr algn="l"/>
             <a:r>
-              <a:rPr sz="1700" b="0">
+              <a:rPr sz="1200" b="0">
+                <a:solidFill>
+                  <a:srgbClr val="51617A"/>
+                </a:solidFill>
+                <a:latin typeface="Manrope"/>
+              </a:rPr>
+              <a:t>Philippines cash remittances, 2025 preliminary</a:t>
+            </a:r>
+          </a:p>
+        </p:txBody>
+      </p:sp>
+      <p:sp>
+        <p:nvSpPr>
+          <p:cNvPr id="12" name="Rounded Rectangle 11"/>
+          <p:cNvSpPr/>
+          <p:nvPr/>
+        </p:nvSpPr>
+        <p:spPr>
+          <a:xfrm>
+            <a:off x="8147304" y="1554480"/>
+            <a:ext cx="3429000" cy="1600200"/>
+          </a:xfrm>
+          <a:prstGeom prst="roundRect">
+            <a:avLst/>
+          </a:prstGeom>
+          <a:solidFill>
+            <a:srgbClr val="FDF1E0"/>
+          </a:solidFill>
+          <a:ln w="15240">
+            <a:solidFill>
+              <a:srgbClr val="FDF1E0"/>
+            </a:solidFill>
+          </a:ln>
+        </p:spPr>
+        <p:style>
+          <a:lnRef idx="1">
+            <a:schemeClr val="accent1"/>
+          </a:lnRef>
+          <a:fillRef idx="3">
+            <a:schemeClr val="accent1"/>
+          </a:fillRef>
+          <a:effectRef idx="2">
+            <a:schemeClr val="accent1"/>
+          </a:effectRef>
+          <a:fontRef idx="minor">
+            <a:schemeClr val="lt1"/>
+          </a:fontRef>
+        </p:style>
+        <p:txBody>
+          <a:bodyPr rtlCol="0" anchor="ctr"/>
+          <a:lstStyle/>
+          <a:p>
+            <a:pPr algn="ctr"/>
+          </a:p>
+        </p:txBody>
+      </p:sp>
+      <p:sp>
+        <p:nvSpPr>
+          <p:cNvPr id="13" name="TextBox 12"/>
+          <p:cNvSpPr txBox="1"/>
+          <p:nvPr/>
+        </p:nvSpPr>
+        <p:spPr>
+          <a:xfrm>
+            <a:off x="8348472" y="1810512"/>
+            <a:ext cx="3017520" cy="502920"/>
+          </a:xfrm>
+          <a:prstGeom prst="rect">
+            <a:avLst/>
+          </a:prstGeom>
+          <a:noFill/>
+        </p:spPr>
+        <p:txBody>
+          <a:bodyPr wrap="square" lIns="0" rIns="0" tIns="0" bIns="0" anchor="t">
+            <a:spAutoFit/>
+          </a:bodyPr>
+          <a:lstStyle/>
+          <a:p>
+            <a:pPr algn="l"/>
+            <a:r>
+              <a:rPr sz="2500" b="1">
                 <a:solidFill>
                   <a:srgbClr val="0B1B2B"/>
                 </a:solidFill>
-                <a:latin typeface="Manrope"/>
+                <a:latin typeface="Fraunces"/>
               </a:rPr>
-              <a:t>• Recipients are often elderly and cannot operate a wallet app.
-• A missed month is not abstract — it means skipped medicine or groceries.
-• Source: World Bank Migration &amp; Remittances data (KNOMAD, 2024).</a:t>
+              <a:t>US$675.153M</a:t>
+            </a:r>
+          </a:p>
+        </p:txBody>
+      </p:sp>
+      <p:sp>
+        <p:nvSpPr>
+          <p:cNvPr id="14" name="TextBox 13"/>
+          <p:cNvSpPr txBox="1"/>
+          <p:nvPr/>
+        </p:nvSpPr>
+        <p:spPr>
+          <a:xfrm>
+            <a:off x="8348472" y="2395728"/>
+            <a:ext cx="3017520" cy="548640"/>
+          </a:xfrm>
+          <a:prstGeom prst="rect">
+            <a:avLst/>
+          </a:prstGeom>
+          <a:noFill/>
+        </p:spPr>
+        <p:txBody>
+          <a:bodyPr wrap="square" lIns="0" rIns="0" tIns="0" bIns="0" anchor="t">
+            <a:spAutoFit/>
+          </a:bodyPr>
+          <a:lstStyle/>
+          <a:p>
+            <a:pPr algn="l"/>
+            <a:r>
+              <a:rPr sz="1200" b="0">
+                <a:solidFill>
+                  <a:srgbClr val="51617A"/>
+                </a:solidFill>
+                <a:latin typeface="Manrope"/>
+              </a:rPr>
+              <a:t>Malaysia-attributed Philippine cash remittances, 2025 provisional</a:t>
+            </a:r>
+          </a:p>
+        </p:txBody>
+      </p:sp>
+      <p:sp>
+        <p:nvSpPr>
+          <p:cNvPr id="15" name="Rounded Rectangle 14"/>
+          <p:cNvSpPr/>
+          <p:nvPr/>
+        </p:nvSpPr>
+        <p:spPr>
+          <a:xfrm>
+            <a:off x="685800" y="3474720"/>
+            <a:ext cx="10808208" cy="1463040"/>
+          </a:xfrm>
+          <a:prstGeom prst="roundRect">
+            <a:avLst/>
+          </a:prstGeom>
+          <a:solidFill>
+            <a:srgbClr val="FFFFFF"/>
+          </a:solidFill>
+          <a:ln w="15240">
+            <a:solidFill>
+              <a:srgbClr val="DBE3EE"/>
+            </a:solidFill>
+          </a:ln>
+        </p:spPr>
+        <p:style>
+          <a:lnRef idx="1">
+            <a:schemeClr val="accent1"/>
+          </a:lnRef>
+          <a:fillRef idx="3">
+            <a:schemeClr val="accent1"/>
+          </a:fillRef>
+          <a:effectRef idx="2">
+            <a:schemeClr val="accent1"/>
+          </a:effectRef>
+          <a:fontRef idx="minor">
+            <a:schemeClr val="lt1"/>
+          </a:fontRef>
+        </p:style>
+        <p:txBody>
+          <a:bodyPr rtlCol="0" anchor="ctr"/>
+          <a:lstStyle/>
+          <a:p>
+            <a:pPr algn="ctr"/>
+          </a:p>
+        </p:txBody>
+      </p:sp>
+      <p:sp>
+        <p:nvSpPr>
+          <p:cNvPr id="16" name="TextBox 15"/>
+          <p:cNvSpPr txBox="1"/>
+          <p:nvPr/>
+        </p:nvSpPr>
+        <p:spPr>
+          <a:xfrm>
+            <a:off x="914400" y="3767328"/>
+            <a:ext cx="10241280" cy="457200"/>
+          </a:xfrm>
+          <a:prstGeom prst="rect">
+            <a:avLst/>
+          </a:prstGeom>
+          <a:noFill/>
+        </p:spPr>
+        <p:txBody>
+          <a:bodyPr wrap="square" lIns="0" rIns="0" tIns="0" bIns="0" anchor="t">
+            <a:spAutoFit/>
+          </a:bodyPr>
+          <a:lstStyle/>
+          <a:p>
+            <a:pPr algn="l"/>
+            <a:r>
+              <a:rPr sz="1600" b="1">
+                <a:solidFill>
+                  <a:srgbClr val="0B1B2B"/>
+                </a:solidFill>
+                <a:latin typeface="Manrope"/>
+              </a:rPr>
+              <a:t>Jan–May 2026: US$15.735B personal; US$14.110B cash; US$279.807M Malaysia-attributed cash.</a:t>
+            </a:r>
+          </a:p>
+        </p:txBody>
+      </p:sp>
+      <p:sp>
+        <p:nvSpPr>
+          <p:cNvPr id="17" name="TextBox 16"/>
+          <p:cNvSpPr txBox="1"/>
+          <p:nvPr/>
+        </p:nvSpPr>
+        <p:spPr>
+          <a:xfrm>
+            <a:off x="914400" y="4325112"/>
+            <a:ext cx="10241280" cy="384048"/>
+          </a:xfrm>
+          <a:prstGeom prst="rect">
+            <a:avLst/>
+          </a:prstGeom>
+          <a:noFill/>
+        </p:spPr>
+        <p:txBody>
+          <a:bodyPr wrap="square" lIns="0" rIns="0" tIns="0" bIns="0" anchor="t">
+            <a:spAutoFit/>
+          </a:bodyPr>
+          <a:lstStyle/>
+          <a:p>
+            <a:pPr algn="l"/>
+            <a:r>
+              <a:rPr sz="1300" b="0">
+                <a:solidFill>
+                  <a:srgbClr val="51617A"/>
+                </a:solidFill>
+                <a:latin typeface="Manrope"/>
+              </a:rPr>
+              <a:t>BSP source-country attribution is the immediate source of funds, not necessarily true origin.</a:t>
+            </a:r>
+          </a:p>
+        </p:txBody>
+      </p:sp>
+      <p:sp>
+        <p:nvSpPr>
+          <p:cNvPr id="18" name="TextBox 17"/>
+          <p:cNvSpPr txBox="1"/>
+          <p:nvPr/>
+        </p:nvSpPr>
+        <p:spPr>
+          <a:xfrm>
+            <a:off x="685800" y="6080760"/>
+            <a:ext cx="10789920" cy="228600"/>
+          </a:xfrm>
+          <a:prstGeom prst="rect">
+            <a:avLst/>
+          </a:prstGeom>
+          <a:noFill/>
+        </p:spPr>
+        <p:txBody>
+          <a:bodyPr wrap="square" lIns="0" rIns="0" tIns="0" bIns="0" anchor="t">
+            <a:spAutoFit/>
+          </a:bodyPr>
+          <a:lstStyle/>
+          <a:p>
+            <a:pPr algn="l"/>
+            <a:r>
+              <a:rPr sz="850" b="0">
+                <a:solidFill>
+                  <a:srgbClr val="51617A"/>
+                </a:solidFill>
+                <a:latin typeface="Manrope"/>
+              </a:rPr>
+              <a:t>Source: BSP https://www.bsp.gov.ph/statistics/external/ofw.aspx and https://www.bsp.gov.ph/statistics/external/ofw2.aspx</a:t>
             </a:r>
           </a:p>
         </p:txBody>
@@ -3702,16 +5054,18 @@
         <p:spPr>
           <a:xfrm>
             <a:off x="0" y="0"/>
-            <a:ext cx="182880" cy="6858000"/>
+            <a:ext cx="12191695" cy="64008"/>
           </a:xfrm>
           <a:prstGeom prst="rect">
             <a:avLst/>
           </a:prstGeom>
           <a:solidFill>
-            <a:srgbClr val="0284C7"/>
+            <a:srgbClr val="0369A1"/>
           </a:solidFill>
-          <a:ln>
-            <a:noFill/>
+          <a:ln w="15240">
+            <a:solidFill>
+              <a:srgbClr val="0369A1"/>
+            </a:solidFill>
           </a:ln>
         </p:spPr>
         <p:style>
@@ -3738,23 +5092,130 @@
       </p:sp>
       <p:sp>
         <p:nvSpPr>
-          <p:cNvPr id="3" name="Rectangle 2"/>
+          <p:cNvPr id="3" name="TextBox 2"/>
+          <p:cNvSpPr txBox="1"/>
+          <p:nvPr/>
+        </p:nvSpPr>
+        <p:spPr>
+          <a:xfrm>
+            <a:off x="658368" y="310896"/>
+            <a:ext cx="9601200" cy="292608"/>
+          </a:xfrm>
+          <a:prstGeom prst="rect">
+            <a:avLst/>
+          </a:prstGeom>
+          <a:noFill/>
+        </p:spPr>
+        <p:txBody>
+          <a:bodyPr wrap="square" lIns="0" rIns="0" tIns="0" bIns="0" anchor="t">
+            <a:spAutoFit/>
+          </a:bodyPr>
+          <a:lstStyle/>
+          <a:p>
+            <a:pPr algn="l"/>
+            <a:r>
+              <a:rPr sz="1100" b="1">
+                <a:solidFill>
+                  <a:srgbClr val="0369A1"/>
+                </a:solidFill>
+                <a:latin typeface="Manrope"/>
+              </a:rPr>
+              <a:t>CUSTOMER AND JOB TO BE DONE</a:t>
+            </a:r>
+          </a:p>
+        </p:txBody>
+      </p:sp>
+      <p:sp>
+        <p:nvSpPr>
+          <p:cNvPr id="4" name="TextBox 3"/>
+          <p:cNvSpPr txBox="1"/>
+          <p:nvPr/>
+        </p:nvSpPr>
+        <p:spPr>
+          <a:xfrm>
+            <a:off x="658368" y="667512"/>
+            <a:ext cx="10789920" cy="658368"/>
+          </a:xfrm>
+          <a:prstGeom prst="rect">
+            <a:avLst/>
+          </a:prstGeom>
+          <a:noFill/>
+        </p:spPr>
+        <p:txBody>
+          <a:bodyPr wrap="square" lIns="0" rIns="0" tIns="0" bIns="0" anchor="t">
+            <a:spAutoFit/>
+          </a:bodyPr>
+          <a:lstStyle/>
+          <a:p>
+            <a:pPr algn="l"/>
+            <a:r>
+              <a:rPr sz="2700" b="1">
+                <a:solidFill>
+                  <a:srgbClr val="0B1B2B"/>
+                </a:solidFill>
+                <a:latin typeface="Fraunces"/>
+              </a:rPr>
+              <a:t>One narrow customer; one clear job to be done</a:t>
+            </a:r>
+          </a:p>
+        </p:txBody>
+      </p:sp>
+      <p:sp>
+        <p:nvSpPr>
+          <p:cNvPr id="5" name="TextBox 4"/>
+          <p:cNvSpPr txBox="1"/>
+          <p:nvPr/>
+        </p:nvSpPr>
+        <p:spPr>
+          <a:xfrm>
+            <a:off x="10927080" y="292608"/>
+            <a:ext cx="566928" cy="228600"/>
+          </a:xfrm>
+          <a:prstGeom prst="rect">
+            <a:avLst/>
+          </a:prstGeom>
+          <a:noFill/>
+        </p:spPr>
+        <p:txBody>
+          <a:bodyPr wrap="square" lIns="0" rIns="0" tIns="0" bIns="0" anchor="t">
+            <a:spAutoFit/>
+          </a:bodyPr>
+          <a:lstStyle/>
+          <a:p>
+            <a:pPr algn="r"/>
+            <a:r>
+              <a:rPr sz="900" b="0">
+                <a:solidFill>
+                  <a:srgbClr val="51617A"/>
+                </a:solidFill>
+                <a:latin typeface="Manrope"/>
+              </a:rPr>
+              <a:t>4 / 9</a:t>
+            </a:r>
+          </a:p>
+        </p:txBody>
+      </p:sp>
+      <p:sp>
+        <p:nvSpPr>
+          <p:cNvPr id="6" name="Rounded Rectangle 5"/>
           <p:cNvSpPr/>
           <p:nvPr/>
         </p:nvSpPr>
         <p:spPr>
           <a:xfrm>
-            <a:off x="0" y="6217920"/>
-            <a:ext cx="12188952" cy="640080"/>
-          </a:xfrm>
-          <a:prstGeom prst="rect">
+            <a:off x="685800" y="1481328"/>
+            <a:ext cx="10808208" cy="530352"/>
+          </a:xfrm>
+          <a:prstGeom prst="roundRect">
             <a:avLst/>
           </a:prstGeom>
           <a:solidFill>
-            <a:srgbClr val="0284C7"/>
+            <a:srgbClr val="E6F3FB"/>
           </a:solidFill>
-          <a:ln>
-            <a:noFill/>
+          <a:ln w="15240">
+            <a:solidFill>
+              <a:srgbClr val="DBE3EE"/>
+            </a:solidFill>
           </a:ln>
         </p:spPr>
         <p:style>
@@ -3781,75 +5242,760 @@
       </p:sp>
       <p:sp>
         <p:nvSpPr>
-          <p:cNvPr id="4" name="TextBox 3"/>
-          <p:cNvSpPr txBox="1"/>
-          <p:nvPr/>
-        </p:nvSpPr>
-        <p:spPr>
-          <a:xfrm>
-            <a:off x="640080" y="320040"/>
-            <a:ext cx="10972800" cy="640080"/>
-          </a:xfrm>
-          <a:prstGeom prst="rect">
-            <a:avLst/>
-          </a:prstGeom>
-          <a:noFill/>
-        </p:spPr>
-        <p:txBody>
-          <a:bodyPr wrap="square">
+          <p:cNvPr id="7" name="TextBox 6"/>
+          <p:cNvSpPr txBox="1"/>
+          <p:nvPr/>
+        </p:nvSpPr>
+        <p:spPr>
+          <a:xfrm>
+            <a:off x="896112" y="1600200"/>
+            <a:ext cx="2240280" cy="256032"/>
+          </a:xfrm>
+          <a:prstGeom prst="rect">
+            <a:avLst/>
+          </a:prstGeom>
+          <a:noFill/>
+        </p:spPr>
+        <p:txBody>
+          <a:bodyPr wrap="square" lIns="0" rIns="0" tIns="0" bIns="0" anchor="t">
             <a:spAutoFit/>
           </a:bodyPr>
           <a:lstStyle/>
           <a:p>
             <a:pPr algn="l"/>
             <a:r>
-              <a:rPr sz="1800" b="1">
-                <a:solidFill>
-                  <a:srgbClr val="0284C7"/>
+              <a:rPr sz="1200" b="1">
+                <a:solidFill>
+                  <a:srgbClr val="0B1B2B"/>
                 </a:solidFill>
                 <a:latin typeface="Manrope"/>
               </a:rPr>
-              <a:t>MARKET</a:t>
-            </a:r>
-          </a:p>
-        </p:txBody>
-      </p:sp>
-      <p:sp>
-        <p:nvSpPr>
-          <p:cNvPr id="5" name="TextBox 4"/>
-          <p:cNvSpPr txBox="1"/>
-          <p:nvPr/>
-        </p:nvSpPr>
-        <p:spPr>
-          <a:xfrm>
-            <a:off x="640080" y="1005840"/>
-            <a:ext cx="10972800" cy="4937760"/>
-          </a:xfrm>
-          <a:prstGeom prst="rect">
-            <a:avLst/>
-          </a:prstGeom>
-          <a:noFill/>
-        </p:spPr>
-        <p:txBody>
-          <a:bodyPr wrap="square">
+              <a:t>Customer</a:t>
+            </a:r>
+          </a:p>
+        </p:txBody>
+      </p:sp>
+      <p:sp>
+        <p:nvSpPr>
+          <p:cNvPr id="8" name="TextBox 7"/>
+          <p:cNvSpPr txBox="1"/>
+          <p:nvPr/>
+        </p:nvSpPr>
+        <p:spPr>
+          <a:xfrm>
+            <a:off x="2944368" y="1600200"/>
+            <a:ext cx="8229600" cy="274320"/>
+          </a:xfrm>
+          <a:prstGeom prst="rect">
+            <a:avLst/>
+          </a:prstGeom>
+          <a:noFill/>
+        </p:spPr>
+        <p:txBody>
+          <a:bodyPr wrap="square" lIns="0" rIns="0" tIns="0" bIns="0" anchor="t">
             <a:spAutoFit/>
           </a:bodyPr>
           <a:lstStyle/>
           <a:p>
             <a:pPr algn="l"/>
             <a:r>
-              <a:rPr sz="1800" b="0">
+              <a:rPr sz="1200" b="0">
+                <a:solidFill>
+                  <a:srgbClr val="51617A"/>
+                </a:solidFill>
+                <a:latin typeface="Manrope"/>
+              </a:rPr>
+              <a:t>Filipino worker in Malaysia with a Stellar wallet</a:t>
+            </a:r>
+          </a:p>
+        </p:txBody>
+      </p:sp>
+      <p:sp>
+        <p:nvSpPr>
+          <p:cNvPr id="9" name="Rounded Rectangle 8"/>
+          <p:cNvSpPr/>
+          <p:nvPr/>
+        </p:nvSpPr>
+        <p:spPr>
+          <a:xfrm>
+            <a:off x="685800" y="2093976"/>
+            <a:ext cx="10808208" cy="530352"/>
+          </a:xfrm>
+          <a:prstGeom prst="roundRect">
+            <a:avLst/>
+          </a:prstGeom>
+          <a:solidFill>
+            <a:srgbClr val="FFFFFF"/>
+          </a:solidFill>
+          <a:ln w="15240">
+            <a:solidFill>
+              <a:srgbClr val="DBE3EE"/>
+            </a:solidFill>
+          </a:ln>
+        </p:spPr>
+        <p:style>
+          <a:lnRef idx="1">
+            <a:schemeClr val="accent1"/>
+          </a:lnRef>
+          <a:fillRef idx="3">
+            <a:schemeClr val="accent1"/>
+          </a:fillRef>
+          <a:effectRef idx="2">
+            <a:schemeClr val="accent1"/>
+          </a:effectRef>
+          <a:fontRef idx="minor">
+            <a:schemeClr val="lt1"/>
+          </a:fontRef>
+        </p:style>
+        <p:txBody>
+          <a:bodyPr rtlCol="0" anchor="ctr"/>
+          <a:lstStyle/>
+          <a:p>
+            <a:pPr algn="ctr"/>
+          </a:p>
+        </p:txBody>
+      </p:sp>
+      <p:sp>
+        <p:nvSpPr>
+          <p:cNvPr id="10" name="TextBox 9"/>
+          <p:cNvSpPr txBox="1"/>
+          <p:nvPr/>
+        </p:nvSpPr>
+        <p:spPr>
+          <a:xfrm>
+            <a:off x="896112" y="2212848"/>
+            <a:ext cx="2240280" cy="256032"/>
+          </a:xfrm>
+          <a:prstGeom prst="rect">
+            <a:avLst/>
+          </a:prstGeom>
+          <a:noFill/>
+        </p:spPr>
+        <p:txBody>
+          <a:bodyPr wrap="square" lIns="0" rIns="0" tIns="0" bIns="0" anchor="t">
+            <a:spAutoFit/>
+          </a:bodyPr>
+          <a:lstStyle/>
+          <a:p>
+            <a:pPr algn="l"/>
+            <a:r>
+              <a:rPr sz="1200" b="1">
                 <a:solidFill>
                   <a:srgbClr val="0B1B2B"/>
                 </a:solidFill>
                 <a:latin typeface="Manrope"/>
               </a:rPr>
-              <a:t>• Philippines 2024: $38.6B personal remittances (Bangko Sentral ng Pilipinas).
-• +3% YoY. Cash remittances alone: $35.6B.
-• Top sources: Saudi Arabia, UAE, USA, Singapore, Hong Kong, UK.
-• Global average cost to send $200: ~6.5% (World Bank Remittance Prices Worldwide, 2024).
-• Malaysia is a top-10 outbound corridor; MY→PH flows through MoneyGram rails into PH cash-pickup.
-• Sources: bsp.gov.ph · remittanceprices.worldbank.org</a:t>
+              <a:t>Recipient today</a:t>
+            </a:r>
+          </a:p>
+        </p:txBody>
+      </p:sp>
+      <p:sp>
+        <p:nvSpPr>
+          <p:cNvPr id="11" name="TextBox 10"/>
+          <p:cNvSpPr txBox="1"/>
+          <p:nvPr/>
+        </p:nvSpPr>
+        <p:spPr>
+          <a:xfrm>
+            <a:off x="2944368" y="2212848"/>
+            <a:ext cx="8229600" cy="274320"/>
+          </a:xfrm>
+          <a:prstGeom prst="rect">
+            <a:avLst/>
+          </a:prstGeom>
+          <a:noFill/>
+        </p:spPr>
+        <p:txBody>
+          <a:bodyPr wrap="square" lIns="0" rIns="0" tIns="0" bIns="0" anchor="t">
+            <a:spAutoFit/>
+          </a:bodyPr>
+          <a:lstStyle/>
+          <a:p>
+            <a:pPr algn="l"/>
+            <a:r>
+              <a:rPr sz="1200" b="0">
+                <a:solidFill>
+                  <a:srgbClr val="51617A"/>
+                </a:solidFill>
+                <a:latin typeface="Manrope"/>
+              </a:rPr>
+              <a:t>Family member with a Stellar address in the Philippines</a:t>
+            </a:r>
+          </a:p>
+        </p:txBody>
+      </p:sp>
+      <p:sp>
+        <p:nvSpPr>
+          <p:cNvPr id="12" name="Rounded Rectangle 11"/>
+          <p:cNvSpPr/>
+          <p:nvPr/>
+        </p:nvSpPr>
+        <p:spPr>
+          <a:xfrm>
+            <a:off x="685800" y="2706624"/>
+            <a:ext cx="10808208" cy="530352"/>
+          </a:xfrm>
+          <a:prstGeom prst="roundRect">
+            <a:avLst/>
+          </a:prstGeom>
+          <a:solidFill>
+            <a:srgbClr val="E6F3FB"/>
+          </a:solidFill>
+          <a:ln w="15240">
+            <a:solidFill>
+              <a:srgbClr val="DBE3EE"/>
+            </a:solidFill>
+          </a:ln>
+        </p:spPr>
+        <p:style>
+          <a:lnRef idx="1">
+            <a:schemeClr val="accent1"/>
+          </a:lnRef>
+          <a:fillRef idx="3">
+            <a:schemeClr val="accent1"/>
+          </a:fillRef>
+          <a:effectRef idx="2">
+            <a:schemeClr val="accent1"/>
+          </a:effectRef>
+          <a:fontRef idx="minor">
+            <a:schemeClr val="lt1"/>
+          </a:fontRef>
+        </p:style>
+        <p:txBody>
+          <a:bodyPr rtlCol="0" anchor="ctr"/>
+          <a:lstStyle/>
+          <a:p>
+            <a:pPr algn="ctr"/>
+          </a:p>
+        </p:txBody>
+      </p:sp>
+      <p:sp>
+        <p:nvSpPr>
+          <p:cNvPr id="13" name="TextBox 12"/>
+          <p:cNvSpPr txBox="1"/>
+          <p:nvPr/>
+        </p:nvSpPr>
+        <p:spPr>
+          <a:xfrm>
+            <a:off x="896112" y="2825496"/>
+            <a:ext cx="2240280" cy="256032"/>
+          </a:xfrm>
+          <a:prstGeom prst="rect">
+            <a:avLst/>
+          </a:prstGeom>
+          <a:noFill/>
+        </p:spPr>
+        <p:txBody>
+          <a:bodyPr wrap="square" lIns="0" rIns="0" tIns="0" bIns="0" anchor="t">
+            <a:spAutoFit/>
+          </a:bodyPr>
+          <a:lstStyle/>
+          <a:p>
+            <a:pPr algn="l"/>
+            <a:r>
+              <a:rPr sz="1200" b="1">
+                <a:solidFill>
+                  <a:srgbClr val="0B1B2B"/>
+                </a:solidFill>
+                <a:latin typeface="Manrope"/>
+              </a:rPr>
+              <a:t>Trigger</a:t>
+            </a:r>
+          </a:p>
+        </p:txBody>
+      </p:sp>
+      <p:sp>
+        <p:nvSpPr>
+          <p:cNvPr id="14" name="TextBox 13"/>
+          <p:cNvSpPr txBox="1"/>
+          <p:nvPr/>
+        </p:nvSpPr>
+        <p:spPr>
+          <a:xfrm>
+            <a:off x="2944368" y="2825496"/>
+            <a:ext cx="8229600" cy="274320"/>
+          </a:xfrm>
+          <a:prstGeom prst="rect">
+            <a:avLst/>
+          </a:prstGeom>
+          <a:noFill/>
+        </p:spPr>
+        <p:txBody>
+          <a:bodyPr wrap="square" lIns="0" rIns="0" tIns="0" bIns="0" anchor="t">
+            <a:spAutoFit/>
+          </a:bodyPr>
+          <a:lstStyle/>
+          <a:p>
+            <a:pPr algn="l"/>
+            <a:r>
+              <a:rPr sz="1200" b="0">
+                <a:solidFill>
+                  <a:srgbClr val="51617A"/>
+                </a:solidFill>
+                <a:latin typeface="Manrope"/>
+              </a:rPr>
+              <a:t>Salary day or another chosen planning date</a:t>
+            </a:r>
+          </a:p>
+        </p:txBody>
+      </p:sp>
+      <p:sp>
+        <p:nvSpPr>
+          <p:cNvPr id="15" name="Rounded Rectangle 14"/>
+          <p:cNvSpPr/>
+          <p:nvPr/>
+        </p:nvSpPr>
+        <p:spPr>
+          <a:xfrm>
+            <a:off x="685800" y="3319272"/>
+            <a:ext cx="10808208" cy="530352"/>
+          </a:xfrm>
+          <a:prstGeom prst="roundRect">
+            <a:avLst/>
+          </a:prstGeom>
+          <a:solidFill>
+            <a:srgbClr val="FFFFFF"/>
+          </a:solidFill>
+          <a:ln w="15240">
+            <a:solidFill>
+              <a:srgbClr val="DBE3EE"/>
+            </a:solidFill>
+          </a:ln>
+        </p:spPr>
+        <p:style>
+          <a:lnRef idx="1">
+            <a:schemeClr val="accent1"/>
+          </a:lnRef>
+          <a:fillRef idx="3">
+            <a:schemeClr val="accent1"/>
+          </a:fillRef>
+          <a:effectRef idx="2">
+            <a:schemeClr val="accent1"/>
+          </a:effectRef>
+          <a:fontRef idx="minor">
+            <a:schemeClr val="lt1"/>
+          </a:fontRef>
+        </p:style>
+        <p:txBody>
+          <a:bodyPr rtlCol="0" anchor="ctr"/>
+          <a:lstStyle/>
+          <a:p>
+            <a:pPr algn="ctr"/>
+          </a:p>
+        </p:txBody>
+      </p:sp>
+      <p:sp>
+        <p:nvSpPr>
+          <p:cNvPr id="16" name="TextBox 15"/>
+          <p:cNvSpPr txBox="1"/>
+          <p:nvPr/>
+        </p:nvSpPr>
+        <p:spPr>
+          <a:xfrm>
+            <a:off x="896112" y="3438144"/>
+            <a:ext cx="2240280" cy="256032"/>
+          </a:xfrm>
+          <a:prstGeom prst="rect">
+            <a:avLst/>
+          </a:prstGeom>
+          <a:noFill/>
+        </p:spPr>
+        <p:txBody>
+          <a:bodyPr wrap="square" lIns="0" rIns="0" tIns="0" bIns="0" anchor="t">
+            <a:spAutoFit/>
+          </a:bodyPr>
+          <a:lstStyle/>
+          <a:p>
+            <a:pPr algn="l"/>
+            <a:r>
+              <a:rPr sz="1200" b="1">
+                <a:solidFill>
+                  <a:srgbClr val="0B1B2B"/>
+                </a:solidFill>
+                <a:latin typeface="Manrope"/>
+              </a:rPr>
+              <a:t>Functional job</a:t>
+            </a:r>
+          </a:p>
+        </p:txBody>
+      </p:sp>
+      <p:sp>
+        <p:nvSpPr>
+          <p:cNvPr id="17" name="TextBox 16"/>
+          <p:cNvSpPr txBox="1"/>
+          <p:nvPr/>
+        </p:nvSpPr>
+        <p:spPr>
+          <a:xfrm>
+            <a:off x="2944368" y="3438144"/>
+            <a:ext cx="8229600" cy="274320"/>
+          </a:xfrm>
+          <a:prstGeom prst="rect">
+            <a:avLst/>
+          </a:prstGeom>
+          <a:noFill/>
+        </p:spPr>
+        <p:txBody>
+          <a:bodyPr wrap="square" lIns="0" rIns="0" tIns="0" bIns="0" anchor="t">
+            <a:spAutoFit/>
+          </a:bodyPr>
+          <a:lstStyle/>
+          <a:p>
+            <a:pPr algn="l"/>
+            <a:r>
+              <a:rPr sz="1200" b="0">
+                <a:solidFill>
+                  <a:srgbClr val="51617A"/>
+                </a:solidFill>
+                <a:latin typeface="Manrope"/>
+              </a:rPr>
+              <a:t>Store recipient + amount + date, then sign a transfer</a:t>
+            </a:r>
+          </a:p>
+        </p:txBody>
+      </p:sp>
+      <p:sp>
+        <p:nvSpPr>
+          <p:cNvPr id="18" name="Rounded Rectangle 17"/>
+          <p:cNvSpPr/>
+          <p:nvPr/>
+        </p:nvSpPr>
+        <p:spPr>
+          <a:xfrm>
+            <a:off x="685800" y="3931920"/>
+            <a:ext cx="10808208" cy="530352"/>
+          </a:xfrm>
+          <a:prstGeom prst="roundRect">
+            <a:avLst/>
+          </a:prstGeom>
+          <a:solidFill>
+            <a:srgbClr val="E6F3FB"/>
+          </a:solidFill>
+          <a:ln w="15240">
+            <a:solidFill>
+              <a:srgbClr val="DBE3EE"/>
+            </a:solidFill>
+          </a:ln>
+        </p:spPr>
+        <p:style>
+          <a:lnRef idx="1">
+            <a:schemeClr val="accent1"/>
+          </a:lnRef>
+          <a:fillRef idx="3">
+            <a:schemeClr val="accent1"/>
+          </a:fillRef>
+          <a:effectRef idx="2">
+            <a:schemeClr val="accent1"/>
+          </a:effectRef>
+          <a:fontRef idx="minor">
+            <a:schemeClr val="lt1"/>
+          </a:fontRef>
+        </p:style>
+        <p:txBody>
+          <a:bodyPr rtlCol="0" anchor="ctr"/>
+          <a:lstStyle/>
+          <a:p>
+            <a:pPr algn="ctr"/>
+          </a:p>
+        </p:txBody>
+      </p:sp>
+      <p:sp>
+        <p:nvSpPr>
+          <p:cNvPr id="19" name="TextBox 18"/>
+          <p:cNvSpPr txBox="1"/>
+          <p:nvPr/>
+        </p:nvSpPr>
+        <p:spPr>
+          <a:xfrm>
+            <a:off x="896112" y="4050791"/>
+            <a:ext cx="2240280" cy="256032"/>
+          </a:xfrm>
+          <a:prstGeom prst="rect">
+            <a:avLst/>
+          </a:prstGeom>
+          <a:noFill/>
+        </p:spPr>
+        <p:txBody>
+          <a:bodyPr wrap="square" lIns="0" rIns="0" tIns="0" bIns="0" anchor="t">
+            <a:spAutoFit/>
+          </a:bodyPr>
+          <a:lstStyle/>
+          <a:p>
+            <a:pPr algn="l"/>
+            <a:r>
+              <a:rPr sz="1200" b="1">
+                <a:solidFill>
+                  <a:srgbClr val="0B1B2B"/>
+                </a:solidFill>
+                <a:latin typeface="Manrope"/>
+              </a:rPr>
+              <a:t>Emotional job</a:t>
+            </a:r>
+          </a:p>
+        </p:txBody>
+      </p:sp>
+      <p:sp>
+        <p:nvSpPr>
+          <p:cNvPr id="20" name="TextBox 19"/>
+          <p:cNvSpPr txBox="1"/>
+          <p:nvPr/>
+        </p:nvSpPr>
+        <p:spPr>
+          <a:xfrm>
+            <a:off x="2944368" y="4050791"/>
+            <a:ext cx="8229600" cy="274320"/>
+          </a:xfrm>
+          <a:prstGeom prst="rect">
+            <a:avLst/>
+          </a:prstGeom>
+          <a:noFill/>
+        </p:spPr>
+        <p:txBody>
+          <a:bodyPr wrap="square" lIns="0" rIns="0" tIns="0" bIns="0" anchor="t">
+            <a:spAutoFit/>
+          </a:bodyPr>
+          <a:lstStyle/>
+          <a:p>
+            <a:pPr algn="l"/>
+            <a:r>
+              <a:rPr sz="1200" b="0">
+                <a:solidFill>
+                  <a:srgbClr val="51617A"/>
+                </a:solidFill>
+                <a:latin typeface="Manrope"/>
+              </a:rPr>
+              <a:t>Feel responsible without pretending the transfer is automatic</a:t>
+            </a:r>
+          </a:p>
+        </p:txBody>
+      </p:sp>
+      <p:sp>
+        <p:nvSpPr>
+          <p:cNvPr id="21" name="Rounded Rectangle 20"/>
+          <p:cNvSpPr/>
+          <p:nvPr/>
+        </p:nvSpPr>
+        <p:spPr>
+          <a:xfrm>
+            <a:off x="685800" y="4544568"/>
+            <a:ext cx="10808208" cy="530352"/>
+          </a:xfrm>
+          <a:prstGeom prst="roundRect">
+            <a:avLst/>
+          </a:prstGeom>
+          <a:solidFill>
+            <a:srgbClr val="FFFFFF"/>
+          </a:solidFill>
+          <a:ln w="15240">
+            <a:solidFill>
+              <a:srgbClr val="DBE3EE"/>
+            </a:solidFill>
+          </a:ln>
+        </p:spPr>
+        <p:style>
+          <a:lnRef idx="1">
+            <a:schemeClr val="accent1"/>
+          </a:lnRef>
+          <a:fillRef idx="3">
+            <a:schemeClr val="accent1"/>
+          </a:fillRef>
+          <a:effectRef idx="2">
+            <a:schemeClr val="accent1"/>
+          </a:effectRef>
+          <a:fontRef idx="minor">
+            <a:schemeClr val="lt1"/>
+          </a:fontRef>
+        </p:style>
+        <p:txBody>
+          <a:bodyPr rtlCol="0" anchor="ctr"/>
+          <a:lstStyle/>
+          <a:p>
+            <a:pPr algn="ctr"/>
+          </a:p>
+        </p:txBody>
+      </p:sp>
+      <p:sp>
+        <p:nvSpPr>
+          <p:cNvPr id="22" name="TextBox 21"/>
+          <p:cNvSpPr txBox="1"/>
+          <p:nvPr/>
+        </p:nvSpPr>
+        <p:spPr>
+          <a:xfrm>
+            <a:off x="896112" y="4663440"/>
+            <a:ext cx="2240280" cy="256032"/>
+          </a:xfrm>
+          <a:prstGeom prst="rect">
+            <a:avLst/>
+          </a:prstGeom>
+          <a:noFill/>
+        </p:spPr>
+        <p:txBody>
+          <a:bodyPr wrap="square" lIns="0" rIns="0" tIns="0" bIns="0" anchor="t">
+            <a:spAutoFit/>
+          </a:bodyPr>
+          <a:lstStyle/>
+          <a:p>
+            <a:pPr algn="l"/>
+            <a:r>
+              <a:rPr sz="1200" b="1">
+                <a:solidFill>
+                  <a:srgbClr val="0B1B2B"/>
+                </a:solidFill>
+                <a:latin typeface="Manrope"/>
+              </a:rPr>
+              <a:t>Evidence job</a:t>
+            </a:r>
+          </a:p>
+        </p:txBody>
+      </p:sp>
+      <p:sp>
+        <p:nvSpPr>
+          <p:cNvPr id="23" name="TextBox 22"/>
+          <p:cNvSpPr txBox="1"/>
+          <p:nvPr/>
+        </p:nvSpPr>
+        <p:spPr>
+          <a:xfrm>
+            <a:off x="2944368" y="4663440"/>
+            <a:ext cx="8229600" cy="274320"/>
+          </a:xfrm>
+          <a:prstGeom prst="rect">
+            <a:avLst/>
+          </a:prstGeom>
+          <a:noFill/>
+        </p:spPr>
+        <p:txBody>
+          <a:bodyPr wrap="square" lIns="0" rIns="0" tIns="0" bIns="0" anchor="t">
+            <a:spAutoFit/>
+          </a:bodyPr>
+          <a:lstStyle/>
+          <a:p>
+            <a:pPr algn="l"/>
+            <a:r>
+              <a:rPr sz="1200" b="0">
+                <a:solidFill>
+                  <a:srgbClr val="51617A"/>
+                </a:solidFill>
+                <a:latin typeface="Manrope"/>
+              </a:rPr>
+              <a:t>Open a real transaction hash and verify the destination</a:t>
+            </a:r>
+          </a:p>
+        </p:txBody>
+      </p:sp>
+      <p:sp>
+        <p:nvSpPr>
+          <p:cNvPr id="24" name="Rounded Rectangle 23"/>
+          <p:cNvSpPr/>
+          <p:nvPr/>
+        </p:nvSpPr>
+        <p:spPr>
+          <a:xfrm>
+            <a:off x="685800" y="5157216"/>
+            <a:ext cx="10808208" cy="530352"/>
+          </a:xfrm>
+          <a:prstGeom prst="roundRect">
+            <a:avLst/>
+          </a:prstGeom>
+          <a:solidFill>
+            <a:srgbClr val="E6F3FB"/>
+          </a:solidFill>
+          <a:ln w="15240">
+            <a:solidFill>
+              <a:srgbClr val="DBE3EE"/>
+            </a:solidFill>
+          </a:ln>
+        </p:spPr>
+        <p:style>
+          <a:lnRef idx="1">
+            <a:schemeClr val="accent1"/>
+          </a:lnRef>
+          <a:fillRef idx="3">
+            <a:schemeClr val="accent1"/>
+          </a:fillRef>
+          <a:effectRef idx="2">
+            <a:schemeClr val="accent1"/>
+          </a:effectRef>
+          <a:fontRef idx="minor">
+            <a:schemeClr val="lt1"/>
+          </a:fontRef>
+        </p:style>
+        <p:txBody>
+          <a:bodyPr rtlCol="0" anchor="ctr"/>
+          <a:lstStyle/>
+          <a:p>
+            <a:pPr algn="ctr"/>
+          </a:p>
+        </p:txBody>
+      </p:sp>
+      <p:sp>
+        <p:nvSpPr>
+          <p:cNvPr id="25" name="TextBox 24"/>
+          <p:cNvSpPr txBox="1"/>
+          <p:nvPr/>
+        </p:nvSpPr>
+        <p:spPr>
+          <a:xfrm>
+            <a:off x="896112" y="5276088"/>
+            <a:ext cx="2240280" cy="256032"/>
+          </a:xfrm>
+          <a:prstGeom prst="rect">
+            <a:avLst/>
+          </a:prstGeom>
+          <a:noFill/>
+        </p:spPr>
+        <p:txBody>
+          <a:bodyPr wrap="square" lIns="0" rIns="0" tIns="0" bIns="0" anchor="t">
+            <a:spAutoFit/>
+          </a:bodyPr>
+          <a:lstStyle/>
+          <a:p>
+            <a:pPr algn="l"/>
+            <a:r>
+              <a:rPr sz="1200" b="1">
+                <a:solidFill>
+                  <a:srgbClr val="0B1B2B"/>
+                </a:solidFill>
+                <a:latin typeface="Manrope"/>
+              </a:rPr>
+              <a:t>Research next</a:t>
+            </a:r>
+          </a:p>
+        </p:txBody>
+      </p:sp>
+      <p:sp>
+        <p:nvSpPr>
+          <p:cNvPr id="26" name="TextBox 25"/>
+          <p:cNvSpPr txBox="1"/>
+          <p:nvPr/>
+        </p:nvSpPr>
+        <p:spPr>
+          <a:xfrm>
+            <a:off x="2944368" y="5276088"/>
+            <a:ext cx="8229600" cy="274320"/>
+          </a:xfrm>
+          <a:prstGeom prst="rect">
+            <a:avLst/>
+          </a:prstGeom>
+          <a:noFill/>
+        </p:spPr>
+        <p:txBody>
+          <a:bodyPr wrap="square" lIns="0" rIns="0" tIns="0" bIns="0" anchor="t">
+            <a:spAutoFit/>
+          </a:bodyPr>
+          <a:lstStyle/>
+          <a:p>
+            <a:pPr algn="l"/>
+            <a:r>
+              <a:rPr sz="1200" b="0">
+                <a:solidFill>
+                  <a:srgbClr val="51617A"/>
+                </a:solidFill>
+                <a:latin typeface="Manrope"/>
+              </a:rPr>
+              <a:t>Recipient cash preference, funding rail, provider trust, compliance path</a:t>
             </a:r>
           </a:p>
         </p:txBody>
@@ -3889,16 +6035,18 @@
         <p:spPr>
           <a:xfrm>
             <a:off x="0" y="0"/>
-            <a:ext cx="182880" cy="6858000"/>
+            <a:ext cx="12191695" cy="64008"/>
           </a:xfrm>
           <a:prstGeom prst="rect">
             <a:avLst/>
           </a:prstGeom>
           <a:solidFill>
-            <a:srgbClr val="0284C7"/>
+            <a:srgbClr val="0369A1"/>
           </a:solidFill>
-          <a:ln>
-            <a:noFill/>
+          <a:ln w="15240">
+            <a:solidFill>
+              <a:srgbClr val="0369A1"/>
+            </a:solidFill>
           </a:ln>
         </p:spPr>
         <p:style>
@@ -3925,23 +6073,130 @@
       </p:sp>
       <p:sp>
         <p:nvSpPr>
-          <p:cNvPr id="3" name="Rectangle 2"/>
+          <p:cNvPr id="3" name="TextBox 2"/>
+          <p:cNvSpPr txBox="1"/>
+          <p:nvPr/>
+        </p:nvSpPr>
+        <p:spPr>
+          <a:xfrm>
+            <a:off x="658368" y="310896"/>
+            <a:ext cx="9601200" cy="292608"/>
+          </a:xfrm>
+          <a:prstGeom prst="rect">
+            <a:avLst/>
+          </a:prstGeom>
+          <a:noFill/>
+        </p:spPr>
+        <p:txBody>
+          <a:bodyPr wrap="square" lIns="0" rIns="0" tIns="0" bIns="0" anchor="t">
+            <a:spAutoFit/>
+          </a:bodyPr>
+          <a:lstStyle/>
+          <a:p>
+            <a:pPr algn="l"/>
+            <a:r>
+              <a:rPr sz="1100" b="1">
+                <a:solidFill>
+                  <a:srgbClr val="0369A1"/>
+                </a:solidFill>
+                <a:latin typeface="Manrope"/>
+              </a:rPr>
+              <a:t>PRODUCT TODAY VS NEXT</a:t>
+            </a:r>
+          </a:p>
+        </p:txBody>
+      </p:sp>
+      <p:sp>
+        <p:nvSpPr>
+          <p:cNvPr id="4" name="TextBox 3"/>
+          <p:cNvSpPr txBox="1"/>
+          <p:nvPr/>
+        </p:nvSpPr>
+        <p:spPr>
+          <a:xfrm>
+            <a:off x="658368" y="667512"/>
+            <a:ext cx="10789920" cy="658368"/>
+          </a:xfrm>
+          <a:prstGeom prst="rect">
+            <a:avLst/>
+          </a:prstGeom>
+          <a:noFill/>
+        </p:spPr>
+        <p:txBody>
+          <a:bodyPr wrap="square" lIns="0" rIns="0" tIns="0" bIns="0" anchor="t">
+            <a:spAutoFit/>
+          </a:bodyPr>
+          <a:lstStyle/>
+          <a:p>
+            <a:pPr algn="l"/>
+            <a:r>
+              <a:rPr sz="2700" b="1">
+                <a:solidFill>
+                  <a:srgbClr val="0B1B2B"/>
+                </a:solidFill>
+                <a:latin typeface="Fraunces"/>
+              </a:rPr>
+              <a:t>Do not confuse on-chain proof with cash delivery</a:t>
+            </a:r>
+          </a:p>
+        </p:txBody>
+      </p:sp>
+      <p:sp>
+        <p:nvSpPr>
+          <p:cNvPr id="5" name="TextBox 4"/>
+          <p:cNvSpPr txBox="1"/>
+          <p:nvPr/>
+        </p:nvSpPr>
+        <p:spPr>
+          <a:xfrm>
+            <a:off x="10927080" y="292608"/>
+            <a:ext cx="566928" cy="228600"/>
+          </a:xfrm>
+          <a:prstGeom prst="rect">
+            <a:avLst/>
+          </a:prstGeom>
+          <a:noFill/>
+        </p:spPr>
+        <p:txBody>
+          <a:bodyPr wrap="square" lIns="0" rIns="0" tIns="0" bIns="0" anchor="t">
+            <a:spAutoFit/>
+          </a:bodyPr>
+          <a:lstStyle/>
+          <a:p>
+            <a:pPr algn="r"/>
+            <a:r>
+              <a:rPr sz="900" b="0">
+                <a:solidFill>
+                  <a:srgbClr val="51617A"/>
+                </a:solidFill>
+                <a:latin typeface="Manrope"/>
+              </a:rPr>
+              <a:t>5 / 9</a:t>
+            </a:r>
+          </a:p>
+        </p:txBody>
+      </p:sp>
+      <p:sp>
+        <p:nvSpPr>
+          <p:cNvPr id="6" name="Rounded Rectangle 5"/>
           <p:cNvSpPr/>
           <p:nvPr/>
         </p:nvSpPr>
         <p:spPr>
           <a:xfrm>
-            <a:off x="0" y="6217920"/>
-            <a:ext cx="12188952" cy="640080"/>
-          </a:xfrm>
-          <a:prstGeom prst="rect">
+            <a:off x="685800" y="1508760"/>
+            <a:ext cx="5230368" cy="4343400"/>
+          </a:xfrm>
+          <a:prstGeom prst="roundRect">
             <a:avLst/>
           </a:prstGeom>
           <a:solidFill>
-            <a:srgbClr val="0284C7"/>
+            <a:srgbClr val="E6F3FB"/>
           </a:solidFill>
-          <a:ln>
-            <a:noFill/>
+          <a:ln w="15240">
+            <a:solidFill>
+              <a:srgbClr val="9DCBEA"/>
+            </a:solidFill>
           </a:ln>
         </p:spPr>
         <p:style>
@@ -3968,14 +6223,94 @@
       </p:sp>
       <p:sp>
         <p:nvSpPr>
-          <p:cNvPr id="4" name="TextBox 3"/>
-          <p:cNvSpPr txBox="1"/>
-          <p:nvPr/>
-        </p:nvSpPr>
-        <p:spPr>
-          <a:xfrm>
-            <a:off x="640080" y="320040"/>
-            <a:ext cx="10972800" cy="640080"/>
+          <p:cNvPr id="7" name="Rounded Rectangle 6"/>
+          <p:cNvSpPr/>
+          <p:nvPr/>
+        </p:nvSpPr>
+        <p:spPr>
+          <a:xfrm>
+            <a:off x="932688" y="1737360"/>
+            <a:ext cx="1481328" cy="310896"/>
+          </a:xfrm>
+          <a:prstGeom prst="roundRect">
+            <a:avLst/>
+          </a:prstGeom>
+          <a:solidFill>
+            <a:srgbClr val="E6F3FB"/>
+          </a:solidFill>
+          <a:ln w="15240">
+            <a:solidFill>
+              <a:srgbClr val="9DCBEA"/>
+            </a:solidFill>
+          </a:ln>
+        </p:spPr>
+        <p:style>
+          <a:lnRef idx="1">
+            <a:schemeClr val="accent1"/>
+          </a:lnRef>
+          <a:fillRef idx="3">
+            <a:schemeClr val="accent1"/>
+          </a:fillRef>
+          <a:effectRef idx="2">
+            <a:schemeClr val="accent1"/>
+          </a:effectRef>
+          <a:fontRef idx="minor">
+            <a:schemeClr val="lt1"/>
+          </a:fontRef>
+        </p:style>
+        <p:txBody>
+          <a:bodyPr rtlCol="0" anchor="ctr"/>
+          <a:lstStyle/>
+          <a:p>
+            <a:pPr algn="ctr"/>
+          </a:p>
+        </p:txBody>
+      </p:sp>
+      <p:sp>
+        <p:nvSpPr>
+          <p:cNvPr id="8" name="TextBox 7"/>
+          <p:cNvSpPr txBox="1"/>
+          <p:nvPr/>
+        </p:nvSpPr>
+        <p:spPr>
+          <a:xfrm>
+            <a:off x="932688" y="1755648"/>
+            <a:ext cx="1481328" cy="228600"/>
+          </a:xfrm>
+          <a:prstGeom prst="rect">
+            <a:avLst/>
+          </a:prstGeom>
+          <a:noFill/>
+        </p:spPr>
+        <p:txBody>
+          <a:bodyPr wrap="square" lIns="0" rIns="0" tIns="0" bIns="0" anchor="t">
+            <a:spAutoFit/>
+          </a:bodyPr>
+          <a:lstStyle/>
+          <a:p>
+            <a:pPr algn="ctr"/>
+            <a:r>
+              <a:rPr sz="900" b="1">
+                <a:solidFill>
+                  <a:srgbClr val="0369A1"/>
+                </a:solidFill>
+                <a:latin typeface="Manrope"/>
+              </a:rPr>
+              <a:t>TODAY · WORKING</a:t>
+            </a:r>
+          </a:p>
+        </p:txBody>
+      </p:sp>
+      <p:sp>
+        <p:nvSpPr>
+          <p:cNvPr id="9" name="TextBox 8"/>
+          <p:cNvSpPr txBox="1"/>
+          <p:nvPr/>
+        </p:nvSpPr>
+        <p:spPr>
+          <a:xfrm>
+            <a:off x="932688" y="2267712"/>
+            <a:ext cx="4617720" cy="3291840"/>
           </a:xfrm>
           <a:prstGeom prst="rect">
             <a:avLst/>
@@ -3988,29 +6323,258 @@
           </a:bodyPr>
           <a:lstStyle/>
           <a:p>
-            <a:pPr algn="l"/>
-            <a:r>
-              <a:rPr sz="1800" b="1">
-                <a:solidFill>
-                  <a:srgbClr val="0284C7"/>
+            <a:pPr>
+              <a:lnSpc>
+                <a:spcPct val="105000"/>
+              </a:lnSpc>
+              <a:spcAft>
+                <a:spcPts val="700"/>
+              </a:spcAft>
+              <a:defRPr sz="1350">
+                <a:solidFill>
+                  <a:srgbClr val="51617A"/>
+                </a:solidFill>
+                <a:latin typeface="Manrope"/>
+              </a:defRPr>
+            </a:pPr>
+            <a:r>
+              <a:t>• Freighter connection + custom signed manageData session (not SEP-10)</a:t>
+            </a:r>
+          </a:p>
+          <a:p>
+            <a:pPr>
+              <a:lnSpc>
+                <a:spcPct val="105000"/>
+              </a:lnSpc>
+              <a:spcAft>
+                <a:spcPts val="700"/>
+              </a:spcAft>
+              <a:defRPr sz="1350">
+                <a:solidFill>
+                  <a:srgbClr val="51617A"/>
+                </a:solidFill>
+                <a:latin typeface="Manrope"/>
+              </a:defRPr>
+            </a:pPr>
+            <a:r>
+              <a:t>• Support-plan records; reminder day is metadata only</a:t>
+            </a:r>
+          </a:p>
+          <a:p>
+            <a:pPr>
+              <a:lnSpc>
+                <a:spcPct val="105000"/>
+              </a:lnSpc>
+              <a:spcAft>
+                <a:spcPts val="700"/>
+              </a:spcAft>
+              <a:defRPr sz="1350">
+                <a:solidFill>
+                  <a:srgbClr val="51617A"/>
+                </a:solidFill>
+                <a:latin typeface="Manrope"/>
+              </a:defRPr>
+            </a:pPr>
+            <a:r>
+              <a:t>• XLM Soroban escrow/release with 60-ledger demo cadence</a:t>
+            </a:r>
+          </a:p>
+          <a:p>
+            <a:pPr>
+              <a:lnSpc>
+                <a:spcPct val="105000"/>
+              </a:lnSpc>
+              <a:spcAft>
+                <a:spcPts val="700"/>
+              </a:spcAft>
+              <a:defRPr sz="1350">
+                <a:solidFill>
+                  <a:srgbClr val="51617A"/>
+                </a:solidFill>
+                <a:latin typeface="Manrope"/>
+              </a:defRPr>
+            </a:pPr>
+            <a:r>
+              <a:t>• Direct XLM/USDC payment to entered recipient address</a:t>
+            </a:r>
+          </a:p>
+          <a:p>
+            <a:pPr>
+              <a:lnSpc>
+                <a:spcPct val="105000"/>
+              </a:lnSpc>
+              <a:spcAft>
+                <a:spcPts val="700"/>
+              </a:spcAft>
+              <a:defRPr sz="1350">
+                <a:solidFill>
+                  <a:srgbClr val="51617A"/>
+                </a:solidFill>
+                <a:latin typeface="Manrope"/>
+              </a:defRPr>
+            </a:pPr>
+            <a:r>
+              <a:t>• Horizon/RPC verification, SEP-7 direct pay link, recipient watcher</a:t>
+            </a:r>
+          </a:p>
+          <a:p>
+            <a:pPr>
+              <a:lnSpc>
+                <a:spcPct val="105000"/>
+              </a:lnSpc>
+              <a:spcAft>
+                <a:spcPts val="700"/>
+              </a:spcAft>
+              <a:defRPr sz="1350">
+                <a:solidFill>
+                  <a:srgbClr val="51617A"/>
+                </a:solidFill>
+                <a:latin typeface="Manrope"/>
+              </a:defRPr>
+            </a:pPr>
+            <a:r>
+              <a:t>• Status ends at Verified on-chain</a:t>
+            </a:r>
+          </a:p>
+        </p:txBody>
+      </p:sp>
+      <p:sp>
+        <p:nvSpPr>
+          <p:cNvPr id="10" name="Rounded Rectangle 9"/>
+          <p:cNvSpPr/>
+          <p:nvPr/>
+        </p:nvSpPr>
+        <p:spPr>
+          <a:xfrm>
+            <a:off x="6263640" y="1508760"/>
+            <a:ext cx="5230368" cy="4343400"/>
+          </a:xfrm>
+          <a:prstGeom prst="roundRect">
+            <a:avLst/>
+          </a:prstGeom>
+          <a:solidFill>
+            <a:srgbClr val="FFFFFF"/>
+          </a:solidFill>
+          <a:ln w="15240">
+            <a:solidFill>
+              <a:srgbClr val="9DCBEA"/>
+            </a:solidFill>
+            <a:prstDash val="dash"/>
+          </a:ln>
+        </p:spPr>
+        <p:style>
+          <a:lnRef idx="1">
+            <a:schemeClr val="accent1"/>
+          </a:lnRef>
+          <a:fillRef idx="3">
+            <a:schemeClr val="accent1"/>
+          </a:fillRef>
+          <a:effectRef idx="2">
+            <a:schemeClr val="accent1"/>
+          </a:effectRef>
+          <a:fontRef idx="minor">
+            <a:schemeClr val="lt1"/>
+          </a:fontRef>
+        </p:style>
+        <p:txBody>
+          <a:bodyPr rtlCol="0" anchor="ctr"/>
+          <a:lstStyle/>
+          <a:p>
+            <a:pPr algn="ctr"/>
+          </a:p>
+        </p:txBody>
+      </p:sp>
+      <p:sp>
+        <p:nvSpPr>
+          <p:cNvPr id="11" name="Rounded Rectangle 10"/>
+          <p:cNvSpPr/>
+          <p:nvPr/>
+        </p:nvSpPr>
+        <p:spPr>
+          <a:xfrm>
+            <a:off x="6510528" y="1737360"/>
+            <a:ext cx="1463040" cy="310896"/>
+          </a:xfrm>
+          <a:prstGeom prst="roundRect">
+            <a:avLst/>
+          </a:prstGeom>
+          <a:solidFill>
+            <a:srgbClr val="FFFFFF"/>
+          </a:solidFill>
+          <a:ln w="15240">
+            <a:solidFill>
+              <a:srgbClr val="9DCBEA"/>
+            </a:solidFill>
+            <a:prstDash val="dash"/>
+          </a:ln>
+        </p:spPr>
+        <p:style>
+          <a:lnRef idx="1">
+            <a:schemeClr val="accent1"/>
+          </a:lnRef>
+          <a:fillRef idx="3">
+            <a:schemeClr val="accent1"/>
+          </a:fillRef>
+          <a:effectRef idx="2">
+            <a:schemeClr val="accent1"/>
+          </a:effectRef>
+          <a:fontRef idx="minor">
+            <a:schemeClr val="lt1"/>
+          </a:fontRef>
+        </p:style>
+        <p:txBody>
+          <a:bodyPr rtlCol="0" anchor="ctr"/>
+          <a:lstStyle/>
+          <a:p>
+            <a:pPr algn="ctr"/>
+          </a:p>
+        </p:txBody>
+      </p:sp>
+      <p:sp>
+        <p:nvSpPr>
+          <p:cNvPr id="12" name="TextBox 11"/>
+          <p:cNvSpPr txBox="1"/>
+          <p:nvPr/>
+        </p:nvSpPr>
+        <p:spPr>
+          <a:xfrm>
+            <a:off x="6510528" y="1755648"/>
+            <a:ext cx="1463040" cy="228600"/>
+          </a:xfrm>
+          <a:prstGeom prst="rect">
+            <a:avLst/>
+          </a:prstGeom>
+          <a:noFill/>
+        </p:spPr>
+        <p:txBody>
+          <a:bodyPr wrap="square" lIns="0" rIns="0" tIns="0" bIns="0" anchor="t">
+            <a:spAutoFit/>
+          </a:bodyPr>
+          <a:lstStyle/>
+          <a:p>
+            <a:pPr algn="ctr"/>
+            <a:r>
+              <a:rPr sz="900" b="1">
+                <a:solidFill>
+                  <a:srgbClr val="0369A1"/>
                 </a:solidFill>
                 <a:latin typeface="Manrope"/>
               </a:rPr>
-              <a:t>SOLUTION</a:t>
-            </a:r>
-          </a:p>
-        </p:txBody>
-      </p:sp>
-      <p:sp>
-        <p:nvSpPr>
-          <p:cNvPr id="5" name="TextBox 4"/>
-          <p:cNvSpPr txBox="1"/>
-          <p:nvPr/>
-        </p:nvSpPr>
-        <p:spPr>
-          <a:xfrm>
-            <a:off x="640080" y="1005840"/>
-            <a:ext cx="10972800" cy="4937760"/>
+              <a:t>NEXT · PLANNED</a:t>
+            </a:r>
+          </a:p>
+        </p:txBody>
+      </p:sp>
+      <p:sp>
+        <p:nvSpPr>
+          <p:cNvPr id="13" name="TextBox 12"/>
+          <p:cNvSpPr txBox="1"/>
+          <p:nvPr/>
+        </p:nvSpPr>
+        <p:spPr>
+          <a:xfrm>
+            <a:off x="6510528" y="2267712"/>
+            <a:ext cx="4617720" cy="3291840"/>
           </a:xfrm>
           <a:prstGeom prst="rect">
             <a:avLst/>
@@ -4023,20 +6587,98 @@
           </a:bodyPr>
           <a:lstStyle/>
           <a:p>
-            <a:pPr algn="l"/>
-            <a:r>
-              <a:rPr sz="1800" b="0">
-                <a:solidFill>
-                  <a:srgbClr val="0B1B2B"/>
-                </a:solidFill>
-                <a:latin typeface="Manrope"/>
-              </a:rPr>
-              <a:t>• A standing allowance that lands on a fixed day, in local cash.
-• Step 1 — Schedule. Sender signs one payment in Freighter: amount, corridor, day-of-month, recipient.
-• Step 2 — Escrow. BaktiEscrow (Soroban) holds the funds and releases one month at a time.
-• Step 3 — Anchor off-ramp. A Stellar SEP-24 anchor converts USDC to local fiat and issues a cash-pickup reference.
-• Step 4 — Pickup. The parent collects local cash at a MoneyGram pickup point. No wallet, no app on their side.
-• Non-custodial end-to-end. Bakti never holds keys or funds.</a:t>
+            <a:pPr>
+              <a:lnSpc>
+                <a:spcPct val="105000"/>
+              </a:lnSpc>
+              <a:spcAft>
+                <a:spcPts val="700"/>
+              </a:spcAft>
+              <a:defRPr sz="1350">
+                <a:solidFill>
+                  <a:srgbClr val="51617A"/>
+                </a:solidFill>
+                <a:latin typeface="Manrope"/>
+              </a:defRPr>
+            </a:pPr>
+            <a:r>
+              <a:t>• Licensed anchor/provider onboarding and agreements</a:t>
+            </a:r>
+          </a:p>
+          <a:p>
+            <a:pPr>
+              <a:lnSpc>
+                <a:spcPct val="105000"/>
+              </a:lnSpc>
+              <a:spcAft>
+                <a:spcPts val="700"/>
+              </a:spcAft>
+              <a:defRPr sz="1350">
+                <a:solidFill>
+                  <a:srgbClr val="51617A"/>
+                </a:solidFill>
+                <a:latin typeface="Manrope"/>
+              </a:defRPr>
+            </a:pPr>
+            <a:r>
+              <a:t>• SEP-1 + provider SEP-10 + hosted SEP-24</a:t>
+            </a:r>
+          </a:p>
+          <a:p>
+            <a:pPr>
+              <a:lnSpc>
+                <a:spcPct val="105000"/>
+              </a:lnSpc>
+              <a:spcAft>
+                <a:spcPts val="700"/>
+              </a:spcAft>
+              <a:defRPr sz="1350">
+                <a:solidFill>
+                  <a:srgbClr val="51617A"/>
+                </a:solidFill>
+                <a:latin typeface="Manrope"/>
+              </a:defRPr>
+            </a:pPr>
+            <a:r>
+              <a:t>• KYC, quote/limits, approved deposit routing, provider status</a:t>
+            </a:r>
+          </a:p>
+          <a:p>
+            <a:pPr>
+              <a:lnSpc>
+                <a:spcPct val="105000"/>
+              </a:lnSpc>
+              <a:spcAft>
+                <a:spcPts val="700"/>
+              </a:spcAft>
+              <a:defRPr sz="1350">
+                <a:solidFill>
+                  <a:srgbClr val="51617A"/>
+                </a:solidFill>
+                <a:latin typeface="Manrope"/>
+              </a:defRPr>
+            </a:pPr>
+            <a:r>
+              <a:t>• PHP cash-out, provider reference, provider-confirmed collection</a:t>
+            </a:r>
+          </a:p>
+          <a:p>
+            <a:pPr>
+              <a:lnSpc>
+                <a:spcPct val="105000"/>
+              </a:lnSpc>
+              <a:spcAft>
+                <a:spcPts val="700"/>
+              </a:spcAft>
+              <a:defRPr sz="1350">
+                <a:solidFill>
+                  <a:srgbClr val="51617A"/>
+                </a:solidFill>
+                <a:latin typeface="Manrope"/>
+              </a:defRPr>
+            </a:pPr>
+            <a:r>
+              <a:t>• No current MoneyGram partnership or connected cash route</a:t>
             </a:r>
           </a:p>
         </p:txBody>
@@ -4076,16 +6718,18 @@
         <p:spPr>
           <a:xfrm>
             <a:off x="0" y="0"/>
-            <a:ext cx="182880" cy="6858000"/>
+            <a:ext cx="12191695" cy="64008"/>
           </a:xfrm>
           <a:prstGeom prst="rect">
             <a:avLst/>
           </a:prstGeom>
           <a:solidFill>
-            <a:srgbClr val="0284C7"/>
+            <a:srgbClr val="0369A1"/>
           </a:solidFill>
-          <a:ln>
-            <a:noFill/>
+          <a:ln w="15240">
+            <a:solidFill>
+              <a:srgbClr val="0369A1"/>
+            </a:solidFill>
           </a:ln>
         </p:spPr>
         <p:style>
@@ -4112,23 +6756,130 @@
       </p:sp>
       <p:sp>
         <p:nvSpPr>
-          <p:cNvPr id="3" name="Rectangle 2"/>
+          <p:cNvPr id="3" name="TextBox 2"/>
+          <p:cNvSpPr txBox="1"/>
+          <p:nvPr/>
+        </p:nvSpPr>
+        <p:spPr>
+          <a:xfrm>
+            <a:off x="658368" y="310896"/>
+            <a:ext cx="9601200" cy="292608"/>
+          </a:xfrm>
+          <a:prstGeom prst="rect">
+            <a:avLst/>
+          </a:prstGeom>
+          <a:noFill/>
+        </p:spPr>
+        <p:txBody>
+          <a:bodyPr wrap="square" lIns="0" rIns="0" tIns="0" bIns="0" anchor="t">
+            <a:spAutoFit/>
+          </a:bodyPr>
+          <a:lstStyle/>
+          <a:p>
+            <a:pPr algn="l"/>
+            <a:r>
+              <a:rPr sz="1100" b="1">
+                <a:solidFill>
+                  <a:srgbClr val="0369A1"/>
+                </a:solidFill>
+                <a:latin typeface="Manrope"/>
+              </a:rPr>
+              <a:t>ONE FLOW — SOLID IS CURRENT, DASHED IS PLANNED</a:t>
+            </a:r>
+          </a:p>
+        </p:txBody>
+      </p:sp>
+      <p:sp>
+        <p:nvSpPr>
+          <p:cNvPr id="4" name="TextBox 3"/>
+          <p:cNvSpPr txBox="1"/>
+          <p:nvPr/>
+        </p:nvSpPr>
+        <p:spPr>
+          <a:xfrm>
+            <a:off x="658368" y="667512"/>
+            <a:ext cx="10789920" cy="658368"/>
+          </a:xfrm>
+          <a:prstGeom prst="rect">
+            <a:avLst/>
+          </a:prstGeom>
+          <a:noFill/>
+        </p:spPr>
+        <p:txBody>
+          <a:bodyPr wrap="square" lIns="0" rIns="0" tIns="0" bIns="0" anchor="t">
+            <a:spAutoFit/>
+          </a:bodyPr>
+          <a:lstStyle/>
+          <a:p>
+            <a:pPr algn="l"/>
+            <a:r>
+              <a:rPr sz="2700" b="1">
+                <a:solidFill>
+                  <a:srgbClr val="0B1B2B"/>
+                </a:solidFill>
+                <a:latin typeface="Fraunces"/>
+              </a:rPr>
+              <a:t>Solid is current. Dashed is planned.</a:t>
+            </a:r>
+          </a:p>
+        </p:txBody>
+      </p:sp>
+      <p:sp>
+        <p:nvSpPr>
+          <p:cNvPr id="5" name="TextBox 4"/>
+          <p:cNvSpPr txBox="1"/>
+          <p:nvPr/>
+        </p:nvSpPr>
+        <p:spPr>
+          <a:xfrm>
+            <a:off x="10927080" y="292608"/>
+            <a:ext cx="566928" cy="228600"/>
+          </a:xfrm>
+          <a:prstGeom prst="rect">
+            <a:avLst/>
+          </a:prstGeom>
+          <a:noFill/>
+        </p:spPr>
+        <p:txBody>
+          <a:bodyPr wrap="square" lIns="0" rIns="0" tIns="0" bIns="0" anchor="t">
+            <a:spAutoFit/>
+          </a:bodyPr>
+          <a:lstStyle/>
+          <a:p>
+            <a:pPr algn="r"/>
+            <a:r>
+              <a:rPr sz="900" b="0">
+                <a:solidFill>
+                  <a:srgbClr val="51617A"/>
+                </a:solidFill>
+                <a:latin typeface="Manrope"/>
+              </a:rPr>
+              <a:t>6 / 9</a:t>
+            </a:r>
+          </a:p>
+        </p:txBody>
+      </p:sp>
+      <p:sp>
+        <p:nvSpPr>
+          <p:cNvPr id="6" name="Rounded Rectangle 5"/>
           <p:cNvSpPr/>
           <p:nvPr/>
         </p:nvSpPr>
         <p:spPr>
           <a:xfrm>
-            <a:off x="0" y="6217920"/>
-            <a:ext cx="12188952" cy="640080"/>
-          </a:xfrm>
-          <a:prstGeom prst="rect">
+            <a:off x="658368" y="1874519"/>
+            <a:ext cx="2057400" cy="1417320"/>
+          </a:xfrm>
+          <a:prstGeom prst="roundRect">
             <a:avLst/>
           </a:prstGeom>
           <a:solidFill>
-            <a:srgbClr val="0284C7"/>
+            <a:srgbClr val="FFFFFF"/>
           </a:solidFill>
-          <a:ln>
-            <a:noFill/>
+          <a:ln w="15240">
+            <a:solidFill>
+              <a:srgbClr val="9DCBEA"/>
+            </a:solidFill>
           </a:ln>
         </p:spPr>
         <p:style>
@@ -4155,73 +6906,756 @@
       </p:sp>
       <p:sp>
         <p:nvSpPr>
-          <p:cNvPr id="4" name="TextBox 3"/>
-          <p:cNvSpPr txBox="1"/>
-          <p:nvPr/>
-        </p:nvSpPr>
-        <p:spPr>
-          <a:xfrm>
-            <a:off x="640080" y="320040"/>
-            <a:ext cx="10972800" cy="640080"/>
-          </a:xfrm>
-          <a:prstGeom prst="rect">
-            <a:avLst/>
-          </a:prstGeom>
-          <a:noFill/>
-        </p:spPr>
-        <p:txBody>
-          <a:bodyPr wrap="square">
+          <p:cNvPr id="7" name="TextBox 6"/>
+          <p:cNvSpPr txBox="1"/>
+          <p:nvPr/>
+        </p:nvSpPr>
+        <p:spPr>
+          <a:xfrm>
+            <a:off x="768096" y="2167128"/>
+            <a:ext cx="1828800" cy="274320"/>
+          </a:xfrm>
+          <a:prstGeom prst="rect">
+            <a:avLst/>
+          </a:prstGeom>
+          <a:noFill/>
+        </p:spPr>
+        <p:txBody>
+          <a:bodyPr wrap="square" lIns="0" rIns="0" tIns="0" bIns="0" anchor="t">
+            <a:spAutoFit/>
+          </a:bodyPr>
+          <a:lstStyle/>
+          <a:p>
+            <a:pPr algn="ctr"/>
+            <a:r>
+              <a:rPr sz="1600" b="1">
+                <a:solidFill>
+                  <a:srgbClr val="0B1B2B"/>
+                </a:solidFill>
+                <a:latin typeface="Manrope"/>
+              </a:rPr>
+              <a:t>Sender</a:t>
+            </a:r>
+          </a:p>
+        </p:txBody>
+      </p:sp>
+      <p:sp>
+        <p:nvSpPr>
+          <p:cNvPr id="8" name="TextBox 7"/>
+          <p:cNvSpPr txBox="1"/>
+          <p:nvPr/>
+        </p:nvSpPr>
+        <p:spPr>
+          <a:xfrm>
+            <a:off x="768096" y="2578608"/>
+            <a:ext cx="1828800" cy="502920"/>
+          </a:xfrm>
+          <a:prstGeom prst="rect">
+            <a:avLst/>
+          </a:prstGeom>
+          <a:noFill/>
+        </p:spPr>
+        <p:txBody>
+          <a:bodyPr wrap="square" lIns="0" rIns="0" tIns="0" bIns="0" anchor="t">
+            <a:spAutoFit/>
+          </a:bodyPr>
+          <a:lstStyle/>
+          <a:p>
+            <a:pPr algn="ctr"/>
+            <a:r>
+              <a:rPr sz="1100" b="0">
+                <a:solidFill>
+                  <a:srgbClr val="51617A"/>
+                </a:solidFill>
+                <a:latin typeface="Manrope"/>
+              </a:rPr>
+              <a:t>Filipino worker
+in Malaysia</a:t>
+            </a:r>
+          </a:p>
+        </p:txBody>
+      </p:sp>
+      <p:sp>
+        <p:nvSpPr>
+          <p:cNvPr id="9" name="TextBox 8"/>
+          <p:cNvSpPr txBox="1"/>
+          <p:nvPr/>
+        </p:nvSpPr>
+        <p:spPr>
+          <a:xfrm>
+            <a:off x="2770632" y="2313432"/>
+            <a:ext cx="685800" cy="365760"/>
+          </a:xfrm>
+          <a:prstGeom prst="rect">
+            <a:avLst/>
+          </a:prstGeom>
+          <a:noFill/>
+        </p:spPr>
+        <p:txBody>
+          <a:bodyPr wrap="square" lIns="0" rIns="0" tIns="0" bIns="0" anchor="t">
+            <a:spAutoFit/>
+          </a:bodyPr>
+          <a:lstStyle/>
+          <a:p>
+            <a:pPr algn="ctr"/>
+            <a:r>
+              <a:rPr sz="2500" b="1">
+                <a:solidFill>
+                  <a:srgbClr val="0369A1"/>
+                </a:solidFill>
+                <a:latin typeface="Manrope"/>
+              </a:rPr>
+              <a:t>→</a:t>
+            </a:r>
+          </a:p>
+        </p:txBody>
+      </p:sp>
+      <p:sp>
+        <p:nvSpPr>
+          <p:cNvPr id="10" name="Rounded Rectangle 9"/>
+          <p:cNvSpPr/>
+          <p:nvPr/>
+        </p:nvSpPr>
+        <p:spPr>
+          <a:xfrm>
+            <a:off x="3529584" y="1874519"/>
+            <a:ext cx="2057400" cy="1417320"/>
+          </a:xfrm>
+          <a:prstGeom prst="roundRect">
+            <a:avLst/>
+          </a:prstGeom>
+          <a:solidFill>
+            <a:srgbClr val="FFFFFF"/>
+          </a:solidFill>
+          <a:ln w="15240">
+            <a:solidFill>
+              <a:srgbClr val="9DCBEA"/>
+            </a:solidFill>
+          </a:ln>
+        </p:spPr>
+        <p:style>
+          <a:lnRef idx="1">
+            <a:schemeClr val="accent1"/>
+          </a:lnRef>
+          <a:fillRef idx="3">
+            <a:schemeClr val="accent1"/>
+          </a:fillRef>
+          <a:effectRef idx="2">
+            <a:schemeClr val="accent1"/>
+          </a:effectRef>
+          <a:fontRef idx="minor">
+            <a:schemeClr val="lt1"/>
+          </a:fontRef>
+        </p:style>
+        <p:txBody>
+          <a:bodyPr rtlCol="0" anchor="ctr"/>
+          <a:lstStyle/>
+          <a:p>
+            <a:pPr algn="ctr"/>
+          </a:p>
+        </p:txBody>
+      </p:sp>
+      <p:sp>
+        <p:nvSpPr>
+          <p:cNvPr id="11" name="TextBox 10"/>
+          <p:cNvSpPr txBox="1"/>
+          <p:nvPr/>
+        </p:nvSpPr>
+        <p:spPr>
+          <a:xfrm>
+            <a:off x="3639312" y="2167128"/>
+            <a:ext cx="1828800" cy="274320"/>
+          </a:xfrm>
+          <a:prstGeom prst="rect">
+            <a:avLst/>
+          </a:prstGeom>
+          <a:noFill/>
+        </p:spPr>
+        <p:txBody>
+          <a:bodyPr wrap="square" lIns="0" rIns="0" tIns="0" bIns="0" anchor="t">
+            <a:spAutoFit/>
+          </a:bodyPr>
+          <a:lstStyle/>
+          <a:p>
+            <a:pPr algn="ctr"/>
+            <a:r>
+              <a:rPr sz="1600" b="1">
+                <a:solidFill>
+                  <a:srgbClr val="0B1B2B"/>
+                </a:solidFill>
+                <a:latin typeface="Manrope"/>
+              </a:rPr>
+              <a:t>Bakti plan</a:t>
+            </a:r>
+          </a:p>
+        </p:txBody>
+      </p:sp>
+      <p:sp>
+        <p:nvSpPr>
+          <p:cNvPr id="12" name="TextBox 11"/>
+          <p:cNvSpPr txBox="1"/>
+          <p:nvPr/>
+        </p:nvSpPr>
+        <p:spPr>
+          <a:xfrm>
+            <a:off x="3639312" y="2578608"/>
+            <a:ext cx="1828800" cy="502920"/>
+          </a:xfrm>
+          <a:prstGeom prst="rect">
+            <a:avLst/>
+          </a:prstGeom>
+          <a:noFill/>
+        </p:spPr>
+        <p:txBody>
+          <a:bodyPr wrap="square" lIns="0" rIns="0" tIns="0" bIns="0" anchor="t">
+            <a:spAutoFit/>
+          </a:bodyPr>
+          <a:lstStyle/>
+          <a:p>
+            <a:pPr algn="ctr"/>
+            <a:r>
+              <a:rPr sz="1100" b="0">
+                <a:solidFill>
+                  <a:srgbClr val="51617A"/>
+                </a:solidFill>
+                <a:latin typeface="Manrope"/>
+              </a:rPr>
+              <a:t>Recipient + amount
++ planning date</a:t>
+            </a:r>
+          </a:p>
+        </p:txBody>
+      </p:sp>
+      <p:sp>
+        <p:nvSpPr>
+          <p:cNvPr id="13" name="TextBox 12"/>
+          <p:cNvSpPr txBox="1"/>
+          <p:nvPr/>
+        </p:nvSpPr>
+        <p:spPr>
+          <a:xfrm>
+            <a:off x="5641848" y="2313432"/>
+            <a:ext cx="685800" cy="365760"/>
+          </a:xfrm>
+          <a:prstGeom prst="rect">
+            <a:avLst/>
+          </a:prstGeom>
+          <a:noFill/>
+        </p:spPr>
+        <p:txBody>
+          <a:bodyPr wrap="square" lIns="0" rIns="0" tIns="0" bIns="0" anchor="t">
+            <a:spAutoFit/>
+          </a:bodyPr>
+          <a:lstStyle/>
+          <a:p>
+            <a:pPr algn="ctr"/>
+            <a:r>
+              <a:rPr sz="2500" b="1">
+                <a:solidFill>
+                  <a:srgbClr val="0369A1"/>
+                </a:solidFill>
+                <a:latin typeface="Manrope"/>
+              </a:rPr>
+              <a:t>→</a:t>
+            </a:r>
+          </a:p>
+        </p:txBody>
+      </p:sp>
+      <p:sp>
+        <p:nvSpPr>
+          <p:cNvPr id="14" name="Rounded Rectangle 13"/>
+          <p:cNvSpPr/>
+          <p:nvPr/>
+        </p:nvSpPr>
+        <p:spPr>
+          <a:xfrm>
+            <a:off x="6400800" y="1874519"/>
+            <a:ext cx="2057400" cy="1417320"/>
+          </a:xfrm>
+          <a:prstGeom prst="roundRect">
+            <a:avLst/>
+          </a:prstGeom>
+          <a:solidFill>
+            <a:srgbClr val="FFFFFF"/>
+          </a:solidFill>
+          <a:ln w="15240">
+            <a:solidFill>
+              <a:srgbClr val="9DCBEA"/>
+            </a:solidFill>
+          </a:ln>
+        </p:spPr>
+        <p:style>
+          <a:lnRef idx="1">
+            <a:schemeClr val="accent1"/>
+          </a:lnRef>
+          <a:fillRef idx="3">
+            <a:schemeClr val="accent1"/>
+          </a:fillRef>
+          <a:effectRef idx="2">
+            <a:schemeClr val="accent1"/>
+          </a:effectRef>
+          <a:fontRef idx="minor">
+            <a:schemeClr val="lt1"/>
+          </a:fontRef>
+        </p:style>
+        <p:txBody>
+          <a:bodyPr rtlCol="0" anchor="ctr"/>
+          <a:lstStyle/>
+          <a:p>
+            <a:pPr algn="ctr"/>
+          </a:p>
+        </p:txBody>
+      </p:sp>
+      <p:sp>
+        <p:nvSpPr>
+          <p:cNvPr id="15" name="TextBox 14"/>
+          <p:cNvSpPr txBox="1"/>
+          <p:nvPr/>
+        </p:nvSpPr>
+        <p:spPr>
+          <a:xfrm>
+            <a:off x="6510528" y="2167128"/>
+            <a:ext cx="1828800" cy="274320"/>
+          </a:xfrm>
+          <a:prstGeom prst="rect">
+            <a:avLst/>
+          </a:prstGeom>
+          <a:noFill/>
+        </p:spPr>
+        <p:txBody>
+          <a:bodyPr wrap="square" lIns="0" rIns="0" tIns="0" bIns="0" anchor="t">
+            <a:spAutoFit/>
+          </a:bodyPr>
+          <a:lstStyle/>
+          <a:p>
+            <a:pPr algn="ctr"/>
+            <a:r>
+              <a:rPr sz="1600" b="1">
+                <a:solidFill>
+                  <a:srgbClr val="0B1B2B"/>
+                </a:solidFill>
+                <a:latin typeface="Manrope"/>
+              </a:rPr>
+              <a:t>Stellar</a:t>
+            </a:r>
+          </a:p>
+        </p:txBody>
+      </p:sp>
+      <p:sp>
+        <p:nvSpPr>
+          <p:cNvPr id="16" name="TextBox 15"/>
+          <p:cNvSpPr txBox="1"/>
+          <p:nvPr/>
+        </p:nvSpPr>
+        <p:spPr>
+          <a:xfrm>
+            <a:off x="6510528" y="2578608"/>
+            <a:ext cx="1828800" cy="502920"/>
+          </a:xfrm>
+          <a:prstGeom prst="rect">
+            <a:avLst/>
+          </a:prstGeom>
+          <a:noFill/>
+        </p:spPr>
+        <p:txBody>
+          <a:bodyPr wrap="square" lIns="0" rIns="0" tIns="0" bIns="0" anchor="t">
+            <a:spAutoFit/>
+          </a:bodyPr>
+          <a:lstStyle/>
+          <a:p>
+            <a:pPr algn="ctr"/>
+            <a:r>
+              <a:rPr sz="1100" b="0">
+                <a:solidFill>
+                  <a:srgbClr val="51617A"/>
+                </a:solidFill>
+                <a:latin typeface="Manrope"/>
+              </a:rPr>
+              <a:t>Direct payment or
+XLM escrow release</a:t>
+            </a:r>
+          </a:p>
+        </p:txBody>
+      </p:sp>
+      <p:sp>
+        <p:nvSpPr>
+          <p:cNvPr id="17" name="TextBox 16"/>
+          <p:cNvSpPr txBox="1"/>
+          <p:nvPr/>
+        </p:nvSpPr>
+        <p:spPr>
+          <a:xfrm>
+            <a:off x="8513064" y="2313432"/>
+            <a:ext cx="685800" cy="365760"/>
+          </a:xfrm>
+          <a:prstGeom prst="rect">
+            <a:avLst/>
+          </a:prstGeom>
+          <a:noFill/>
+        </p:spPr>
+        <p:txBody>
+          <a:bodyPr wrap="square" lIns="0" rIns="0" tIns="0" bIns="0" anchor="t">
+            <a:spAutoFit/>
+          </a:bodyPr>
+          <a:lstStyle/>
+          <a:p>
+            <a:pPr algn="ctr"/>
+            <a:r>
+              <a:rPr sz="2500" b="1">
+                <a:solidFill>
+                  <a:srgbClr val="0369A1"/>
+                </a:solidFill>
+                <a:latin typeface="Manrope"/>
+              </a:rPr>
+              <a:t>→</a:t>
+            </a:r>
+          </a:p>
+        </p:txBody>
+      </p:sp>
+      <p:sp>
+        <p:nvSpPr>
+          <p:cNvPr id="18" name="Rounded Rectangle 17"/>
+          <p:cNvSpPr/>
+          <p:nvPr/>
+        </p:nvSpPr>
+        <p:spPr>
+          <a:xfrm>
+            <a:off x="9272016" y="1874519"/>
+            <a:ext cx="2057400" cy="1417320"/>
+          </a:xfrm>
+          <a:prstGeom prst="roundRect">
+            <a:avLst/>
+          </a:prstGeom>
+          <a:solidFill>
+            <a:srgbClr val="FFFFFF"/>
+          </a:solidFill>
+          <a:ln w="15240">
+            <a:solidFill>
+              <a:srgbClr val="9DCBEA"/>
+            </a:solidFill>
+          </a:ln>
+        </p:spPr>
+        <p:style>
+          <a:lnRef idx="1">
+            <a:schemeClr val="accent1"/>
+          </a:lnRef>
+          <a:fillRef idx="3">
+            <a:schemeClr val="accent1"/>
+          </a:fillRef>
+          <a:effectRef idx="2">
+            <a:schemeClr val="accent1"/>
+          </a:effectRef>
+          <a:fontRef idx="minor">
+            <a:schemeClr val="lt1"/>
+          </a:fontRef>
+        </p:style>
+        <p:txBody>
+          <a:bodyPr rtlCol="0" anchor="ctr"/>
+          <a:lstStyle/>
+          <a:p>
+            <a:pPr algn="ctr"/>
+          </a:p>
+        </p:txBody>
+      </p:sp>
+      <p:sp>
+        <p:nvSpPr>
+          <p:cNvPr id="19" name="TextBox 18"/>
+          <p:cNvSpPr txBox="1"/>
+          <p:nvPr/>
+        </p:nvSpPr>
+        <p:spPr>
+          <a:xfrm>
+            <a:off x="9381744" y="2167128"/>
+            <a:ext cx="1828800" cy="274320"/>
+          </a:xfrm>
+          <a:prstGeom prst="rect">
+            <a:avLst/>
+          </a:prstGeom>
+          <a:noFill/>
+        </p:spPr>
+        <p:txBody>
+          <a:bodyPr wrap="square" lIns="0" rIns="0" tIns="0" bIns="0" anchor="t">
+            <a:spAutoFit/>
+          </a:bodyPr>
+          <a:lstStyle/>
+          <a:p>
+            <a:pPr algn="ctr"/>
+            <a:r>
+              <a:rPr sz="1600" b="1">
+                <a:solidFill>
+                  <a:srgbClr val="0B1B2B"/>
+                </a:solidFill>
+                <a:latin typeface="Manrope"/>
+              </a:rPr>
+              <a:t>Recipient wallet</a:t>
+            </a:r>
+          </a:p>
+        </p:txBody>
+      </p:sp>
+      <p:sp>
+        <p:nvSpPr>
+          <p:cNvPr id="20" name="TextBox 19"/>
+          <p:cNvSpPr txBox="1"/>
+          <p:nvPr/>
+        </p:nvSpPr>
+        <p:spPr>
+          <a:xfrm>
+            <a:off x="9381744" y="2578608"/>
+            <a:ext cx="1828800" cy="502920"/>
+          </a:xfrm>
+          <a:prstGeom prst="rect">
+            <a:avLst/>
+          </a:prstGeom>
+          <a:noFill/>
+        </p:spPr>
+        <p:txBody>
+          <a:bodyPr wrap="square" lIns="0" rIns="0" tIns="0" bIns="0" anchor="t">
+            <a:spAutoFit/>
+          </a:bodyPr>
+          <a:lstStyle/>
+          <a:p>
+            <a:pPr algn="ctr"/>
+            <a:r>
+              <a:rPr sz="1100" b="0">
+                <a:solidFill>
+                  <a:srgbClr val="51617A"/>
+                </a:solidFill>
+                <a:latin typeface="Manrope"/>
+              </a:rPr>
+              <a:t>Entered Stellar
+address</a:t>
+            </a:r>
+          </a:p>
+        </p:txBody>
+      </p:sp>
+      <p:sp>
+        <p:nvSpPr>
+          <p:cNvPr id="21" name="Rounded Rectangle 20"/>
+          <p:cNvSpPr/>
+          <p:nvPr/>
+        </p:nvSpPr>
+        <p:spPr>
+          <a:xfrm>
+            <a:off x="685800" y="3886200"/>
+            <a:ext cx="10808208" cy="1097280"/>
+          </a:xfrm>
+          <a:prstGeom prst="roundRect">
+            <a:avLst/>
+          </a:prstGeom>
+          <a:solidFill>
+            <a:srgbClr val="FFFFFF"/>
+          </a:solidFill>
+          <a:ln w="15240">
+            <a:solidFill>
+              <a:srgbClr val="9DCBEA"/>
+            </a:solidFill>
+            <a:prstDash val="dash"/>
+          </a:ln>
+        </p:spPr>
+        <p:style>
+          <a:lnRef idx="1">
+            <a:schemeClr val="accent1"/>
+          </a:lnRef>
+          <a:fillRef idx="3">
+            <a:schemeClr val="accent1"/>
+          </a:fillRef>
+          <a:effectRef idx="2">
+            <a:schemeClr val="accent1"/>
+          </a:effectRef>
+          <a:fontRef idx="minor">
+            <a:schemeClr val="lt1"/>
+          </a:fontRef>
+        </p:style>
+        <p:txBody>
+          <a:bodyPr rtlCol="0" anchor="ctr"/>
+          <a:lstStyle/>
+          <a:p>
+            <a:pPr algn="ctr"/>
+          </a:p>
+        </p:txBody>
+      </p:sp>
+      <p:sp>
+        <p:nvSpPr>
+          <p:cNvPr id="22" name="Rounded Rectangle 21"/>
+          <p:cNvSpPr/>
+          <p:nvPr/>
+        </p:nvSpPr>
+        <p:spPr>
+          <a:xfrm>
+            <a:off x="914400" y="4133087"/>
+            <a:ext cx="914400" cy="310896"/>
+          </a:xfrm>
+          <a:prstGeom prst="roundRect">
+            <a:avLst/>
+          </a:prstGeom>
+          <a:solidFill>
+            <a:srgbClr val="FFFFFF"/>
+          </a:solidFill>
+          <a:ln w="15240">
+            <a:solidFill>
+              <a:srgbClr val="9DCBEA"/>
+            </a:solidFill>
+            <a:prstDash val="dash"/>
+          </a:ln>
+        </p:spPr>
+        <p:style>
+          <a:lnRef idx="1">
+            <a:schemeClr val="accent1"/>
+          </a:lnRef>
+          <a:fillRef idx="3">
+            <a:schemeClr val="accent1"/>
+          </a:fillRef>
+          <a:effectRef idx="2">
+            <a:schemeClr val="accent1"/>
+          </a:effectRef>
+          <a:fontRef idx="minor">
+            <a:schemeClr val="lt1"/>
+          </a:fontRef>
+        </p:style>
+        <p:txBody>
+          <a:bodyPr rtlCol="0" anchor="ctr"/>
+          <a:lstStyle/>
+          <a:p>
+            <a:pPr algn="ctr"/>
+          </a:p>
+        </p:txBody>
+      </p:sp>
+      <p:sp>
+        <p:nvSpPr>
+          <p:cNvPr id="23" name="TextBox 22"/>
+          <p:cNvSpPr txBox="1"/>
+          <p:nvPr/>
+        </p:nvSpPr>
+        <p:spPr>
+          <a:xfrm>
+            <a:off x="914400" y="4151375"/>
+            <a:ext cx="914400" cy="228600"/>
+          </a:xfrm>
+          <a:prstGeom prst="rect">
+            <a:avLst/>
+          </a:prstGeom>
+          <a:noFill/>
+        </p:spPr>
+        <p:txBody>
+          <a:bodyPr wrap="square" lIns="0" rIns="0" tIns="0" bIns="0" anchor="t">
+            <a:spAutoFit/>
+          </a:bodyPr>
+          <a:lstStyle/>
+          <a:p>
+            <a:pPr algn="ctr"/>
+            <a:r>
+              <a:rPr sz="900" b="1">
+                <a:solidFill>
+                  <a:srgbClr val="0369A1"/>
+                </a:solidFill>
+                <a:latin typeface="Manrope"/>
+              </a:rPr>
+              <a:t>PLANNED</a:t>
+            </a:r>
+          </a:p>
+        </p:txBody>
+      </p:sp>
+      <p:sp>
+        <p:nvSpPr>
+          <p:cNvPr id="24" name="TextBox 23"/>
+          <p:cNvSpPr txBox="1"/>
+          <p:nvPr/>
+        </p:nvSpPr>
+        <p:spPr>
+          <a:xfrm>
+            <a:off x="2011680" y="4096512"/>
+            <a:ext cx="9098280" cy="438912"/>
+          </a:xfrm>
+          <a:prstGeom prst="rect">
+            <a:avLst/>
+          </a:prstGeom>
+          <a:noFill/>
+        </p:spPr>
+        <p:txBody>
+          <a:bodyPr wrap="square" lIns="0" rIns="0" tIns="0" bIns="0" anchor="t">
             <a:spAutoFit/>
           </a:bodyPr>
           <a:lstStyle/>
           <a:p>
             <a:pPr algn="l"/>
             <a:r>
-              <a:rPr sz="1800" b="1">
-                <a:solidFill>
-                  <a:srgbClr val="0284C7"/>
+              <a:rPr sz="1400" b="1">
+                <a:solidFill>
+                  <a:srgbClr val="0B1B2B"/>
                 </a:solidFill>
                 <a:latin typeface="Manrope"/>
               </a:rPr>
-              <a:t>FLOW</a:t>
-            </a:r>
-          </a:p>
-        </p:txBody>
-      </p:sp>
-      <p:sp>
-        <p:nvSpPr>
-          <p:cNvPr id="5" name="TextBox 4"/>
-          <p:cNvSpPr txBox="1"/>
-          <p:nvPr/>
-        </p:nvSpPr>
-        <p:spPr>
-          <a:xfrm>
-            <a:off x="640080" y="1005840"/>
-            <a:ext cx="10972800" cy="4937760"/>
-          </a:xfrm>
-          <a:prstGeom prst="rect">
-            <a:avLst/>
-          </a:prstGeom>
-          <a:noFill/>
-        </p:spPr>
-        <p:txBody>
-          <a:bodyPr wrap="square">
-            <a:spAutoFit/>
-          </a:bodyPr>
-          <a:lstStyle/>
-          <a:p>
-            <a:pPr algn="l"/>
-            <a:r>
-              <a:rPr sz="1800" b="0">
-                <a:solidFill>
-                  <a:srgbClr val="0B1B2B"/>
+              <a:t>Planned continuation: Stellar/provider deposit → licensed anchor → KYC → PHP cash-out → family member</a:t>
+            </a:r>
+          </a:p>
+        </p:txBody>
+      </p:sp>
+      <p:sp>
+        <p:nvSpPr>
+          <p:cNvPr id="25" name="TextBox 24"/>
+          <p:cNvSpPr txBox="1"/>
+          <p:nvPr/>
+        </p:nvSpPr>
+        <p:spPr>
+          <a:xfrm>
+            <a:off x="868680" y="5257800"/>
+            <a:ext cx="10424160" cy="320040"/>
+          </a:xfrm>
+          <a:prstGeom prst="rect">
+            <a:avLst/>
+          </a:prstGeom>
+          <a:noFill/>
+        </p:spPr>
+        <p:txBody>
+          <a:bodyPr wrap="square" lIns="0" rIns="0" tIns="0" bIns="0" anchor="t">
+            <a:spAutoFit/>
+          </a:bodyPr>
+          <a:lstStyle/>
+          <a:p>
+            <a:pPr algn="ctr"/>
+            <a:r>
+              <a:rPr sz="1200" b="0">
+                <a:solidFill>
+                  <a:srgbClr val="51617A"/>
                 </a:solidFill>
                 <a:latin typeface="Manrope"/>
               </a:rPr>
-              <a:t>• Sender → Freighter (signs schedule)
-•         → Soroban BaktiEscrow (release 1 month per call)
-•         → SEP-24 Anchor (USDC → local fiat, cash-pickup reference)
-•         → MoneyGram pickup point (parent collects cash)</a:t>
+              <a:t>Current product requires the recipient wallet address.</a:t>
+            </a:r>
+          </a:p>
+        </p:txBody>
+      </p:sp>
+      <p:sp>
+        <p:nvSpPr>
+          <p:cNvPr id="26" name="TextBox 25"/>
+          <p:cNvSpPr txBox="1"/>
+          <p:nvPr/>
+        </p:nvSpPr>
+        <p:spPr>
+          <a:xfrm>
+            <a:off x="868680" y="5623560"/>
+            <a:ext cx="10424160" cy="320040"/>
+          </a:xfrm>
+          <a:prstGeom prst="rect">
+            <a:avLst/>
+          </a:prstGeom>
+          <a:noFill/>
+        </p:spPr>
+        <p:txBody>
+          <a:bodyPr wrap="square" lIns="0" rIns="0" tIns="0" bIns="0" anchor="t">
+            <a:spAutoFit/>
+          </a:bodyPr>
+          <a:lstStyle/>
+          <a:p>
+            <a:pPr algn="ctr"/>
+            <a:r>
+              <a:rPr sz="1200" b="0">
+                <a:solidFill>
+                  <a:srgbClr val="51617A"/>
+                </a:solidFill>
+                <a:latin typeface="Manrope"/>
+              </a:rPr>
+              <a:t>No provider destination, pickup reference, or automatic monthly scheduler is wired.</a:t>
             </a:r>
           </a:p>
         </p:txBody>
@@ -4261,16 +7695,18 @@
         <p:spPr>
           <a:xfrm>
             <a:off x="0" y="0"/>
-            <a:ext cx="182880" cy="6858000"/>
+            <a:ext cx="12191695" cy="64008"/>
           </a:xfrm>
           <a:prstGeom prst="rect">
             <a:avLst/>
           </a:prstGeom>
           <a:solidFill>
-            <a:srgbClr val="0284C7"/>
+            <a:srgbClr val="0369A1"/>
           </a:solidFill>
-          <a:ln>
-            <a:noFill/>
+          <a:ln w="15240">
+            <a:solidFill>
+              <a:srgbClr val="0369A1"/>
+            </a:solidFill>
           </a:ln>
         </p:spPr>
         <p:style>
@@ -4297,23 +7733,130 @@
       </p:sp>
       <p:sp>
         <p:nvSpPr>
-          <p:cNvPr id="3" name="Rectangle 2"/>
+          <p:cNvPr id="3" name="TextBox 2"/>
+          <p:cNvSpPr txBox="1"/>
+          <p:nvPr/>
+        </p:nvSpPr>
+        <p:spPr>
+          <a:xfrm>
+            <a:off x="658368" y="310896"/>
+            <a:ext cx="9601200" cy="292608"/>
+          </a:xfrm>
+          <a:prstGeom prst="rect">
+            <a:avLst/>
+          </a:prstGeom>
+          <a:noFill/>
+        </p:spPr>
+        <p:txBody>
+          <a:bodyPr wrap="square" lIns="0" rIns="0" tIns="0" bIns="0" anchor="t">
+            <a:spAutoFit/>
+          </a:bodyPr>
+          <a:lstStyle/>
+          <a:p>
+            <a:pPr algn="l"/>
+            <a:r>
+              <a:rPr sz="1100" b="1">
+                <a:solidFill>
+                  <a:srgbClr val="0369A1"/>
+                </a:solidFill>
+                <a:latin typeface="Manrope"/>
+              </a:rPr>
+              <a:t>WHY STELLAR; WHY THE PROVIDER PATH</a:t>
+            </a:r>
+          </a:p>
+        </p:txBody>
+      </p:sp>
+      <p:sp>
+        <p:nvSpPr>
+          <p:cNvPr id="4" name="TextBox 3"/>
+          <p:cNvSpPr txBox="1"/>
+          <p:nvPr/>
+        </p:nvSpPr>
+        <p:spPr>
+          <a:xfrm>
+            <a:off x="658368" y="667512"/>
+            <a:ext cx="10789920" cy="658368"/>
+          </a:xfrm>
+          <a:prstGeom prst="rect">
+            <a:avLst/>
+          </a:prstGeom>
+          <a:noFill/>
+        </p:spPr>
+        <p:txBody>
+          <a:bodyPr wrap="square" lIns="0" rIns="0" tIns="0" bIns="0" anchor="t">
+            <a:spAutoFit/>
+          </a:bodyPr>
+          <a:lstStyle/>
+          <a:p>
+            <a:pPr algn="l"/>
+            <a:r>
+              <a:rPr sz="2700" b="1">
+                <a:solidFill>
+                  <a:srgbClr val="0B1B2B"/>
+                </a:solidFill>
+                <a:latin typeface="Fraunces"/>
+              </a:rPr>
+              <a:t>Verifiable rails now; regulated last mile next</a:t>
+            </a:r>
+          </a:p>
+        </p:txBody>
+      </p:sp>
+      <p:sp>
+        <p:nvSpPr>
+          <p:cNvPr id="5" name="TextBox 4"/>
+          <p:cNvSpPr txBox="1"/>
+          <p:nvPr/>
+        </p:nvSpPr>
+        <p:spPr>
+          <a:xfrm>
+            <a:off x="10927080" y="292608"/>
+            <a:ext cx="566928" cy="228600"/>
+          </a:xfrm>
+          <a:prstGeom prst="rect">
+            <a:avLst/>
+          </a:prstGeom>
+          <a:noFill/>
+        </p:spPr>
+        <p:txBody>
+          <a:bodyPr wrap="square" lIns="0" rIns="0" tIns="0" bIns="0" anchor="t">
+            <a:spAutoFit/>
+          </a:bodyPr>
+          <a:lstStyle/>
+          <a:p>
+            <a:pPr algn="r"/>
+            <a:r>
+              <a:rPr sz="900" b="0">
+                <a:solidFill>
+                  <a:srgbClr val="51617A"/>
+                </a:solidFill>
+                <a:latin typeface="Manrope"/>
+              </a:rPr>
+              <a:t>7 / 9</a:t>
+            </a:r>
+          </a:p>
+        </p:txBody>
+      </p:sp>
+      <p:sp>
+        <p:nvSpPr>
+          <p:cNvPr id="6" name="Rounded Rectangle 5"/>
           <p:cNvSpPr/>
           <p:nvPr/>
         </p:nvSpPr>
         <p:spPr>
           <a:xfrm>
-            <a:off x="0" y="6217920"/>
-            <a:ext cx="12188952" cy="640080"/>
-          </a:xfrm>
-          <a:prstGeom prst="rect">
+            <a:off x="685800" y="1508760"/>
+            <a:ext cx="5230368" cy="4389120"/>
+          </a:xfrm>
+          <a:prstGeom prst="roundRect">
             <a:avLst/>
           </a:prstGeom>
           <a:solidFill>
-            <a:srgbClr val="0284C7"/>
+            <a:srgbClr val="E6F3FB"/>
           </a:solidFill>
-          <a:ln>
-            <a:noFill/>
+          <a:ln w="15240">
+            <a:solidFill>
+              <a:srgbClr val="9DCBEA"/>
+            </a:solidFill>
           </a:ln>
         </p:spPr>
         <p:style>
@@ -4340,14 +7883,49 @@
       </p:sp>
       <p:sp>
         <p:nvSpPr>
-          <p:cNvPr id="4" name="TextBox 3"/>
-          <p:cNvSpPr txBox="1"/>
-          <p:nvPr/>
-        </p:nvSpPr>
-        <p:spPr>
-          <a:xfrm>
-            <a:off x="640080" y="320040"/>
-            <a:ext cx="10972800" cy="640080"/>
+          <p:cNvPr id="7" name="TextBox 6"/>
+          <p:cNvSpPr txBox="1"/>
+          <p:nvPr/>
+        </p:nvSpPr>
+        <p:spPr>
+          <a:xfrm>
+            <a:off x="932688" y="1792224"/>
+            <a:ext cx="2286000" cy="274320"/>
+          </a:xfrm>
+          <a:prstGeom prst="rect">
+            <a:avLst/>
+          </a:prstGeom>
+          <a:noFill/>
+        </p:spPr>
+        <p:txBody>
+          <a:bodyPr wrap="square" lIns="0" rIns="0" tIns="0" bIns="0" anchor="t">
+            <a:spAutoFit/>
+          </a:bodyPr>
+          <a:lstStyle/>
+          <a:p>
+            <a:pPr algn="l"/>
+            <a:r>
+              <a:rPr sz="1200" b="1">
+                <a:solidFill>
+                  <a:srgbClr val="0369A1"/>
+                </a:solidFill>
+                <a:latin typeface="Manrope"/>
+              </a:rPr>
+              <a:t>WHY STELLAR NOW</a:t>
+            </a:r>
+          </a:p>
+        </p:txBody>
+      </p:sp>
+      <p:sp>
+        <p:nvSpPr>
+          <p:cNvPr id="8" name="TextBox 7"/>
+          <p:cNvSpPr txBox="1"/>
+          <p:nvPr/>
+        </p:nvSpPr>
+        <p:spPr>
+          <a:xfrm>
+            <a:off x="932688" y="2212848"/>
+            <a:ext cx="4617720" cy="3246120"/>
           </a:xfrm>
           <a:prstGeom prst="rect">
             <a:avLst/>
@@ -4360,29 +7938,193 @@
           </a:bodyPr>
           <a:lstStyle/>
           <a:p>
+            <a:pPr>
+              <a:lnSpc>
+                <a:spcPct val="105000"/>
+              </a:lnSpc>
+              <a:spcAft>
+                <a:spcPts val="700"/>
+              </a:spcAft>
+              <a:defRPr sz="1350">
+                <a:solidFill>
+                  <a:srgbClr val="51617A"/>
+                </a:solidFill>
+                <a:latin typeface="Manrope"/>
+              </a:defRPr>
+            </a:pPr>
+            <a:r>
+              <a:t>• Freighter keeps transaction signing with the sender.</a:t>
+            </a:r>
+          </a:p>
+          <a:p>
+            <a:pPr>
+              <a:lnSpc>
+                <a:spcPct val="105000"/>
+              </a:lnSpc>
+              <a:spcAft>
+                <a:spcPts val="700"/>
+              </a:spcAft>
+              <a:defRPr sz="1350">
+                <a:solidFill>
+                  <a:srgbClr val="51617A"/>
+                </a:solidFill>
+                <a:latin typeface="Manrope"/>
+              </a:defRPr>
+            </a:pPr>
+            <a:r>
+              <a:t>• Horizon and Soroban RPC make the implemented transfers inspectable.</a:t>
+            </a:r>
+          </a:p>
+          <a:p>
+            <a:pPr>
+              <a:lnSpc>
+                <a:spcPct val="105000"/>
+              </a:lnSpc>
+              <a:spcAft>
+                <a:spcPts val="700"/>
+              </a:spcAft>
+              <a:defRPr sz="1350">
+                <a:solidFill>
+                  <a:srgbClr val="51617A"/>
+                </a:solidFill>
+                <a:latin typeface="Manrope"/>
+              </a:defRPr>
+            </a:pPr>
+            <a:r>
+              <a:t>• Soroban demonstrates pre-funded XLM release rules.</a:t>
+            </a:r>
+          </a:p>
+          <a:p>
+            <a:pPr>
+              <a:lnSpc>
+                <a:spcPct val="105000"/>
+              </a:lnSpc>
+              <a:spcAft>
+                <a:spcPts val="700"/>
+              </a:spcAft>
+              <a:defRPr sz="1350">
+                <a:solidFill>
+                  <a:srgbClr val="51617A"/>
+                </a:solidFill>
+                <a:latin typeface="Manrope"/>
+              </a:defRPr>
+            </a:pPr>
+            <a:r>
+              <a:t>• Stellar anchors connect network assets to off-chain rails.</a:t>
+            </a:r>
+          </a:p>
+          <a:p>
+            <a:pPr>
+              <a:lnSpc>
+                <a:spcPct val="105000"/>
+              </a:lnSpc>
+              <a:spcAft>
+                <a:spcPts val="700"/>
+              </a:spcAft>
+              <a:defRPr sz="1350">
+                <a:solidFill>
+                  <a:srgbClr val="51617A"/>
+                </a:solidFill>
+                <a:latin typeface="Manrope"/>
+              </a:defRPr>
+            </a:pPr>
+            <a:r>
+              <a:t>• SEP-24 is a hosted interactive deposit/withdrawal flow with anchor authentication and KYC.</a:t>
+            </a:r>
+          </a:p>
+        </p:txBody>
+      </p:sp>
+      <p:sp>
+        <p:nvSpPr>
+          <p:cNvPr id="9" name="Rounded Rectangle 8"/>
+          <p:cNvSpPr/>
+          <p:nvPr/>
+        </p:nvSpPr>
+        <p:spPr>
+          <a:xfrm>
+            <a:off x="6263640" y="1508760"/>
+            <a:ext cx="5230368" cy="4389120"/>
+          </a:xfrm>
+          <a:prstGeom prst="roundRect">
+            <a:avLst/>
+          </a:prstGeom>
+          <a:solidFill>
+            <a:srgbClr val="FFFFFF"/>
+          </a:solidFill>
+          <a:ln w="15240">
+            <a:solidFill>
+              <a:srgbClr val="9DCBEA"/>
+            </a:solidFill>
+            <a:prstDash val="dash"/>
+          </a:ln>
+        </p:spPr>
+        <p:style>
+          <a:lnRef idx="1">
+            <a:schemeClr val="accent1"/>
+          </a:lnRef>
+          <a:fillRef idx="3">
+            <a:schemeClr val="accent1"/>
+          </a:fillRef>
+          <a:effectRef idx="2">
+            <a:schemeClr val="accent1"/>
+          </a:effectRef>
+          <a:fontRef idx="minor">
+            <a:schemeClr val="lt1"/>
+          </a:fontRef>
+        </p:style>
+        <p:txBody>
+          <a:bodyPr rtlCol="0" anchor="ctr"/>
+          <a:lstStyle/>
+          <a:p>
+            <a:pPr algn="ctr"/>
+          </a:p>
+        </p:txBody>
+      </p:sp>
+      <p:sp>
+        <p:nvSpPr>
+          <p:cNvPr id="10" name="TextBox 9"/>
+          <p:cNvSpPr txBox="1"/>
+          <p:nvPr/>
+        </p:nvSpPr>
+        <p:spPr>
+          <a:xfrm>
+            <a:off x="6510528" y="1792224"/>
+            <a:ext cx="2286000" cy="274320"/>
+          </a:xfrm>
+          <a:prstGeom prst="rect">
+            <a:avLst/>
+          </a:prstGeom>
+          <a:noFill/>
+        </p:spPr>
+        <p:txBody>
+          <a:bodyPr wrap="square" lIns="0" rIns="0" tIns="0" bIns="0" anchor="t">
+            <a:spAutoFit/>
+          </a:bodyPr>
+          <a:lstStyle/>
+          <a:p>
             <a:pPr algn="l"/>
             <a:r>
-              <a:rPr sz="1800" b="1">
-                <a:solidFill>
-                  <a:srgbClr val="0284C7"/>
+              <a:rPr sz="1200" b="1">
+                <a:solidFill>
+                  <a:srgbClr val="0369A1"/>
                 </a:solidFill>
                 <a:latin typeface="Manrope"/>
               </a:rPr>
-              <a:t>WHY STELLAR</a:t>
-            </a:r>
-          </a:p>
-        </p:txBody>
-      </p:sp>
-      <p:sp>
-        <p:nvSpPr>
-          <p:cNvPr id="5" name="TextBox 4"/>
-          <p:cNvSpPr txBox="1"/>
-          <p:nvPr/>
-        </p:nvSpPr>
-        <p:spPr>
-          <a:xfrm>
-            <a:off x="640080" y="1005840"/>
-            <a:ext cx="10972800" cy="4937760"/>
+              <a:t>PROVIDER PATH</a:t>
+            </a:r>
+          </a:p>
+        </p:txBody>
+      </p:sp>
+      <p:sp>
+        <p:nvSpPr>
+          <p:cNvPr id="11" name="TextBox 10"/>
+          <p:cNvSpPr txBox="1"/>
+          <p:nvPr/>
+        </p:nvSpPr>
+        <p:spPr>
+          <a:xfrm>
+            <a:off x="6510528" y="2212848"/>
+            <a:ext cx="4617720" cy="3246120"/>
           </a:xfrm>
           <a:prstGeom prst="rect">
             <a:avLst/>
@@ -4395,20 +8137,76 @@
           </a:bodyPr>
           <a:lstStyle/>
           <a:p>
+            <a:pPr>
+              <a:lnSpc>
+                <a:spcPct val="105000"/>
+              </a:lnSpc>
+              <a:spcAft>
+                <a:spcPts val="700"/>
+              </a:spcAft>
+              <a:defRPr sz="1250">
+                <a:solidFill>
+                  <a:srgbClr val="51617A"/>
+                </a:solidFill>
+                <a:latin typeface="Manrope"/>
+              </a:defRPr>
+            </a:pPr>
+            <a:r>
+              <a:t>• MoneyGram Ramps is a target path, not a partner: integration requires allowlisting, SEP-1, SEP-10, SEP-24, KYC fields, testing/certification, KYB/compliance, and agreements.</a:t>
+            </a:r>
+          </a:p>
+          <a:p>
+            <a:pPr>
+              <a:lnSpc>
+                <a:spcPct val="105000"/>
+              </a:lnSpc>
+              <a:spcAft>
+                <a:spcPts val="700"/>
+              </a:spcAft>
+              <a:defRPr sz="1250">
+                <a:solidFill>
+                  <a:srgbClr val="51617A"/>
+                </a:solidFill>
+                <a:latin typeface="Manrope"/>
+              </a:defRPr>
+            </a:pPr>
+            <a:r>
+              <a:t>• Published MoneyGram off-ramp range: 5–2,500 USDC. Malaysia and Philippines are listed cash-out only; this does not prove a MY salary cash-in route.</a:t>
+            </a:r>
+          </a:p>
+        </p:txBody>
+      </p:sp>
+      <p:sp>
+        <p:nvSpPr>
+          <p:cNvPr id="12" name="TextBox 11"/>
+          <p:cNvSpPr txBox="1"/>
+          <p:nvPr/>
+        </p:nvSpPr>
+        <p:spPr>
+          <a:xfrm>
+            <a:off x="685800" y="6108192"/>
+            <a:ext cx="10789920" cy="201168"/>
+          </a:xfrm>
+          <a:prstGeom prst="rect">
+            <a:avLst/>
+          </a:prstGeom>
+          <a:noFill/>
+        </p:spPr>
+        <p:txBody>
+          <a:bodyPr wrap="square" lIns="0" rIns="0" tIns="0" bIns="0" anchor="t">
+            <a:spAutoFit/>
+          </a:bodyPr>
+          <a:lstStyle/>
+          <a:p>
             <a:pPr algn="l"/>
             <a:r>
-              <a:rPr sz="1800" b="0">
-                <a:solidFill>
-                  <a:srgbClr val="0B1B2B"/>
+              <a:rPr sz="850" b="0">
+                <a:solidFill>
+                  <a:srgbClr val="51617A"/>
                 </a:solidFill>
                 <a:latin typeface="Manrope"/>
               </a:rPr>
-              <a:t>• Only chain where the last mile ends in cash.
-• Sub-cent fees: a $25 allowance is not eaten by rails ($0.0000027 per tx).
-• USDC on Stellar is natively issued by Circle — no bridged assets, no counterparty risk.
-• Soroban escrow: permissionless keeper release, auditable on-chain.
-• SEP-10 auth, SEP-23 muxed accounts, SEP-24 anchor off-ramp — standardized protocol, not proprietary lock-in.
-• Source: stellar.org/developers · stellar.org/case-studies/moneygram</a:t>
+              <a:t>Sources: Stellar anchors/SEP-24 docs; MoneyGram Ramps integration docs</a:t>
             </a:r>
           </a:p>
         </p:txBody>
@@ -4448,16 +8246,18 @@
         <p:spPr>
           <a:xfrm>
             <a:off x="0" y="0"/>
-            <a:ext cx="182880" cy="6858000"/>
+            <a:ext cx="12191695" cy="64008"/>
           </a:xfrm>
           <a:prstGeom prst="rect">
             <a:avLst/>
           </a:prstGeom>
           <a:solidFill>
-            <a:srgbClr val="0284C7"/>
+            <a:srgbClr val="0369A1"/>
           </a:solidFill>
-          <a:ln>
-            <a:noFill/>
+          <a:ln w="15240">
+            <a:solidFill>
+              <a:srgbClr val="0369A1"/>
+            </a:solidFill>
           </a:ln>
         </p:spPr>
         <p:style>
@@ -4484,23 +8284,130 @@
       </p:sp>
       <p:sp>
         <p:nvSpPr>
-          <p:cNvPr id="3" name="Rectangle 2"/>
+          <p:cNvPr id="3" name="TextBox 2"/>
+          <p:cNvSpPr txBox="1"/>
+          <p:nvPr/>
+        </p:nvSpPr>
+        <p:spPr>
+          <a:xfrm>
+            <a:off x="658368" y="310896"/>
+            <a:ext cx="9601200" cy="292608"/>
+          </a:xfrm>
+          <a:prstGeom prst="rect">
+            <a:avLst/>
+          </a:prstGeom>
+          <a:noFill/>
+        </p:spPr>
+        <p:txBody>
+          <a:bodyPr wrap="square" lIns="0" rIns="0" tIns="0" bIns="0" anchor="t">
+            <a:spAutoFit/>
+          </a:bodyPr>
+          <a:lstStyle/>
+          <a:p>
+            <a:pPr algn="l"/>
+            <a:r>
+              <a:rPr sz="1100" b="1">
+                <a:solidFill>
+                  <a:srgbClr val="0369A1"/>
+                </a:solidFill>
+                <a:latin typeface="Manrope"/>
+              </a:rPr>
+              <a:t>BUSINESS MODEL + GTM HYPOTHESES — UNVALIDATED</a:t>
+            </a:r>
+          </a:p>
+        </p:txBody>
+      </p:sp>
+      <p:sp>
+        <p:nvSpPr>
+          <p:cNvPr id="4" name="TextBox 3"/>
+          <p:cNvSpPr txBox="1"/>
+          <p:nvPr/>
+        </p:nvSpPr>
+        <p:spPr>
+          <a:xfrm>
+            <a:off x="658368" y="667512"/>
+            <a:ext cx="10789920" cy="658368"/>
+          </a:xfrm>
+          <a:prstGeom prst="rect">
+            <a:avLst/>
+          </a:prstGeom>
+          <a:noFill/>
+        </p:spPr>
+        <p:txBody>
+          <a:bodyPr wrap="square" lIns="0" rIns="0" tIns="0" bIns="0" anchor="t">
+            <a:spAutoFit/>
+          </a:bodyPr>
+          <a:lstStyle/>
+          <a:p>
+            <a:pPr algn="l"/>
+            <a:r>
+              <a:rPr sz="2700" b="1">
+                <a:solidFill>
+                  <a:srgbClr val="0B1B2B"/>
+                </a:solidFill>
+                <a:latin typeface="Fraunces"/>
+              </a:rPr>
+              <a:t>Hypotheses to test — not forecasts</a:t>
+            </a:r>
+          </a:p>
+        </p:txBody>
+      </p:sp>
+      <p:sp>
+        <p:nvSpPr>
+          <p:cNvPr id="5" name="TextBox 4"/>
+          <p:cNvSpPr txBox="1"/>
+          <p:nvPr/>
+        </p:nvSpPr>
+        <p:spPr>
+          <a:xfrm>
+            <a:off x="10927080" y="292608"/>
+            <a:ext cx="566928" cy="228600"/>
+          </a:xfrm>
+          <a:prstGeom prst="rect">
+            <a:avLst/>
+          </a:prstGeom>
+          <a:noFill/>
+        </p:spPr>
+        <p:txBody>
+          <a:bodyPr wrap="square" lIns="0" rIns="0" tIns="0" bIns="0" anchor="t">
+            <a:spAutoFit/>
+          </a:bodyPr>
+          <a:lstStyle/>
+          <a:p>
+            <a:pPr algn="r"/>
+            <a:r>
+              <a:rPr sz="900" b="0">
+                <a:solidFill>
+                  <a:srgbClr val="51617A"/>
+                </a:solidFill>
+                <a:latin typeface="Manrope"/>
+              </a:rPr>
+              <a:t>8 / 9</a:t>
+            </a:r>
+          </a:p>
+        </p:txBody>
+      </p:sp>
+      <p:sp>
+        <p:nvSpPr>
+          <p:cNvPr id="6" name="Rounded Rectangle 5"/>
           <p:cNvSpPr/>
           <p:nvPr/>
         </p:nvSpPr>
         <p:spPr>
           <a:xfrm>
-            <a:off x="0" y="6217920"/>
-            <a:ext cx="12188952" cy="640080"/>
-          </a:xfrm>
-          <a:prstGeom prst="rect">
+            <a:off x="685800" y="1508760"/>
+            <a:ext cx="5230368" cy="4389120"/>
+          </a:xfrm>
+          <a:prstGeom prst="roundRect">
             <a:avLst/>
           </a:prstGeom>
           <a:solidFill>
-            <a:srgbClr val="0284C7"/>
+            <a:srgbClr val="FDF1E0"/>
           </a:solidFill>
-          <a:ln>
-            <a:noFill/>
+          <a:ln w="15240">
+            <a:solidFill>
+              <a:srgbClr val="FDF1E0"/>
+            </a:solidFill>
           </a:ln>
         </p:spPr>
         <p:style>
@@ -4527,14 +8434,94 @@
       </p:sp>
       <p:sp>
         <p:nvSpPr>
-          <p:cNvPr id="4" name="TextBox 3"/>
-          <p:cNvSpPr txBox="1"/>
-          <p:nvPr/>
-        </p:nvSpPr>
-        <p:spPr>
-          <a:xfrm>
-            <a:off x="640080" y="320040"/>
-            <a:ext cx="10972800" cy="640080"/>
+          <p:cNvPr id="7" name="Rounded Rectangle 6"/>
+          <p:cNvSpPr/>
+          <p:nvPr/>
+        </p:nvSpPr>
+        <p:spPr>
+          <a:xfrm>
+            <a:off x="932688" y="1755648"/>
+            <a:ext cx="2176272" cy="310896"/>
+          </a:xfrm>
+          <a:prstGeom prst="roundRect">
+            <a:avLst/>
+          </a:prstGeom>
+          <a:solidFill>
+            <a:srgbClr val="E6F3FB"/>
+          </a:solidFill>
+          <a:ln w="15240">
+            <a:solidFill>
+              <a:srgbClr val="9DCBEA"/>
+            </a:solidFill>
+          </a:ln>
+        </p:spPr>
+        <p:style>
+          <a:lnRef idx="1">
+            <a:schemeClr val="accent1"/>
+          </a:lnRef>
+          <a:fillRef idx="3">
+            <a:schemeClr val="accent1"/>
+          </a:fillRef>
+          <a:effectRef idx="2">
+            <a:schemeClr val="accent1"/>
+          </a:effectRef>
+          <a:fontRef idx="minor">
+            <a:schemeClr val="lt1"/>
+          </a:fontRef>
+        </p:style>
+        <p:txBody>
+          <a:bodyPr rtlCol="0" anchor="ctr"/>
+          <a:lstStyle/>
+          <a:p>
+            <a:pPr algn="ctr"/>
+          </a:p>
+        </p:txBody>
+      </p:sp>
+      <p:sp>
+        <p:nvSpPr>
+          <p:cNvPr id="8" name="TextBox 7"/>
+          <p:cNvSpPr txBox="1"/>
+          <p:nvPr/>
+        </p:nvSpPr>
+        <p:spPr>
+          <a:xfrm>
+            <a:off x="932688" y="1773936"/>
+            <a:ext cx="2176272" cy="228600"/>
+          </a:xfrm>
+          <a:prstGeom prst="rect">
+            <a:avLst/>
+          </a:prstGeom>
+          <a:noFill/>
+        </p:spPr>
+        <p:txBody>
+          <a:bodyPr wrap="square" lIns="0" rIns="0" tIns="0" bIns="0" anchor="t">
+            <a:spAutoFit/>
+          </a:bodyPr>
+          <a:lstStyle/>
+          <a:p>
+            <a:pPr algn="ctr"/>
+            <a:r>
+              <a:rPr sz="900" b="1">
+                <a:solidFill>
+                  <a:srgbClr val="0369A1"/>
+                </a:solidFill>
+                <a:latin typeface="Manrope"/>
+              </a:rPr>
+              <a:t>UNVALIDATED BUSINESS MODEL</a:t>
+            </a:r>
+          </a:p>
+        </p:txBody>
+      </p:sp>
+      <p:sp>
+        <p:nvSpPr>
+          <p:cNvPr id="9" name="TextBox 8"/>
+          <p:cNvSpPr txBox="1"/>
+          <p:nvPr/>
+        </p:nvSpPr>
+        <p:spPr>
+          <a:xfrm>
+            <a:off x="932688" y="2267712"/>
+            <a:ext cx="4617720" cy="3154680"/>
           </a:xfrm>
           <a:prstGeom prst="rect">
             <a:avLst/>
@@ -4547,29 +8534,218 @@
           </a:bodyPr>
           <a:lstStyle/>
           <a:p>
-            <a:pPr algn="l"/>
-            <a:r>
-              <a:rPr sz="1800" b="1">
-                <a:solidFill>
-                  <a:srgbClr val="0284C7"/>
+            <a:pPr>
+              <a:lnSpc>
+                <a:spcPct val="105000"/>
+              </a:lnSpc>
+              <a:spcAft>
+                <a:spcPts val="700"/>
+              </a:spcAft>
+              <a:defRPr sz="1400">
+                <a:solidFill>
+                  <a:srgbClr val="51617A"/>
+                </a:solidFill>
+                <a:latin typeface="Manrope"/>
+              </a:defRPr>
+            </a:pPr>
+            <a:r>
+              <a:t>• Transparent sender service fee within a licensed provider quote</a:t>
+            </a:r>
+          </a:p>
+          <a:p>
+            <a:pPr>
+              <a:lnSpc>
+                <a:spcPct val="105000"/>
+              </a:lnSpc>
+              <a:spcAft>
+                <a:spcPts val="700"/>
+              </a:spcAft>
+              <a:defRPr sz="1400">
+                <a:solidFill>
+                  <a:srgbClr val="51617A"/>
+                </a:solidFill>
+                <a:latin typeface="Manrope"/>
+              </a:defRPr>
+            </a:pPr>
+            <a:r>
+              <a:t>• Provider referral/revenue share where permitted</a:t>
+            </a:r>
+          </a:p>
+          <a:p>
+            <a:pPr>
+              <a:lnSpc>
+                <a:spcPct val="105000"/>
+              </a:lnSpc>
+              <a:spcAft>
+                <a:spcPts val="700"/>
+              </a:spcAft>
+              <a:defRPr sz="1400">
+                <a:solidFill>
+                  <a:srgbClr val="51617A"/>
+                </a:solidFill>
+                <a:latin typeface="Manrope"/>
+              </a:defRPr>
+            </a:pPr>
+            <a:r>
+              <a:t>• Employer, cooperative, or worker-community distribution</a:t>
+            </a:r>
+          </a:p>
+          <a:p>
+            <a:pPr>
+              <a:lnSpc>
+                <a:spcPct val="105000"/>
+              </a:lnSpc>
+              <a:spcAft>
+                <a:spcPts val="700"/>
+              </a:spcAft>
+              <a:defRPr sz="1400">
+                <a:solidFill>
+                  <a:srgbClr val="51617A"/>
+                </a:solidFill>
+                <a:latin typeface="Manrope"/>
+              </a:defRPr>
+            </a:pPr>
+            <a:r>
+              <a:t>• No validated price, take rate, margin, or unit economics</a:t>
+            </a:r>
+          </a:p>
+        </p:txBody>
+      </p:sp>
+      <p:sp>
+        <p:nvSpPr>
+          <p:cNvPr id="10" name="Rounded Rectangle 9"/>
+          <p:cNvSpPr/>
+          <p:nvPr/>
+        </p:nvSpPr>
+        <p:spPr>
+          <a:xfrm>
+            <a:off x="6263640" y="1508760"/>
+            <a:ext cx="5230368" cy="4389120"/>
+          </a:xfrm>
+          <a:prstGeom prst="roundRect">
+            <a:avLst/>
+          </a:prstGeom>
+          <a:solidFill>
+            <a:srgbClr val="FFFFFF"/>
+          </a:solidFill>
+          <a:ln w="15240">
+            <a:solidFill>
+              <a:srgbClr val="DBE3EE"/>
+            </a:solidFill>
+          </a:ln>
+        </p:spPr>
+        <p:style>
+          <a:lnRef idx="1">
+            <a:schemeClr val="accent1"/>
+          </a:lnRef>
+          <a:fillRef idx="3">
+            <a:schemeClr val="accent1"/>
+          </a:fillRef>
+          <a:effectRef idx="2">
+            <a:schemeClr val="accent1"/>
+          </a:effectRef>
+          <a:fontRef idx="minor">
+            <a:schemeClr val="lt1"/>
+          </a:fontRef>
+        </p:style>
+        <p:txBody>
+          <a:bodyPr rtlCol="0" anchor="ctr"/>
+          <a:lstStyle/>
+          <a:p>
+            <a:pPr algn="ctr"/>
+          </a:p>
+        </p:txBody>
+      </p:sp>
+      <p:sp>
+        <p:nvSpPr>
+          <p:cNvPr id="11" name="Rounded Rectangle 10"/>
+          <p:cNvSpPr/>
+          <p:nvPr/>
+        </p:nvSpPr>
+        <p:spPr>
+          <a:xfrm>
+            <a:off x="6510528" y="1755648"/>
+            <a:ext cx="1572768" cy="310896"/>
+          </a:xfrm>
+          <a:prstGeom prst="roundRect">
+            <a:avLst/>
+          </a:prstGeom>
+          <a:solidFill>
+            <a:srgbClr val="E6F3FB"/>
+          </a:solidFill>
+          <a:ln w="15240">
+            <a:solidFill>
+              <a:srgbClr val="9DCBEA"/>
+            </a:solidFill>
+          </a:ln>
+        </p:spPr>
+        <p:style>
+          <a:lnRef idx="1">
+            <a:schemeClr val="accent1"/>
+          </a:lnRef>
+          <a:fillRef idx="3">
+            <a:schemeClr val="accent1"/>
+          </a:fillRef>
+          <a:effectRef idx="2">
+            <a:schemeClr val="accent1"/>
+          </a:effectRef>
+          <a:fontRef idx="minor">
+            <a:schemeClr val="lt1"/>
+          </a:fontRef>
+        </p:style>
+        <p:txBody>
+          <a:bodyPr rtlCol="0" anchor="ctr"/>
+          <a:lstStyle/>
+          <a:p>
+            <a:pPr algn="ctr"/>
+          </a:p>
+        </p:txBody>
+      </p:sp>
+      <p:sp>
+        <p:nvSpPr>
+          <p:cNvPr id="12" name="TextBox 11"/>
+          <p:cNvSpPr txBox="1"/>
+          <p:nvPr/>
+        </p:nvSpPr>
+        <p:spPr>
+          <a:xfrm>
+            <a:off x="6510528" y="1773936"/>
+            <a:ext cx="1572768" cy="228600"/>
+          </a:xfrm>
+          <a:prstGeom prst="rect">
+            <a:avLst/>
+          </a:prstGeom>
+          <a:noFill/>
+        </p:spPr>
+        <p:txBody>
+          <a:bodyPr wrap="square" lIns="0" rIns="0" tIns="0" bIns="0" anchor="t">
+            <a:spAutoFit/>
+          </a:bodyPr>
+          <a:lstStyle/>
+          <a:p>
+            <a:pPr algn="ctr"/>
+            <a:r>
+              <a:rPr sz="900" b="1">
+                <a:solidFill>
+                  <a:srgbClr val="0369A1"/>
                 </a:solidFill>
                 <a:latin typeface="Manrope"/>
               </a:rPr>
-              <a:t>LIVE PROOF</a:t>
-            </a:r>
-          </a:p>
-        </p:txBody>
-      </p:sp>
-      <p:sp>
-        <p:nvSpPr>
-          <p:cNvPr id="5" name="TextBox 4"/>
-          <p:cNvSpPr txBox="1"/>
-          <p:nvPr/>
-        </p:nvSpPr>
-        <p:spPr>
-          <a:xfrm>
-            <a:off x="640080" y="1005840"/>
-            <a:ext cx="10972800" cy="4937760"/>
+              <a:t>GTM EXPERIMENTS</a:t>
+            </a:r>
+          </a:p>
+        </p:txBody>
+      </p:sp>
+      <p:sp>
+        <p:nvSpPr>
+          <p:cNvPr id="13" name="TextBox 12"/>
+          <p:cNvSpPr txBox="1"/>
+          <p:nvPr/>
+        </p:nvSpPr>
+        <p:spPr>
+          <a:xfrm>
+            <a:off x="6510528" y="2267712"/>
+            <a:ext cx="4617720" cy="3154680"/>
           </a:xfrm>
           <a:prstGeom prst="rect">
             <a:avLst/>
@@ -4582,20 +8758,98 @@
           </a:bodyPr>
           <a:lstStyle/>
           <a:p>
-            <a:pPr algn="l"/>
-            <a:r>
-              <a:rPr sz="1800" b="0">
-                <a:solidFill>
-                  <a:srgbClr val="0B1B2B"/>
-                </a:solidFill>
-                <a:latin typeface="Manrope"/>
-              </a:rPr>
-              <a:t>• Not a mockup. A real mainnet payout.
-• Live app: https://bakti-stellar.vercel.app
-• Soroban contract (mainnet): CBVAZDK2GAX5MJ7SSSQKRLY33TO7Q6DG3ZGZK6WMZSGI63XRMIR2CTHR
-• On-chain release: https://stellar.expert/explorer/public/tx/cfa17a939f5cd0c90bc674d7cee61f0f4a67ed4c2f11ab3c789b0e3ad0c419d2
-• Sign once. Watch the payout flip Due now → Cash ready.
-• Verify on stellar.expert — real, permanent receipt.</a:t>
+            <a:pPr>
+              <a:lnSpc>
+                <a:spcPct val="105000"/>
+              </a:lnSpc>
+              <a:spcAft>
+                <a:spcPts val="700"/>
+              </a:spcAft>
+              <a:defRPr sz="1350">
+                <a:solidFill>
+                  <a:srgbClr val="51617A"/>
+                </a:solidFill>
+                <a:latin typeface="Manrope"/>
+              </a:defRPr>
+            </a:pPr>
+            <a:r>
+              <a:t>• Interview Filipino workers in Malaysia and family recipients</a:t>
+            </a:r>
+          </a:p>
+          <a:p>
+            <a:pPr>
+              <a:lnSpc>
+                <a:spcPct val="105000"/>
+              </a:lnSpc>
+              <a:spcAft>
+                <a:spcPts val="700"/>
+              </a:spcAft>
+              <a:defRPr sz="1350">
+                <a:solidFill>
+                  <a:srgbClr val="51617A"/>
+                </a:solidFill>
+                <a:latin typeface="Manrope"/>
+              </a:defRPr>
+            </a:pPr>
+            <a:r>
+              <a:t>• Test planning/reminder value before automation</a:t>
+            </a:r>
+          </a:p>
+          <a:p>
+            <a:pPr>
+              <a:lnSpc>
+                <a:spcPct val="105000"/>
+              </a:lnSpc>
+              <a:spcAft>
+                <a:spcPts val="700"/>
+              </a:spcAft>
+              <a:defRPr sz="1350">
+                <a:solidFill>
+                  <a:srgbClr val="51617A"/>
+                </a:solidFill>
+                <a:latin typeface="Manrope"/>
+              </a:defRPr>
+            </a:pPr>
+            <a:r>
+              <a:t>• Map compliant Malaysia funding and Philippines payout partners</a:t>
+            </a:r>
+          </a:p>
+          <a:p>
+            <a:pPr>
+              <a:lnSpc>
+                <a:spcPct val="105000"/>
+              </a:lnSpc>
+              <a:spcAft>
+                <a:spcPts val="700"/>
+              </a:spcAft>
+              <a:defRPr sz="1350">
+                <a:solidFill>
+                  <a:srgbClr val="51617A"/>
+                </a:solidFill>
+                <a:latin typeface="Manrope"/>
+              </a:defRPr>
+            </a:pPr>
+            <a:r>
+              <a:t>• Run testnet usability studies for signing, address safety, and proof</a:t>
+            </a:r>
+          </a:p>
+          <a:p>
+            <a:pPr>
+              <a:lnSpc>
+                <a:spcPct val="105000"/>
+              </a:lnSpc>
+              <a:spcAft>
+                <a:spcPts val="700"/>
+              </a:spcAft>
+              <a:defRPr sz="1350">
+                <a:solidFill>
+                  <a:srgbClr val="51617A"/>
+                </a:solidFill>
+                <a:latin typeface="Manrope"/>
+              </a:defRPr>
+            </a:pPr>
+            <a:r>
+              <a:t>• Seek provider sandbox/certification conversations without claiming partnership</a:t>
             </a:r>
           </a:p>
         </p:txBody>
@@ -4635,16 +8889,18 @@
         <p:spPr>
           <a:xfrm>
             <a:off x="0" y="0"/>
-            <a:ext cx="182880" cy="6858000"/>
+            <a:ext cx="12191695" cy="64008"/>
           </a:xfrm>
           <a:prstGeom prst="rect">
             <a:avLst/>
           </a:prstGeom>
           <a:solidFill>
-            <a:srgbClr val="0284C7"/>
+            <a:srgbClr val="0369A1"/>
           </a:solidFill>
-          <a:ln>
-            <a:noFill/>
+          <a:ln w="15240">
+            <a:solidFill>
+              <a:srgbClr val="0369A1"/>
+            </a:solidFill>
           </a:ln>
         </p:spPr>
         <p:style>
@@ -4671,23 +8927,130 @@
       </p:sp>
       <p:sp>
         <p:nvSpPr>
-          <p:cNvPr id="3" name="Rectangle 2"/>
+          <p:cNvPr id="3" name="TextBox 2"/>
+          <p:cNvSpPr txBox="1"/>
+          <p:nvPr/>
+        </p:nvSpPr>
+        <p:spPr>
+          <a:xfrm>
+            <a:off x="658368" y="310896"/>
+            <a:ext cx="9601200" cy="292608"/>
+          </a:xfrm>
+          <a:prstGeom prst="rect">
+            <a:avLst/>
+          </a:prstGeom>
+          <a:noFill/>
+        </p:spPr>
+        <p:txBody>
+          <a:bodyPr wrap="square" lIns="0" rIns="0" tIns="0" bIns="0" anchor="t">
+            <a:spAutoFit/>
+          </a:bodyPr>
+          <a:lstStyle/>
+          <a:p>
+            <a:pPr algn="l"/>
+            <a:r>
+              <a:rPr sz="1100" b="1">
+                <a:solidFill>
+                  <a:srgbClr val="0369A1"/>
+                </a:solidFill>
+                <a:latin typeface="Manrope"/>
+              </a:rPr>
+              <a:t>BUILD STATUS + ASK</a:t>
+            </a:r>
+          </a:p>
+        </p:txBody>
+      </p:sp>
+      <p:sp>
+        <p:nvSpPr>
+          <p:cNvPr id="4" name="TextBox 3"/>
+          <p:cNvSpPr txBox="1"/>
+          <p:nvPr/>
+        </p:nvSpPr>
+        <p:spPr>
+          <a:xfrm>
+            <a:off x="658368" y="667512"/>
+            <a:ext cx="10789920" cy="658368"/>
+          </a:xfrm>
+          <a:prstGeom prst="rect">
+            <a:avLst/>
+          </a:prstGeom>
+          <a:noFill/>
+        </p:spPr>
+        <p:txBody>
+          <a:bodyPr wrap="square" lIns="0" rIns="0" tIns="0" bIns="0" anchor="t">
+            <a:spAutoFit/>
+          </a:bodyPr>
+          <a:lstStyle/>
+          <a:p>
+            <a:pPr algn="l"/>
+            <a:r>
+              <a:rPr sz="2700" b="1">
+                <a:solidFill>
+                  <a:srgbClr val="0B1B2B"/>
+                </a:solidFill>
+                <a:latin typeface="Fraunces"/>
+              </a:rPr>
+              <a:t>A working testnet core, with an honest last-mile gap</a:t>
+            </a:r>
+          </a:p>
+        </p:txBody>
+      </p:sp>
+      <p:sp>
+        <p:nvSpPr>
+          <p:cNvPr id="5" name="TextBox 4"/>
+          <p:cNvSpPr txBox="1"/>
+          <p:nvPr/>
+        </p:nvSpPr>
+        <p:spPr>
+          <a:xfrm>
+            <a:off x="10927080" y="292608"/>
+            <a:ext cx="566928" cy="228600"/>
+          </a:xfrm>
+          <a:prstGeom prst="rect">
+            <a:avLst/>
+          </a:prstGeom>
+          <a:noFill/>
+        </p:spPr>
+        <p:txBody>
+          <a:bodyPr wrap="square" lIns="0" rIns="0" tIns="0" bIns="0" anchor="t">
+            <a:spAutoFit/>
+          </a:bodyPr>
+          <a:lstStyle/>
+          <a:p>
+            <a:pPr algn="r"/>
+            <a:r>
+              <a:rPr sz="900" b="0">
+                <a:solidFill>
+                  <a:srgbClr val="51617A"/>
+                </a:solidFill>
+                <a:latin typeface="Manrope"/>
+              </a:rPr>
+              <a:t>9 / 9</a:t>
+            </a:r>
+          </a:p>
+        </p:txBody>
+      </p:sp>
+      <p:sp>
+        <p:nvSpPr>
+          <p:cNvPr id="6" name="Rounded Rectangle 5"/>
           <p:cNvSpPr/>
           <p:nvPr/>
         </p:nvSpPr>
         <p:spPr>
           <a:xfrm>
-            <a:off x="0" y="6217920"/>
-            <a:ext cx="12188952" cy="640080"/>
-          </a:xfrm>
-          <a:prstGeom prst="rect">
+            <a:off x="685800" y="1508760"/>
+            <a:ext cx="5230368" cy="4434840"/>
+          </a:xfrm>
+          <a:prstGeom prst="roundRect">
             <a:avLst/>
           </a:prstGeom>
           <a:solidFill>
-            <a:srgbClr val="0284C7"/>
+            <a:srgbClr val="E6F3FB"/>
           </a:solidFill>
-          <a:ln>
-            <a:noFill/>
+          <a:ln w="15240">
+            <a:solidFill>
+              <a:srgbClr val="9DCBEA"/>
+            </a:solidFill>
           </a:ln>
         </p:spPr>
         <p:style>
@@ -4714,14 +9077,94 @@
       </p:sp>
       <p:sp>
         <p:nvSpPr>
-          <p:cNvPr id="4" name="TextBox 3"/>
-          <p:cNvSpPr txBox="1"/>
-          <p:nvPr/>
-        </p:nvSpPr>
-        <p:spPr>
-          <a:xfrm>
-            <a:off x="640080" y="320040"/>
-            <a:ext cx="10972800" cy="640080"/>
+          <p:cNvPr id="7" name="Rounded Rectangle 6"/>
+          <p:cNvSpPr/>
+          <p:nvPr/>
+        </p:nvSpPr>
+        <p:spPr>
+          <a:xfrm>
+            <a:off x="932688" y="1755648"/>
+            <a:ext cx="713232" cy="310896"/>
+          </a:xfrm>
+          <a:prstGeom prst="roundRect">
+            <a:avLst/>
+          </a:prstGeom>
+          <a:solidFill>
+            <a:srgbClr val="E6F3FB"/>
+          </a:solidFill>
+          <a:ln w="15240">
+            <a:solidFill>
+              <a:srgbClr val="9DCBEA"/>
+            </a:solidFill>
+          </a:ln>
+        </p:spPr>
+        <p:style>
+          <a:lnRef idx="1">
+            <a:schemeClr val="accent1"/>
+          </a:lnRef>
+          <a:fillRef idx="3">
+            <a:schemeClr val="accent1"/>
+          </a:fillRef>
+          <a:effectRef idx="2">
+            <a:schemeClr val="accent1"/>
+          </a:effectRef>
+          <a:fontRef idx="minor">
+            <a:schemeClr val="lt1"/>
+          </a:fontRef>
+        </p:style>
+        <p:txBody>
+          <a:bodyPr rtlCol="0" anchor="ctr"/>
+          <a:lstStyle/>
+          <a:p>
+            <a:pPr algn="ctr"/>
+          </a:p>
+        </p:txBody>
+      </p:sp>
+      <p:sp>
+        <p:nvSpPr>
+          <p:cNvPr id="8" name="TextBox 7"/>
+          <p:cNvSpPr txBox="1"/>
+          <p:nvPr/>
+        </p:nvSpPr>
+        <p:spPr>
+          <a:xfrm>
+            <a:off x="932688" y="1773936"/>
+            <a:ext cx="713232" cy="228600"/>
+          </a:xfrm>
+          <a:prstGeom prst="rect">
+            <a:avLst/>
+          </a:prstGeom>
+          <a:noFill/>
+        </p:spPr>
+        <p:txBody>
+          <a:bodyPr wrap="square" lIns="0" rIns="0" tIns="0" bIns="0" anchor="t">
+            <a:spAutoFit/>
+          </a:bodyPr>
+          <a:lstStyle/>
+          <a:p>
+            <a:pPr algn="ctr"/>
+            <a:r>
+              <a:rPr sz="900" b="1">
+                <a:solidFill>
+                  <a:srgbClr val="0369A1"/>
+                </a:solidFill>
+                <a:latin typeface="Manrope"/>
+              </a:rPr>
+              <a:t>BUILT</a:t>
+            </a:r>
+          </a:p>
+        </p:txBody>
+      </p:sp>
+      <p:sp>
+        <p:nvSpPr>
+          <p:cNvPr id="9" name="TextBox 8"/>
+          <p:cNvSpPr txBox="1"/>
+          <p:nvPr/>
+        </p:nvSpPr>
+        <p:spPr>
+          <a:xfrm>
+            <a:off x="932688" y="2212848"/>
+            <a:ext cx="4617720" cy="1755648"/>
           </a:xfrm>
           <a:prstGeom prst="rect">
             <a:avLst/>
@@ -4734,29 +9177,271 @@
           </a:bodyPr>
           <a:lstStyle/>
           <a:p>
+            <a:pPr>
+              <a:lnSpc>
+                <a:spcPct val="105000"/>
+              </a:lnSpc>
+              <a:spcAft>
+                <a:spcPts val="700"/>
+              </a:spcAft>
+              <a:defRPr sz="1220">
+                <a:solidFill>
+                  <a:srgbClr val="51617A"/>
+                </a:solidFill>
+                <a:latin typeface="Manrope"/>
+              </a:defRPr>
+            </a:pPr>
+            <a:r>
+              <a:t>• Verified Stellar testnet contract: CATFEIDC4CQ3ZSYTWAEM4SHWUB5ZK4R7VGE5QO6XDWRQ6UC4ZLB34VCQ</a:t>
+            </a:r>
+          </a:p>
+          <a:p>
+            <a:pPr>
+              <a:lnSpc>
+                <a:spcPct val="105000"/>
+              </a:lnSpc>
+              <a:spcAft>
+                <a:spcPts val="700"/>
+              </a:spcAft>
+              <a:defRPr sz="1220">
+                <a:solidFill>
+                  <a:srgbClr val="51617A"/>
+                </a:solidFill>
+                <a:latin typeface="Manrope"/>
+              </a:defRPr>
+            </a:pPr>
+            <a:r>
+              <a:t>• Verified testnet Freighter-signed release: cfa17a939f5cd0c90bc674d7cee61f0f4a67ed4c2f11ab3c789b0e3ad0c419d2</a:t>
+            </a:r>
+          </a:p>
+          <a:p>
+            <a:pPr>
+              <a:lnSpc>
+                <a:spcPct val="105000"/>
+              </a:lnSpc>
+              <a:spcAft>
+                <a:spcPts val="700"/>
+              </a:spcAft>
+              <a:defRPr sz="1220">
+                <a:solidFill>
+                  <a:srgbClr val="51617A"/>
+                </a:solidFill>
+                <a:latin typeface="Manrope"/>
+              </a:defRPr>
+            </a:pPr>
+            <a:r>
+              <a:t>• Direct payment verification; support-plan UI; honest status boundary</a:t>
+            </a:r>
+          </a:p>
+        </p:txBody>
+      </p:sp>
+      <p:sp>
+        <p:nvSpPr>
+          <p:cNvPr id="10" name="TextBox 9"/>
+          <p:cNvSpPr txBox="1"/>
+          <p:nvPr/>
+        </p:nvSpPr>
+        <p:spPr>
+          <a:xfrm>
+            <a:off x="932688" y="4069080"/>
+            <a:ext cx="4617720" cy="502920"/>
+          </a:xfrm>
+          <a:prstGeom prst="rect">
+            <a:avLst/>
+          </a:prstGeom>
+          <a:noFill/>
+        </p:spPr>
+        <p:txBody>
+          <a:bodyPr wrap="square" lIns="0" rIns="0" tIns="0" bIns="0" anchor="t">
+            <a:spAutoFit/>
+          </a:bodyPr>
+          <a:lstStyle/>
+          <a:p>
             <a:pPr algn="l"/>
             <a:r>
-              <a:rPr sz="1800" b="1">
-                <a:solidFill>
-                  <a:srgbClr val="0284C7"/>
-                </a:solidFill>
-                <a:latin typeface="Manrope"/>
+              <a:rPr sz="950" b="0">
+                <a:solidFill>
+                  <a:srgbClr val="51617A"/>
+                </a:solidFill>
+                <a:latin typeface="Menlo"/>
               </a:rPr>
-              <a:t>THE ASK</a:t>
-            </a:r>
-          </a:p>
-        </p:txBody>
-      </p:sp>
-      <p:sp>
-        <p:nvSpPr>
-          <p:cNvPr id="5" name="TextBox 4"/>
-          <p:cNvSpPr txBox="1"/>
-          <p:nvPr/>
-        </p:nvSpPr>
-        <p:spPr>
-          <a:xfrm>
-            <a:off x="640080" y="1005840"/>
-            <a:ext cx="10972800" cy="4937760"/>
+              <a:t>CATFEIDC4CQ3ZSYTWAEM4SHWUB5ZK4R7VGE5QO6XDWRQ6UC4ZLB34VCQ</a:t>
+            </a:r>
+          </a:p>
+        </p:txBody>
+      </p:sp>
+      <p:sp>
+        <p:nvSpPr>
+          <p:cNvPr id="11" name="TextBox 10"/>
+          <p:cNvSpPr txBox="1"/>
+          <p:nvPr/>
+        </p:nvSpPr>
+        <p:spPr>
+          <a:xfrm>
+            <a:off x="932688" y="4754880"/>
+            <a:ext cx="4617720" cy="502920"/>
+          </a:xfrm>
+          <a:prstGeom prst="rect">
+            <a:avLst/>
+          </a:prstGeom>
+          <a:noFill/>
+        </p:spPr>
+        <p:txBody>
+          <a:bodyPr wrap="square" lIns="0" rIns="0" tIns="0" bIns="0" anchor="t">
+            <a:spAutoFit/>
+          </a:bodyPr>
+          <a:lstStyle/>
+          <a:p>
+            <a:pPr algn="l"/>
+            <a:r>
+              <a:rPr sz="950" b="0">
+                <a:solidFill>
+                  <a:srgbClr val="51617A"/>
+                </a:solidFill>
+                <a:latin typeface="Menlo"/>
+              </a:rPr>
+              <a:t>cfa17a939f5cd0c90bc674d7cee61f0f4a67ed4c2f11ab3c789b0e3ad0c419d2</a:t>
+            </a:r>
+          </a:p>
+        </p:txBody>
+      </p:sp>
+      <p:sp>
+        <p:nvSpPr>
+          <p:cNvPr id="12" name="Rounded Rectangle 11"/>
+          <p:cNvSpPr/>
+          <p:nvPr/>
+        </p:nvSpPr>
+        <p:spPr>
+          <a:xfrm>
+            <a:off x="6263640" y="1508760"/>
+            <a:ext cx="5230368" cy="4434840"/>
+          </a:xfrm>
+          <a:prstGeom prst="roundRect">
+            <a:avLst/>
+          </a:prstGeom>
+          <a:solidFill>
+            <a:srgbClr val="FFFFFF"/>
+          </a:solidFill>
+          <a:ln w="15240">
+            <a:solidFill>
+              <a:srgbClr val="9DCBEA"/>
+            </a:solidFill>
+            <a:prstDash val="dash"/>
+          </a:ln>
+        </p:spPr>
+        <p:style>
+          <a:lnRef idx="1">
+            <a:schemeClr val="accent1"/>
+          </a:lnRef>
+          <a:fillRef idx="3">
+            <a:schemeClr val="accent1"/>
+          </a:fillRef>
+          <a:effectRef idx="2">
+            <a:schemeClr val="accent1"/>
+          </a:effectRef>
+          <a:fontRef idx="minor">
+            <a:schemeClr val="lt1"/>
+          </a:fontRef>
+        </p:style>
+        <p:txBody>
+          <a:bodyPr rtlCol="0" anchor="ctr"/>
+          <a:lstStyle/>
+          <a:p>
+            <a:pPr algn="ctr"/>
+          </a:p>
+        </p:txBody>
+      </p:sp>
+      <p:sp>
+        <p:nvSpPr>
+          <p:cNvPr id="13" name="Rounded Rectangle 12"/>
+          <p:cNvSpPr/>
+          <p:nvPr/>
+        </p:nvSpPr>
+        <p:spPr>
+          <a:xfrm>
+            <a:off x="6510528" y="1755648"/>
+            <a:ext cx="658368" cy="310896"/>
+          </a:xfrm>
+          <a:prstGeom prst="roundRect">
+            <a:avLst/>
+          </a:prstGeom>
+          <a:solidFill>
+            <a:srgbClr val="FFFFFF"/>
+          </a:solidFill>
+          <a:ln w="15240">
+            <a:solidFill>
+              <a:srgbClr val="9DCBEA"/>
+            </a:solidFill>
+            <a:prstDash val="dash"/>
+          </a:ln>
+        </p:spPr>
+        <p:style>
+          <a:lnRef idx="1">
+            <a:schemeClr val="accent1"/>
+          </a:lnRef>
+          <a:fillRef idx="3">
+            <a:schemeClr val="accent1"/>
+          </a:fillRef>
+          <a:effectRef idx="2">
+            <a:schemeClr val="accent1"/>
+          </a:effectRef>
+          <a:fontRef idx="minor">
+            <a:schemeClr val="lt1"/>
+          </a:fontRef>
+        </p:style>
+        <p:txBody>
+          <a:bodyPr rtlCol="0" anchor="ctr"/>
+          <a:lstStyle/>
+          <a:p>
+            <a:pPr algn="ctr"/>
+          </a:p>
+        </p:txBody>
+      </p:sp>
+      <p:sp>
+        <p:nvSpPr>
+          <p:cNvPr id="14" name="TextBox 13"/>
+          <p:cNvSpPr txBox="1"/>
+          <p:nvPr/>
+        </p:nvSpPr>
+        <p:spPr>
+          <a:xfrm>
+            <a:off x="6510528" y="1773936"/>
+            <a:ext cx="658368" cy="228600"/>
+          </a:xfrm>
+          <a:prstGeom prst="rect">
+            <a:avLst/>
+          </a:prstGeom>
+          <a:noFill/>
+        </p:spPr>
+        <p:txBody>
+          <a:bodyPr wrap="square" lIns="0" rIns="0" tIns="0" bIns="0" anchor="t">
+            <a:spAutoFit/>
+          </a:bodyPr>
+          <a:lstStyle/>
+          <a:p>
+            <a:pPr algn="ctr"/>
+            <a:r>
+              <a:rPr sz="900" b="1">
+                <a:solidFill>
+                  <a:srgbClr val="0369A1"/>
+                </a:solidFill>
+                <a:latin typeface="Manrope"/>
+              </a:rPr>
+              <a:t>ASK</a:t>
+            </a:r>
+          </a:p>
+        </p:txBody>
+      </p:sp>
+      <p:sp>
+        <p:nvSpPr>
+          <p:cNvPr id="15" name="TextBox 14"/>
+          <p:cNvSpPr txBox="1"/>
+          <p:nvPr/>
+        </p:nvSpPr>
+        <p:spPr>
+          <a:xfrm>
+            <a:off x="6510528" y="2212848"/>
+            <a:ext cx="4617720" cy="1874519"/>
           </a:xfrm>
           <a:prstGeom prst="rect">
             <a:avLst/>
@@ -4769,19 +9454,165 @@
           </a:bodyPr>
           <a:lstStyle/>
           <a:p>
+            <a:pPr>
+              <a:lnSpc>
+                <a:spcPct val="105000"/>
+              </a:lnSpc>
+              <a:spcAft>
+                <a:spcPts val="700"/>
+              </a:spcAft>
+              <a:defRPr sz="1320">
+                <a:solidFill>
+                  <a:srgbClr val="51617A"/>
+                </a:solidFill>
+                <a:latin typeface="Manrope"/>
+              </a:defRPr>
+            </a:pPr>
+            <a:r>
+              <a:t>• Customer-discovery introductions in Malaysia</a:t>
+            </a:r>
+          </a:p>
+          <a:p>
+            <a:pPr>
+              <a:lnSpc>
+                <a:spcPct val="105000"/>
+              </a:lnSpc>
+              <a:spcAft>
+                <a:spcPts val="700"/>
+              </a:spcAft>
+              <a:defRPr sz="1320">
+                <a:solidFill>
+                  <a:srgbClr val="51617A"/>
+                </a:solidFill>
+                <a:latin typeface="Manrope"/>
+              </a:defRPr>
+            </a:pPr>
+            <a:r>
+              <a:t>• Licensed anchor/provider technical and compliance review</a:t>
+            </a:r>
+          </a:p>
+          <a:p>
+            <a:pPr>
+              <a:lnSpc>
+                <a:spcPct val="105000"/>
+              </a:lnSpc>
+              <a:spcAft>
+                <a:spcPts val="700"/>
+              </a:spcAft>
+              <a:defRPr sz="1320">
+                <a:solidFill>
+                  <a:srgbClr val="51617A"/>
+                </a:solidFill>
+                <a:latin typeface="Manrope"/>
+              </a:defRPr>
+            </a:pPr>
+            <a:r>
+              <a:t>• Feedback on the planning job before adding last-mile complexity</a:t>
+            </a:r>
+          </a:p>
+        </p:txBody>
+      </p:sp>
+      <p:sp>
+        <p:nvSpPr>
+          <p:cNvPr id="16" name="TextBox 15"/>
+          <p:cNvSpPr txBox="1"/>
+          <p:nvPr/>
+        </p:nvSpPr>
+        <p:spPr>
+          <a:xfrm>
+            <a:off x="6510528" y="4279392"/>
+            <a:ext cx="1188720" cy="274320"/>
+          </a:xfrm>
+          <a:prstGeom prst="rect">
+            <a:avLst/>
+          </a:prstGeom>
+          <a:noFill/>
+        </p:spPr>
+        <p:txBody>
+          <a:bodyPr wrap="square" lIns="0" rIns="0" tIns="0" bIns="0" anchor="t">
+            <a:spAutoFit/>
+          </a:bodyPr>
+          <a:lstStyle/>
+          <a:p>
             <a:pPr algn="l"/>
             <a:r>
-              <a:rPr sz="1800" b="0">
-                <a:solidFill>
-                  <a:srgbClr val="0B1B2B"/>
+              <a:rPr sz="1100" b="1">
+                <a:solidFill>
+                  <a:srgbClr val="0369A1"/>
                 </a:solidFill>
                 <a:latin typeface="Manrope"/>
               </a:rPr>
-              <a:t>• Pilot anchor partner for SEP-24 integration, cash_pickup type.
-• Intro to one Philippines diaspora organization in the Gulf (Saudi / UAE).
-• Connections to PH remittance compliance reviewers.
-• Funding support for anchor integration legal review.
-• Contacts: GitHub issues @ castrodennisstephens128174-jpg/Bakti</a:t>
+              <a:t>NOT BUILT</a:t>
+            </a:r>
+          </a:p>
+        </p:txBody>
+      </p:sp>
+      <p:sp>
+        <p:nvSpPr>
+          <p:cNvPr id="17" name="TextBox 16"/>
+          <p:cNvSpPr txBox="1"/>
+          <p:nvPr/>
+        </p:nvSpPr>
+        <p:spPr>
+          <a:xfrm>
+            <a:off x="6510528" y="4645152"/>
+            <a:ext cx="4617720" cy="594360"/>
+          </a:xfrm>
+          <a:prstGeom prst="rect">
+            <a:avLst/>
+          </a:prstGeom>
+          <a:noFill/>
+        </p:spPr>
+        <p:txBody>
+          <a:bodyPr wrap="square" lIns="0" rIns="0" tIns="0" bIns="0" anchor="t">
+            <a:spAutoFit/>
+          </a:bodyPr>
+          <a:lstStyle/>
+          <a:p>
+            <a:pPr algn="l"/>
+            <a:r>
+              <a:rPr sz="1150" b="0">
+                <a:solidFill>
+                  <a:srgbClr val="51617A"/>
+                </a:solidFill>
+                <a:latin typeface="Manrope"/>
+              </a:rPr>
+              <a:t>SEP-24, MoneyGram API/webview, KYC, provider routing/status/reference, PHP cash-out, automatic scheduling</a:t>
+            </a:r>
+          </a:p>
+        </p:txBody>
+      </p:sp>
+      <p:sp>
+        <p:nvSpPr>
+          <p:cNvPr id="18" name="TextBox 17"/>
+          <p:cNvSpPr txBox="1"/>
+          <p:nvPr/>
+        </p:nvSpPr>
+        <p:spPr>
+          <a:xfrm>
+            <a:off x="685800" y="6144768"/>
+            <a:ext cx="10789920" cy="228600"/>
+          </a:xfrm>
+          <a:prstGeom prst="rect">
+            <a:avLst/>
+          </a:prstGeom>
+          <a:noFill/>
+        </p:spPr>
+        <p:txBody>
+          <a:bodyPr wrap="square" lIns="0" rIns="0" tIns="0" bIns="0" anchor="t">
+            <a:spAutoFit/>
+          </a:bodyPr>
+          <a:lstStyle/>
+          <a:p>
+            <a:pPr algn="l"/>
+            <a:r>
+              <a:rPr sz="850" b="0">
+                <a:solidFill>
+                  <a:srgbClr val="51617A"/>
+                </a:solidFill>
+                <a:latin typeface="Manrope"/>
+              </a:rPr>
+              <a:t>Proof: https://stellar.expert/explorer/testnet/tx/cfa17a939f5cd0c90bc674d7cee61f0f4a67ed4c2f11ab3c789b0e3ad0c419d2</a:t>
             </a:r>
           </a:p>
         </p:txBody>

--- a/slides/Bakti.pptx
+++ b/slides/Bakti.pptx
@@ -13,7 +13,6 @@
     <p:sldId id="261" r:id="rId12"/>
     <p:sldId id="262" r:id="rId13"/>
     <p:sldId id="263" r:id="rId14"/>
-    <p:sldId id="264" r:id="rId15"/>
   </p:sldIdLst>
   <p:sldSz cx="12191695" cy="6858000" type="screen4x3"/>
   <p:notesSz cx="6858000" cy="9144000"/>
@@ -3297,8 +3296,8 @@
         </p:nvSpPr>
         <p:spPr>
           <a:xfrm>
-            <a:off x="685800" y="3474720"/>
-            <a:ext cx="5257800" cy="1508760"/>
+            <a:off x="685800" y="3383280"/>
+            <a:ext cx="1188720" cy="310896"/>
           </a:xfrm>
           <a:prstGeom prst="roundRect">
             <a:avLst/>
@@ -3336,59 +3335,14 @@
       </p:sp>
       <p:sp>
         <p:nvSpPr>
-          <p:cNvPr id="8" name="Rounded Rectangle 7"/>
-          <p:cNvSpPr/>
-          <p:nvPr/>
-        </p:nvSpPr>
-        <p:spPr>
-          <a:xfrm>
-            <a:off x="932688" y="3685032"/>
-            <a:ext cx="914400" cy="310896"/>
-          </a:xfrm>
-          <a:prstGeom prst="roundRect">
-            <a:avLst/>
-          </a:prstGeom>
-          <a:solidFill>
-            <a:srgbClr val="E6F3FB"/>
-          </a:solidFill>
-          <a:ln w="15240">
-            <a:solidFill>
-              <a:srgbClr val="9DCBEA"/>
-            </a:solidFill>
-          </a:ln>
-        </p:spPr>
-        <p:style>
-          <a:lnRef idx="1">
-            <a:schemeClr val="accent1"/>
-          </a:lnRef>
-          <a:fillRef idx="3">
-            <a:schemeClr val="accent1"/>
-          </a:fillRef>
-          <a:effectRef idx="2">
-            <a:schemeClr val="accent1"/>
-          </a:effectRef>
-          <a:fontRef idx="minor">
-            <a:schemeClr val="lt1"/>
-          </a:fontRef>
-        </p:style>
-        <p:txBody>
-          <a:bodyPr rtlCol="0" anchor="ctr"/>
-          <a:lstStyle/>
-          <a:p>
-            <a:pPr algn="ctr"/>
-          </a:p>
-        </p:txBody>
-      </p:sp>
-      <p:sp>
-        <p:nvSpPr>
-          <p:cNvPr id="9" name="TextBox 8"/>
+          <p:cNvPr id="8" name="TextBox 7"/>
           <p:cNvSpPr txBox="1"/>
           <p:nvPr/>
         </p:nvSpPr>
         <p:spPr>
           <a:xfrm>
-            <a:off x="932688" y="3703320"/>
-            <a:ext cx="914400" cy="228600"/>
+            <a:off x="685800" y="3401568"/>
+            <a:ext cx="1188720" cy="228600"/>
           </a:xfrm>
           <a:prstGeom prst="rect">
             <a:avLst/>
@@ -3409,21 +3363,21 @@
                 </a:solidFill>
                 <a:latin typeface="Manrope"/>
               </a:rPr>
-              <a:t>CURRENT</a:t>
-            </a:r>
-          </a:p>
-        </p:txBody>
-      </p:sp>
-      <p:sp>
-        <p:nvSpPr>
-          <p:cNvPr id="10" name="TextBox 9"/>
+              <a:t>MAINNET</a:t>
+            </a:r>
+          </a:p>
+        </p:txBody>
+      </p:sp>
+      <p:sp>
+        <p:nvSpPr>
+          <p:cNvPr id="9" name="TextBox 8"/>
           <p:cNvSpPr txBox="1"/>
           <p:nvPr/>
         </p:nvSpPr>
         <p:spPr>
           <a:xfrm>
-            <a:off x="932688" y="4114800"/>
-            <a:ext cx="4572000" cy="292608"/>
+            <a:off x="685800" y="6172200"/>
+            <a:ext cx="10789920" cy="228600"/>
           </a:xfrm>
           <a:prstGeom prst="rect">
             <a:avLst/>
@@ -3438,27 +3392,27 @@
           <a:p>
             <a:pPr algn="l"/>
             <a:r>
-              <a:rPr sz="1800" b="1">
-                <a:solidFill>
-                  <a:srgbClr val="0B1B2B"/>
+              <a:rPr sz="1000" b="0">
+                <a:solidFill>
+                  <a:srgbClr val="51617A"/>
                 </a:solidFill>
                 <a:latin typeface="Manrope"/>
               </a:rPr>
-              <a:t>Stellar testnet prototype</a:t>
-            </a:r>
-          </a:p>
-        </p:txBody>
-      </p:sp>
-      <p:sp>
-        <p:nvSpPr>
-          <p:cNvPr id="11" name="TextBox 10"/>
+              <a:t>Stellar mainnet product · licensed cash-out is the next integration</a:t>
+            </a:r>
+          </a:p>
+        </p:txBody>
+      </p:sp>
+      <p:sp>
+        <p:nvSpPr>
+          <p:cNvPr id="10" name="TextBox 9"/>
           <p:cNvSpPr txBox="1"/>
           <p:nvPr/>
         </p:nvSpPr>
         <p:spPr>
           <a:xfrm>
-            <a:off x="932688" y="4480560"/>
-            <a:ext cx="4572000" cy="384048"/>
+            <a:off x="10927080" y="292608"/>
+            <a:ext cx="566928" cy="228600"/>
           </a:xfrm>
           <a:prstGeom prst="rect">
             <a:avLst/>
@@ -3471,282 +3425,15 @@
           </a:bodyPr>
           <a:lstStyle/>
           <a:p>
-            <a:pPr algn="l"/>
-            <a:r>
-              <a:rPr sz="1300" b="0">
+            <a:pPr algn="r"/>
+            <a:r>
+              <a:rPr sz="900" b="0">
                 <a:solidFill>
                   <a:srgbClr val="51617A"/>
                 </a:solidFill>
                 <a:latin typeface="Manrope"/>
               </a:rPr>
-              <a:t>Signed XLM escrow releases, direct payments, and on-chain verification.</a:t>
-            </a:r>
-          </a:p>
-        </p:txBody>
-      </p:sp>
-      <p:sp>
-        <p:nvSpPr>
-          <p:cNvPr id="12" name="Rounded Rectangle 11"/>
-          <p:cNvSpPr/>
-          <p:nvPr/>
-        </p:nvSpPr>
-        <p:spPr>
-          <a:xfrm>
-            <a:off x="6236208" y="3474720"/>
-            <a:ext cx="5257800" cy="1508760"/>
-          </a:xfrm>
-          <a:prstGeom prst="roundRect">
-            <a:avLst/>
-          </a:prstGeom>
-          <a:solidFill>
-            <a:srgbClr val="FFFFFF"/>
-          </a:solidFill>
-          <a:ln w="15240">
-            <a:solidFill>
-              <a:srgbClr val="9DCBEA"/>
-            </a:solidFill>
-            <a:prstDash val="dash"/>
-          </a:ln>
-        </p:spPr>
-        <p:style>
-          <a:lnRef idx="1">
-            <a:schemeClr val="accent1"/>
-          </a:lnRef>
-          <a:fillRef idx="3">
-            <a:schemeClr val="accent1"/>
-          </a:fillRef>
-          <a:effectRef idx="2">
-            <a:schemeClr val="accent1"/>
-          </a:effectRef>
-          <a:fontRef idx="minor">
-            <a:schemeClr val="lt1"/>
-          </a:fontRef>
-        </p:style>
-        <p:txBody>
-          <a:bodyPr rtlCol="0" anchor="ctr"/>
-          <a:lstStyle/>
-          <a:p>
-            <a:pPr algn="ctr"/>
-          </a:p>
-        </p:txBody>
-      </p:sp>
-      <p:sp>
-        <p:nvSpPr>
-          <p:cNvPr id="13" name="Rounded Rectangle 12"/>
-          <p:cNvSpPr/>
-          <p:nvPr/>
-        </p:nvSpPr>
-        <p:spPr>
-          <a:xfrm>
-            <a:off x="6483096" y="3685032"/>
-            <a:ext cx="914400" cy="310896"/>
-          </a:xfrm>
-          <a:prstGeom prst="roundRect">
-            <a:avLst/>
-          </a:prstGeom>
-          <a:solidFill>
-            <a:srgbClr val="FFFFFF"/>
-          </a:solidFill>
-          <a:ln w="15240">
-            <a:solidFill>
-              <a:srgbClr val="9DCBEA"/>
-            </a:solidFill>
-            <a:prstDash val="dash"/>
-          </a:ln>
-        </p:spPr>
-        <p:style>
-          <a:lnRef idx="1">
-            <a:schemeClr val="accent1"/>
-          </a:lnRef>
-          <a:fillRef idx="3">
-            <a:schemeClr val="accent1"/>
-          </a:fillRef>
-          <a:effectRef idx="2">
-            <a:schemeClr val="accent1"/>
-          </a:effectRef>
-          <a:fontRef idx="minor">
-            <a:schemeClr val="lt1"/>
-          </a:fontRef>
-        </p:style>
-        <p:txBody>
-          <a:bodyPr rtlCol="0" anchor="ctr"/>
-          <a:lstStyle/>
-          <a:p>
-            <a:pPr algn="ctr"/>
-          </a:p>
-        </p:txBody>
-      </p:sp>
-      <p:sp>
-        <p:nvSpPr>
-          <p:cNvPr id="14" name="TextBox 13"/>
-          <p:cNvSpPr txBox="1"/>
-          <p:nvPr/>
-        </p:nvSpPr>
-        <p:spPr>
-          <a:xfrm>
-            <a:off x="6483096" y="3703320"/>
-            <a:ext cx="914400" cy="228600"/>
-          </a:xfrm>
-          <a:prstGeom prst="rect">
-            <a:avLst/>
-          </a:prstGeom>
-          <a:noFill/>
-        </p:spPr>
-        <p:txBody>
-          <a:bodyPr wrap="square" lIns="0" rIns="0" tIns="0" bIns="0" anchor="t">
-            <a:spAutoFit/>
-          </a:bodyPr>
-          <a:lstStyle/>
-          <a:p>
-            <a:pPr algn="ctr"/>
-            <a:r>
-              <a:rPr sz="900" b="1">
-                <a:solidFill>
-                  <a:srgbClr val="0369A1"/>
-                </a:solidFill>
-                <a:latin typeface="Manrope"/>
-              </a:rPr>
-              <a:t>PLANNED</a:t>
-            </a:r>
-          </a:p>
-        </p:txBody>
-      </p:sp>
-      <p:sp>
-        <p:nvSpPr>
-          <p:cNvPr id="15" name="TextBox 14"/>
-          <p:cNvSpPr txBox="1"/>
-          <p:nvPr/>
-        </p:nvSpPr>
-        <p:spPr>
-          <a:xfrm>
-            <a:off x="6483096" y="4114800"/>
-            <a:ext cx="4572000" cy="292608"/>
-          </a:xfrm>
-          <a:prstGeom prst="rect">
-            <a:avLst/>
-          </a:prstGeom>
-          <a:noFill/>
-        </p:spPr>
-        <p:txBody>
-          <a:bodyPr wrap="square" lIns="0" rIns="0" tIns="0" bIns="0" anchor="t">
-            <a:spAutoFit/>
-          </a:bodyPr>
-          <a:lstStyle/>
-          <a:p>
-            <a:pPr algn="l"/>
-            <a:r>
-              <a:rPr sz="1800" b="1">
-                <a:solidFill>
-                  <a:srgbClr val="0B1B2B"/>
-                </a:solidFill>
-                <a:latin typeface="Manrope"/>
-              </a:rPr>
-              <a:t>Licensed PHP cash-out</a:t>
-            </a:r>
-          </a:p>
-        </p:txBody>
-      </p:sp>
-      <p:sp>
-        <p:nvSpPr>
-          <p:cNvPr id="16" name="TextBox 15"/>
-          <p:cNvSpPr txBox="1"/>
-          <p:nvPr/>
-        </p:nvSpPr>
-        <p:spPr>
-          <a:xfrm>
-            <a:off x="6483096" y="4480560"/>
-            <a:ext cx="4572000" cy="384048"/>
-          </a:xfrm>
-          <a:prstGeom prst="rect">
-            <a:avLst/>
-          </a:prstGeom>
-          <a:noFill/>
-        </p:spPr>
-        <p:txBody>
-          <a:bodyPr wrap="square" lIns="0" rIns="0" tIns="0" bIns="0" anchor="t">
-            <a:spAutoFit/>
-          </a:bodyPr>
-          <a:lstStyle/>
-          <a:p>
-            <a:pPr algn="l"/>
-            <a:r>
-              <a:rPr sz="1300" b="0">
-                <a:solidFill>
-                  <a:srgbClr val="51617A"/>
-                </a:solidFill>
-                <a:latin typeface="Manrope"/>
-              </a:rPr>
-              <a:t>Provider SEP-24, KYC, routing/status, and confirmed collection.</a:t>
-            </a:r>
-          </a:p>
-        </p:txBody>
-      </p:sp>
-      <p:sp>
-        <p:nvSpPr>
-          <p:cNvPr id="17" name="TextBox 16"/>
-          <p:cNvSpPr txBox="1"/>
-          <p:nvPr/>
-        </p:nvSpPr>
-        <p:spPr>
-          <a:xfrm>
-            <a:off x="685800" y="6172200"/>
-            <a:ext cx="10789920" cy="228600"/>
-          </a:xfrm>
-          <a:prstGeom prst="rect">
-            <a:avLst/>
-          </a:prstGeom>
-          <a:noFill/>
-        </p:spPr>
-        <p:txBody>
-          <a:bodyPr wrap="square" lIns="0" rIns="0" tIns="0" bIns="0" anchor="t">
-            <a:spAutoFit/>
-          </a:bodyPr>
-          <a:lstStyle/>
-          <a:p>
-            <a:pPr algn="l"/>
-            <a:r>
-              <a:rPr sz="1000" b="0">
-                <a:solidFill>
-                  <a:srgbClr val="51617A"/>
-                </a:solidFill>
-                <a:latin typeface="Manrope"/>
-              </a:rPr>
-              <a:t>Stellar testnet prototype · licensed cash-out is the next integration</a:t>
-            </a:r>
-          </a:p>
-        </p:txBody>
-      </p:sp>
-      <p:sp>
-        <p:nvSpPr>
-          <p:cNvPr id="18" name="TextBox 17"/>
-          <p:cNvSpPr txBox="1"/>
-          <p:nvPr/>
-        </p:nvSpPr>
-        <p:spPr>
-          <a:xfrm>
-            <a:off x="10927080" y="292608"/>
-            <a:ext cx="566928" cy="228600"/>
-          </a:xfrm>
-          <a:prstGeom prst="rect">
-            <a:avLst/>
-          </a:prstGeom>
-          <a:noFill/>
-        </p:spPr>
-        <p:txBody>
-          <a:bodyPr wrap="square" lIns="0" rIns="0" tIns="0" bIns="0" anchor="t">
-            <a:spAutoFit/>
-          </a:bodyPr>
-          <a:lstStyle/>
-          <a:p>
-            <a:pPr algn="r"/>
-            <a:r>
-              <a:rPr sz="900" b="0">
-                <a:solidFill>
-                  <a:srgbClr val="51617A"/>
-                </a:solidFill>
-                <a:latin typeface="Manrope"/>
-              </a:rPr>
-              <a:t>1 / 9</a:t>
+              <a:t>1 / 8</a:t>
             </a:r>
           </a:p>
         </p:txBody>
@@ -3922,7 +3609,7 @@
                 </a:solidFill>
                 <a:latin typeface="Manrope"/>
               </a:rPr>
-              <a:t>2 / 9</a:t>
+              <a:t>2 / 8</a:t>
             </a:r>
           </a:p>
         </p:txBody>
@@ -3936,7 +3623,7 @@
         <p:spPr>
           <a:xfrm>
             <a:off x="685800" y="1481328"/>
-            <a:ext cx="2926080" cy="310896"/>
+            <a:ext cx="3108960" cy="310896"/>
           </a:xfrm>
           <a:prstGeom prst="roundRect">
             <a:avLst/>
@@ -3981,7 +3668,7 @@
         <p:spPr>
           <a:xfrm>
             <a:off x="685800" y="1499616"/>
-            <a:ext cx="2926080" cy="228600"/>
+            <a:ext cx="3108960" cy="228600"/>
           </a:xfrm>
           <a:prstGeom prst="rect">
             <a:avLst/>
@@ -4016,7 +3703,7 @@
         <p:spPr>
           <a:xfrm>
             <a:off x="685800" y="2011680"/>
-            <a:ext cx="6583680" cy="1600200"/>
+            <a:ext cx="10789920" cy="1280160"/>
           </a:xfrm>
           <a:prstGeom prst="rect">
             <a:avLst/>
@@ -4050,8 +3737,8 @@
         </p:nvSpPr>
         <p:spPr>
           <a:xfrm>
-            <a:off x="685800" y="3840480"/>
-            <a:ext cx="6583680" cy="713232"/>
+            <a:off x="685800" y="3429000"/>
+            <a:ext cx="10789920" cy="640080"/>
           </a:xfrm>
           <a:prstGeom prst="rect">
             <a:avLst/>
@@ -4085,8 +3772,8 @@
         </p:nvSpPr>
         <p:spPr>
           <a:xfrm>
-            <a:off x="685800" y="4800600"/>
-            <a:ext cx="6583680" cy="502920"/>
+            <a:off x="685800" y="4206240"/>
+            <a:ext cx="10789920" cy="502920"/>
           </a:xfrm>
           <a:prstGeom prst="rect">
             <a:avLst/>
@@ -4108,242 +3795,6 @@
                 <a:latin typeface="Manrope"/>
               </a:rPr>
               <a:t>Job: make family support intentional, legible, and verifiable.</a:t>
-            </a:r>
-          </a:p>
-        </p:txBody>
-      </p:sp>
-      <p:sp>
-        <p:nvSpPr>
-          <p:cNvPr id="11" name="Rounded Rectangle 10"/>
-          <p:cNvSpPr/>
-          <p:nvPr/>
-        </p:nvSpPr>
-        <p:spPr>
-          <a:xfrm>
-            <a:off x="7909560" y="1463040"/>
-            <a:ext cx="3566160" cy="4480560"/>
-          </a:xfrm>
-          <a:prstGeom prst="roundRect">
-            <a:avLst/>
-          </a:prstGeom>
-          <a:solidFill>
-            <a:srgbClr val="FDF1E0"/>
-          </a:solidFill>
-          <a:ln w="15240">
-            <a:solidFill>
-              <a:srgbClr val="DBE3EE"/>
-            </a:solidFill>
-          </a:ln>
-        </p:spPr>
-        <p:style>
-          <a:lnRef idx="1">
-            <a:schemeClr val="accent1"/>
-          </a:lnRef>
-          <a:fillRef idx="3">
-            <a:schemeClr val="accent1"/>
-          </a:fillRef>
-          <a:effectRef idx="2">
-            <a:schemeClr val="accent1"/>
-          </a:effectRef>
-          <a:fontRef idx="minor">
-            <a:schemeClr val="lt1"/>
-          </a:fontRef>
-        </p:style>
-        <p:txBody>
-          <a:bodyPr rtlCol="0" anchor="ctr"/>
-          <a:lstStyle/>
-          <a:p>
-            <a:pPr algn="ctr"/>
-          </a:p>
-        </p:txBody>
-      </p:sp>
-      <p:sp>
-        <p:nvSpPr>
-          <p:cNvPr id="12" name="Oval 11"/>
-          <p:cNvSpPr/>
-          <p:nvPr/>
-        </p:nvSpPr>
-        <p:spPr>
-          <a:xfrm>
-            <a:off x="8915400" y="2240280"/>
-            <a:ext cx="1554480" cy="1554480"/>
-          </a:xfrm>
-          <a:prstGeom prst="ellipse">
-            <a:avLst/>
-          </a:prstGeom>
-          <a:solidFill>
-            <a:srgbClr val="0369A1"/>
-          </a:solidFill>
-          <a:ln>
-            <a:noFill/>
-          </a:ln>
-        </p:spPr>
-        <p:style>
-          <a:lnRef idx="1">
-            <a:schemeClr val="accent1"/>
-          </a:lnRef>
-          <a:fillRef idx="3">
-            <a:schemeClr val="accent1"/>
-          </a:fillRef>
-          <a:effectRef idx="2">
-            <a:schemeClr val="accent1"/>
-          </a:effectRef>
-          <a:fontRef idx="minor">
-            <a:schemeClr val="lt1"/>
-          </a:fontRef>
-        </p:style>
-        <p:txBody>
-          <a:bodyPr rtlCol="0" anchor="ctr"/>
-          <a:lstStyle/>
-          <a:p>
-            <a:pPr algn="ctr"/>
-          </a:p>
-        </p:txBody>
-      </p:sp>
-      <p:sp>
-        <p:nvSpPr>
-          <p:cNvPr id="13" name="Oval 12"/>
-          <p:cNvSpPr/>
-          <p:nvPr/>
-        </p:nvSpPr>
-        <p:spPr>
-          <a:xfrm>
-            <a:off x="9189720" y="2487168"/>
-            <a:ext cx="1005840" cy="777240"/>
-          </a:xfrm>
-          <a:prstGeom prst="ellipse">
-            <a:avLst/>
-          </a:prstGeom>
-          <a:solidFill>
-            <a:srgbClr val="FDF1E0"/>
-          </a:solidFill>
-          <a:ln>
-            <a:noFill/>
-          </a:ln>
-        </p:spPr>
-        <p:style>
-          <a:lnRef idx="1">
-            <a:schemeClr val="accent1"/>
-          </a:lnRef>
-          <a:fillRef idx="3">
-            <a:schemeClr val="accent1"/>
-          </a:fillRef>
-          <a:effectRef idx="2">
-            <a:schemeClr val="accent1"/>
-          </a:effectRef>
-          <a:fontRef idx="minor">
-            <a:schemeClr val="lt1"/>
-          </a:fontRef>
-        </p:style>
-        <p:txBody>
-          <a:bodyPr rtlCol="0" anchor="ctr"/>
-          <a:lstStyle/>
-          <a:p>
-            <a:pPr algn="ctr"/>
-          </a:p>
-        </p:txBody>
-      </p:sp>
-      <p:sp>
-        <p:nvSpPr>
-          <p:cNvPr id="14" name="TextBox 13"/>
-          <p:cNvSpPr txBox="1"/>
-          <p:nvPr/>
-        </p:nvSpPr>
-        <p:spPr>
-          <a:xfrm>
-            <a:off x="8549640" y="4160520"/>
-            <a:ext cx="2286000" cy="365760"/>
-          </a:xfrm>
-          <a:prstGeom prst="rect">
-            <a:avLst/>
-          </a:prstGeom>
-          <a:noFill/>
-        </p:spPr>
-        <p:txBody>
-          <a:bodyPr wrap="square" lIns="0" rIns="0" tIns="0" bIns="0" anchor="t">
-            <a:spAutoFit/>
-          </a:bodyPr>
-          <a:lstStyle/>
-          <a:p>
-            <a:pPr algn="ctr"/>
-            <a:r>
-              <a:rPr sz="1200" b="1">
-                <a:solidFill>
-                  <a:srgbClr val="51617A"/>
-                </a:solidFill>
-                <a:latin typeface="Manrope"/>
-              </a:rPr>
-              <a:t>MARIA</a:t>
-            </a:r>
-          </a:p>
-        </p:txBody>
-      </p:sp>
-      <p:sp>
-        <p:nvSpPr>
-          <p:cNvPr id="15" name="TextBox 14"/>
-          <p:cNvSpPr txBox="1"/>
-          <p:nvPr/>
-        </p:nvSpPr>
-        <p:spPr>
-          <a:xfrm>
-            <a:off x="8549640" y="4590288"/>
-            <a:ext cx="2286000" cy="320040"/>
-          </a:xfrm>
-          <a:prstGeom prst="rect">
-            <a:avLst/>
-          </a:prstGeom>
-          <a:noFill/>
-        </p:spPr>
-        <p:txBody>
-          <a:bodyPr wrap="square" lIns="0" rIns="0" tIns="0" bIns="0" anchor="t">
-            <a:spAutoFit/>
-          </a:bodyPr>
-          <a:lstStyle/>
-          <a:p>
-            <a:pPr algn="ctr"/>
-            <a:r>
-              <a:rPr sz="1300" b="1">
-                <a:solidFill>
-                  <a:srgbClr val="0B1B2B"/>
-                </a:solidFill>
-                <a:latin typeface="Manrope"/>
-              </a:rPr>
-              <a:t>Illustrative persona</a:t>
-            </a:r>
-          </a:p>
-        </p:txBody>
-      </p:sp>
-      <p:sp>
-        <p:nvSpPr>
-          <p:cNvPr id="16" name="TextBox 15"/>
-          <p:cNvSpPr txBox="1"/>
-          <p:nvPr/>
-        </p:nvSpPr>
-        <p:spPr>
-          <a:xfrm>
-            <a:off x="8549640" y="4956048"/>
-            <a:ext cx="2286000" cy="320040"/>
-          </a:xfrm>
-          <a:prstGeom prst="rect">
-            <a:avLst/>
-          </a:prstGeom>
-          <a:noFill/>
-        </p:spPr>
-        <p:txBody>
-          <a:bodyPr wrap="square" lIns="0" rIns="0" tIns="0" bIns="0" anchor="t">
-            <a:spAutoFit/>
-          </a:bodyPr>
-          <a:lstStyle/>
-          <a:p>
-            <a:pPr algn="ctr"/>
-            <a:r>
-              <a:rPr sz="1100" b="0">
-                <a:solidFill>
-                  <a:srgbClr val="51617A"/>
-                </a:solidFill>
-                <a:latin typeface="Manrope"/>
-              </a:rPr>
-              <a:t>Not a claimed interview</a:t>
             </a:r>
           </a:p>
         </p:txBody>
@@ -4519,7 +3970,7 @@
                 </a:solidFill>
                 <a:latin typeface="Manrope"/>
               </a:rPr>
-              <a:t>3 / 9</a:t>
+              <a:t>3 / 8</a:t>
             </a:r>
           </a:p>
         </p:txBody>
@@ -4533,7 +3984,7 @@
         <p:spPr>
           <a:xfrm>
             <a:off x="685800" y="1554480"/>
-            <a:ext cx="3429000" cy="1600200"/>
+            <a:ext cx="5230368" cy="1600200"/>
           </a:xfrm>
           <a:prstGeom prst="roundRect">
             <a:avLst/>
@@ -4577,8 +4028,8 @@
         </p:nvSpPr>
         <p:spPr>
           <a:xfrm>
-            <a:off x="886968" y="1810512"/>
-            <a:ext cx="3017520" cy="502920"/>
+            <a:off x="960120" y="1810512"/>
+            <a:ext cx="4663440" cy="502920"/>
           </a:xfrm>
           <a:prstGeom prst="rect">
             <a:avLst/>
@@ -4593,13 +4044,13 @@
           <a:p>
             <a:pPr algn="l"/>
             <a:r>
-              <a:rPr sz="2500" b="1">
+              <a:rPr sz="3000" b="1">
                 <a:solidFill>
                   <a:srgbClr val="0B1B2B"/>
                 </a:solidFill>
                 <a:latin typeface="Fraunces"/>
               </a:rPr>
-              <a:t>US$39.619B</a:t>
+              <a:t>US$35.634B</a:t>
             </a:r>
           </a:p>
         </p:txBody>
@@ -4612,8 +4063,8 @@
         </p:nvSpPr>
         <p:spPr>
           <a:xfrm>
-            <a:off x="886968" y="2395728"/>
-            <a:ext cx="3017520" cy="548640"/>
+            <a:off x="960120" y="2395728"/>
+            <a:ext cx="4663440" cy="548640"/>
           </a:xfrm>
           <a:prstGeom prst="rect">
             <a:avLst/>
@@ -4628,13 +4079,13 @@
           <a:p>
             <a:pPr algn="l"/>
             <a:r>
-              <a:rPr sz="1200" b="0">
+              <a:rPr sz="1300" b="0">
                 <a:solidFill>
                   <a:srgbClr val="51617A"/>
                 </a:solidFill>
                 <a:latin typeface="Manrope"/>
               </a:rPr>
-              <a:t>Philippines personal remittances, 2025 preliminary</a:t>
+              <a:t>Philippines cash remittances, 2025 preliminary</a:t>
             </a:r>
           </a:p>
         </p:txBody>
@@ -4647,8 +4098,8 @@
         </p:nvSpPr>
         <p:spPr>
           <a:xfrm>
-            <a:off x="4416552" y="1554480"/>
-            <a:ext cx="3429000" cy="1600200"/>
+            <a:off x="6263640" y="1554480"/>
+            <a:ext cx="5230368" cy="1600200"/>
           </a:xfrm>
           <a:prstGeom prst="roundRect">
             <a:avLst/>
@@ -4692,8 +4143,8 @@
         </p:nvSpPr>
         <p:spPr>
           <a:xfrm>
-            <a:off x="4617720" y="1810512"/>
-            <a:ext cx="3017520" cy="502920"/>
+            <a:off x="6537960" y="1810512"/>
+            <a:ext cx="4663440" cy="502920"/>
           </a:xfrm>
           <a:prstGeom prst="rect">
             <a:avLst/>
@@ -4708,13 +4159,13 @@
           <a:p>
             <a:pPr algn="l"/>
             <a:r>
-              <a:rPr sz="2500" b="1">
+              <a:rPr sz="3000" b="1">
                 <a:solidFill>
                   <a:srgbClr val="0B1B2B"/>
                 </a:solidFill>
                 <a:latin typeface="Fraunces"/>
               </a:rPr>
-              <a:t>US$35.634B</a:t>
+              <a:t>US$675.153M</a:t>
             </a:r>
           </a:p>
         </p:txBody>
@@ -4727,8 +4178,8 @@
         </p:nvSpPr>
         <p:spPr>
           <a:xfrm>
-            <a:off x="4617720" y="2395728"/>
-            <a:ext cx="3017520" cy="548640"/>
+            <a:off x="6537960" y="2395728"/>
+            <a:ext cx="4663440" cy="548640"/>
           </a:xfrm>
           <a:prstGeom prst="rect">
             <a:avLst/>
@@ -4743,122 +4194,7 @@
           <a:p>
             <a:pPr algn="l"/>
             <a:r>
-              <a:rPr sz="1200" b="0">
-                <a:solidFill>
-                  <a:srgbClr val="51617A"/>
-                </a:solidFill>
-                <a:latin typeface="Manrope"/>
-              </a:rPr>
-              <a:t>Philippines cash remittances, 2025 preliminary</a:t>
-            </a:r>
-          </a:p>
-        </p:txBody>
-      </p:sp>
-      <p:sp>
-        <p:nvSpPr>
-          <p:cNvPr id="12" name="Rounded Rectangle 11"/>
-          <p:cNvSpPr/>
-          <p:nvPr/>
-        </p:nvSpPr>
-        <p:spPr>
-          <a:xfrm>
-            <a:off x="8147304" y="1554480"/>
-            <a:ext cx="3429000" cy="1600200"/>
-          </a:xfrm>
-          <a:prstGeom prst="roundRect">
-            <a:avLst/>
-          </a:prstGeom>
-          <a:solidFill>
-            <a:srgbClr val="FDF1E0"/>
-          </a:solidFill>
-          <a:ln w="15240">
-            <a:solidFill>
-              <a:srgbClr val="FDF1E0"/>
-            </a:solidFill>
-          </a:ln>
-        </p:spPr>
-        <p:style>
-          <a:lnRef idx="1">
-            <a:schemeClr val="accent1"/>
-          </a:lnRef>
-          <a:fillRef idx="3">
-            <a:schemeClr val="accent1"/>
-          </a:fillRef>
-          <a:effectRef idx="2">
-            <a:schemeClr val="accent1"/>
-          </a:effectRef>
-          <a:fontRef idx="minor">
-            <a:schemeClr val="lt1"/>
-          </a:fontRef>
-        </p:style>
-        <p:txBody>
-          <a:bodyPr rtlCol="0" anchor="ctr"/>
-          <a:lstStyle/>
-          <a:p>
-            <a:pPr algn="ctr"/>
-          </a:p>
-        </p:txBody>
-      </p:sp>
-      <p:sp>
-        <p:nvSpPr>
-          <p:cNvPr id="13" name="TextBox 12"/>
-          <p:cNvSpPr txBox="1"/>
-          <p:nvPr/>
-        </p:nvSpPr>
-        <p:spPr>
-          <a:xfrm>
-            <a:off x="8348472" y="1810512"/>
-            <a:ext cx="3017520" cy="502920"/>
-          </a:xfrm>
-          <a:prstGeom prst="rect">
-            <a:avLst/>
-          </a:prstGeom>
-          <a:noFill/>
-        </p:spPr>
-        <p:txBody>
-          <a:bodyPr wrap="square" lIns="0" rIns="0" tIns="0" bIns="0" anchor="t">
-            <a:spAutoFit/>
-          </a:bodyPr>
-          <a:lstStyle/>
-          <a:p>
-            <a:pPr algn="l"/>
-            <a:r>
-              <a:rPr sz="2500" b="1">
-                <a:solidFill>
-                  <a:srgbClr val="0B1B2B"/>
-                </a:solidFill>
-                <a:latin typeface="Fraunces"/>
-              </a:rPr>
-              <a:t>US$675.153M</a:t>
-            </a:r>
-          </a:p>
-        </p:txBody>
-      </p:sp>
-      <p:sp>
-        <p:nvSpPr>
-          <p:cNvPr id="14" name="TextBox 13"/>
-          <p:cNvSpPr txBox="1"/>
-          <p:nvPr/>
-        </p:nvSpPr>
-        <p:spPr>
-          <a:xfrm>
-            <a:off x="8348472" y="2395728"/>
-            <a:ext cx="3017520" cy="548640"/>
-          </a:xfrm>
-          <a:prstGeom prst="rect">
-            <a:avLst/>
-          </a:prstGeom>
-          <a:noFill/>
-        </p:spPr>
-        <p:txBody>
-          <a:bodyPr wrap="square" lIns="0" rIns="0" tIns="0" bIns="0" anchor="t">
-            <a:spAutoFit/>
-          </a:bodyPr>
-          <a:lstStyle/>
-          <a:p>
-            <a:pPr algn="l"/>
-            <a:r>
-              <a:rPr sz="1200" b="0">
+              <a:rPr sz="1300" b="0">
                 <a:solidFill>
                   <a:srgbClr val="51617A"/>
                 </a:solidFill>
@@ -4871,7 +4207,7 @@
       </p:sp>
       <p:sp>
         <p:nvSpPr>
-          <p:cNvPr id="15" name="Rounded Rectangle 14"/>
+          <p:cNvPr id="12" name="Rounded Rectangle 11"/>
           <p:cNvSpPr/>
           <p:nvPr/>
         </p:nvSpPr>
@@ -4916,7 +4252,7 @@
       </p:sp>
       <p:sp>
         <p:nvSpPr>
-          <p:cNvPr id="16" name="TextBox 15"/>
+          <p:cNvPr id="13" name="TextBox 12"/>
           <p:cNvSpPr txBox="1"/>
           <p:nvPr/>
         </p:nvSpPr>
@@ -4944,14 +4280,14 @@
                 </a:solidFill>
                 <a:latin typeface="Manrope"/>
               </a:rPr>
-              <a:t>Jan–May 2026: US$15.735B personal; US$14.110B cash; US$279.807M Malaysia-attributed cash.</a:t>
-            </a:r>
-          </a:p>
-        </p:txBody>
-      </p:sp>
-      <p:sp>
-        <p:nvSpPr>
-          <p:cNvPr id="17" name="TextBox 16"/>
+              <a:t>Jan–May 2026 already US$279.807M Malaysia-attributed cash.</a:t>
+            </a:r>
+          </a:p>
+        </p:txBody>
+      </p:sp>
+      <p:sp>
+        <p:nvSpPr>
+          <p:cNvPr id="14" name="TextBox 13"/>
           <p:cNvSpPr txBox="1"/>
           <p:nvPr/>
         </p:nvSpPr>
@@ -4986,7 +4322,7 @@
       </p:sp>
       <p:sp>
         <p:nvSpPr>
-          <p:cNvPr id="18" name="TextBox 17"/>
+          <p:cNvPr id="15" name="TextBox 14"/>
           <p:cNvSpPr txBox="1"/>
           <p:nvPr/>
         </p:nvSpPr>
@@ -5120,7 +4456,7 @@
                 </a:solidFill>
                 <a:latin typeface="Manrope"/>
               </a:rPr>
-              <a:t>CUSTOMER AND JOB TO BE DONE</a:t>
+              <a:t>PRODUCT TODAY VS NEXT</a:t>
             </a:r>
           </a:p>
         </p:txBody>
@@ -5155,7 +4491,7 @@
                 </a:solidFill>
                 <a:latin typeface="Fraunces"/>
               </a:rPr>
-              <a:t>One narrow customer; one clear job to be done</a:t>
+              <a:t>Plan, sign, and verify on-chain today</a:t>
             </a:r>
           </a:p>
         </p:txBody>
@@ -5190,7 +4526,7 @@
                 </a:solidFill>
                 <a:latin typeface="Manrope"/>
               </a:rPr>
-              <a:t>4 / 9</a:t>
+              <a:t>4 / 8</a:t>
             </a:r>
           </a:p>
         </p:txBody>
@@ -5203,8 +4539,8 @@
         </p:nvSpPr>
         <p:spPr>
           <a:xfrm>
-            <a:off x="685800" y="1481328"/>
-            <a:ext cx="10808208" cy="530352"/>
+            <a:off x="685800" y="1508760"/>
+            <a:ext cx="5230368" cy="4343400"/>
           </a:xfrm>
           <a:prstGeom prst="roundRect">
             <a:avLst/>
@@ -5214,7 +4550,7 @@
           </a:solidFill>
           <a:ln w="15240">
             <a:solidFill>
-              <a:srgbClr val="DBE3EE"/>
+              <a:srgbClr val="9DCBEA"/>
             </a:solidFill>
           </a:ln>
         </p:spPr>
@@ -5242,14 +4578,59 @@
       </p:sp>
       <p:sp>
         <p:nvSpPr>
-          <p:cNvPr id="7" name="TextBox 6"/>
+          <p:cNvPr id="7" name="Rounded Rectangle 6"/>
+          <p:cNvSpPr/>
+          <p:nvPr/>
+        </p:nvSpPr>
+        <p:spPr>
+          <a:xfrm>
+            <a:off x="932688" y="1737360"/>
+            <a:ext cx="1481328" cy="310896"/>
+          </a:xfrm>
+          <a:prstGeom prst="roundRect">
+            <a:avLst/>
+          </a:prstGeom>
+          <a:solidFill>
+            <a:srgbClr val="E6F3FB"/>
+          </a:solidFill>
+          <a:ln w="15240">
+            <a:solidFill>
+              <a:srgbClr val="9DCBEA"/>
+            </a:solidFill>
+          </a:ln>
+        </p:spPr>
+        <p:style>
+          <a:lnRef idx="1">
+            <a:schemeClr val="accent1"/>
+          </a:lnRef>
+          <a:fillRef idx="3">
+            <a:schemeClr val="accent1"/>
+          </a:fillRef>
+          <a:effectRef idx="2">
+            <a:schemeClr val="accent1"/>
+          </a:effectRef>
+          <a:fontRef idx="minor">
+            <a:schemeClr val="lt1"/>
+          </a:fontRef>
+        </p:style>
+        <p:txBody>
+          <a:bodyPr rtlCol="0" anchor="ctr"/>
+          <a:lstStyle/>
+          <a:p>
+            <a:pPr algn="ctr"/>
+          </a:p>
+        </p:txBody>
+      </p:sp>
+      <p:sp>
+        <p:nvSpPr>
+          <p:cNvPr id="8" name="TextBox 7"/>
           <p:cNvSpPr txBox="1"/>
           <p:nvPr/>
         </p:nvSpPr>
         <p:spPr>
           <a:xfrm>
-            <a:off x="896112" y="1600200"/>
-            <a:ext cx="2240280" cy="256032"/>
+            <a:off x="932688" y="1755648"/>
+            <a:ext cx="1481328" cy="228600"/>
           </a:xfrm>
           <a:prstGeom prst="rect">
             <a:avLst/>
@@ -5262,29 +4643,29 @@
           </a:bodyPr>
           <a:lstStyle/>
           <a:p>
-            <a:pPr algn="l"/>
-            <a:r>
-              <a:rPr sz="1200" b="1">
-                <a:solidFill>
-                  <a:srgbClr val="0B1B2B"/>
+            <a:pPr algn="ctr"/>
+            <a:r>
+              <a:rPr sz="900" b="1">
+                <a:solidFill>
+                  <a:srgbClr val="0369A1"/>
                 </a:solidFill>
                 <a:latin typeface="Manrope"/>
               </a:rPr>
-              <a:t>Customer</a:t>
-            </a:r>
-          </a:p>
-        </p:txBody>
-      </p:sp>
-      <p:sp>
-        <p:nvSpPr>
-          <p:cNvPr id="8" name="TextBox 7"/>
+              <a:t>TODAY · WORKING</a:t>
+            </a:r>
+          </a:p>
+        </p:txBody>
+      </p:sp>
+      <p:sp>
+        <p:nvSpPr>
+          <p:cNvPr id="9" name="TextBox 8"/>
           <p:cNvSpPr txBox="1"/>
           <p:nvPr/>
         </p:nvSpPr>
         <p:spPr>
           <a:xfrm>
-            <a:off x="2944368" y="1600200"/>
-            <a:ext cx="8229600" cy="274320"/>
+            <a:off x="932688" y="2267712"/>
+            <a:ext cx="4617720" cy="3291840"/>
           </a:xfrm>
           <a:prstGeom prst="rect">
             <a:avLst/>
@@ -5292,34 +4673,136 @@
           <a:noFill/>
         </p:spPr>
         <p:txBody>
-          <a:bodyPr wrap="square" lIns="0" rIns="0" tIns="0" bIns="0" anchor="t">
+          <a:bodyPr wrap="square">
             <a:spAutoFit/>
           </a:bodyPr>
           <a:lstStyle/>
           <a:p>
-            <a:pPr algn="l"/>
-            <a:r>
-              <a:rPr sz="1200" b="0">
+            <a:pPr>
+              <a:lnSpc>
+                <a:spcPct val="105000"/>
+              </a:lnSpc>
+              <a:spcAft>
+                <a:spcPts val="700"/>
+              </a:spcAft>
+              <a:defRPr sz="1350">
                 <a:solidFill>
                   <a:srgbClr val="51617A"/>
                 </a:solidFill>
                 <a:latin typeface="Manrope"/>
-              </a:rPr>
-              <a:t>Filipino worker in Malaysia with a Stellar wallet</a:t>
-            </a:r>
-          </a:p>
-        </p:txBody>
-      </p:sp>
-      <p:sp>
-        <p:nvSpPr>
-          <p:cNvPr id="9" name="Rounded Rectangle 8"/>
+              </a:defRPr>
+            </a:pPr>
+            <a:r>
+              <a:t>• Freighter connection + custom signed manageData session (not SEP-10)</a:t>
+            </a:r>
+          </a:p>
+          <a:p>
+            <a:pPr>
+              <a:lnSpc>
+                <a:spcPct val="105000"/>
+              </a:lnSpc>
+              <a:spcAft>
+                <a:spcPts val="700"/>
+              </a:spcAft>
+              <a:defRPr sz="1350">
+                <a:solidFill>
+                  <a:srgbClr val="51617A"/>
+                </a:solidFill>
+                <a:latin typeface="Manrope"/>
+              </a:defRPr>
+            </a:pPr>
+            <a:r>
+              <a:t>• Support-plan records; reminder day is metadata only</a:t>
+            </a:r>
+          </a:p>
+          <a:p>
+            <a:pPr>
+              <a:lnSpc>
+                <a:spcPct val="105000"/>
+              </a:lnSpc>
+              <a:spcAft>
+                <a:spcPts val="700"/>
+              </a:spcAft>
+              <a:defRPr sz="1350">
+                <a:solidFill>
+                  <a:srgbClr val="51617A"/>
+                </a:solidFill>
+                <a:latin typeface="Manrope"/>
+              </a:defRPr>
+            </a:pPr>
+            <a:r>
+              <a:t>• XLM Soroban escrow/release with 60-ledger demo cadence</a:t>
+            </a:r>
+          </a:p>
+          <a:p>
+            <a:pPr>
+              <a:lnSpc>
+                <a:spcPct val="105000"/>
+              </a:lnSpc>
+              <a:spcAft>
+                <a:spcPts val="700"/>
+              </a:spcAft>
+              <a:defRPr sz="1350">
+                <a:solidFill>
+                  <a:srgbClr val="51617A"/>
+                </a:solidFill>
+                <a:latin typeface="Manrope"/>
+              </a:defRPr>
+            </a:pPr>
+            <a:r>
+              <a:t>• Direct XLM/USDC payment to entered recipient address</a:t>
+            </a:r>
+          </a:p>
+          <a:p>
+            <a:pPr>
+              <a:lnSpc>
+                <a:spcPct val="105000"/>
+              </a:lnSpc>
+              <a:spcAft>
+                <a:spcPts val="700"/>
+              </a:spcAft>
+              <a:defRPr sz="1350">
+                <a:solidFill>
+                  <a:srgbClr val="51617A"/>
+                </a:solidFill>
+                <a:latin typeface="Manrope"/>
+              </a:defRPr>
+            </a:pPr>
+            <a:r>
+              <a:t>• Horizon/RPC verification, SEP-7 direct pay link, recipient watcher</a:t>
+            </a:r>
+          </a:p>
+          <a:p>
+            <a:pPr>
+              <a:lnSpc>
+                <a:spcPct val="105000"/>
+              </a:lnSpc>
+              <a:spcAft>
+                <a:spcPts val="700"/>
+              </a:spcAft>
+              <a:defRPr sz="1350">
+                <a:solidFill>
+                  <a:srgbClr val="51617A"/>
+                </a:solidFill>
+                <a:latin typeface="Manrope"/>
+              </a:defRPr>
+            </a:pPr>
+            <a:r>
+              <a:t>• Status ends at Verified on-chain</a:t>
+            </a:r>
+          </a:p>
+        </p:txBody>
+      </p:sp>
+      <p:sp>
+        <p:nvSpPr>
+          <p:cNvPr id="10" name="Rounded Rectangle 9"/>
           <p:cNvSpPr/>
           <p:nvPr/>
         </p:nvSpPr>
         <p:spPr>
           <a:xfrm>
-            <a:off x="685800" y="2093976"/>
-            <a:ext cx="10808208" cy="530352"/>
+            <a:off x="6263640" y="1508760"/>
+            <a:ext cx="5230368" cy="4343400"/>
           </a:xfrm>
           <a:prstGeom prst="roundRect">
             <a:avLst/>
@@ -5329,8 +4812,9 @@
           </a:solidFill>
           <a:ln w="15240">
             <a:solidFill>
-              <a:srgbClr val="DBE3EE"/>
+              <a:srgbClr val="9DCBEA"/>
             </a:solidFill>
+            <a:prstDash val="dash"/>
           </a:ln>
         </p:spPr>
         <p:style>
@@ -5357,95 +4841,26 @@
       </p:sp>
       <p:sp>
         <p:nvSpPr>
-          <p:cNvPr id="10" name="TextBox 9"/>
-          <p:cNvSpPr txBox="1"/>
-          <p:nvPr/>
-        </p:nvSpPr>
-        <p:spPr>
-          <a:xfrm>
-            <a:off x="896112" y="2212848"/>
-            <a:ext cx="2240280" cy="256032"/>
-          </a:xfrm>
-          <a:prstGeom prst="rect">
-            <a:avLst/>
-          </a:prstGeom>
-          <a:noFill/>
-        </p:spPr>
-        <p:txBody>
-          <a:bodyPr wrap="square" lIns="0" rIns="0" tIns="0" bIns="0" anchor="t">
-            <a:spAutoFit/>
-          </a:bodyPr>
-          <a:lstStyle/>
-          <a:p>
-            <a:pPr algn="l"/>
-            <a:r>
-              <a:rPr sz="1200" b="1">
-                <a:solidFill>
-                  <a:srgbClr val="0B1B2B"/>
-                </a:solidFill>
-                <a:latin typeface="Manrope"/>
-              </a:rPr>
-              <a:t>Recipient today</a:t>
-            </a:r>
-          </a:p>
-        </p:txBody>
-      </p:sp>
-      <p:sp>
-        <p:nvSpPr>
-          <p:cNvPr id="11" name="TextBox 10"/>
-          <p:cNvSpPr txBox="1"/>
-          <p:nvPr/>
-        </p:nvSpPr>
-        <p:spPr>
-          <a:xfrm>
-            <a:off x="2944368" y="2212848"/>
-            <a:ext cx="8229600" cy="274320"/>
-          </a:xfrm>
-          <a:prstGeom prst="rect">
-            <a:avLst/>
-          </a:prstGeom>
-          <a:noFill/>
-        </p:spPr>
-        <p:txBody>
-          <a:bodyPr wrap="square" lIns="0" rIns="0" tIns="0" bIns="0" anchor="t">
-            <a:spAutoFit/>
-          </a:bodyPr>
-          <a:lstStyle/>
-          <a:p>
-            <a:pPr algn="l"/>
-            <a:r>
-              <a:rPr sz="1200" b="0">
-                <a:solidFill>
-                  <a:srgbClr val="51617A"/>
-                </a:solidFill>
-                <a:latin typeface="Manrope"/>
-              </a:rPr>
-              <a:t>Family member with a Stellar address in the Philippines</a:t>
-            </a:r>
-          </a:p>
-        </p:txBody>
-      </p:sp>
-      <p:sp>
-        <p:nvSpPr>
-          <p:cNvPr id="12" name="Rounded Rectangle 11"/>
+          <p:cNvPr id="11" name="Rounded Rectangle 10"/>
           <p:cNvSpPr/>
           <p:nvPr/>
         </p:nvSpPr>
         <p:spPr>
           <a:xfrm>
-            <a:off x="685800" y="2706624"/>
-            <a:ext cx="10808208" cy="530352"/>
+            <a:off x="6510528" y="1737360"/>
+            <a:ext cx="1463040" cy="310896"/>
           </a:xfrm>
           <a:prstGeom prst="roundRect">
             <a:avLst/>
           </a:prstGeom>
           <a:solidFill>
-            <a:srgbClr val="E6F3FB"/>
+            <a:srgbClr val="FFFFFF"/>
           </a:solidFill>
           <a:ln w="15240">
             <a:solidFill>
-              <a:srgbClr val="DBE3EE"/>
+              <a:srgbClr val="9DCBEA"/>
             </a:solidFill>
+            <a:prstDash val="dash"/>
           </a:ln>
         </p:spPr>
         <p:style>
@@ -5472,14 +4887,14 @@
       </p:sp>
       <p:sp>
         <p:nvSpPr>
-          <p:cNvPr id="13" name="TextBox 12"/>
+          <p:cNvPr id="12" name="TextBox 11"/>
           <p:cNvSpPr txBox="1"/>
           <p:nvPr/>
         </p:nvSpPr>
         <p:spPr>
           <a:xfrm>
-            <a:off x="896112" y="2825496"/>
-            <a:ext cx="2240280" cy="256032"/>
+            <a:off x="6510528" y="1755648"/>
+            <a:ext cx="1463040" cy="228600"/>
           </a:xfrm>
           <a:prstGeom prst="rect">
             <a:avLst/>
@@ -5492,29 +4907,29 @@
           </a:bodyPr>
           <a:lstStyle/>
           <a:p>
-            <a:pPr algn="l"/>
-            <a:r>
-              <a:rPr sz="1200" b="1">
-                <a:solidFill>
-                  <a:srgbClr val="0B1B2B"/>
+            <a:pPr algn="ctr"/>
+            <a:r>
+              <a:rPr sz="900" b="1">
+                <a:solidFill>
+                  <a:srgbClr val="0369A1"/>
                 </a:solidFill>
                 <a:latin typeface="Manrope"/>
               </a:rPr>
-              <a:t>Trigger</a:t>
-            </a:r>
-          </a:p>
-        </p:txBody>
-      </p:sp>
-      <p:sp>
-        <p:nvSpPr>
-          <p:cNvPr id="14" name="TextBox 13"/>
+              <a:t>NEXT · PLANNED</a:t>
+            </a:r>
+          </a:p>
+        </p:txBody>
+      </p:sp>
+      <p:sp>
+        <p:nvSpPr>
+          <p:cNvPr id="13" name="TextBox 12"/>
           <p:cNvSpPr txBox="1"/>
           <p:nvPr/>
         </p:nvSpPr>
         <p:spPr>
           <a:xfrm>
-            <a:off x="2944368" y="2825496"/>
-            <a:ext cx="8229600" cy="274320"/>
+            <a:off x="6510528" y="2267712"/>
+            <a:ext cx="4617720" cy="3291840"/>
           </a:xfrm>
           <a:prstGeom prst="rect">
             <a:avLst/>
@@ -5522,480 +4937,84 @@
           <a:noFill/>
         </p:spPr>
         <p:txBody>
-          <a:bodyPr wrap="square" lIns="0" rIns="0" tIns="0" bIns="0" anchor="t">
+          <a:bodyPr wrap="square">
             <a:spAutoFit/>
           </a:bodyPr>
           <a:lstStyle/>
           <a:p>
-            <a:pPr algn="l"/>
-            <a:r>
-              <a:rPr sz="1200" b="0">
+            <a:pPr>
+              <a:lnSpc>
+                <a:spcPct val="105000"/>
+              </a:lnSpc>
+              <a:spcAft>
+                <a:spcPts val="700"/>
+              </a:spcAft>
+              <a:defRPr sz="1350">
                 <a:solidFill>
                   <a:srgbClr val="51617A"/>
                 </a:solidFill>
                 <a:latin typeface="Manrope"/>
-              </a:rPr>
-              <a:t>Salary day or another chosen planning date</a:t>
-            </a:r>
-          </a:p>
-        </p:txBody>
-      </p:sp>
-      <p:sp>
-        <p:nvSpPr>
-          <p:cNvPr id="15" name="Rounded Rectangle 14"/>
-          <p:cNvSpPr/>
-          <p:nvPr/>
-        </p:nvSpPr>
-        <p:spPr>
-          <a:xfrm>
-            <a:off x="685800" y="3319272"/>
-            <a:ext cx="10808208" cy="530352"/>
-          </a:xfrm>
-          <a:prstGeom prst="roundRect">
-            <a:avLst/>
-          </a:prstGeom>
-          <a:solidFill>
-            <a:srgbClr val="FFFFFF"/>
-          </a:solidFill>
-          <a:ln w="15240">
-            <a:solidFill>
-              <a:srgbClr val="DBE3EE"/>
-            </a:solidFill>
-          </a:ln>
-        </p:spPr>
-        <p:style>
-          <a:lnRef idx="1">
-            <a:schemeClr val="accent1"/>
-          </a:lnRef>
-          <a:fillRef idx="3">
-            <a:schemeClr val="accent1"/>
-          </a:fillRef>
-          <a:effectRef idx="2">
-            <a:schemeClr val="accent1"/>
-          </a:effectRef>
-          <a:fontRef idx="minor">
-            <a:schemeClr val="lt1"/>
-          </a:fontRef>
-        </p:style>
-        <p:txBody>
-          <a:bodyPr rtlCol="0" anchor="ctr"/>
-          <a:lstStyle/>
-          <a:p>
-            <a:pPr algn="ctr"/>
-          </a:p>
-        </p:txBody>
-      </p:sp>
-      <p:sp>
-        <p:nvSpPr>
-          <p:cNvPr id="16" name="TextBox 15"/>
-          <p:cNvSpPr txBox="1"/>
-          <p:nvPr/>
-        </p:nvSpPr>
-        <p:spPr>
-          <a:xfrm>
-            <a:off x="896112" y="3438144"/>
-            <a:ext cx="2240280" cy="256032"/>
-          </a:xfrm>
-          <a:prstGeom prst="rect">
-            <a:avLst/>
-          </a:prstGeom>
-          <a:noFill/>
-        </p:spPr>
-        <p:txBody>
-          <a:bodyPr wrap="square" lIns="0" rIns="0" tIns="0" bIns="0" anchor="t">
-            <a:spAutoFit/>
-          </a:bodyPr>
-          <a:lstStyle/>
-          <a:p>
-            <a:pPr algn="l"/>
-            <a:r>
-              <a:rPr sz="1200" b="1">
-                <a:solidFill>
-                  <a:srgbClr val="0B1B2B"/>
-                </a:solidFill>
-                <a:latin typeface="Manrope"/>
-              </a:rPr>
-              <a:t>Functional job</a:t>
-            </a:r>
-          </a:p>
-        </p:txBody>
-      </p:sp>
-      <p:sp>
-        <p:nvSpPr>
-          <p:cNvPr id="17" name="TextBox 16"/>
-          <p:cNvSpPr txBox="1"/>
-          <p:nvPr/>
-        </p:nvSpPr>
-        <p:spPr>
-          <a:xfrm>
-            <a:off x="2944368" y="3438144"/>
-            <a:ext cx="8229600" cy="274320"/>
-          </a:xfrm>
-          <a:prstGeom prst="rect">
-            <a:avLst/>
-          </a:prstGeom>
-          <a:noFill/>
-        </p:spPr>
-        <p:txBody>
-          <a:bodyPr wrap="square" lIns="0" rIns="0" tIns="0" bIns="0" anchor="t">
-            <a:spAutoFit/>
-          </a:bodyPr>
-          <a:lstStyle/>
-          <a:p>
-            <a:pPr algn="l"/>
-            <a:r>
-              <a:rPr sz="1200" b="0">
+              </a:defRPr>
+            </a:pPr>
+            <a:r>
+              <a:t>• Licensed anchor/provider onboarding and agreements</a:t>
+            </a:r>
+          </a:p>
+          <a:p>
+            <a:pPr>
+              <a:lnSpc>
+                <a:spcPct val="105000"/>
+              </a:lnSpc>
+              <a:spcAft>
+                <a:spcPts val="700"/>
+              </a:spcAft>
+              <a:defRPr sz="1350">
                 <a:solidFill>
                   <a:srgbClr val="51617A"/>
                 </a:solidFill>
                 <a:latin typeface="Manrope"/>
-              </a:rPr>
-              <a:t>Store recipient + amount + date, then sign a transfer</a:t>
-            </a:r>
-          </a:p>
-        </p:txBody>
-      </p:sp>
-      <p:sp>
-        <p:nvSpPr>
-          <p:cNvPr id="18" name="Rounded Rectangle 17"/>
-          <p:cNvSpPr/>
-          <p:nvPr/>
-        </p:nvSpPr>
-        <p:spPr>
-          <a:xfrm>
-            <a:off x="685800" y="3931920"/>
-            <a:ext cx="10808208" cy="530352"/>
-          </a:xfrm>
-          <a:prstGeom prst="roundRect">
-            <a:avLst/>
-          </a:prstGeom>
-          <a:solidFill>
-            <a:srgbClr val="E6F3FB"/>
-          </a:solidFill>
-          <a:ln w="15240">
-            <a:solidFill>
-              <a:srgbClr val="DBE3EE"/>
-            </a:solidFill>
-          </a:ln>
-        </p:spPr>
-        <p:style>
-          <a:lnRef idx="1">
-            <a:schemeClr val="accent1"/>
-          </a:lnRef>
-          <a:fillRef idx="3">
-            <a:schemeClr val="accent1"/>
-          </a:fillRef>
-          <a:effectRef idx="2">
-            <a:schemeClr val="accent1"/>
-          </a:effectRef>
-          <a:fontRef idx="minor">
-            <a:schemeClr val="lt1"/>
-          </a:fontRef>
-        </p:style>
-        <p:txBody>
-          <a:bodyPr rtlCol="0" anchor="ctr"/>
-          <a:lstStyle/>
-          <a:p>
-            <a:pPr algn="ctr"/>
-          </a:p>
-        </p:txBody>
-      </p:sp>
-      <p:sp>
-        <p:nvSpPr>
-          <p:cNvPr id="19" name="TextBox 18"/>
-          <p:cNvSpPr txBox="1"/>
-          <p:nvPr/>
-        </p:nvSpPr>
-        <p:spPr>
-          <a:xfrm>
-            <a:off x="896112" y="4050791"/>
-            <a:ext cx="2240280" cy="256032"/>
-          </a:xfrm>
-          <a:prstGeom prst="rect">
-            <a:avLst/>
-          </a:prstGeom>
-          <a:noFill/>
-        </p:spPr>
-        <p:txBody>
-          <a:bodyPr wrap="square" lIns="0" rIns="0" tIns="0" bIns="0" anchor="t">
-            <a:spAutoFit/>
-          </a:bodyPr>
-          <a:lstStyle/>
-          <a:p>
-            <a:pPr algn="l"/>
-            <a:r>
-              <a:rPr sz="1200" b="1">
-                <a:solidFill>
-                  <a:srgbClr val="0B1B2B"/>
-                </a:solidFill>
-                <a:latin typeface="Manrope"/>
-              </a:rPr>
-              <a:t>Emotional job</a:t>
-            </a:r>
-          </a:p>
-        </p:txBody>
-      </p:sp>
-      <p:sp>
-        <p:nvSpPr>
-          <p:cNvPr id="20" name="TextBox 19"/>
-          <p:cNvSpPr txBox="1"/>
-          <p:nvPr/>
-        </p:nvSpPr>
-        <p:spPr>
-          <a:xfrm>
-            <a:off x="2944368" y="4050791"/>
-            <a:ext cx="8229600" cy="274320"/>
-          </a:xfrm>
-          <a:prstGeom prst="rect">
-            <a:avLst/>
-          </a:prstGeom>
-          <a:noFill/>
-        </p:spPr>
-        <p:txBody>
-          <a:bodyPr wrap="square" lIns="0" rIns="0" tIns="0" bIns="0" anchor="t">
-            <a:spAutoFit/>
-          </a:bodyPr>
-          <a:lstStyle/>
-          <a:p>
-            <a:pPr algn="l"/>
-            <a:r>
-              <a:rPr sz="1200" b="0">
+              </a:defRPr>
+            </a:pPr>
+            <a:r>
+              <a:t>• SEP-1 + provider SEP-10 + hosted SEP-24</a:t>
+            </a:r>
+          </a:p>
+          <a:p>
+            <a:pPr>
+              <a:lnSpc>
+                <a:spcPct val="105000"/>
+              </a:lnSpc>
+              <a:spcAft>
+                <a:spcPts val="700"/>
+              </a:spcAft>
+              <a:defRPr sz="1350">
                 <a:solidFill>
                   <a:srgbClr val="51617A"/>
                 </a:solidFill>
                 <a:latin typeface="Manrope"/>
-              </a:rPr>
-              <a:t>Feel responsible without pretending the transfer is automatic</a:t>
-            </a:r>
-          </a:p>
-        </p:txBody>
-      </p:sp>
-      <p:sp>
-        <p:nvSpPr>
-          <p:cNvPr id="21" name="Rounded Rectangle 20"/>
-          <p:cNvSpPr/>
-          <p:nvPr/>
-        </p:nvSpPr>
-        <p:spPr>
-          <a:xfrm>
-            <a:off x="685800" y="4544568"/>
-            <a:ext cx="10808208" cy="530352"/>
-          </a:xfrm>
-          <a:prstGeom prst="roundRect">
-            <a:avLst/>
-          </a:prstGeom>
-          <a:solidFill>
-            <a:srgbClr val="FFFFFF"/>
-          </a:solidFill>
-          <a:ln w="15240">
-            <a:solidFill>
-              <a:srgbClr val="DBE3EE"/>
-            </a:solidFill>
-          </a:ln>
-        </p:spPr>
-        <p:style>
-          <a:lnRef idx="1">
-            <a:schemeClr val="accent1"/>
-          </a:lnRef>
-          <a:fillRef idx="3">
-            <a:schemeClr val="accent1"/>
-          </a:fillRef>
-          <a:effectRef idx="2">
-            <a:schemeClr val="accent1"/>
-          </a:effectRef>
-          <a:fontRef idx="minor">
-            <a:schemeClr val="lt1"/>
-          </a:fontRef>
-        </p:style>
-        <p:txBody>
-          <a:bodyPr rtlCol="0" anchor="ctr"/>
-          <a:lstStyle/>
-          <a:p>
-            <a:pPr algn="ctr"/>
-          </a:p>
-        </p:txBody>
-      </p:sp>
-      <p:sp>
-        <p:nvSpPr>
-          <p:cNvPr id="22" name="TextBox 21"/>
-          <p:cNvSpPr txBox="1"/>
-          <p:nvPr/>
-        </p:nvSpPr>
-        <p:spPr>
-          <a:xfrm>
-            <a:off x="896112" y="4663440"/>
-            <a:ext cx="2240280" cy="256032"/>
-          </a:xfrm>
-          <a:prstGeom prst="rect">
-            <a:avLst/>
-          </a:prstGeom>
-          <a:noFill/>
-        </p:spPr>
-        <p:txBody>
-          <a:bodyPr wrap="square" lIns="0" rIns="0" tIns="0" bIns="0" anchor="t">
-            <a:spAutoFit/>
-          </a:bodyPr>
-          <a:lstStyle/>
-          <a:p>
-            <a:pPr algn="l"/>
-            <a:r>
-              <a:rPr sz="1200" b="1">
-                <a:solidFill>
-                  <a:srgbClr val="0B1B2B"/>
-                </a:solidFill>
-                <a:latin typeface="Manrope"/>
-              </a:rPr>
-              <a:t>Evidence job</a:t>
-            </a:r>
-          </a:p>
-        </p:txBody>
-      </p:sp>
-      <p:sp>
-        <p:nvSpPr>
-          <p:cNvPr id="23" name="TextBox 22"/>
-          <p:cNvSpPr txBox="1"/>
-          <p:nvPr/>
-        </p:nvSpPr>
-        <p:spPr>
-          <a:xfrm>
-            <a:off x="2944368" y="4663440"/>
-            <a:ext cx="8229600" cy="274320"/>
-          </a:xfrm>
-          <a:prstGeom prst="rect">
-            <a:avLst/>
-          </a:prstGeom>
-          <a:noFill/>
-        </p:spPr>
-        <p:txBody>
-          <a:bodyPr wrap="square" lIns="0" rIns="0" tIns="0" bIns="0" anchor="t">
-            <a:spAutoFit/>
-          </a:bodyPr>
-          <a:lstStyle/>
-          <a:p>
-            <a:pPr algn="l"/>
-            <a:r>
-              <a:rPr sz="1200" b="0">
+              </a:defRPr>
+            </a:pPr>
+            <a:r>
+              <a:t>• KYC, quote/limits, approved deposit routing, provider status</a:t>
+            </a:r>
+          </a:p>
+          <a:p>
+            <a:pPr>
+              <a:lnSpc>
+                <a:spcPct val="105000"/>
+              </a:lnSpc>
+              <a:spcAft>
+                <a:spcPts val="700"/>
+              </a:spcAft>
+              <a:defRPr sz="1350">
                 <a:solidFill>
                   <a:srgbClr val="51617A"/>
                 </a:solidFill>
                 <a:latin typeface="Manrope"/>
-              </a:rPr>
-              <a:t>Open a real transaction hash and verify the destination</a:t>
-            </a:r>
-          </a:p>
-        </p:txBody>
-      </p:sp>
-      <p:sp>
-        <p:nvSpPr>
-          <p:cNvPr id="24" name="Rounded Rectangle 23"/>
-          <p:cNvSpPr/>
-          <p:nvPr/>
-        </p:nvSpPr>
-        <p:spPr>
-          <a:xfrm>
-            <a:off x="685800" y="5157216"/>
-            <a:ext cx="10808208" cy="530352"/>
-          </a:xfrm>
-          <a:prstGeom prst="roundRect">
-            <a:avLst/>
-          </a:prstGeom>
-          <a:solidFill>
-            <a:srgbClr val="E6F3FB"/>
-          </a:solidFill>
-          <a:ln w="15240">
-            <a:solidFill>
-              <a:srgbClr val="DBE3EE"/>
-            </a:solidFill>
-          </a:ln>
-        </p:spPr>
-        <p:style>
-          <a:lnRef idx="1">
-            <a:schemeClr val="accent1"/>
-          </a:lnRef>
-          <a:fillRef idx="3">
-            <a:schemeClr val="accent1"/>
-          </a:fillRef>
-          <a:effectRef idx="2">
-            <a:schemeClr val="accent1"/>
-          </a:effectRef>
-          <a:fontRef idx="minor">
-            <a:schemeClr val="lt1"/>
-          </a:fontRef>
-        </p:style>
-        <p:txBody>
-          <a:bodyPr rtlCol="0" anchor="ctr"/>
-          <a:lstStyle/>
-          <a:p>
-            <a:pPr algn="ctr"/>
-          </a:p>
-        </p:txBody>
-      </p:sp>
-      <p:sp>
-        <p:nvSpPr>
-          <p:cNvPr id="25" name="TextBox 24"/>
-          <p:cNvSpPr txBox="1"/>
-          <p:nvPr/>
-        </p:nvSpPr>
-        <p:spPr>
-          <a:xfrm>
-            <a:off x="896112" y="5276088"/>
-            <a:ext cx="2240280" cy="256032"/>
-          </a:xfrm>
-          <a:prstGeom prst="rect">
-            <a:avLst/>
-          </a:prstGeom>
-          <a:noFill/>
-        </p:spPr>
-        <p:txBody>
-          <a:bodyPr wrap="square" lIns="0" rIns="0" tIns="0" bIns="0" anchor="t">
-            <a:spAutoFit/>
-          </a:bodyPr>
-          <a:lstStyle/>
-          <a:p>
-            <a:pPr algn="l"/>
-            <a:r>
-              <a:rPr sz="1200" b="1">
-                <a:solidFill>
-                  <a:srgbClr val="0B1B2B"/>
-                </a:solidFill>
-                <a:latin typeface="Manrope"/>
-              </a:rPr>
-              <a:t>Research next</a:t>
-            </a:r>
-          </a:p>
-        </p:txBody>
-      </p:sp>
-      <p:sp>
-        <p:nvSpPr>
-          <p:cNvPr id="26" name="TextBox 25"/>
-          <p:cNvSpPr txBox="1"/>
-          <p:nvPr/>
-        </p:nvSpPr>
-        <p:spPr>
-          <a:xfrm>
-            <a:off x="2944368" y="5276088"/>
-            <a:ext cx="8229600" cy="274320"/>
-          </a:xfrm>
-          <a:prstGeom prst="rect">
-            <a:avLst/>
-          </a:prstGeom>
-          <a:noFill/>
-        </p:spPr>
-        <p:txBody>
-          <a:bodyPr wrap="square" lIns="0" rIns="0" tIns="0" bIns="0" anchor="t">
-            <a:spAutoFit/>
-          </a:bodyPr>
-          <a:lstStyle/>
-          <a:p>
-            <a:pPr algn="l"/>
-            <a:r>
-              <a:rPr sz="1200" b="0">
-                <a:solidFill>
-                  <a:srgbClr val="51617A"/>
-                </a:solidFill>
-                <a:latin typeface="Manrope"/>
-              </a:rPr>
-              <a:t>Recipient cash preference, funding rail, provider trust, compliance path</a:t>
+              </a:defRPr>
+            </a:pPr>
+            <a:r>
+              <a:t>• PHP cash-out, provider reference, provider-confirmed collection</a:t>
             </a:r>
           </a:p>
         </p:txBody>
@@ -6101,7 +5120,7 @@
                 </a:solidFill>
                 <a:latin typeface="Manrope"/>
               </a:rPr>
-              <a:t>PRODUCT TODAY VS NEXT</a:t>
+              <a:t>ONE FLOW — SOLID IS CURRENT, DASHED IS PLANNED</a:t>
             </a:r>
           </a:p>
         </p:txBody>
@@ -6136,7 +5155,7 @@
                 </a:solidFill>
                 <a:latin typeface="Fraunces"/>
               </a:rPr>
-              <a:t>Do not confuse on-chain proof with cash delivery</a:t>
+              <a:t>Solid is current. Dashed is planned.</a:t>
             </a:r>
           </a:p>
         </p:txBody>
@@ -6171,7 +5190,7 @@
                 </a:solidFill>
                 <a:latin typeface="Manrope"/>
               </a:rPr>
-              <a:t>5 / 9</a:t>
+              <a:t>5 / 8</a:t>
             </a:r>
           </a:p>
         </p:txBody>
@@ -6184,14 +5203,14 @@
         </p:nvSpPr>
         <p:spPr>
           <a:xfrm>
-            <a:off x="685800" y="1508760"/>
-            <a:ext cx="5230368" cy="4343400"/>
+            <a:off x="658368" y="1874519"/>
+            <a:ext cx="2057400" cy="1417320"/>
           </a:xfrm>
           <a:prstGeom prst="roundRect">
             <a:avLst/>
           </a:prstGeom>
           <a:solidFill>
-            <a:srgbClr val="E6F3FB"/>
+            <a:srgbClr val="FFFFFF"/>
           </a:solidFill>
           <a:ln w="15240">
             <a:solidFill>
@@ -6223,20 +5242,126 @@
       </p:sp>
       <p:sp>
         <p:nvSpPr>
-          <p:cNvPr id="7" name="Rounded Rectangle 6"/>
+          <p:cNvPr id="7" name="TextBox 6"/>
+          <p:cNvSpPr txBox="1"/>
+          <p:nvPr/>
+        </p:nvSpPr>
+        <p:spPr>
+          <a:xfrm>
+            <a:off x="768096" y="2167128"/>
+            <a:ext cx="1828800" cy="274320"/>
+          </a:xfrm>
+          <a:prstGeom prst="rect">
+            <a:avLst/>
+          </a:prstGeom>
+          <a:noFill/>
+        </p:spPr>
+        <p:txBody>
+          <a:bodyPr wrap="square" lIns="0" rIns="0" tIns="0" bIns="0" anchor="t">
+            <a:spAutoFit/>
+          </a:bodyPr>
+          <a:lstStyle/>
+          <a:p>
+            <a:pPr algn="ctr"/>
+            <a:r>
+              <a:rPr sz="1600" b="1">
+                <a:solidFill>
+                  <a:srgbClr val="0B1B2B"/>
+                </a:solidFill>
+                <a:latin typeface="Manrope"/>
+              </a:rPr>
+              <a:t>Sender</a:t>
+            </a:r>
+          </a:p>
+        </p:txBody>
+      </p:sp>
+      <p:sp>
+        <p:nvSpPr>
+          <p:cNvPr id="8" name="TextBox 7"/>
+          <p:cNvSpPr txBox="1"/>
+          <p:nvPr/>
+        </p:nvSpPr>
+        <p:spPr>
+          <a:xfrm>
+            <a:off x="768096" y="2578608"/>
+            <a:ext cx="1828800" cy="502920"/>
+          </a:xfrm>
+          <a:prstGeom prst="rect">
+            <a:avLst/>
+          </a:prstGeom>
+          <a:noFill/>
+        </p:spPr>
+        <p:txBody>
+          <a:bodyPr wrap="square" lIns="0" rIns="0" tIns="0" bIns="0" anchor="t">
+            <a:spAutoFit/>
+          </a:bodyPr>
+          <a:lstStyle/>
+          <a:p>
+            <a:pPr algn="ctr"/>
+            <a:r>
+              <a:rPr sz="1100" b="0">
+                <a:solidFill>
+                  <a:srgbClr val="51617A"/>
+                </a:solidFill>
+                <a:latin typeface="Manrope"/>
+              </a:rPr>
+              <a:t>Filipino worker
+in Malaysia</a:t>
+            </a:r>
+          </a:p>
+        </p:txBody>
+      </p:sp>
+      <p:sp>
+        <p:nvSpPr>
+          <p:cNvPr id="9" name="TextBox 8"/>
+          <p:cNvSpPr txBox="1"/>
+          <p:nvPr/>
+        </p:nvSpPr>
+        <p:spPr>
+          <a:xfrm>
+            <a:off x="2770632" y="2313432"/>
+            <a:ext cx="685800" cy="365760"/>
+          </a:xfrm>
+          <a:prstGeom prst="rect">
+            <a:avLst/>
+          </a:prstGeom>
+          <a:noFill/>
+        </p:spPr>
+        <p:txBody>
+          <a:bodyPr wrap="square" lIns="0" rIns="0" tIns="0" bIns="0" anchor="t">
+            <a:spAutoFit/>
+          </a:bodyPr>
+          <a:lstStyle/>
+          <a:p>
+            <a:pPr algn="ctr"/>
+            <a:r>
+              <a:rPr sz="2500" b="1">
+                <a:solidFill>
+                  <a:srgbClr val="0369A1"/>
+                </a:solidFill>
+                <a:latin typeface="Manrope"/>
+              </a:rPr>
+              <a:t>→</a:t>
+            </a:r>
+          </a:p>
+        </p:txBody>
+      </p:sp>
+      <p:sp>
+        <p:nvSpPr>
+          <p:cNvPr id="10" name="Rounded Rectangle 9"/>
           <p:cNvSpPr/>
           <p:nvPr/>
         </p:nvSpPr>
         <p:spPr>
           <a:xfrm>
-            <a:off x="932688" y="1737360"/>
-            <a:ext cx="1481328" cy="310896"/>
+            <a:off x="3529584" y="1874519"/>
+            <a:ext cx="2057400" cy="1417320"/>
           </a:xfrm>
           <a:prstGeom prst="roundRect">
             <a:avLst/>
           </a:prstGeom>
           <a:solidFill>
-            <a:srgbClr val="E6F3FB"/>
+            <a:srgbClr val="FFFFFF"/>
           </a:solidFill>
           <a:ln w="15240">
             <a:solidFill>
@@ -6268,14 +5393,14 @@
       </p:sp>
       <p:sp>
         <p:nvSpPr>
-          <p:cNvPr id="8" name="TextBox 7"/>
+          <p:cNvPr id="11" name="TextBox 10"/>
           <p:cNvSpPr txBox="1"/>
           <p:nvPr/>
         </p:nvSpPr>
         <p:spPr>
           <a:xfrm>
-            <a:off x="932688" y="1755648"/>
-            <a:ext cx="1481328" cy="228600"/>
+            <a:off x="3639312" y="2167128"/>
+            <a:ext cx="1828800" cy="274320"/>
           </a:xfrm>
           <a:prstGeom prst="rect">
             <a:avLst/>
@@ -6290,27 +5415,27 @@
           <a:p>
             <a:pPr algn="ctr"/>
             <a:r>
-              <a:rPr sz="900" b="1">
-                <a:solidFill>
-                  <a:srgbClr val="0369A1"/>
+              <a:rPr sz="1600" b="1">
+                <a:solidFill>
+                  <a:srgbClr val="0B1B2B"/>
                 </a:solidFill>
                 <a:latin typeface="Manrope"/>
               </a:rPr>
-              <a:t>TODAY · WORKING</a:t>
-            </a:r>
-          </a:p>
-        </p:txBody>
-      </p:sp>
-      <p:sp>
-        <p:nvSpPr>
-          <p:cNvPr id="9" name="TextBox 8"/>
+              <a:t>Bakti plan</a:t>
+            </a:r>
+          </a:p>
+        </p:txBody>
+      </p:sp>
+      <p:sp>
+        <p:nvSpPr>
+          <p:cNvPr id="12" name="TextBox 11"/>
           <p:cNvSpPr txBox="1"/>
           <p:nvPr/>
         </p:nvSpPr>
         <p:spPr>
           <a:xfrm>
-            <a:off x="932688" y="2267712"/>
-            <a:ext cx="4617720" cy="3291840"/>
+            <a:off x="3639312" y="2578608"/>
+            <a:ext cx="1828800" cy="502920"/>
           </a:xfrm>
           <a:prstGeom prst="rect">
             <a:avLst/>
@@ -6318,136 +5443,337 @@
           <a:noFill/>
         </p:spPr>
         <p:txBody>
-          <a:bodyPr wrap="square">
+          <a:bodyPr wrap="square" lIns="0" rIns="0" tIns="0" bIns="0" anchor="t">
             <a:spAutoFit/>
           </a:bodyPr>
           <a:lstStyle/>
           <a:p>
-            <a:pPr>
-              <a:lnSpc>
-                <a:spcPct val="105000"/>
-              </a:lnSpc>
-              <a:spcAft>
-                <a:spcPts val="700"/>
-              </a:spcAft>
-              <a:defRPr sz="1350">
+            <a:pPr algn="ctr"/>
+            <a:r>
+              <a:rPr sz="1100" b="0">
                 <a:solidFill>
                   <a:srgbClr val="51617A"/>
                 </a:solidFill>
                 <a:latin typeface="Manrope"/>
-              </a:defRPr>
-            </a:pPr>
-            <a:r>
-              <a:t>• Freighter connection + custom signed manageData session (not SEP-10)</a:t>
-            </a:r>
-          </a:p>
-          <a:p>
-            <a:pPr>
-              <a:lnSpc>
-                <a:spcPct val="105000"/>
-              </a:lnSpc>
-              <a:spcAft>
-                <a:spcPts val="700"/>
-              </a:spcAft>
-              <a:defRPr sz="1350">
+              </a:rPr>
+              <a:t>Recipient + amount
++ planning date</a:t>
+            </a:r>
+          </a:p>
+        </p:txBody>
+      </p:sp>
+      <p:sp>
+        <p:nvSpPr>
+          <p:cNvPr id="13" name="TextBox 12"/>
+          <p:cNvSpPr txBox="1"/>
+          <p:nvPr/>
+        </p:nvSpPr>
+        <p:spPr>
+          <a:xfrm>
+            <a:off x="5641848" y="2313432"/>
+            <a:ext cx="685800" cy="365760"/>
+          </a:xfrm>
+          <a:prstGeom prst="rect">
+            <a:avLst/>
+          </a:prstGeom>
+          <a:noFill/>
+        </p:spPr>
+        <p:txBody>
+          <a:bodyPr wrap="square" lIns="0" rIns="0" tIns="0" bIns="0" anchor="t">
+            <a:spAutoFit/>
+          </a:bodyPr>
+          <a:lstStyle/>
+          <a:p>
+            <a:pPr algn="ctr"/>
+            <a:r>
+              <a:rPr sz="2500" b="1">
+                <a:solidFill>
+                  <a:srgbClr val="0369A1"/>
+                </a:solidFill>
+                <a:latin typeface="Manrope"/>
+              </a:rPr>
+              <a:t>→</a:t>
+            </a:r>
+          </a:p>
+        </p:txBody>
+      </p:sp>
+      <p:sp>
+        <p:nvSpPr>
+          <p:cNvPr id="14" name="Rounded Rectangle 13"/>
+          <p:cNvSpPr/>
+          <p:nvPr/>
+        </p:nvSpPr>
+        <p:spPr>
+          <a:xfrm>
+            <a:off x="6400800" y="1874519"/>
+            <a:ext cx="2057400" cy="1417320"/>
+          </a:xfrm>
+          <a:prstGeom prst="roundRect">
+            <a:avLst/>
+          </a:prstGeom>
+          <a:solidFill>
+            <a:srgbClr val="FFFFFF"/>
+          </a:solidFill>
+          <a:ln w="15240">
+            <a:solidFill>
+              <a:srgbClr val="9DCBEA"/>
+            </a:solidFill>
+          </a:ln>
+        </p:spPr>
+        <p:style>
+          <a:lnRef idx="1">
+            <a:schemeClr val="accent1"/>
+          </a:lnRef>
+          <a:fillRef idx="3">
+            <a:schemeClr val="accent1"/>
+          </a:fillRef>
+          <a:effectRef idx="2">
+            <a:schemeClr val="accent1"/>
+          </a:effectRef>
+          <a:fontRef idx="minor">
+            <a:schemeClr val="lt1"/>
+          </a:fontRef>
+        </p:style>
+        <p:txBody>
+          <a:bodyPr rtlCol="0" anchor="ctr"/>
+          <a:lstStyle/>
+          <a:p>
+            <a:pPr algn="ctr"/>
+          </a:p>
+        </p:txBody>
+      </p:sp>
+      <p:sp>
+        <p:nvSpPr>
+          <p:cNvPr id="15" name="TextBox 14"/>
+          <p:cNvSpPr txBox="1"/>
+          <p:nvPr/>
+        </p:nvSpPr>
+        <p:spPr>
+          <a:xfrm>
+            <a:off x="6510528" y="2167128"/>
+            <a:ext cx="1828800" cy="274320"/>
+          </a:xfrm>
+          <a:prstGeom prst="rect">
+            <a:avLst/>
+          </a:prstGeom>
+          <a:noFill/>
+        </p:spPr>
+        <p:txBody>
+          <a:bodyPr wrap="square" lIns="0" rIns="0" tIns="0" bIns="0" anchor="t">
+            <a:spAutoFit/>
+          </a:bodyPr>
+          <a:lstStyle/>
+          <a:p>
+            <a:pPr algn="ctr"/>
+            <a:r>
+              <a:rPr sz="1600" b="1">
+                <a:solidFill>
+                  <a:srgbClr val="0B1B2B"/>
+                </a:solidFill>
+                <a:latin typeface="Manrope"/>
+              </a:rPr>
+              <a:t>Stellar</a:t>
+            </a:r>
+          </a:p>
+        </p:txBody>
+      </p:sp>
+      <p:sp>
+        <p:nvSpPr>
+          <p:cNvPr id="16" name="TextBox 15"/>
+          <p:cNvSpPr txBox="1"/>
+          <p:nvPr/>
+        </p:nvSpPr>
+        <p:spPr>
+          <a:xfrm>
+            <a:off x="6510528" y="2578608"/>
+            <a:ext cx="1828800" cy="502920"/>
+          </a:xfrm>
+          <a:prstGeom prst="rect">
+            <a:avLst/>
+          </a:prstGeom>
+          <a:noFill/>
+        </p:spPr>
+        <p:txBody>
+          <a:bodyPr wrap="square" lIns="0" rIns="0" tIns="0" bIns="0" anchor="t">
+            <a:spAutoFit/>
+          </a:bodyPr>
+          <a:lstStyle/>
+          <a:p>
+            <a:pPr algn="ctr"/>
+            <a:r>
+              <a:rPr sz="1100" b="0">
                 <a:solidFill>
                   <a:srgbClr val="51617A"/>
                 </a:solidFill>
                 <a:latin typeface="Manrope"/>
-              </a:defRPr>
-            </a:pPr>
-            <a:r>
-              <a:t>• Support-plan records; reminder day is metadata only</a:t>
-            </a:r>
-          </a:p>
-          <a:p>
-            <a:pPr>
-              <a:lnSpc>
-                <a:spcPct val="105000"/>
-              </a:lnSpc>
-              <a:spcAft>
-                <a:spcPts val="700"/>
-              </a:spcAft>
-              <a:defRPr sz="1350">
+              </a:rPr>
+              <a:t>Direct payment or
+XLM escrow release</a:t>
+            </a:r>
+          </a:p>
+        </p:txBody>
+      </p:sp>
+      <p:sp>
+        <p:nvSpPr>
+          <p:cNvPr id="17" name="TextBox 16"/>
+          <p:cNvSpPr txBox="1"/>
+          <p:nvPr/>
+        </p:nvSpPr>
+        <p:spPr>
+          <a:xfrm>
+            <a:off x="8513064" y="2313432"/>
+            <a:ext cx="685800" cy="365760"/>
+          </a:xfrm>
+          <a:prstGeom prst="rect">
+            <a:avLst/>
+          </a:prstGeom>
+          <a:noFill/>
+        </p:spPr>
+        <p:txBody>
+          <a:bodyPr wrap="square" lIns="0" rIns="0" tIns="0" bIns="0" anchor="t">
+            <a:spAutoFit/>
+          </a:bodyPr>
+          <a:lstStyle/>
+          <a:p>
+            <a:pPr algn="ctr"/>
+            <a:r>
+              <a:rPr sz="2500" b="1">
+                <a:solidFill>
+                  <a:srgbClr val="0369A1"/>
+                </a:solidFill>
+                <a:latin typeface="Manrope"/>
+              </a:rPr>
+              <a:t>→</a:t>
+            </a:r>
+          </a:p>
+        </p:txBody>
+      </p:sp>
+      <p:sp>
+        <p:nvSpPr>
+          <p:cNvPr id="18" name="Rounded Rectangle 17"/>
+          <p:cNvSpPr/>
+          <p:nvPr/>
+        </p:nvSpPr>
+        <p:spPr>
+          <a:xfrm>
+            <a:off x="9272016" y="1874519"/>
+            <a:ext cx="2057400" cy="1417320"/>
+          </a:xfrm>
+          <a:prstGeom prst="roundRect">
+            <a:avLst/>
+          </a:prstGeom>
+          <a:solidFill>
+            <a:srgbClr val="FFFFFF"/>
+          </a:solidFill>
+          <a:ln w="15240">
+            <a:solidFill>
+              <a:srgbClr val="9DCBEA"/>
+            </a:solidFill>
+          </a:ln>
+        </p:spPr>
+        <p:style>
+          <a:lnRef idx="1">
+            <a:schemeClr val="accent1"/>
+          </a:lnRef>
+          <a:fillRef idx="3">
+            <a:schemeClr val="accent1"/>
+          </a:fillRef>
+          <a:effectRef idx="2">
+            <a:schemeClr val="accent1"/>
+          </a:effectRef>
+          <a:fontRef idx="minor">
+            <a:schemeClr val="lt1"/>
+          </a:fontRef>
+        </p:style>
+        <p:txBody>
+          <a:bodyPr rtlCol="0" anchor="ctr"/>
+          <a:lstStyle/>
+          <a:p>
+            <a:pPr algn="ctr"/>
+          </a:p>
+        </p:txBody>
+      </p:sp>
+      <p:sp>
+        <p:nvSpPr>
+          <p:cNvPr id="19" name="TextBox 18"/>
+          <p:cNvSpPr txBox="1"/>
+          <p:nvPr/>
+        </p:nvSpPr>
+        <p:spPr>
+          <a:xfrm>
+            <a:off x="9381744" y="2167128"/>
+            <a:ext cx="1828800" cy="274320"/>
+          </a:xfrm>
+          <a:prstGeom prst="rect">
+            <a:avLst/>
+          </a:prstGeom>
+          <a:noFill/>
+        </p:spPr>
+        <p:txBody>
+          <a:bodyPr wrap="square" lIns="0" rIns="0" tIns="0" bIns="0" anchor="t">
+            <a:spAutoFit/>
+          </a:bodyPr>
+          <a:lstStyle/>
+          <a:p>
+            <a:pPr algn="ctr"/>
+            <a:r>
+              <a:rPr sz="1600" b="1">
+                <a:solidFill>
+                  <a:srgbClr val="0B1B2B"/>
+                </a:solidFill>
+                <a:latin typeface="Manrope"/>
+              </a:rPr>
+              <a:t>Recipient wallet</a:t>
+            </a:r>
+          </a:p>
+        </p:txBody>
+      </p:sp>
+      <p:sp>
+        <p:nvSpPr>
+          <p:cNvPr id="20" name="TextBox 19"/>
+          <p:cNvSpPr txBox="1"/>
+          <p:nvPr/>
+        </p:nvSpPr>
+        <p:spPr>
+          <a:xfrm>
+            <a:off x="9381744" y="2578608"/>
+            <a:ext cx="1828800" cy="502920"/>
+          </a:xfrm>
+          <a:prstGeom prst="rect">
+            <a:avLst/>
+          </a:prstGeom>
+          <a:noFill/>
+        </p:spPr>
+        <p:txBody>
+          <a:bodyPr wrap="square" lIns="0" rIns="0" tIns="0" bIns="0" anchor="t">
+            <a:spAutoFit/>
+          </a:bodyPr>
+          <a:lstStyle/>
+          <a:p>
+            <a:pPr algn="ctr"/>
+            <a:r>
+              <a:rPr sz="1100" b="0">
                 <a:solidFill>
                   <a:srgbClr val="51617A"/>
                 </a:solidFill>
                 <a:latin typeface="Manrope"/>
-              </a:defRPr>
-            </a:pPr>
-            <a:r>
-              <a:t>• XLM Soroban escrow/release with 60-ledger demo cadence</a:t>
-            </a:r>
-          </a:p>
-          <a:p>
-            <a:pPr>
-              <a:lnSpc>
-                <a:spcPct val="105000"/>
-              </a:lnSpc>
-              <a:spcAft>
-                <a:spcPts val="700"/>
-              </a:spcAft>
-              <a:defRPr sz="1350">
-                <a:solidFill>
-                  <a:srgbClr val="51617A"/>
-                </a:solidFill>
-                <a:latin typeface="Manrope"/>
-              </a:defRPr>
-            </a:pPr>
-            <a:r>
-              <a:t>• Direct XLM/USDC payment to entered recipient address</a:t>
-            </a:r>
-          </a:p>
-          <a:p>
-            <a:pPr>
-              <a:lnSpc>
-                <a:spcPct val="105000"/>
-              </a:lnSpc>
-              <a:spcAft>
-                <a:spcPts val="700"/>
-              </a:spcAft>
-              <a:defRPr sz="1350">
-                <a:solidFill>
-                  <a:srgbClr val="51617A"/>
-                </a:solidFill>
-                <a:latin typeface="Manrope"/>
-              </a:defRPr>
-            </a:pPr>
-            <a:r>
-              <a:t>• Horizon/RPC verification, SEP-7 direct pay link, recipient watcher</a:t>
-            </a:r>
-          </a:p>
-          <a:p>
-            <a:pPr>
-              <a:lnSpc>
-                <a:spcPct val="105000"/>
-              </a:lnSpc>
-              <a:spcAft>
-                <a:spcPts val="700"/>
-              </a:spcAft>
-              <a:defRPr sz="1350">
-                <a:solidFill>
-                  <a:srgbClr val="51617A"/>
-                </a:solidFill>
-                <a:latin typeface="Manrope"/>
-              </a:defRPr>
-            </a:pPr>
-            <a:r>
-              <a:t>• Status ends at Verified on-chain</a:t>
-            </a:r>
-          </a:p>
-        </p:txBody>
-      </p:sp>
-      <p:sp>
-        <p:nvSpPr>
-          <p:cNvPr id="10" name="Rounded Rectangle 9"/>
+              </a:rPr>
+              <a:t>Entered Stellar
+address</a:t>
+            </a:r>
+          </a:p>
+        </p:txBody>
+      </p:sp>
+      <p:sp>
+        <p:nvSpPr>
+          <p:cNvPr id="21" name="Rounded Rectangle 20"/>
           <p:cNvSpPr/>
           <p:nvPr/>
         </p:nvSpPr>
         <p:spPr>
           <a:xfrm>
-            <a:off x="6263640" y="1508760"/>
-            <a:ext cx="5230368" cy="4343400"/>
+            <a:off x="685800" y="3886200"/>
+            <a:ext cx="10808208" cy="1097280"/>
           </a:xfrm>
           <a:prstGeom prst="roundRect">
             <a:avLst/>
@@ -6486,14 +5812,14 @@
       </p:sp>
       <p:sp>
         <p:nvSpPr>
-          <p:cNvPr id="11" name="Rounded Rectangle 10"/>
+          <p:cNvPr id="22" name="Rounded Rectangle 21"/>
           <p:cNvSpPr/>
           <p:nvPr/>
         </p:nvSpPr>
         <p:spPr>
           <a:xfrm>
-            <a:off x="6510528" y="1737360"/>
-            <a:ext cx="1463040" cy="310896"/>
+            <a:off x="914400" y="4133087"/>
+            <a:ext cx="914400" cy="310896"/>
           </a:xfrm>
           <a:prstGeom prst="roundRect">
             <a:avLst/>
@@ -6532,14 +5858,14 @@
       </p:sp>
       <p:sp>
         <p:nvSpPr>
-          <p:cNvPr id="12" name="TextBox 11"/>
+          <p:cNvPr id="23" name="TextBox 22"/>
           <p:cNvSpPr txBox="1"/>
           <p:nvPr/>
         </p:nvSpPr>
         <p:spPr>
           <a:xfrm>
-            <a:off x="6510528" y="1755648"/>
-            <a:ext cx="1463040" cy="228600"/>
+            <a:off x="914400" y="4151375"/>
+            <a:ext cx="914400" cy="228600"/>
           </a:xfrm>
           <a:prstGeom prst="rect">
             <a:avLst/>
@@ -6560,21 +5886,21 @@
                 </a:solidFill>
                 <a:latin typeface="Manrope"/>
               </a:rPr>
-              <a:t>NEXT · PLANNED</a:t>
-            </a:r>
-          </a:p>
-        </p:txBody>
-      </p:sp>
-      <p:sp>
-        <p:nvSpPr>
-          <p:cNvPr id="13" name="TextBox 12"/>
+              <a:t>PLANNED</a:t>
+            </a:r>
+          </a:p>
+        </p:txBody>
+      </p:sp>
+      <p:sp>
+        <p:nvSpPr>
+          <p:cNvPr id="24" name="TextBox 23"/>
           <p:cNvSpPr txBox="1"/>
           <p:nvPr/>
         </p:nvSpPr>
         <p:spPr>
           <a:xfrm>
-            <a:off x="6510528" y="2267712"/>
-            <a:ext cx="4617720" cy="3291840"/>
+            <a:off x="2011680" y="4096512"/>
+            <a:ext cx="9098280" cy="438912"/>
           </a:xfrm>
           <a:prstGeom prst="rect">
             <a:avLst/>
@@ -6582,103 +5908,20 @@
           <a:noFill/>
         </p:spPr>
         <p:txBody>
-          <a:bodyPr wrap="square">
+          <a:bodyPr wrap="square" lIns="0" rIns="0" tIns="0" bIns="0" anchor="t">
             <a:spAutoFit/>
           </a:bodyPr>
           <a:lstStyle/>
           <a:p>
-            <a:pPr>
-              <a:lnSpc>
-                <a:spcPct val="105000"/>
-              </a:lnSpc>
-              <a:spcAft>
-                <a:spcPts val="700"/>
-              </a:spcAft>
-              <a:defRPr sz="1350">
-                <a:solidFill>
-                  <a:srgbClr val="51617A"/>
-                </a:solidFill>
-                <a:latin typeface="Manrope"/>
-              </a:defRPr>
-            </a:pPr>
-            <a:r>
-              <a:t>• Licensed anchor/provider onboarding and agreements</a:t>
-            </a:r>
-          </a:p>
-          <a:p>
-            <a:pPr>
-              <a:lnSpc>
-                <a:spcPct val="105000"/>
-              </a:lnSpc>
-              <a:spcAft>
-                <a:spcPts val="700"/>
-              </a:spcAft>
-              <a:defRPr sz="1350">
-                <a:solidFill>
-                  <a:srgbClr val="51617A"/>
-                </a:solidFill>
-                <a:latin typeface="Manrope"/>
-              </a:defRPr>
-            </a:pPr>
-            <a:r>
-              <a:t>• SEP-1 + provider SEP-10 + hosted SEP-24</a:t>
-            </a:r>
-          </a:p>
-          <a:p>
-            <a:pPr>
-              <a:lnSpc>
-                <a:spcPct val="105000"/>
-              </a:lnSpc>
-              <a:spcAft>
-                <a:spcPts val="700"/>
-              </a:spcAft>
-              <a:defRPr sz="1350">
-                <a:solidFill>
-                  <a:srgbClr val="51617A"/>
-                </a:solidFill>
-                <a:latin typeface="Manrope"/>
-              </a:defRPr>
-            </a:pPr>
-            <a:r>
-              <a:t>• KYC, quote/limits, approved deposit routing, provider status</a:t>
-            </a:r>
-          </a:p>
-          <a:p>
-            <a:pPr>
-              <a:lnSpc>
-                <a:spcPct val="105000"/>
-              </a:lnSpc>
-              <a:spcAft>
-                <a:spcPts val="700"/>
-              </a:spcAft>
-              <a:defRPr sz="1350">
-                <a:solidFill>
-                  <a:srgbClr val="51617A"/>
-                </a:solidFill>
-                <a:latin typeface="Manrope"/>
-              </a:defRPr>
-            </a:pPr>
-            <a:r>
-              <a:t>• PHP cash-out, provider reference, provider-confirmed collection</a:t>
-            </a:r>
-          </a:p>
-          <a:p>
-            <a:pPr>
-              <a:lnSpc>
-                <a:spcPct val="105000"/>
-              </a:lnSpc>
-              <a:spcAft>
-                <a:spcPts val="700"/>
-              </a:spcAft>
-              <a:defRPr sz="1350">
-                <a:solidFill>
-                  <a:srgbClr val="51617A"/>
-                </a:solidFill>
-                <a:latin typeface="Manrope"/>
-              </a:defRPr>
-            </a:pPr>
-            <a:r>
-              <a:t>• No current MoneyGram partnership or connected cash route</a:t>
+            <a:pPr algn="l"/>
+            <a:r>
+              <a:rPr sz="1400" b="1">
+                <a:solidFill>
+                  <a:srgbClr val="0B1B2B"/>
+                </a:solidFill>
+                <a:latin typeface="Manrope"/>
+              </a:rPr>
+              <a:t>Planned continuation: Stellar/provider deposit → licensed anchor → KYC → PHP cash-out → family member</a:t>
             </a:r>
           </a:p>
         </p:txBody>
@@ -6784,7 +6027,7 @@
                 </a:solidFill>
                 <a:latin typeface="Manrope"/>
               </a:rPr>
-              <a:t>ONE FLOW — SOLID IS CURRENT, DASHED IS PLANNED</a:t>
+              <a:t>WHY STELLAR; WHY THE PROVIDER PATH</a:t>
             </a:r>
           </a:p>
         </p:txBody>
@@ -6819,7 +6062,7 @@
                 </a:solidFill>
                 <a:latin typeface="Fraunces"/>
               </a:rPr>
-              <a:t>Solid is current. Dashed is planned.</a:t>
+              <a:t>Verifiable rails now; regulated last mile next</a:t>
             </a:r>
           </a:p>
         </p:txBody>
@@ -6854,7 +6097,7 @@
                 </a:solidFill>
                 <a:latin typeface="Manrope"/>
               </a:rPr>
-              <a:t>6 / 9</a:t>
+              <a:t>6 / 8</a:t>
             </a:r>
           </a:p>
         </p:txBody>
@@ -6867,14 +6110,14 @@
         </p:nvSpPr>
         <p:spPr>
           <a:xfrm>
-            <a:off x="658368" y="1874519"/>
-            <a:ext cx="2057400" cy="1417320"/>
+            <a:off x="685800" y="1508760"/>
+            <a:ext cx="5230368" cy="4389120"/>
           </a:xfrm>
           <a:prstGeom prst="roundRect">
             <a:avLst/>
           </a:prstGeom>
           <a:solidFill>
-            <a:srgbClr val="FFFFFF"/>
+            <a:srgbClr val="E6F3FB"/>
           </a:solidFill>
           <a:ln w="15240">
             <a:solidFill>
@@ -6912,8 +6155,8 @@
         </p:nvSpPr>
         <p:spPr>
           <a:xfrm>
-            <a:off x="768096" y="2167128"/>
-            <a:ext cx="1828800" cy="274320"/>
+            <a:off x="932688" y="1792224"/>
+            <a:ext cx="2286000" cy="274320"/>
           </a:xfrm>
           <a:prstGeom prst="rect">
             <a:avLst/>
@@ -6926,15 +6169,15 @@
           </a:bodyPr>
           <a:lstStyle/>
           <a:p>
-            <a:pPr algn="ctr"/>
-            <a:r>
-              <a:rPr sz="1600" b="1">
-                <a:solidFill>
-                  <a:srgbClr val="0B1B2B"/>
+            <a:pPr algn="l"/>
+            <a:r>
+              <a:rPr sz="1200" b="1">
+                <a:solidFill>
+                  <a:srgbClr val="0369A1"/>
                 </a:solidFill>
                 <a:latin typeface="Manrope"/>
               </a:rPr>
-              <a:t>Sender</a:t>
+              <a:t>WHY STELLAR NOW</a:t>
             </a:r>
           </a:p>
         </p:txBody>
@@ -6947,8 +6190,8 @@
         </p:nvSpPr>
         <p:spPr>
           <a:xfrm>
-            <a:off x="768096" y="2578608"/>
-            <a:ext cx="1828800" cy="502920"/>
+            <a:off x="932688" y="2212848"/>
+            <a:ext cx="4617720" cy="3246120"/>
           </a:xfrm>
           <a:prstGeom prst="rect">
             <a:avLst/>
@@ -6956,488 +6199,117 @@
           <a:noFill/>
         </p:spPr>
         <p:txBody>
-          <a:bodyPr wrap="square" lIns="0" rIns="0" tIns="0" bIns="0" anchor="t">
+          <a:bodyPr wrap="square">
             <a:spAutoFit/>
           </a:bodyPr>
           <a:lstStyle/>
           <a:p>
-            <a:pPr algn="ctr"/>
-            <a:r>
-              <a:rPr sz="1100" b="0">
+            <a:pPr>
+              <a:lnSpc>
+                <a:spcPct val="105000"/>
+              </a:lnSpc>
+              <a:spcAft>
+                <a:spcPts val="700"/>
+              </a:spcAft>
+              <a:defRPr sz="1350">
                 <a:solidFill>
                   <a:srgbClr val="51617A"/>
                 </a:solidFill>
                 <a:latin typeface="Manrope"/>
-              </a:rPr>
-              <a:t>Filipino worker
-in Malaysia</a:t>
-            </a:r>
-          </a:p>
-        </p:txBody>
-      </p:sp>
-      <p:sp>
-        <p:nvSpPr>
-          <p:cNvPr id="9" name="TextBox 8"/>
-          <p:cNvSpPr txBox="1"/>
-          <p:nvPr/>
-        </p:nvSpPr>
-        <p:spPr>
-          <a:xfrm>
-            <a:off x="2770632" y="2313432"/>
-            <a:ext cx="685800" cy="365760"/>
-          </a:xfrm>
-          <a:prstGeom prst="rect">
-            <a:avLst/>
-          </a:prstGeom>
-          <a:noFill/>
-        </p:spPr>
-        <p:txBody>
-          <a:bodyPr wrap="square" lIns="0" rIns="0" tIns="0" bIns="0" anchor="t">
-            <a:spAutoFit/>
-          </a:bodyPr>
-          <a:lstStyle/>
-          <a:p>
-            <a:pPr algn="ctr"/>
-            <a:r>
-              <a:rPr sz="2500" b="1">
-                <a:solidFill>
-                  <a:srgbClr val="0369A1"/>
-                </a:solidFill>
-                <a:latin typeface="Manrope"/>
-              </a:rPr>
-              <a:t>→</a:t>
-            </a:r>
-          </a:p>
-        </p:txBody>
-      </p:sp>
-      <p:sp>
-        <p:nvSpPr>
-          <p:cNvPr id="10" name="Rounded Rectangle 9"/>
+              </a:defRPr>
+            </a:pPr>
+            <a:r>
+              <a:t>• Freighter keeps transaction signing with the sender.</a:t>
+            </a:r>
+          </a:p>
+          <a:p>
+            <a:pPr>
+              <a:lnSpc>
+                <a:spcPct val="105000"/>
+              </a:lnSpc>
+              <a:spcAft>
+                <a:spcPts val="700"/>
+              </a:spcAft>
+              <a:defRPr sz="1350">
+                <a:solidFill>
+                  <a:srgbClr val="51617A"/>
+                </a:solidFill>
+                <a:latin typeface="Manrope"/>
+              </a:defRPr>
+            </a:pPr>
+            <a:r>
+              <a:t>• Horizon and Soroban RPC make the implemented transfers inspectable.</a:t>
+            </a:r>
+          </a:p>
+          <a:p>
+            <a:pPr>
+              <a:lnSpc>
+                <a:spcPct val="105000"/>
+              </a:lnSpc>
+              <a:spcAft>
+                <a:spcPts val="700"/>
+              </a:spcAft>
+              <a:defRPr sz="1350">
+                <a:solidFill>
+                  <a:srgbClr val="51617A"/>
+                </a:solidFill>
+                <a:latin typeface="Manrope"/>
+              </a:defRPr>
+            </a:pPr>
+            <a:r>
+              <a:t>• Soroban demonstrates pre-funded XLM release rules.</a:t>
+            </a:r>
+          </a:p>
+          <a:p>
+            <a:pPr>
+              <a:lnSpc>
+                <a:spcPct val="105000"/>
+              </a:lnSpc>
+              <a:spcAft>
+                <a:spcPts val="700"/>
+              </a:spcAft>
+              <a:defRPr sz="1350">
+                <a:solidFill>
+                  <a:srgbClr val="51617A"/>
+                </a:solidFill>
+                <a:latin typeface="Manrope"/>
+              </a:defRPr>
+            </a:pPr>
+            <a:r>
+              <a:t>• Stellar anchors connect network assets to off-chain rails.</a:t>
+            </a:r>
+          </a:p>
+          <a:p>
+            <a:pPr>
+              <a:lnSpc>
+                <a:spcPct val="105000"/>
+              </a:lnSpc>
+              <a:spcAft>
+                <a:spcPts val="700"/>
+              </a:spcAft>
+              <a:defRPr sz="1350">
+                <a:solidFill>
+                  <a:srgbClr val="51617A"/>
+                </a:solidFill>
+                <a:latin typeface="Manrope"/>
+              </a:defRPr>
+            </a:pPr>
+            <a:r>
+              <a:t>• SEP-24 is a hosted interactive deposit/withdrawal flow with anchor authentication and KYC.</a:t>
+            </a:r>
+          </a:p>
+        </p:txBody>
+      </p:sp>
+      <p:sp>
+        <p:nvSpPr>
+          <p:cNvPr id="9" name="Rounded Rectangle 8"/>
           <p:cNvSpPr/>
           <p:nvPr/>
         </p:nvSpPr>
         <p:spPr>
           <a:xfrm>
-            <a:off x="3529584" y="1874519"/>
-            <a:ext cx="2057400" cy="1417320"/>
-          </a:xfrm>
-          <a:prstGeom prst="roundRect">
-            <a:avLst/>
-          </a:prstGeom>
-          <a:solidFill>
-            <a:srgbClr val="FFFFFF"/>
-          </a:solidFill>
-          <a:ln w="15240">
-            <a:solidFill>
-              <a:srgbClr val="9DCBEA"/>
-            </a:solidFill>
-          </a:ln>
-        </p:spPr>
-        <p:style>
-          <a:lnRef idx="1">
-            <a:schemeClr val="accent1"/>
-          </a:lnRef>
-          <a:fillRef idx="3">
-            <a:schemeClr val="accent1"/>
-          </a:fillRef>
-          <a:effectRef idx="2">
-            <a:schemeClr val="accent1"/>
-          </a:effectRef>
-          <a:fontRef idx="minor">
-            <a:schemeClr val="lt1"/>
-          </a:fontRef>
-        </p:style>
-        <p:txBody>
-          <a:bodyPr rtlCol="0" anchor="ctr"/>
-          <a:lstStyle/>
-          <a:p>
-            <a:pPr algn="ctr"/>
-          </a:p>
-        </p:txBody>
-      </p:sp>
-      <p:sp>
-        <p:nvSpPr>
-          <p:cNvPr id="11" name="TextBox 10"/>
-          <p:cNvSpPr txBox="1"/>
-          <p:nvPr/>
-        </p:nvSpPr>
-        <p:spPr>
-          <a:xfrm>
-            <a:off x="3639312" y="2167128"/>
-            <a:ext cx="1828800" cy="274320"/>
-          </a:xfrm>
-          <a:prstGeom prst="rect">
-            <a:avLst/>
-          </a:prstGeom>
-          <a:noFill/>
-        </p:spPr>
-        <p:txBody>
-          <a:bodyPr wrap="square" lIns="0" rIns="0" tIns="0" bIns="0" anchor="t">
-            <a:spAutoFit/>
-          </a:bodyPr>
-          <a:lstStyle/>
-          <a:p>
-            <a:pPr algn="ctr"/>
-            <a:r>
-              <a:rPr sz="1600" b="1">
-                <a:solidFill>
-                  <a:srgbClr val="0B1B2B"/>
-                </a:solidFill>
-                <a:latin typeface="Manrope"/>
-              </a:rPr>
-              <a:t>Bakti plan</a:t>
-            </a:r>
-          </a:p>
-        </p:txBody>
-      </p:sp>
-      <p:sp>
-        <p:nvSpPr>
-          <p:cNvPr id="12" name="TextBox 11"/>
-          <p:cNvSpPr txBox="1"/>
-          <p:nvPr/>
-        </p:nvSpPr>
-        <p:spPr>
-          <a:xfrm>
-            <a:off x="3639312" y="2578608"/>
-            <a:ext cx="1828800" cy="502920"/>
-          </a:xfrm>
-          <a:prstGeom prst="rect">
-            <a:avLst/>
-          </a:prstGeom>
-          <a:noFill/>
-        </p:spPr>
-        <p:txBody>
-          <a:bodyPr wrap="square" lIns="0" rIns="0" tIns="0" bIns="0" anchor="t">
-            <a:spAutoFit/>
-          </a:bodyPr>
-          <a:lstStyle/>
-          <a:p>
-            <a:pPr algn="ctr"/>
-            <a:r>
-              <a:rPr sz="1100" b="0">
-                <a:solidFill>
-                  <a:srgbClr val="51617A"/>
-                </a:solidFill>
-                <a:latin typeface="Manrope"/>
-              </a:rPr>
-              <a:t>Recipient + amount
-+ planning date</a:t>
-            </a:r>
-          </a:p>
-        </p:txBody>
-      </p:sp>
-      <p:sp>
-        <p:nvSpPr>
-          <p:cNvPr id="13" name="TextBox 12"/>
-          <p:cNvSpPr txBox="1"/>
-          <p:nvPr/>
-        </p:nvSpPr>
-        <p:spPr>
-          <a:xfrm>
-            <a:off x="5641848" y="2313432"/>
-            <a:ext cx="685800" cy="365760"/>
-          </a:xfrm>
-          <a:prstGeom prst="rect">
-            <a:avLst/>
-          </a:prstGeom>
-          <a:noFill/>
-        </p:spPr>
-        <p:txBody>
-          <a:bodyPr wrap="square" lIns="0" rIns="0" tIns="0" bIns="0" anchor="t">
-            <a:spAutoFit/>
-          </a:bodyPr>
-          <a:lstStyle/>
-          <a:p>
-            <a:pPr algn="ctr"/>
-            <a:r>
-              <a:rPr sz="2500" b="1">
-                <a:solidFill>
-                  <a:srgbClr val="0369A1"/>
-                </a:solidFill>
-                <a:latin typeface="Manrope"/>
-              </a:rPr>
-              <a:t>→</a:t>
-            </a:r>
-          </a:p>
-        </p:txBody>
-      </p:sp>
-      <p:sp>
-        <p:nvSpPr>
-          <p:cNvPr id="14" name="Rounded Rectangle 13"/>
-          <p:cNvSpPr/>
-          <p:nvPr/>
-        </p:nvSpPr>
-        <p:spPr>
-          <a:xfrm>
-            <a:off x="6400800" y="1874519"/>
-            <a:ext cx="2057400" cy="1417320"/>
-          </a:xfrm>
-          <a:prstGeom prst="roundRect">
-            <a:avLst/>
-          </a:prstGeom>
-          <a:solidFill>
-            <a:srgbClr val="FFFFFF"/>
-          </a:solidFill>
-          <a:ln w="15240">
-            <a:solidFill>
-              <a:srgbClr val="9DCBEA"/>
-            </a:solidFill>
-          </a:ln>
-        </p:spPr>
-        <p:style>
-          <a:lnRef idx="1">
-            <a:schemeClr val="accent1"/>
-          </a:lnRef>
-          <a:fillRef idx="3">
-            <a:schemeClr val="accent1"/>
-          </a:fillRef>
-          <a:effectRef idx="2">
-            <a:schemeClr val="accent1"/>
-          </a:effectRef>
-          <a:fontRef idx="minor">
-            <a:schemeClr val="lt1"/>
-          </a:fontRef>
-        </p:style>
-        <p:txBody>
-          <a:bodyPr rtlCol="0" anchor="ctr"/>
-          <a:lstStyle/>
-          <a:p>
-            <a:pPr algn="ctr"/>
-          </a:p>
-        </p:txBody>
-      </p:sp>
-      <p:sp>
-        <p:nvSpPr>
-          <p:cNvPr id="15" name="TextBox 14"/>
-          <p:cNvSpPr txBox="1"/>
-          <p:nvPr/>
-        </p:nvSpPr>
-        <p:spPr>
-          <a:xfrm>
-            <a:off x="6510528" y="2167128"/>
-            <a:ext cx="1828800" cy="274320"/>
-          </a:xfrm>
-          <a:prstGeom prst="rect">
-            <a:avLst/>
-          </a:prstGeom>
-          <a:noFill/>
-        </p:spPr>
-        <p:txBody>
-          <a:bodyPr wrap="square" lIns="0" rIns="0" tIns="0" bIns="0" anchor="t">
-            <a:spAutoFit/>
-          </a:bodyPr>
-          <a:lstStyle/>
-          <a:p>
-            <a:pPr algn="ctr"/>
-            <a:r>
-              <a:rPr sz="1600" b="1">
-                <a:solidFill>
-                  <a:srgbClr val="0B1B2B"/>
-                </a:solidFill>
-                <a:latin typeface="Manrope"/>
-              </a:rPr>
-              <a:t>Stellar</a:t>
-            </a:r>
-          </a:p>
-        </p:txBody>
-      </p:sp>
-      <p:sp>
-        <p:nvSpPr>
-          <p:cNvPr id="16" name="TextBox 15"/>
-          <p:cNvSpPr txBox="1"/>
-          <p:nvPr/>
-        </p:nvSpPr>
-        <p:spPr>
-          <a:xfrm>
-            <a:off x="6510528" y="2578608"/>
-            <a:ext cx="1828800" cy="502920"/>
-          </a:xfrm>
-          <a:prstGeom prst="rect">
-            <a:avLst/>
-          </a:prstGeom>
-          <a:noFill/>
-        </p:spPr>
-        <p:txBody>
-          <a:bodyPr wrap="square" lIns="0" rIns="0" tIns="0" bIns="0" anchor="t">
-            <a:spAutoFit/>
-          </a:bodyPr>
-          <a:lstStyle/>
-          <a:p>
-            <a:pPr algn="ctr"/>
-            <a:r>
-              <a:rPr sz="1100" b="0">
-                <a:solidFill>
-                  <a:srgbClr val="51617A"/>
-                </a:solidFill>
-                <a:latin typeface="Manrope"/>
-              </a:rPr>
-              <a:t>Direct payment or
-XLM escrow release</a:t>
-            </a:r>
-          </a:p>
-        </p:txBody>
-      </p:sp>
-      <p:sp>
-        <p:nvSpPr>
-          <p:cNvPr id="17" name="TextBox 16"/>
-          <p:cNvSpPr txBox="1"/>
-          <p:nvPr/>
-        </p:nvSpPr>
-        <p:spPr>
-          <a:xfrm>
-            <a:off x="8513064" y="2313432"/>
-            <a:ext cx="685800" cy="365760"/>
-          </a:xfrm>
-          <a:prstGeom prst="rect">
-            <a:avLst/>
-          </a:prstGeom>
-          <a:noFill/>
-        </p:spPr>
-        <p:txBody>
-          <a:bodyPr wrap="square" lIns="0" rIns="0" tIns="0" bIns="0" anchor="t">
-            <a:spAutoFit/>
-          </a:bodyPr>
-          <a:lstStyle/>
-          <a:p>
-            <a:pPr algn="ctr"/>
-            <a:r>
-              <a:rPr sz="2500" b="1">
-                <a:solidFill>
-                  <a:srgbClr val="0369A1"/>
-                </a:solidFill>
-                <a:latin typeface="Manrope"/>
-              </a:rPr>
-              <a:t>→</a:t>
-            </a:r>
-          </a:p>
-        </p:txBody>
-      </p:sp>
-      <p:sp>
-        <p:nvSpPr>
-          <p:cNvPr id="18" name="Rounded Rectangle 17"/>
-          <p:cNvSpPr/>
-          <p:nvPr/>
-        </p:nvSpPr>
-        <p:spPr>
-          <a:xfrm>
-            <a:off x="9272016" y="1874519"/>
-            <a:ext cx="2057400" cy="1417320"/>
-          </a:xfrm>
-          <a:prstGeom prst="roundRect">
-            <a:avLst/>
-          </a:prstGeom>
-          <a:solidFill>
-            <a:srgbClr val="FFFFFF"/>
-          </a:solidFill>
-          <a:ln w="15240">
-            <a:solidFill>
-              <a:srgbClr val="9DCBEA"/>
-            </a:solidFill>
-          </a:ln>
-        </p:spPr>
-        <p:style>
-          <a:lnRef idx="1">
-            <a:schemeClr val="accent1"/>
-          </a:lnRef>
-          <a:fillRef idx="3">
-            <a:schemeClr val="accent1"/>
-          </a:fillRef>
-          <a:effectRef idx="2">
-            <a:schemeClr val="accent1"/>
-          </a:effectRef>
-          <a:fontRef idx="minor">
-            <a:schemeClr val="lt1"/>
-          </a:fontRef>
-        </p:style>
-        <p:txBody>
-          <a:bodyPr rtlCol="0" anchor="ctr"/>
-          <a:lstStyle/>
-          <a:p>
-            <a:pPr algn="ctr"/>
-          </a:p>
-        </p:txBody>
-      </p:sp>
-      <p:sp>
-        <p:nvSpPr>
-          <p:cNvPr id="19" name="TextBox 18"/>
-          <p:cNvSpPr txBox="1"/>
-          <p:nvPr/>
-        </p:nvSpPr>
-        <p:spPr>
-          <a:xfrm>
-            <a:off x="9381744" y="2167128"/>
-            <a:ext cx="1828800" cy="274320"/>
-          </a:xfrm>
-          <a:prstGeom prst="rect">
-            <a:avLst/>
-          </a:prstGeom>
-          <a:noFill/>
-        </p:spPr>
-        <p:txBody>
-          <a:bodyPr wrap="square" lIns="0" rIns="0" tIns="0" bIns="0" anchor="t">
-            <a:spAutoFit/>
-          </a:bodyPr>
-          <a:lstStyle/>
-          <a:p>
-            <a:pPr algn="ctr"/>
-            <a:r>
-              <a:rPr sz="1600" b="1">
-                <a:solidFill>
-                  <a:srgbClr val="0B1B2B"/>
-                </a:solidFill>
-                <a:latin typeface="Manrope"/>
-              </a:rPr>
-              <a:t>Recipient wallet</a:t>
-            </a:r>
-          </a:p>
-        </p:txBody>
-      </p:sp>
-      <p:sp>
-        <p:nvSpPr>
-          <p:cNvPr id="20" name="TextBox 19"/>
-          <p:cNvSpPr txBox="1"/>
-          <p:nvPr/>
-        </p:nvSpPr>
-        <p:spPr>
-          <a:xfrm>
-            <a:off x="9381744" y="2578608"/>
-            <a:ext cx="1828800" cy="502920"/>
-          </a:xfrm>
-          <a:prstGeom prst="rect">
-            <a:avLst/>
-          </a:prstGeom>
-          <a:noFill/>
-        </p:spPr>
-        <p:txBody>
-          <a:bodyPr wrap="square" lIns="0" rIns="0" tIns="0" bIns="0" anchor="t">
-            <a:spAutoFit/>
-          </a:bodyPr>
-          <a:lstStyle/>
-          <a:p>
-            <a:pPr algn="ctr"/>
-            <a:r>
-              <a:rPr sz="1100" b="0">
-                <a:solidFill>
-                  <a:srgbClr val="51617A"/>
-                </a:solidFill>
-                <a:latin typeface="Manrope"/>
-              </a:rPr>
-              <a:t>Entered Stellar
-address</a:t>
-            </a:r>
-          </a:p>
-        </p:txBody>
-      </p:sp>
-      <p:sp>
-        <p:nvSpPr>
-          <p:cNvPr id="21" name="Rounded Rectangle 20"/>
-          <p:cNvSpPr/>
-          <p:nvPr/>
-        </p:nvSpPr>
-        <p:spPr>
-          <a:xfrm>
-            <a:off x="685800" y="3886200"/>
-            <a:ext cx="10808208" cy="1097280"/>
+            <a:off x="6263640" y="1508760"/>
+            <a:ext cx="5230368" cy="4389120"/>
           </a:xfrm>
           <a:prstGeom prst="roundRect">
             <a:avLst/>
@@ -7476,60 +6348,14 @@
       </p:sp>
       <p:sp>
         <p:nvSpPr>
-          <p:cNvPr id="22" name="Rounded Rectangle 21"/>
-          <p:cNvSpPr/>
-          <p:nvPr/>
-        </p:nvSpPr>
-        <p:spPr>
-          <a:xfrm>
-            <a:off x="914400" y="4133087"/>
-            <a:ext cx="914400" cy="310896"/>
-          </a:xfrm>
-          <a:prstGeom prst="roundRect">
-            <a:avLst/>
-          </a:prstGeom>
-          <a:solidFill>
-            <a:srgbClr val="FFFFFF"/>
-          </a:solidFill>
-          <a:ln w="15240">
-            <a:solidFill>
-              <a:srgbClr val="9DCBEA"/>
-            </a:solidFill>
-            <a:prstDash val="dash"/>
-          </a:ln>
-        </p:spPr>
-        <p:style>
-          <a:lnRef idx="1">
-            <a:schemeClr val="accent1"/>
-          </a:lnRef>
-          <a:fillRef idx="3">
-            <a:schemeClr val="accent1"/>
-          </a:fillRef>
-          <a:effectRef idx="2">
-            <a:schemeClr val="accent1"/>
-          </a:effectRef>
-          <a:fontRef idx="minor">
-            <a:schemeClr val="lt1"/>
-          </a:fontRef>
-        </p:style>
-        <p:txBody>
-          <a:bodyPr rtlCol="0" anchor="ctr"/>
-          <a:lstStyle/>
-          <a:p>
-            <a:pPr algn="ctr"/>
-          </a:p>
-        </p:txBody>
-      </p:sp>
-      <p:sp>
-        <p:nvSpPr>
-          <p:cNvPr id="23" name="TextBox 22"/>
+          <p:cNvPr id="10" name="TextBox 9"/>
           <p:cNvSpPr txBox="1"/>
           <p:nvPr/>
         </p:nvSpPr>
         <p:spPr>
           <a:xfrm>
-            <a:off x="914400" y="4151375"/>
-            <a:ext cx="914400" cy="228600"/>
+            <a:off x="6510528" y="1792224"/>
+            <a:ext cx="2286000" cy="274320"/>
           </a:xfrm>
           <a:prstGeom prst="rect">
             <a:avLst/>
@@ -7542,29 +6368,90 @@
           </a:bodyPr>
           <a:lstStyle/>
           <a:p>
-            <a:pPr algn="ctr"/>
-            <a:r>
-              <a:rPr sz="900" b="1">
+            <a:pPr algn="l"/>
+            <a:r>
+              <a:rPr sz="1200" b="1">
                 <a:solidFill>
                   <a:srgbClr val="0369A1"/>
                 </a:solidFill>
                 <a:latin typeface="Manrope"/>
               </a:rPr>
-              <a:t>PLANNED</a:t>
-            </a:r>
-          </a:p>
-        </p:txBody>
-      </p:sp>
-      <p:sp>
-        <p:nvSpPr>
-          <p:cNvPr id="24" name="TextBox 23"/>
+              <a:t>PROVIDER PATH</a:t>
+            </a:r>
+          </a:p>
+        </p:txBody>
+      </p:sp>
+      <p:sp>
+        <p:nvSpPr>
+          <p:cNvPr id="11" name="TextBox 10"/>
           <p:cNvSpPr txBox="1"/>
           <p:nvPr/>
         </p:nvSpPr>
         <p:spPr>
           <a:xfrm>
-            <a:off x="2011680" y="4096512"/>
-            <a:ext cx="9098280" cy="438912"/>
+            <a:off x="6510528" y="2212848"/>
+            <a:ext cx="4617720" cy="3246120"/>
+          </a:xfrm>
+          <a:prstGeom prst="rect">
+            <a:avLst/>
+          </a:prstGeom>
+          <a:noFill/>
+        </p:spPr>
+        <p:txBody>
+          <a:bodyPr wrap="square">
+            <a:spAutoFit/>
+          </a:bodyPr>
+          <a:lstStyle/>
+          <a:p>
+            <a:pPr>
+              <a:lnSpc>
+                <a:spcPct val="105000"/>
+              </a:lnSpc>
+              <a:spcAft>
+                <a:spcPts val="700"/>
+              </a:spcAft>
+              <a:defRPr sz="1250">
+                <a:solidFill>
+                  <a:srgbClr val="51617A"/>
+                </a:solidFill>
+                <a:latin typeface="Manrope"/>
+              </a:defRPr>
+            </a:pPr>
+            <a:r>
+              <a:t>• MoneyGram Ramps is a target path, not a partner: integration requires allowlisting, SEP-1, SEP-10, SEP-24, KYC fields, testing/certification, KYB/compliance, and agreements.</a:t>
+            </a:r>
+          </a:p>
+          <a:p>
+            <a:pPr>
+              <a:lnSpc>
+                <a:spcPct val="105000"/>
+              </a:lnSpc>
+              <a:spcAft>
+                <a:spcPts val="700"/>
+              </a:spcAft>
+              <a:defRPr sz="1250">
+                <a:solidFill>
+                  <a:srgbClr val="51617A"/>
+                </a:solidFill>
+                <a:latin typeface="Manrope"/>
+              </a:defRPr>
+            </a:pPr>
+            <a:r>
+              <a:t>• MoneyGram limits, three sources disagree: docs 5–950 on-ramp/5–2,500 off-ramp USDC; live endpoint floors at 1; certification tier caps 10–20 (100 aggregate). Malaysia and Philippines are both cash-out only — no MY salary cash-in route exists today.</a:t>
+            </a:r>
+          </a:p>
+        </p:txBody>
+      </p:sp>
+      <p:sp>
+        <p:nvSpPr>
+          <p:cNvPr id="12" name="TextBox 11"/>
+          <p:cNvSpPr txBox="1"/>
+          <p:nvPr/>
+        </p:nvSpPr>
+        <p:spPr>
+          <a:xfrm>
+            <a:off x="685800" y="6108192"/>
+            <a:ext cx="10789920" cy="201168"/>
           </a:xfrm>
           <a:prstGeom prst="rect">
             <a:avLst/>
@@ -7579,83 +6466,13 @@
           <a:p>
             <a:pPr algn="l"/>
             <a:r>
-              <a:rPr sz="1400" b="1">
-                <a:solidFill>
-                  <a:srgbClr val="0B1B2B"/>
+              <a:rPr sz="850" b="0">
+                <a:solidFill>
+                  <a:srgbClr val="51617A"/>
                 </a:solidFill>
                 <a:latin typeface="Manrope"/>
               </a:rPr>
-              <a:t>Planned continuation: Stellar/provider deposit → licensed anchor → KYC → PHP cash-out → family member</a:t>
-            </a:r>
-          </a:p>
-        </p:txBody>
-      </p:sp>
-      <p:sp>
-        <p:nvSpPr>
-          <p:cNvPr id="25" name="TextBox 24"/>
-          <p:cNvSpPr txBox="1"/>
-          <p:nvPr/>
-        </p:nvSpPr>
-        <p:spPr>
-          <a:xfrm>
-            <a:off x="868680" y="5257800"/>
-            <a:ext cx="10424160" cy="320040"/>
-          </a:xfrm>
-          <a:prstGeom prst="rect">
-            <a:avLst/>
-          </a:prstGeom>
-          <a:noFill/>
-        </p:spPr>
-        <p:txBody>
-          <a:bodyPr wrap="square" lIns="0" rIns="0" tIns="0" bIns="0" anchor="t">
-            <a:spAutoFit/>
-          </a:bodyPr>
-          <a:lstStyle/>
-          <a:p>
-            <a:pPr algn="ctr"/>
-            <a:r>
-              <a:rPr sz="1200" b="0">
-                <a:solidFill>
-                  <a:srgbClr val="51617A"/>
-                </a:solidFill>
-                <a:latin typeface="Manrope"/>
-              </a:rPr>
-              <a:t>Current product requires the recipient wallet address.</a:t>
-            </a:r>
-          </a:p>
-        </p:txBody>
-      </p:sp>
-      <p:sp>
-        <p:nvSpPr>
-          <p:cNvPr id="26" name="TextBox 25"/>
-          <p:cNvSpPr txBox="1"/>
-          <p:nvPr/>
-        </p:nvSpPr>
-        <p:spPr>
-          <a:xfrm>
-            <a:off x="868680" y="5623560"/>
-            <a:ext cx="10424160" cy="320040"/>
-          </a:xfrm>
-          <a:prstGeom prst="rect">
-            <a:avLst/>
-          </a:prstGeom>
-          <a:noFill/>
-        </p:spPr>
-        <p:txBody>
-          <a:bodyPr wrap="square" lIns="0" rIns="0" tIns="0" bIns="0" anchor="t">
-            <a:spAutoFit/>
-          </a:bodyPr>
-          <a:lstStyle/>
-          <a:p>
-            <a:pPr algn="ctr"/>
-            <a:r>
-              <a:rPr sz="1200" b="0">
-                <a:solidFill>
-                  <a:srgbClr val="51617A"/>
-                </a:solidFill>
-                <a:latin typeface="Manrope"/>
-              </a:rPr>
-              <a:t>No provider destination, pickup reference, or automatic monthly scheduler is wired.</a:t>
+              <a:t>Sources: Stellar anchors/SEP-24 docs; MoneyGram Ramps integration docs</a:t>
             </a:r>
           </a:p>
         </p:txBody>
@@ -7761,7 +6578,7 @@
                 </a:solidFill>
                 <a:latin typeface="Manrope"/>
               </a:rPr>
-              <a:t>WHY STELLAR; WHY THE PROVIDER PATH</a:t>
+              <a:t>BUSINESS MODEL + GTM HYPOTHESES — UNVALIDATED</a:t>
             </a:r>
           </a:p>
         </p:txBody>
@@ -7796,7 +6613,7 @@
                 </a:solidFill>
                 <a:latin typeface="Fraunces"/>
               </a:rPr>
-              <a:t>Verifiable rails now; regulated last mile next</a:t>
+              <a:t>Hypotheses to test — not forecasts</a:t>
             </a:r>
           </a:p>
         </p:txBody>
@@ -7831,7 +6648,7 @@
                 </a:solidFill>
                 <a:latin typeface="Manrope"/>
               </a:rPr>
-              <a:t>7 / 9</a:t>
+              <a:t>7 / 8</a:t>
             </a:r>
           </a:p>
         </p:txBody>
@@ -7846,6 +6663,51 @@
           <a:xfrm>
             <a:off x="685800" y="1508760"/>
             <a:ext cx="5230368" cy="4389120"/>
+          </a:xfrm>
+          <a:prstGeom prst="roundRect">
+            <a:avLst/>
+          </a:prstGeom>
+          <a:solidFill>
+            <a:srgbClr val="FDF1E0"/>
+          </a:solidFill>
+          <a:ln w="15240">
+            <a:solidFill>
+              <a:srgbClr val="FDF1E0"/>
+            </a:solidFill>
+          </a:ln>
+        </p:spPr>
+        <p:style>
+          <a:lnRef idx="1">
+            <a:schemeClr val="accent1"/>
+          </a:lnRef>
+          <a:fillRef idx="3">
+            <a:schemeClr val="accent1"/>
+          </a:fillRef>
+          <a:effectRef idx="2">
+            <a:schemeClr val="accent1"/>
+          </a:effectRef>
+          <a:fontRef idx="minor">
+            <a:schemeClr val="lt1"/>
+          </a:fontRef>
+        </p:style>
+        <p:txBody>
+          <a:bodyPr rtlCol="0" anchor="ctr"/>
+          <a:lstStyle/>
+          <a:p>
+            <a:pPr algn="ctr"/>
+          </a:p>
+        </p:txBody>
+      </p:sp>
+      <p:sp>
+        <p:nvSpPr>
+          <p:cNvPr id="7" name="Rounded Rectangle 6"/>
+          <p:cNvSpPr/>
+          <p:nvPr/>
+        </p:nvSpPr>
+        <p:spPr>
+          <a:xfrm>
+            <a:off x="932688" y="1755648"/>
+            <a:ext cx="2176272" cy="310896"/>
           </a:xfrm>
           <a:prstGeom prst="roundRect">
             <a:avLst/>
@@ -7883,14 +6745,14 @@
       </p:sp>
       <p:sp>
         <p:nvSpPr>
-          <p:cNvPr id="7" name="TextBox 6"/>
+          <p:cNvPr id="8" name="TextBox 7"/>
           <p:cNvSpPr txBox="1"/>
           <p:nvPr/>
         </p:nvSpPr>
         <p:spPr>
           <a:xfrm>
-            <a:off x="932688" y="1792224"/>
-            <a:ext cx="2286000" cy="274320"/>
+            <a:off x="932688" y="1773936"/>
+            <a:ext cx="2176272" cy="228600"/>
           </a:xfrm>
           <a:prstGeom prst="rect">
             <a:avLst/>
@@ -7903,29 +6765,253 @@
           </a:bodyPr>
           <a:lstStyle/>
           <a:p>
-            <a:pPr algn="l"/>
-            <a:r>
-              <a:rPr sz="1200" b="1">
+            <a:pPr algn="ctr"/>
+            <a:r>
+              <a:rPr sz="900" b="1">
                 <a:solidFill>
                   <a:srgbClr val="0369A1"/>
                 </a:solidFill>
                 <a:latin typeface="Manrope"/>
               </a:rPr>
-              <a:t>WHY STELLAR NOW</a:t>
-            </a:r>
-          </a:p>
-        </p:txBody>
-      </p:sp>
-      <p:sp>
-        <p:nvSpPr>
-          <p:cNvPr id="8" name="TextBox 7"/>
+              <a:t>UNVALIDATED BUSINESS MODEL</a:t>
+            </a:r>
+          </a:p>
+        </p:txBody>
+      </p:sp>
+      <p:sp>
+        <p:nvSpPr>
+          <p:cNvPr id="9" name="TextBox 8"/>
           <p:cNvSpPr txBox="1"/>
           <p:nvPr/>
         </p:nvSpPr>
         <p:spPr>
           <a:xfrm>
-            <a:off x="932688" y="2212848"/>
-            <a:ext cx="4617720" cy="3246120"/>
+            <a:off x="932688" y="2267712"/>
+            <a:ext cx="4617720" cy="3154680"/>
+          </a:xfrm>
+          <a:prstGeom prst="rect">
+            <a:avLst/>
+          </a:prstGeom>
+          <a:noFill/>
+        </p:spPr>
+        <p:txBody>
+          <a:bodyPr wrap="square">
+            <a:spAutoFit/>
+          </a:bodyPr>
+          <a:lstStyle/>
+          <a:p>
+            <a:pPr>
+              <a:lnSpc>
+                <a:spcPct val="105000"/>
+              </a:lnSpc>
+              <a:spcAft>
+                <a:spcPts val="700"/>
+              </a:spcAft>
+              <a:defRPr sz="1400">
+                <a:solidFill>
+                  <a:srgbClr val="51617A"/>
+                </a:solidFill>
+                <a:latin typeface="Manrope"/>
+              </a:defRPr>
+            </a:pPr>
+            <a:r>
+              <a:t>• Transparent sender service fee within a licensed provider quote</a:t>
+            </a:r>
+          </a:p>
+          <a:p>
+            <a:pPr>
+              <a:lnSpc>
+                <a:spcPct val="105000"/>
+              </a:lnSpc>
+              <a:spcAft>
+                <a:spcPts val="700"/>
+              </a:spcAft>
+              <a:defRPr sz="1400">
+                <a:solidFill>
+                  <a:srgbClr val="51617A"/>
+                </a:solidFill>
+                <a:latin typeface="Manrope"/>
+              </a:defRPr>
+            </a:pPr>
+            <a:r>
+              <a:t>• Provider referral/revenue share where permitted</a:t>
+            </a:r>
+          </a:p>
+          <a:p>
+            <a:pPr>
+              <a:lnSpc>
+                <a:spcPct val="105000"/>
+              </a:lnSpc>
+              <a:spcAft>
+                <a:spcPts val="700"/>
+              </a:spcAft>
+              <a:defRPr sz="1400">
+                <a:solidFill>
+                  <a:srgbClr val="51617A"/>
+                </a:solidFill>
+                <a:latin typeface="Manrope"/>
+              </a:defRPr>
+            </a:pPr>
+            <a:r>
+              <a:t>• Employer, cooperative, or worker-community distribution</a:t>
+            </a:r>
+          </a:p>
+          <a:p>
+            <a:pPr>
+              <a:lnSpc>
+                <a:spcPct val="105000"/>
+              </a:lnSpc>
+              <a:spcAft>
+                <a:spcPts val="700"/>
+              </a:spcAft>
+              <a:defRPr sz="1400">
+                <a:solidFill>
+                  <a:srgbClr val="51617A"/>
+                </a:solidFill>
+                <a:latin typeface="Manrope"/>
+              </a:defRPr>
+            </a:pPr>
+            <a:r>
+              <a:t>• No validated price, take rate, margin, or unit economics</a:t>
+            </a:r>
+          </a:p>
+        </p:txBody>
+      </p:sp>
+      <p:sp>
+        <p:nvSpPr>
+          <p:cNvPr id="10" name="Rounded Rectangle 9"/>
+          <p:cNvSpPr/>
+          <p:nvPr/>
+        </p:nvSpPr>
+        <p:spPr>
+          <a:xfrm>
+            <a:off x="6263640" y="1508760"/>
+            <a:ext cx="5230368" cy="4389120"/>
+          </a:xfrm>
+          <a:prstGeom prst="roundRect">
+            <a:avLst/>
+          </a:prstGeom>
+          <a:solidFill>
+            <a:srgbClr val="FFFFFF"/>
+          </a:solidFill>
+          <a:ln w="15240">
+            <a:solidFill>
+              <a:srgbClr val="DBE3EE"/>
+            </a:solidFill>
+          </a:ln>
+        </p:spPr>
+        <p:style>
+          <a:lnRef idx="1">
+            <a:schemeClr val="accent1"/>
+          </a:lnRef>
+          <a:fillRef idx="3">
+            <a:schemeClr val="accent1"/>
+          </a:fillRef>
+          <a:effectRef idx="2">
+            <a:schemeClr val="accent1"/>
+          </a:effectRef>
+          <a:fontRef idx="minor">
+            <a:schemeClr val="lt1"/>
+          </a:fontRef>
+        </p:style>
+        <p:txBody>
+          <a:bodyPr rtlCol="0" anchor="ctr"/>
+          <a:lstStyle/>
+          <a:p>
+            <a:pPr algn="ctr"/>
+          </a:p>
+        </p:txBody>
+      </p:sp>
+      <p:sp>
+        <p:nvSpPr>
+          <p:cNvPr id="11" name="Rounded Rectangle 10"/>
+          <p:cNvSpPr/>
+          <p:nvPr/>
+        </p:nvSpPr>
+        <p:spPr>
+          <a:xfrm>
+            <a:off x="6510528" y="1755648"/>
+            <a:ext cx="1572768" cy="310896"/>
+          </a:xfrm>
+          <a:prstGeom prst="roundRect">
+            <a:avLst/>
+          </a:prstGeom>
+          <a:solidFill>
+            <a:srgbClr val="E6F3FB"/>
+          </a:solidFill>
+          <a:ln w="15240">
+            <a:solidFill>
+              <a:srgbClr val="9DCBEA"/>
+            </a:solidFill>
+          </a:ln>
+        </p:spPr>
+        <p:style>
+          <a:lnRef idx="1">
+            <a:schemeClr val="accent1"/>
+          </a:lnRef>
+          <a:fillRef idx="3">
+            <a:schemeClr val="accent1"/>
+          </a:fillRef>
+          <a:effectRef idx="2">
+            <a:schemeClr val="accent1"/>
+          </a:effectRef>
+          <a:fontRef idx="minor">
+            <a:schemeClr val="lt1"/>
+          </a:fontRef>
+        </p:style>
+        <p:txBody>
+          <a:bodyPr rtlCol="0" anchor="ctr"/>
+          <a:lstStyle/>
+          <a:p>
+            <a:pPr algn="ctr"/>
+          </a:p>
+        </p:txBody>
+      </p:sp>
+      <p:sp>
+        <p:nvSpPr>
+          <p:cNvPr id="12" name="TextBox 11"/>
+          <p:cNvSpPr txBox="1"/>
+          <p:nvPr/>
+        </p:nvSpPr>
+        <p:spPr>
+          <a:xfrm>
+            <a:off x="6510528" y="1773936"/>
+            <a:ext cx="1572768" cy="228600"/>
+          </a:xfrm>
+          <a:prstGeom prst="rect">
+            <a:avLst/>
+          </a:prstGeom>
+          <a:noFill/>
+        </p:spPr>
+        <p:txBody>
+          <a:bodyPr wrap="square" lIns="0" rIns="0" tIns="0" bIns="0" anchor="t">
+            <a:spAutoFit/>
+          </a:bodyPr>
+          <a:lstStyle/>
+          <a:p>
+            <a:pPr algn="ctr"/>
+            <a:r>
+              <a:rPr sz="900" b="1">
+                <a:solidFill>
+                  <a:srgbClr val="0369A1"/>
+                </a:solidFill>
+                <a:latin typeface="Manrope"/>
+              </a:rPr>
+              <a:t>GTM EXPERIMENTS</a:t>
+            </a:r>
+          </a:p>
+        </p:txBody>
+      </p:sp>
+      <p:sp>
+        <p:nvSpPr>
+          <p:cNvPr id="13" name="TextBox 12"/>
+          <p:cNvSpPr txBox="1"/>
+          <p:nvPr/>
+        </p:nvSpPr>
+        <p:spPr>
+          <a:xfrm>
+            <a:off x="6510528" y="2267712"/>
+            <a:ext cx="4617720" cy="3154680"/>
           </a:xfrm>
           <a:prstGeom prst="rect">
             <a:avLst/>
@@ -7953,7 +7039,7 @@
               </a:defRPr>
             </a:pPr>
             <a:r>
-              <a:t>• Freighter keeps transaction signing with the sender.</a:t>
+              <a:t>• Interview Filipino workers in Malaysia and family recipients</a:t>
             </a:r>
           </a:p>
           <a:p>
@@ -7972,7 +7058,7 @@
               </a:defRPr>
             </a:pPr>
             <a:r>
-              <a:t>• Horizon and Soroban RPC make the implemented transfers inspectable.</a:t>
+              <a:t>• Test planning/reminder value before automation</a:t>
             </a:r>
           </a:p>
           <a:p>
@@ -7991,7 +7077,7 @@
               </a:defRPr>
             </a:pPr>
             <a:r>
-              <a:t>• Soroban demonstrates pre-funded XLM release rules.</a:t>
+              <a:t>• Map compliant Malaysia funding and Philippines payout partners</a:t>
             </a:r>
           </a:p>
           <a:p>
@@ -8010,7 +7096,7 @@
               </a:defRPr>
             </a:pPr>
             <a:r>
-              <a:t>• Stellar anchors connect network assets to off-chain rails.</a:t>
+              <a:t>• Run testnet usability studies for signing, address safety, and proof</a:t>
             </a:r>
           </a:p>
           <a:p>
@@ -8029,184 +7115,7 @@
               </a:defRPr>
             </a:pPr>
             <a:r>
-              <a:t>• SEP-24 is a hosted interactive deposit/withdrawal flow with anchor authentication and KYC.</a:t>
-            </a:r>
-          </a:p>
-        </p:txBody>
-      </p:sp>
-      <p:sp>
-        <p:nvSpPr>
-          <p:cNvPr id="9" name="Rounded Rectangle 8"/>
-          <p:cNvSpPr/>
-          <p:nvPr/>
-        </p:nvSpPr>
-        <p:spPr>
-          <a:xfrm>
-            <a:off x="6263640" y="1508760"/>
-            <a:ext cx="5230368" cy="4389120"/>
-          </a:xfrm>
-          <a:prstGeom prst="roundRect">
-            <a:avLst/>
-          </a:prstGeom>
-          <a:solidFill>
-            <a:srgbClr val="FFFFFF"/>
-          </a:solidFill>
-          <a:ln w="15240">
-            <a:solidFill>
-              <a:srgbClr val="9DCBEA"/>
-            </a:solidFill>
-            <a:prstDash val="dash"/>
-          </a:ln>
-        </p:spPr>
-        <p:style>
-          <a:lnRef idx="1">
-            <a:schemeClr val="accent1"/>
-          </a:lnRef>
-          <a:fillRef idx="3">
-            <a:schemeClr val="accent1"/>
-          </a:fillRef>
-          <a:effectRef idx="2">
-            <a:schemeClr val="accent1"/>
-          </a:effectRef>
-          <a:fontRef idx="minor">
-            <a:schemeClr val="lt1"/>
-          </a:fontRef>
-        </p:style>
-        <p:txBody>
-          <a:bodyPr rtlCol="0" anchor="ctr"/>
-          <a:lstStyle/>
-          <a:p>
-            <a:pPr algn="ctr"/>
-          </a:p>
-        </p:txBody>
-      </p:sp>
-      <p:sp>
-        <p:nvSpPr>
-          <p:cNvPr id="10" name="TextBox 9"/>
-          <p:cNvSpPr txBox="1"/>
-          <p:nvPr/>
-        </p:nvSpPr>
-        <p:spPr>
-          <a:xfrm>
-            <a:off x="6510528" y="1792224"/>
-            <a:ext cx="2286000" cy="274320"/>
-          </a:xfrm>
-          <a:prstGeom prst="rect">
-            <a:avLst/>
-          </a:prstGeom>
-          <a:noFill/>
-        </p:spPr>
-        <p:txBody>
-          <a:bodyPr wrap="square" lIns="0" rIns="0" tIns="0" bIns="0" anchor="t">
-            <a:spAutoFit/>
-          </a:bodyPr>
-          <a:lstStyle/>
-          <a:p>
-            <a:pPr algn="l"/>
-            <a:r>
-              <a:rPr sz="1200" b="1">
-                <a:solidFill>
-                  <a:srgbClr val="0369A1"/>
-                </a:solidFill>
-                <a:latin typeface="Manrope"/>
-              </a:rPr>
-              <a:t>PROVIDER PATH</a:t>
-            </a:r>
-          </a:p>
-        </p:txBody>
-      </p:sp>
-      <p:sp>
-        <p:nvSpPr>
-          <p:cNvPr id="11" name="TextBox 10"/>
-          <p:cNvSpPr txBox="1"/>
-          <p:nvPr/>
-        </p:nvSpPr>
-        <p:spPr>
-          <a:xfrm>
-            <a:off x="6510528" y="2212848"/>
-            <a:ext cx="4617720" cy="3246120"/>
-          </a:xfrm>
-          <a:prstGeom prst="rect">
-            <a:avLst/>
-          </a:prstGeom>
-          <a:noFill/>
-        </p:spPr>
-        <p:txBody>
-          <a:bodyPr wrap="square">
-            <a:spAutoFit/>
-          </a:bodyPr>
-          <a:lstStyle/>
-          <a:p>
-            <a:pPr>
-              <a:lnSpc>
-                <a:spcPct val="105000"/>
-              </a:lnSpc>
-              <a:spcAft>
-                <a:spcPts val="700"/>
-              </a:spcAft>
-              <a:defRPr sz="1250">
-                <a:solidFill>
-                  <a:srgbClr val="51617A"/>
-                </a:solidFill>
-                <a:latin typeface="Manrope"/>
-              </a:defRPr>
-            </a:pPr>
-            <a:r>
-              <a:t>• MoneyGram Ramps is a target path, not a partner: integration requires allowlisting, SEP-1, SEP-10, SEP-24, KYC fields, testing/certification, KYB/compliance, and agreements.</a:t>
-            </a:r>
-          </a:p>
-          <a:p>
-            <a:pPr>
-              <a:lnSpc>
-                <a:spcPct val="105000"/>
-              </a:lnSpc>
-              <a:spcAft>
-                <a:spcPts val="700"/>
-              </a:spcAft>
-              <a:defRPr sz="1250">
-                <a:solidFill>
-                  <a:srgbClr val="51617A"/>
-                </a:solidFill>
-                <a:latin typeface="Manrope"/>
-              </a:defRPr>
-            </a:pPr>
-            <a:r>
-              <a:t>• Published MoneyGram off-ramp range: 5–2,500 USDC. Malaysia and Philippines are listed cash-out only; this does not prove a MY salary cash-in route.</a:t>
-            </a:r>
-          </a:p>
-        </p:txBody>
-      </p:sp>
-      <p:sp>
-        <p:nvSpPr>
-          <p:cNvPr id="12" name="TextBox 11"/>
-          <p:cNvSpPr txBox="1"/>
-          <p:nvPr/>
-        </p:nvSpPr>
-        <p:spPr>
-          <a:xfrm>
-            <a:off x="685800" y="6108192"/>
-            <a:ext cx="10789920" cy="201168"/>
-          </a:xfrm>
-          <a:prstGeom prst="rect">
-            <a:avLst/>
-          </a:prstGeom>
-          <a:noFill/>
-        </p:spPr>
-        <p:txBody>
-          <a:bodyPr wrap="square" lIns="0" rIns="0" tIns="0" bIns="0" anchor="t">
-            <a:spAutoFit/>
-          </a:bodyPr>
-          <a:lstStyle/>
-          <a:p>
-            <a:pPr algn="l"/>
-            <a:r>
-              <a:rPr sz="850" b="0">
-                <a:solidFill>
-                  <a:srgbClr val="51617A"/>
-                </a:solidFill>
-                <a:latin typeface="Manrope"/>
-              </a:rPr>
-              <a:t>Sources: Stellar anchors/SEP-24 docs; MoneyGram Ramps integration docs</a:t>
+              <a:t>• Seek provider sandbox/certification conversations without claiming partnership</a:t>
             </a:r>
           </a:p>
         </p:txBody>
@@ -8312,7 +7221,7 @@
                 </a:solidFill>
                 <a:latin typeface="Manrope"/>
               </a:rPr>
-              <a:t>BUSINESS MODEL + GTM HYPOTHESES — UNVALIDATED</a:t>
+              <a:t>BUILD STATUS + ASK</a:t>
             </a:r>
           </a:p>
         </p:txBody>
@@ -8347,7 +7256,7 @@
                 </a:solidFill>
                 <a:latin typeface="Fraunces"/>
               </a:rPr>
-              <a:t>Hypotheses to test — not forecasts</a:t>
+              <a:t>A working mainnet core, with an honest last-mile gap</a:t>
             </a:r>
           </a:p>
         </p:txBody>
@@ -8382,7 +7291,7 @@
                 </a:solidFill>
                 <a:latin typeface="Manrope"/>
               </a:rPr>
-              <a:t>8 / 9</a:t>
+              <a:t>8 / 8</a:t>
             </a:r>
           </a:p>
         </p:txBody>
@@ -8396,52 +7305,7 @@
         <p:spPr>
           <a:xfrm>
             <a:off x="685800" y="1508760"/>
-            <a:ext cx="5230368" cy="4389120"/>
-          </a:xfrm>
-          <a:prstGeom prst="roundRect">
-            <a:avLst/>
-          </a:prstGeom>
-          <a:solidFill>
-            <a:srgbClr val="FDF1E0"/>
-          </a:solidFill>
-          <a:ln w="15240">
-            <a:solidFill>
-              <a:srgbClr val="FDF1E0"/>
-            </a:solidFill>
-          </a:ln>
-        </p:spPr>
-        <p:style>
-          <a:lnRef idx="1">
-            <a:schemeClr val="accent1"/>
-          </a:lnRef>
-          <a:fillRef idx="3">
-            <a:schemeClr val="accent1"/>
-          </a:fillRef>
-          <a:effectRef idx="2">
-            <a:schemeClr val="accent1"/>
-          </a:effectRef>
-          <a:fontRef idx="minor">
-            <a:schemeClr val="lt1"/>
-          </a:fontRef>
-        </p:style>
-        <p:txBody>
-          <a:bodyPr rtlCol="0" anchor="ctr"/>
-          <a:lstStyle/>
-          <a:p>
-            <a:pPr algn="ctr"/>
-          </a:p>
-        </p:txBody>
-      </p:sp>
-      <p:sp>
-        <p:nvSpPr>
-          <p:cNvPr id="7" name="Rounded Rectangle 6"/>
-          <p:cNvSpPr/>
-          <p:nvPr/>
-        </p:nvSpPr>
-        <p:spPr>
-          <a:xfrm>
-            <a:off x="932688" y="1755648"/>
-            <a:ext cx="2176272" cy="310896"/>
+            <a:ext cx="5230368" cy="4434840"/>
           </a:xfrm>
           <a:prstGeom prst="roundRect">
             <a:avLst/>
@@ -8479,193 +7343,14 @@
       </p:sp>
       <p:sp>
         <p:nvSpPr>
-          <p:cNvPr id="8" name="TextBox 7"/>
-          <p:cNvSpPr txBox="1"/>
-          <p:nvPr/>
-        </p:nvSpPr>
-        <p:spPr>
-          <a:xfrm>
-            <a:off x="932688" y="1773936"/>
-            <a:ext cx="2176272" cy="228600"/>
-          </a:xfrm>
-          <a:prstGeom prst="rect">
-            <a:avLst/>
-          </a:prstGeom>
-          <a:noFill/>
-        </p:spPr>
-        <p:txBody>
-          <a:bodyPr wrap="square" lIns="0" rIns="0" tIns="0" bIns="0" anchor="t">
-            <a:spAutoFit/>
-          </a:bodyPr>
-          <a:lstStyle/>
-          <a:p>
-            <a:pPr algn="ctr"/>
-            <a:r>
-              <a:rPr sz="900" b="1">
-                <a:solidFill>
-                  <a:srgbClr val="0369A1"/>
-                </a:solidFill>
-                <a:latin typeface="Manrope"/>
-              </a:rPr>
-              <a:t>UNVALIDATED BUSINESS MODEL</a:t>
-            </a:r>
-          </a:p>
-        </p:txBody>
-      </p:sp>
-      <p:sp>
-        <p:nvSpPr>
-          <p:cNvPr id="9" name="TextBox 8"/>
-          <p:cNvSpPr txBox="1"/>
-          <p:nvPr/>
-        </p:nvSpPr>
-        <p:spPr>
-          <a:xfrm>
-            <a:off x="932688" y="2267712"/>
-            <a:ext cx="4617720" cy="3154680"/>
-          </a:xfrm>
-          <a:prstGeom prst="rect">
-            <a:avLst/>
-          </a:prstGeom>
-          <a:noFill/>
-        </p:spPr>
-        <p:txBody>
-          <a:bodyPr wrap="square">
-            <a:spAutoFit/>
-          </a:bodyPr>
-          <a:lstStyle/>
-          <a:p>
-            <a:pPr>
-              <a:lnSpc>
-                <a:spcPct val="105000"/>
-              </a:lnSpc>
-              <a:spcAft>
-                <a:spcPts val="700"/>
-              </a:spcAft>
-              <a:defRPr sz="1400">
-                <a:solidFill>
-                  <a:srgbClr val="51617A"/>
-                </a:solidFill>
-                <a:latin typeface="Manrope"/>
-              </a:defRPr>
-            </a:pPr>
-            <a:r>
-              <a:t>• Transparent sender service fee within a licensed provider quote</a:t>
-            </a:r>
-          </a:p>
-          <a:p>
-            <a:pPr>
-              <a:lnSpc>
-                <a:spcPct val="105000"/>
-              </a:lnSpc>
-              <a:spcAft>
-                <a:spcPts val="700"/>
-              </a:spcAft>
-              <a:defRPr sz="1400">
-                <a:solidFill>
-                  <a:srgbClr val="51617A"/>
-                </a:solidFill>
-                <a:latin typeface="Manrope"/>
-              </a:defRPr>
-            </a:pPr>
-            <a:r>
-              <a:t>• Provider referral/revenue share where permitted</a:t>
-            </a:r>
-          </a:p>
-          <a:p>
-            <a:pPr>
-              <a:lnSpc>
-                <a:spcPct val="105000"/>
-              </a:lnSpc>
-              <a:spcAft>
-                <a:spcPts val="700"/>
-              </a:spcAft>
-              <a:defRPr sz="1400">
-                <a:solidFill>
-                  <a:srgbClr val="51617A"/>
-                </a:solidFill>
-                <a:latin typeface="Manrope"/>
-              </a:defRPr>
-            </a:pPr>
-            <a:r>
-              <a:t>• Employer, cooperative, or worker-community distribution</a:t>
-            </a:r>
-          </a:p>
-          <a:p>
-            <a:pPr>
-              <a:lnSpc>
-                <a:spcPct val="105000"/>
-              </a:lnSpc>
-              <a:spcAft>
-                <a:spcPts val="700"/>
-              </a:spcAft>
-              <a:defRPr sz="1400">
-                <a:solidFill>
-                  <a:srgbClr val="51617A"/>
-                </a:solidFill>
-                <a:latin typeface="Manrope"/>
-              </a:defRPr>
-            </a:pPr>
-            <a:r>
-              <a:t>• No validated price, take rate, margin, or unit economics</a:t>
-            </a:r>
-          </a:p>
-        </p:txBody>
-      </p:sp>
-      <p:sp>
-        <p:nvSpPr>
-          <p:cNvPr id="10" name="Rounded Rectangle 9"/>
+          <p:cNvPr id="7" name="Rounded Rectangle 6"/>
           <p:cNvSpPr/>
           <p:nvPr/>
         </p:nvSpPr>
         <p:spPr>
           <a:xfrm>
-            <a:off x="6263640" y="1508760"/>
-            <a:ext cx="5230368" cy="4389120"/>
-          </a:xfrm>
-          <a:prstGeom prst="roundRect">
-            <a:avLst/>
-          </a:prstGeom>
-          <a:solidFill>
-            <a:srgbClr val="FFFFFF"/>
-          </a:solidFill>
-          <a:ln w="15240">
-            <a:solidFill>
-              <a:srgbClr val="DBE3EE"/>
-            </a:solidFill>
-          </a:ln>
-        </p:spPr>
-        <p:style>
-          <a:lnRef idx="1">
-            <a:schemeClr val="accent1"/>
-          </a:lnRef>
-          <a:fillRef idx="3">
-            <a:schemeClr val="accent1"/>
-          </a:fillRef>
-          <a:effectRef idx="2">
-            <a:schemeClr val="accent1"/>
-          </a:effectRef>
-          <a:fontRef idx="minor">
-            <a:schemeClr val="lt1"/>
-          </a:fontRef>
-        </p:style>
-        <p:txBody>
-          <a:bodyPr rtlCol="0" anchor="ctr"/>
-          <a:lstStyle/>
-          <a:p>
-            <a:pPr algn="ctr"/>
-          </a:p>
-        </p:txBody>
-      </p:sp>
-      <p:sp>
-        <p:nvSpPr>
-          <p:cNvPr id="11" name="Rounded Rectangle 10"/>
-          <p:cNvSpPr/>
-          <p:nvPr/>
-        </p:nvSpPr>
-        <p:spPr>
-          <a:xfrm>
-            <a:off x="6510528" y="1755648"/>
-            <a:ext cx="1572768" cy="310896"/>
+            <a:off x="932688" y="1755648"/>
+            <a:ext cx="713232" cy="310896"/>
           </a:xfrm>
           <a:prstGeom prst="roundRect">
             <a:avLst/>
@@ -8703,14 +7388,14 @@
       </p:sp>
       <p:sp>
         <p:nvSpPr>
-          <p:cNvPr id="12" name="TextBox 11"/>
+          <p:cNvPr id="8" name="TextBox 7"/>
           <p:cNvSpPr txBox="1"/>
           <p:nvPr/>
         </p:nvSpPr>
         <p:spPr>
           <a:xfrm>
-            <a:off x="6510528" y="1773936"/>
-            <a:ext cx="1572768" cy="228600"/>
+            <a:off x="932688" y="1773936"/>
+            <a:ext cx="713232" cy="228600"/>
           </a:xfrm>
           <a:prstGeom prst="rect">
             <a:avLst/>
@@ -8731,425 +7416,6 @@
                 </a:solidFill>
                 <a:latin typeface="Manrope"/>
               </a:rPr>
-              <a:t>GTM EXPERIMENTS</a:t>
-            </a:r>
-          </a:p>
-        </p:txBody>
-      </p:sp>
-      <p:sp>
-        <p:nvSpPr>
-          <p:cNvPr id="13" name="TextBox 12"/>
-          <p:cNvSpPr txBox="1"/>
-          <p:nvPr/>
-        </p:nvSpPr>
-        <p:spPr>
-          <a:xfrm>
-            <a:off x="6510528" y="2267712"/>
-            <a:ext cx="4617720" cy="3154680"/>
-          </a:xfrm>
-          <a:prstGeom prst="rect">
-            <a:avLst/>
-          </a:prstGeom>
-          <a:noFill/>
-        </p:spPr>
-        <p:txBody>
-          <a:bodyPr wrap="square">
-            <a:spAutoFit/>
-          </a:bodyPr>
-          <a:lstStyle/>
-          <a:p>
-            <a:pPr>
-              <a:lnSpc>
-                <a:spcPct val="105000"/>
-              </a:lnSpc>
-              <a:spcAft>
-                <a:spcPts val="700"/>
-              </a:spcAft>
-              <a:defRPr sz="1350">
-                <a:solidFill>
-                  <a:srgbClr val="51617A"/>
-                </a:solidFill>
-                <a:latin typeface="Manrope"/>
-              </a:defRPr>
-            </a:pPr>
-            <a:r>
-              <a:t>• Interview Filipino workers in Malaysia and family recipients</a:t>
-            </a:r>
-          </a:p>
-          <a:p>
-            <a:pPr>
-              <a:lnSpc>
-                <a:spcPct val="105000"/>
-              </a:lnSpc>
-              <a:spcAft>
-                <a:spcPts val="700"/>
-              </a:spcAft>
-              <a:defRPr sz="1350">
-                <a:solidFill>
-                  <a:srgbClr val="51617A"/>
-                </a:solidFill>
-                <a:latin typeface="Manrope"/>
-              </a:defRPr>
-            </a:pPr>
-            <a:r>
-              <a:t>• Test planning/reminder value before automation</a:t>
-            </a:r>
-          </a:p>
-          <a:p>
-            <a:pPr>
-              <a:lnSpc>
-                <a:spcPct val="105000"/>
-              </a:lnSpc>
-              <a:spcAft>
-                <a:spcPts val="700"/>
-              </a:spcAft>
-              <a:defRPr sz="1350">
-                <a:solidFill>
-                  <a:srgbClr val="51617A"/>
-                </a:solidFill>
-                <a:latin typeface="Manrope"/>
-              </a:defRPr>
-            </a:pPr>
-            <a:r>
-              <a:t>• Map compliant Malaysia funding and Philippines payout partners</a:t>
-            </a:r>
-          </a:p>
-          <a:p>
-            <a:pPr>
-              <a:lnSpc>
-                <a:spcPct val="105000"/>
-              </a:lnSpc>
-              <a:spcAft>
-                <a:spcPts val="700"/>
-              </a:spcAft>
-              <a:defRPr sz="1350">
-                <a:solidFill>
-                  <a:srgbClr val="51617A"/>
-                </a:solidFill>
-                <a:latin typeface="Manrope"/>
-              </a:defRPr>
-            </a:pPr>
-            <a:r>
-              <a:t>• Run testnet usability studies for signing, address safety, and proof</a:t>
-            </a:r>
-          </a:p>
-          <a:p>
-            <a:pPr>
-              <a:lnSpc>
-                <a:spcPct val="105000"/>
-              </a:lnSpc>
-              <a:spcAft>
-                <a:spcPts val="700"/>
-              </a:spcAft>
-              <a:defRPr sz="1350">
-                <a:solidFill>
-                  <a:srgbClr val="51617A"/>
-                </a:solidFill>
-                <a:latin typeface="Manrope"/>
-              </a:defRPr>
-            </a:pPr>
-            <a:r>
-              <a:t>• Seek provider sandbox/certification conversations without claiming partnership</a:t>
-            </a:r>
-          </a:p>
-        </p:txBody>
-      </p:sp>
-    </p:spTree>
-  </p:cSld>
-  <p:clrMapOvr>
-    <a:masterClrMapping/>
-  </p:clrMapOvr>
-</p:sld>
-</file>
-
-<file path=ppt/slides/slide9.xml><?xml version="1.0" encoding="utf-8"?>
-<p:sld xmlns:a="http://schemas.openxmlformats.org/drawingml/2006/main" xmlns:p="http://schemas.openxmlformats.org/presentationml/2006/main" xmlns:r="http://schemas.openxmlformats.org/officeDocument/2006/relationships">
-  <p:cSld>
-    <p:bg>
-      <p:bgPr>
-        <a:solidFill>
-          <a:srgbClr val="FFFFFF"/>
-        </a:solidFill>
-        <a:effectLst/>
-      </p:bgPr>
-    </p:bg>
-    <p:spTree>
-      <p:nvGrpSpPr>
-        <p:cNvPr id="1" name=""/>
-        <p:cNvGrpSpPr/>
-        <p:nvPr/>
-      </p:nvGrpSpPr>
-      <p:grpSpPr/>
-      <p:sp>
-        <p:nvSpPr>
-          <p:cNvPr id="2" name="Rectangle 1"/>
-          <p:cNvSpPr/>
-          <p:nvPr/>
-        </p:nvSpPr>
-        <p:spPr>
-          <a:xfrm>
-            <a:off x="0" y="0"/>
-            <a:ext cx="12191695" cy="64008"/>
-          </a:xfrm>
-          <a:prstGeom prst="rect">
-            <a:avLst/>
-          </a:prstGeom>
-          <a:solidFill>
-            <a:srgbClr val="0369A1"/>
-          </a:solidFill>
-          <a:ln w="15240">
-            <a:solidFill>
-              <a:srgbClr val="0369A1"/>
-            </a:solidFill>
-          </a:ln>
-        </p:spPr>
-        <p:style>
-          <a:lnRef idx="1">
-            <a:schemeClr val="accent1"/>
-          </a:lnRef>
-          <a:fillRef idx="3">
-            <a:schemeClr val="accent1"/>
-          </a:fillRef>
-          <a:effectRef idx="2">
-            <a:schemeClr val="accent1"/>
-          </a:effectRef>
-          <a:fontRef idx="minor">
-            <a:schemeClr val="lt1"/>
-          </a:fontRef>
-        </p:style>
-        <p:txBody>
-          <a:bodyPr rtlCol="0" anchor="ctr"/>
-          <a:lstStyle/>
-          <a:p>
-            <a:pPr algn="ctr"/>
-          </a:p>
-        </p:txBody>
-      </p:sp>
-      <p:sp>
-        <p:nvSpPr>
-          <p:cNvPr id="3" name="TextBox 2"/>
-          <p:cNvSpPr txBox="1"/>
-          <p:nvPr/>
-        </p:nvSpPr>
-        <p:spPr>
-          <a:xfrm>
-            <a:off x="658368" y="310896"/>
-            <a:ext cx="9601200" cy="292608"/>
-          </a:xfrm>
-          <a:prstGeom prst="rect">
-            <a:avLst/>
-          </a:prstGeom>
-          <a:noFill/>
-        </p:spPr>
-        <p:txBody>
-          <a:bodyPr wrap="square" lIns="0" rIns="0" tIns="0" bIns="0" anchor="t">
-            <a:spAutoFit/>
-          </a:bodyPr>
-          <a:lstStyle/>
-          <a:p>
-            <a:pPr algn="l"/>
-            <a:r>
-              <a:rPr sz="1100" b="1">
-                <a:solidFill>
-                  <a:srgbClr val="0369A1"/>
-                </a:solidFill>
-                <a:latin typeface="Manrope"/>
-              </a:rPr>
-              <a:t>BUILD STATUS + ASK</a:t>
-            </a:r>
-          </a:p>
-        </p:txBody>
-      </p:sp>
-      <p:sp>
-        <p:nvSpPr>
-          <p:cNvPr id="4" name="TextBox 3"/>
-          <p:cNvSpPr txBox="1"/>
-          <p:nvPr/>
-        </p:nvSpPr>
-        <p:spPr>
-          <a:xfrm>
-            <a:off x="658368" y="667512"/>
-            <a:ext cx="10789920" cy="658368"/>
-          </a:xfrm>
-          <a:prstGeom prst="rect">
-            <a:avLst/>
-          </a:prstGeom>
-          <a:noFill/>
-        </p:spPr>
-        <p:txBody>
-          <a:bodyPr wrap="square" lIns="0" rIns="0" tIns="0" bIns="0" anchor="t">
-            <a:spAutoFit/>
-          </a:bodyPr>
-          <a:lstStyle/>
-          <a:p>
-            <a:pPr algn="l"/>
-            <a:r>
-              <a:rPr sz="2700" b="1">
-                <a:solidFill>
-                  <a:srgbClr val="0B1B2B"/>
-                </a:solidFill>
-                <a:latin typeface="Fraunces"/>
-              </a:rPr>
-              <a:t>A working testnet core, with an honest last-mile gap</a:t>
-            </a:r>
-          </a:p>
-        </p:txBody>
-      </p:sp>
-      <p:sp>
-        <p:nvSpPr>
-          <p:cNvPr id="5" name="TextBox 4"/>
-          <p:cNvSpPr txBox="1"/>
-          <p:nvPr/>
-        </p:nvSpPr>
-        <p:spPr>
-          <a:xfrm>
-            <a:off x="10927080" y="292608"/>
-            <a:ext cx="566928" cy="228600"/>
-          </a:xfrm>
-          <a:prstGeom prst="rect">
-            <a:avLst/>
-          </a:prstGeom>
-          <a:noFill/>
-        </p:spPr>
-        <p:txBody>
-          <a:bodyPr wrap="square" lIns="0" rIns="0" tIns="0" bIns="0" anchor="t">
-            <a:spAutoFit/>
-          </a:bodyPr>
-          <a:lstStyle/>
-          <a:p>
-            <a:pPr algn="r"/>
-            <a:r>
-              <a:rPr sz="900" b="0">
-                <a:solidFill>
-                  <a:srgbClr val="51617A"/>
-                </a:solidFill>
-                <a:latin typeface="Manrope"/>
-              </a:rPr>
-              <a:t>9 / 9</a:t>
-            </a:r>
-          </a:p>
-        </p:txBody>
-      </p:sp>
-      <p:sp>
-        <p:nvSpPr>
-          <p:cNvPr id="6" name="Rounded Rectangle 5"/>
-          <p:cNvSpPr/>
-          <p:nvPr/>
-        </p:nvSpPr>
-        <p:spPr>
-          <a:xfrm>
-            <a:off x="685800" y="1508760"/>
-            <a:ext cx="5230368" cy="4434840"/>
-          </a:xfrm>
-          <a:prstGeom prst="roundRect">
-            <a:avLst/>
-          </a:prstGeom>
-          <a:solidFill>
-            <a:srgbClr val="E6F3FB"/>
-          </a:solidFill>
-          <a:ln w="15240">
-            <a:solidFill>
-              <a:srgbClr val="9DCBEA"/>
-            </a:solidFill>
-          </a:ln>
-        </p:spPr>
-        <p:style>
-          <a:lnRef idx="1">
-            <a:schemeClr val="accent1"/>
-          </a:lnRef>
-          <a:fillRef idx="3">
-            <a:schemeClr val="accent1"/>
-          </a:fillRef>
-          <a:effectRef idx="2">
-            <a:schemeClr val="accent1"/>
-          </a:effectRef>
-          <a:fontRef idx="minor">
-            <a:schemeClr val="lt1"/>
-          </a:fontRef>
-        </p:style>
-        <p:txBody>
-          <a:bodyPr rtlCol="0" anchor="ctr"/>
-          <a:lstStyle/>
-          <a:p>
-            <a:pPr algn="ctr"/>
-          </a:p>
-        </p:txBody>
-      </p:sp>
-      <p:sp>
-        <p:nvSpPr>
-          <p:cNvPr id="7" name="Rounded Rectangle 6"/>
-          <p:cNvSpPr/>
-          <p:nvPr/>
-        </p:nvSpPr>
-        <p:spPr>
-          <a:xfrm>
-            <a:off x="932688" y="1755648"/>
-            <a:ext cx="713232" cy="310896"/>
-          </a:xfrm>
-          <a:prstGeom prst="roundRect">
-            <a:avLst/>
-          </a:prstGeom>
-          <a:solidFill>
-            <a:srgbClr val="E6F3FB"/>
-          </a:solidFill>
-          <a:ln w="15240">
-            <a:solidFill>
-              <a:srgbClr val="9DCBEA"/>
-            </a:solidFill>
-          </a:ln>
-        </p:spPr>
-        <p:style>
-          <a:lnRef idx="1">
-            <a:schemeClr val="accent1"/>
-          </a:lnRef>
-          <a:fillRef idx="3">
-            <a:schemeClr val="accent1"/>
-          </a:fillRef>
-          <a:effectRef idx="2">
-            <a:schemeClr val="accent1"/>
-          </a:effectRef>
-          <a:fontRef idx="minor">
-            <a:schemeClr val="lt1"/>
-          </a:fontRef>
-        </p:style>
-        <p:txBody>
-          <a:bodyPr rtlCol="0" anchor="ctr"/>
-          <a:lstStyle/>
-          <a:p>
-            <a:pPr algn="ctr"/>
-          </a:p>
-        </p:txBody>
-      </p:sp>
-      <p:sp>
-        <p:nvSpPr>
-          <p:cNvPr id="8" name="TextBox 7"/>
-          <p:cNvSpPr txBox="1"/>
-          <p:nvPr/>
-        </p:nvSpPr>
-        <p:spPr>
-          <a:xfrm>
-            <a:off x="932688" y="1773936"/>
-            <a:ext cx="713232" cy="228600"/>
-          </a:xfrm>
-          <a:prstGeom prst="rect">
-            <a:avLst/>
-          </a:prstGeom>
-          <a:noFill/>
-        </p:spPr>
-        <p:txBody>
-          <a:bodyPr wrap="square" lIns="0" rIns="0" tIns="0" bIns="0" anchor="t">
-            <a:spAutoFit/>
-          </a:bodyPr>
-          <a:lstStyle/>
-          <a:p>
-            <a:pPr algn="ctr"/>
-            <a:r>
-              <a:rPr sz="900" b="1">
-                <a:solidFill>
-                  <a:srgbClr val="0369A1"/>
-                </a:solidFill>
-                <a:latin typeface="Manrope"/>
-              </a:rPr>
               <a:t>BUILT</a:t>
             </a:r>
           </a:p>
@@ -9164,7 +7430,7 @@
         <p:spPr>
           <a:xfrm>
             <a:off x="932688" y="2212848"/>
-            <a:ext cx="4617720" cy="1755648"/>
+            <a:ext cx="4617720" cy="777240"/>
           </a:xfrm>
           <a:prstGeom prst="rect">
             <a:avLst/>
@@ -9192,7 +7458,7 @@
               </a:defRPr>
             </a:pPr>
             <a:r>
-              <a:t>• Verified Stellar testnet contract: CATFEIDC4CQ3ZSYTWAEM4SHWUB5ZK4R7VGE5QO6XDWRQ6UC4ZLB34VCQ</a:t>
+              <a:t>• Direct payment verification; support-plan UI; honest status boundary</a:t>
             </a:r>
           </a:p>
           <a:p>
@@ -9211,26 +7477,7 @@
               </a:defRPr>
             </a:pPr>
             <a:r>
-              <a:t>• Verified testnet Freighter-signed release: cfa17a939f5cd0c90bc674d7cee61f0f4a67ed4c2f11ab3c789b0e3ad0c419d2</a:t>
-            </a:r>
-          </a:p>
-          <a:p>
-            <a:pPr>
-              <a:lnSpc>
-                <a:spcPct val="105000"/>
-              </a:lnSpc>
-              <a:spcAft>
-                <a:spcPts val="700"/>
-              </a:spcAft>
-              <a:defRPr sz="1220">
-                <a:solidFill>
-                  <a:srgbClr val="51617A"/>
-                </a:solidFill>
-                <a:latin typeface="Manrope"/>
-              </a:defRPr>
-            </a:pPr>
-            <a:r>
-              <a:t>• Direct payment verification; support-plan UI; honest status boundary</a:t>
+              <a:t>• Current endpoints stop at Verified on-chain</a:t>
             </a:r>
           </a:p>
         </p:txBody>
@@ -9243,8 +7490,8 @@
         </p:nvSpPr>
         <p:spPr>
           <a:xfrm>
-            <a:off x="932688" y="4069080"/>
-            <a:ext cx="4617720" cy="502920"/>
+            <a:off x="932688" y="3127248"/>
+            <a:ext cx="4617720" cy="256032"/>
           </a:xfrm>
           <a:prstGeom prst="rect">
             <a:avLst/>
@@ -9259,13 +7506,13 @@
           <a:p>
             <a:pPr algn="l"/>
             <a:r>
-              <a:rPr sz="950" b="0">
+              <a:rPr sz="1050" b="1">
                 <a:solidFill>
                   <a:srgbClr val="51617A"/>
                 </a:solidFill>
-                <a:latin typeface="Menlo"/>
+                <a:latin typeface="Manrope"/>
               </a:rPr>
-              <a:t>CATFEIDC4CQ3ZSYTWAEM4SHWUB5ZK4R7VGE5QO6XDWRQ6UC4ZLB34VCQ</a:t>
+              <a:t>Deployed on mainnet, creator key under review</a:t>
             </a:r>
           </a:p>
         </p:txBody>
@@ -9278,8 +7525,8 @@
         </p:nvSpPr>
         <p:spPr>
           <a:xfrm>
-            <a:off x="932688" y="4754880"/>
-            <a:ext cx="4617720" cy="502920"/>
+            <a:off x="932688" y="3364992"/>
+            <a:ext cx="4617720" cy="384048"/>
           </a:xfrm>
           <a:prstGeom prst="rect">
             <a:avLst/>
@@ -9296,18 +7543,88 @@
             <a:r>
               <a:rPr sz="950" b="0">
                 <a:solidFill>
+                  <a:srgbClr val="0B1B2B"/>
+                </a:solidFill>
+                <a:latin typeface="Consolas"/>
+              </a:rPr>
+              <a:t>CBVAZDK2GAX5MJ7SSSQKRLY33TO7Q6DG3ZGZK6WMZSGI63XRMIR2CTHR</a:t>
+            </a:r>
+          </a:p>
+        </p:txBody>
+      </p:sp>
+      <p:sp>
+        <p:nvSpPr>
+          <p:cNvPr id="12" name="TextBox 11"/>
+          <p:cNvSpPr txBox="1"/>
+          <p:nvPr/>
+        </p:nvSpPr>
+        <p:spPr>
+          <a:xfrm>
+            <a:off x="932688" y="3977639"/>
+            <a:ext cx="4617720" cy="256032"/>
+          </a:xfrm>
+          <a:prstGeom prst="rect">
+            <a:avLst/>
+          </a:prstGeom>
+          <a:noFill/>
+        </p:spPr>
+        <p:txBody>
+          <a:bodyPr wrap="square" lIns="0" rIns="0" tIns="0" bIns="0" anchor="t">
+            <a:spAutoFit/>
+          </a:bodyPr>
+          <a:lstStyle/>
+          <a:p>
+            <a:pPr algn="l"/>
+            <a:r>
+              <a:rPr sz="1050" b="1">
+                <a:solidFill>
                   <a:srgbClr val="51617A"/>
                 </a:solidFill>
-                <a:latin typeface="Menlo"/>
+                <a:latin typeface="Manrope"/>
               </a:rPr>
-              <a:t>cfa17a939f5cd0c90bc674d7cee61f0f4a67ed4c2f11ab3c789b0e3ad0c419d2</a:t>
-            </a:r>
-          </a:p>
-        </p:txBody>
-      </p:sp>
-      <p:sp>
-        <p:nvSpPr>
-          <p:cNvPr id="12" name="Rounded Rectangle 11"/>
+              <a:t>Mainnet release transaction</a:t>
+            </a:r>
+          </a:p>
+        </p:txBody>
+      </p:sp>
+      <p:sp>
+        <p:nvSpPr>
+          <p:cNvPr id="13" name="TextBox 12"/>
+          <p:cNvSpPr txBox="1"/>
+          <p:nvPr/>
+        </p:nvSpPr>
+        <p:spPr>
+          <a:xfrm>
+            <a:off x="932688" y="4215384"/>
+            <a:ext cx="4617720" cy="384048"/>
+          </a:xfrm>
+          <a:prstGeom prst="rect">
+            <a:avLst/>
+          </a:prstGeom>
+          <a:noFill/>
+        </p:spPr>
+        <p:txBody>
+          <a:bodyPr wrap="square" lIns="0" rIns="0" tIns="0" bIns="0" anchor="t">
+            <a:spAutoFit/>
+          </a:bodyPr>
+          <a:lstStyle/>
+          <a:p>
+            <a:pPr algn="l"/>
+            <a:r>
+              <a:rPr sz="950" b="0">
+                <a:solidFill>
+                  <a:srgbClr val="0B1B2B"/>
+                </a:solidFill>
+                <a:latin typeface="Consolas"/>
+              </a:rPr>
+              <a:t>pending — to be signed before submission</a:t>
+            </a:r>
+          </a:p>
+        </p:txBody>
+      </p:sp>
+      <p:sp>
+        <p:nvSpPr>
+          <p:cNvPr id="14" name="Rounded Rectangle 13"/>
           <p:cNvSpPr/>
           <p:nvPr/>
         </p:nvSpPr>
@@ -9353,7 +7670,7 @@
       </p:sp>
       <p:sp>
         <p:nvSpPr>
-          <p:cNvPr id="13" name="Rounded Rectangle 12"/>
+          <p:cNvPr id="15" name="Rounded Rectangle 14"/>
           <p:cNvSpPr/>
           <p:nvPr/>
         </p:nvSpPr>
@@ -9399,7 +7716,7 @@
       </p:sp>
       <p:sp>
         <p:nvSpPr>
-          <p:cNvPr id="14" name="TextBox 13"/>
+          <p:cNvPr id="16" name="TextBox 15"/>
           <p:cNvSpPr txBox="1"/>
           <p:nvPr/>
         </p:nvSpPr>
@@ -9434,7 +7751,7 @@
       </p:sp>
       <p:sp>
         <p:nvSpPr>
-          <p:cNvPr id="15" name="TextBox 14"/>
+          <p:cNvPr id="17" name="TextBox 16"/>
           <p:cNvSpPr txBox="1"/>
           <p:nvPr/>
         </p:nvSpPr>
@@ -9488,7 +7805,7 @@
               </a:defRPr>
             </a:pPr>
             <a:r>
-              <a:t>• Licensed anchor/provider technical and compliance review</a:t>
+              <a:t>• Anchor review: confirm third-party cash pickup (no recipient wallet/KYC) and a Malaysia MYR on-ramp path</a:t>
             </a:r>
           </a:p>
           <a:p>
@@ -9510,11 +7827,30 @@
               <a:t>• Feedback on the planning job before adding last-mile complexity</a:t>
             </a:r>
           </a:p>
-        </p:txBody>
-      </p:sp>
-      <p:sp>
-        <p:nvSpPr>
-          <p:cNvPr id="16" name="TextBox 15"/>
+          <a:p>
+            <a:pPr>
+              <a:lnSpc>
+                <a:spcPct val="105000"/>
+              </a:lnSpc>
+              <a:spcAft>
+                <a:spcPts val="700"/>
+              </a:spcAft>
+              <a:defRPr sz="1320">
+                <a:solidFill>
+                  <a:srgbClr val="51617A"/>
+                </a:solidFill>
+                <a:latin typeface="Manrope"/>
+              </a:defRPr>
+            </a:pPr>
+            <a:r>
+              <a:t>• Help mapping a compliant Malaysia funding → Philippines payout path</a:t>
+            </a:r>
+          </a:p>
+        </p:txBody>
+      </p:sp>
+      <p:sp>
+        <p:nvSpPr>
+          <p:cNvPr id="18" name="TextBox 17"/>
           <p:cNvSpPr txBox="1"/>
           <p:nvPr/>
         </p:nvSpPr>
@@ -9549,7 +7885,7 @@
       </p:sp>
       <p:sp>
         <p:nvSpPr>
-          <p:cNvPr id="17" name="TextBox 16"/>
+          <p:cNvPr id="19" name="TextBox 18"/>
           <p:cNvSpPr txBox="1"/>
           <p:nvPr/>
         </p:nvSpPr>
@@ -9584,7 +7920,7 @@
       </p:sp>
       <p:sp>
         <p:nvSpPr>
-          <p:cNvPr id="18" name="TextBox 17"/>
+          <p:cNvPr id="20" name="TextBox 19"/>
           <p:cNvSpPr txBox="1"/>
           <p:nvPr/>
         </p:nvSpPr>
@@ -9612,7 +7948,7 @@
                 </a:solidFill>
                 <a:latin typeface="Manrope"/>
               </a:rPr>
-              <a:t>Proof: https://stellar.expert/explorer/testnet/tx/cfa17a939f5cd0c90bc674d7cee61f0f4a67ed4c2f11ab3c789b0e3ad0c419d2</a:t>
+              <a:t>Proof: https://stellar.expert/explorer/public/contract/CBVAZDK2GAX5MJ7SSSQKRLY33TO7Q6DG3ZGZK6WMZSGI63XRMIR2CTHR (testnet release history: contracts/DEPLOYMENT.md)</a:t>
             </a:r>
           </a:p>
         </p:txBody>
